--- a/Task_3/Task3Powerpoint.pptx
+++ b/Task_3/Task3Powerpoint.pptx
@@ -5,10 +5,10 @@
     <p:sldMasterId id="2147483744" r:id="rId1"/>
   </p:sldMasterIdLst>
   <p:notesMasterIdLst>
-    <p:notesMasterId r:id="rId20"/>
+    <p:notesMasterId r:id="rId22"/>
   </p:notesMasterIdLst>
   <p:handoutMasterIdLst>
-    <p:handoutMasterId r:id="rId21"/>
+    <p:handoutMasterId r:id="rId23"/>
   </p:handoutMasterIdLst>
   <p:sldIdLst>
     <p:sldId id="256" r:id="rId2"/>
@@ -23,12 +23,14 @@
     <p:sldId id="265" r:id="rId11"/>
     <p:sldId id="270" r:id="rId12"/>
     <p:sldId id="271" r:id="rId13"/>
-    <p:sldId id="272" r:id="rId14"/>
-    <p:sldId id="273" r:id="rId15"/>
-    <p:sldId id="274" r:id="rId16"/>
-    <p:sldId id="275" r:id="rId17"/>
-    <p:sldId id="276" r:id="rId18"/>
-    <p:sldId id="277" r:id="rId19"/>
+    <p:sldId id="278" r:id="rId14"/>
+    <p:sldId id="272" r:id="rId15"/>
+    <p:sldId id="279" r:id="rId16"/>
+    <p:sldId id="273" r:id="rId17"/>
+    <p:sldId id="274" r:id="rId18"/>
+    <p:sldId id="275" r:id="rId19"/>
+    <p:sldId id="276" r:id="rId20"/>
+    <p:sldId id="277" r:id="rId21"/>
   </p:sldIdLst>
   <p:sldSz cx="12192000" cy="6858000"/>
   <p:notesSz cx="9144000" cy="6858000"/>
@@ -745,6 +747,13 @@
           </p:nvPr>
         </p:nvSpPr>
         <p:spPr/>
+        <p:txBody>
+          <a:bodyPr/>
+          <a:lstStyle/>
+          <a:p>
+            <a:endParaRPr lang="de-DE"/>
+          </a:p>
+        </p:txBody>
       </p:sp>
       <p:sp>
         <p:nvSpPr>
@@ -858,61 +867,17 @@
           <a:bodyPr/>
           <a:lstStyle/>
           <a:p>
-            <a:pPr marL="0" marR="0" lvl="0" indent="0" algn="l" defTabSz="914400" rtl="0" eaLnBrk="1" fontAlgn="auto" latinLnBrk="0" hangingPunct="1">
-              <a:lnSpc>
-                <a:spcPct val="100000"/>
-              </a:lnSpc>
-              <a:spcBef>
-                <a:spcPts val="0"/>
-              </a:spcBef>
-              <a:spcAft>
-                <a:spcPts val="0"/>
-              </a:spcAft>
-              <a:buClrTx/>
-              <a:buSzTx/>
-              <a:buFontTx/>
-              <a:buNone/>
-              <a:tabLst/>
-              <a:defRPr/>
-            </a:pPr>
-            <a:r>
-              <a:rPr lang="de-DE" dirty="0"/>
-              <a:t>T</a:t>
-            </a:r>
-          </a:p>
-          <a:p>
-            <a:pPr marL="0" marR="0" lvl="0" indent="0" algn="l" defTabSz="914400" rtl="0" eaLnBrk="1" fontAlgn="auto" latinLnBrk="0" hangingPunct="1">
-              <a:lnSpc>
-                <a:spcPct val="100000"/>
-              </a:lnSpc>
-              <a:spcBef>
-                <a:spcPts val="0"/>
-              </a:spcBef>
-              <a:spcAft>
-                <a:spcPts val="0"/>
-              </a:spcAft>
-              <a:buClrTx/>
-              <a:buSzTx/>
-              <a:buFontTx/>
-              <a:buNone/>
-              <a:tabLst/>
-              <a:defRPr/>
-            </a:pPr>
-            <a:r>
-              <a:rPr lang="de-DE" dirty="0" err="1"/>
-              <a:t>mID</a:t>
-            </a:r>
-            <a:r>
-              <a:rPr lang="de-DE" dirty="0"/>
-              <a:t>: Z01-Z05 = 0000 und </a:t>
-            </a:r>
-            <a:r>
-              <a:rPr lang="de-DE" dirty="0" err="1"/>
-              <a:t>rID</a:t>
-            </a:r>
-            <a:r>
-              <a:rPr lang="de-DE" dirty="0"/>
-              <a:t> = 00000 und Pos = 00</a:t>
+            <a:r>
+              <a:rPr lang="de-DE" sz="1200" b="0" kern="1200" dirty="0">
+                <a:solidFill>
+                  <a:schemeClr val="tx1"/>
+                </a:solidFill>
+                <a:effectLst/>
+                <a:latin typeface="+mn-lt"/>
+                <a:ea typeface="+mn-ea"/>
+                <a:cs typeface="+mn-cs"/>
+              </a:rPr>
+              <a:t>Die Hyperparameter werden nicht auf dem Testsatz ausgewählt. Für jede Kombination trainieren wir auf dem Trainingssatz und bewerten auf dem Entwicklungssatz. Das beste Modell wird anhand der Entwicklungs-Metriken ausgewählt. Danach wird das finale Modell mit Training plus Entwicklung neu trainiert und erst dann auf dem Testsatz bewertet.</a:t>
             </a:r>
           </a:p>
         </p:txBody>
@@ -981,6 +946,13 @@
           </p:nvPr>
         </p:nvSpPr>
         <p:spPr/>
+        <p:txBody>
+          <a:bodyPr/>
+          <a:lstStyle/>
+          <a:p>
+            <a:endParaRPr lang="de-DE"/>
+          </a:p>
+        </p:txBody>
       </p:sp>
       <p:sp>
         <p:nvSpPr>
@@ -1015,8 +987,136 @@
               <a:defRPr/>
             </a:pPr>
             <a:r>
-              <a:rPr lang="de-DE" dirty="0"/>
-              <a:t>B</a:t>
+              <a:rPr lang="de-DE" sz="1200" b="0" kern="1200" dirty="0">
+                <a:solidFill>
+                  <a:schemeClr val="tx1"/>
+                </a:solidFill>
+                <a:effectLst/>
+                <a:latin typeface="+mn-lt"/>
+                <a:ea typeface="+mn-ea"/>
+                <a:cs typeface="+mn-cs"/>
+              </a:rPr>
+              <a:t>Die Code-Vorstellung läuft am besten über `main.py`, weil dort alle Schritte sichtbar zusammenlaufen: Signale laden, Split anwenden, Features extrahieren, über `</a:t>
+            </a:r>
+            <a:r>
+              <a:rPr lang="de-DE" sz="1200" b="0" kern="1200" dirty="0" err="1">
+                <a:solidFill>
+                  <a:schemeClr val="tx1"/>
+                </a:solidFill>
+                <a:effectLst/>
+                <a:latin typeface="+mn-lt"/>
+                <a:ea typeface="+mn-ea"/>
+                <a:cs typeface="+mn-cs"/>
+              </a:rPr>
+              <a:t>mID</a:t>
+            </a:r>
+            <a:r>
+              <a:rPr lang="de-DE" sz="1200" b="0" kern="1200" dirty="0">
+                <a:solidFill>
+                  <a:schemeClr val="tx1"/>
+                </a:solidFill>
+                <a:effectLst/>
+                <a:latin typeface="+mn-lt"/>
+                <a:ea typeface="+mn-ea"/>
+                <a:cs typeface="+mn-cs"/>
+              </a:rPr>
+              <a:t>` mitteln, pro Channel ein Modell trainieren und am Ende Ergebnisse speichern. Die anderen Dateien erklären wir kurz nach ihrer Rolle. `dataframe_manager.py` baut den Rohdaten-Data-Frame aus den WAV-Dateien. `split.py` enthält die methodisch wichtige Aufteilung: `Z01` und `Z02` ins Training, `Z04` in den Entwicklungssatz, `Z03` in den Testsatz und `Z05` positionsbasiert in alle drei Splits. `extraction.py` berechnet die Merkmale wie MFCC, Spektralmerkmale, Chroma, Zero-Crossing-Rate und RMS. `model.py` muss nicht im Detail vorgestellt werden; wichtig ist nur, dass dort `</a:t>
+            </a:r>
+            <a:r>
+              <a:rPr lang="de-DE" sz="1200" b="0" kern="1200" dirty="0" err="1">
+                <a:solidFill>
+                  <a:schemeClr val="tx1"/>
+                </a:solidFill>
+                <a:effectLst/>
+                <a:latin typeface="+mn-lt"/>
+                <a:ea typeface="+mn-ea"/>
+                <a:cs typeface="+mn-cs"/>
+              </a:rPr>
+              <a:t>StandardScaler</a:t>
+            </a:r>
+            <a:r>
+              <a:rPr lang="de-DE" sz="1200" b="0" kern="1200" dirty="0">
+                <a:solidFill>
+                  <a:schemeClr val="tx1"/>
+                </a:solidFill>
+                <a:effectLst/>
+                <a:latin typeface="+mn-lt"/>
+                <a:ea typeface="+mn-ea"/>
+                <a:cs typeface="+mn-cs"/>
+              </a:rPr>
+              <a:t> -&gt; </a:t>
+            </a:r>
+            <a:r>
+              <a:rPr lang="de-DE" sz="1200" b="0" kern="1200" dirty="0" err="1">
+                <a:solidFill>
+                  <a:schemeClr val="tx1"/>
+                </a:solidFill>
+                <a:effectLst/>
+                <a:latin typeface="+mn-lt"/>
+                <a:ea typeface="+mn-ea"/>
+                <a:cs typeface="+mn-cs"/>
+              </a:rPr>
+              <a:t>MLPClassifier</a:t>
+            </a:r>
+            <a:r>
+              <a:rPr lang="de-DE" sz="1200" b="0" kern="1200" dirty="0">
+                <a:solidFill>
+                  <a:schemeClr val="tx1"/>
+                </a:solidFill>
+                <a:effectLst/>
+                <a:latin typeface="+mn-lt"/>
+                <a:ea typeface="+mn-ea"/>
+                <a:cs typeface="+mn-cs"/>
+              </a:rPr>
+              <a:t>`, Hyperparameter-Suche, finale Evaluation, ROC, </a:t>
+            </a:r>
+            <a:r>
+              <a:rPr lang="de-DE" sz="1200" b="0" kern="1200" dirty="0" err="1">
+                <a:solidFill>
+                  <a:schemeClr val="tx1"/>
+                </a:solidFill>
+                <a:effectLst/>
+                <a:latin typeface="+mn-lt"/>
+                <a:ea typeface="+mn-ea"/>
+                <a:cs typeface="+mn-cs"/>
+              </a:rPr>
+              <a:t>Confusion</a:t>
+            </a:r>
+            <a:r>
+              <a:rPr lang="de-DE" sz="1200" b="0" kern="1200" dirty="0">
+                <a:solidFill>
+                  <a:schemeClr val="tx1"/>
+                </a:solidFill>
+                <a:effectLst/>
+                <a:latin typeface="+mn-lt"/>
+                <a:ea typeface="+mn-ea"/>
+                <a:cs typeface="+mn-cs"/>
+              </a:rPr>
+              <a:t> Matrix, Learning </a:t>
+            </a:r>
+            <a:r>
+              <a:rPr lang="de-DE" sz="1200" b="0" kern="1200" dirty="0" err="1">
+                <a:solidFill>
+                  <a:schemeClr val="tx1"/>
+                </a:solidFill>
+                <a:effectLst/>
+                <a:latin typeface="+mn-lt"/>
+                <a:ea typeface="+mn-ea"/>
+                <a:cs typeface="+mn-cs"/>
+              </a:rPr>
+              <a:t>Curves</a:t>
+            </a:r>
+            <a:r>
+              <a:rPr lang="de-DE" sz="1200" b="0" kern="1200" dirty="0">
+                <a:solidFill>
+                  <a:schemeClr val="tx1"/>
+                </a:solidFill>
+                <a:effectLst/>
+                <a:latin typeface="+mn-lt"/>
+                <a:ea typeface="+mn-ea"/>
+                <a:cs typeface="+mn-cs"/>
+              </a:rPr>
+              <a:t> und Loss-Kurven umgesetzt sind.</a:t>
             </a:r>
           </a:p>
           <a:p>
@@ -1088,6 +1188,13 @@
           </p:nvPr>
         </p:nvSpPr>
         <p:spPr/>
+        <p:txBody>
+          <a:bodyPr/>
+          <a:lstStyle/>
+          <a:p>
+            <a:endParaRPr lang="de-DE"/>
+          </a:p>
+        </p:txBody>
       </p:sp>
       <p:sp>
         <p:nvSpPr>
@@ -1105,8 +1212,40 @@
           <a:lstStyle/>
           <a:p>
             <a:r>
-              <a:rPr lang="de-DE" dirty="0"/>
-              <a:t>B</a:t>
+              <a:rPr lang="de-DE" sz="1200" b="0" kern="1200" dirty="0">
+                <a:solidFill>
+                  <a:schemeClr val="tx1"/>
+                </a:solidFill>
+                <a:effectLst/>
+                <a:latin typeface="+mn-lt"/>
+                <a:ea typeface="+mn-ea"/>
+                <a:cs typeface="+mn-cs"/>
+              </a:rPr>
+              <a:t> Die Training-Loss-Kurve zeigt, wie sich der Fehler während des Trainings entwickelt. Der Loss basiert auf den vorhergesagten Wahrscheinlichkeiten des MLP und den echten Labels. Wenn das Modell der richtigen Klasse eine hohe Wahrscheinlichkeit gibt, ist der Loss klein. Wenn es unsicher oder falsch liegt, steigt der Loss. In unseren Kurven sinkt der Loss deutlich ab, was zeigt, dass das Training funktioniert und das Modell die Trainingsdaten zunehmend besser beschreibt. Wichtig ist aber, dass ein niedriger Trainings-Loss allein nicht   ausreicht. Ein Modell kann auf Trainingsdaten sehr gut sein und trotzdem schlecht generalisieren. Deshalb bewerten wir zusätzlich mit Entwicklungssatz, Testsatz, ROC/AUC und Learning </a:t>
+            </a:r>
+            <a:r>
+              <a:rPr lang="de-DE" sz="1200" b="0" kern="1200" dirty="0" err="1">
+                <a:solidFill>
+                  <a:schemeClr val="tx1"/>
+                </a:solidFill>
+                <a:effectLst/>
+                <a:latin typeface="+mn-lt"/>
+                <a:ea typeface="+mn-ea"/>
+                <a:cs typeface="+mn-cs"/>
+              </a:rPr>
+              <a:t>Curves</a:t>
+            </a:r>
+            <a:r>
+              <a:rPr lang="de-DE" sz="1200" b="0" kern="1200" dirty="0">
+                <a:solidFill>
+                  <a:schemeClr val="tx1"/>
+                </a:solidFill>
+                <a:effectLst/>
+                <a:latin typeface="+mn-lt"/>
+                <a:ea typeface="+mn-ea"/>
+                <a:cs typeface="+mn-cs"/>
+              </a:rPr>
+              <a:t>.</a:t>
             </a:r>
           </a:p>
         </p:txBody>
@@ -1152,7 +1291,13 @@
   <p:cSld>
     <p:spTree>
       <p:nvGrpSpPr>
-        <p:cNvPr id="1" name=""/>
+        <p:cNvPr id="1" name="">
+          <a:extLst>
+            <a:ext uri="{FF2B5EF4-FFF2-40B4-BE49-F238E27FC236}">
+              <a16:creationId xmlns:a16="http://schemas.microsoft.com/office/drawing/2014/main" id="{F4F32459-7450-A094-EFE4-A5719BBE60A5}"/>
+            </a:ext>
+          </a:extLst>
+        </p:cNvPr>
         <p:cNvGrpSpPr/>
         <p:nvPr/>
       </p:nvGrpSpPr>
@@ -1166,7 +1311,13 @@
       </p:grpSpPr>
       <p:sp>
         <p:nvSpPr>
-          <p:cNvPr id="2" name="Folienbildplatzhalter 1"/>
+          <p:cNvPr id="2" name="Folienbildplatzhalter 1">
+            <a:extLst>
+              <a:ext uri="{FF2B5EF4-FFF2-40B4-BE49-F238E27FC236}">
+                <a16:creationId xmlns:a16="http://schemas.microsoft.com/office/drawing/2014/main" id="{10A727EB-4506-57C5-94F3-6703BF0E0E89}"/>
+              </a:ext>
+            </a:extLst>
+          </p:cNvPr>
           <p:cNvSpPr>
             <a:spLocks noGrp="1" noRot="1" noChangeAspect="1"/>
           </p:cNvSpPr>
@@ -1175,10 +1326,23 @@
           </p:nvPr>
         </p:nvSpPr>
         <p:spPr/>
-      </p:sp>
-      <p:sp>
-        <p:nvSpPr>
-          <p:cNvPr id="3" name="Notizenplatzhalter 2"/>
+        <p:txBody>
+          <a:bodyPr/>
+          <a:lstStyle/>
+          <a:p>
+            <a:endParaRPr lang="de-DE"/>
+          </a:p>
+        </p:txBody>
+      </p:sp>
+      <p:sp>
+        <p:nvSpPr>
+          <p:cNvPr id="3" name="Notizenplatzhalter 2">
+            <a:extLst>
+              <a:ext uri="{FF2B5EF4-FFF2-40B4-BE49-F238E27FC236}">
+                <a16:creationId xmlns:a16="http://schemas.microsoft.com/office/drawing/2014/main" id="{80DF9377-D63B-B215-1E30-95489284FCD2}"/>
+              </a:ext>
+            </a:extLst>
+          </p:cNvPr>
           <p:cNvSpPr>
             <a:spLocks noGrp="1"/>
           </p:cNvSpPr>
@@ -1192,15 +1356,53 @@
           <a:lstStyle/>
           <a:p>
             <a:r>
-              <a:rPr lang="de-DE" dirty="0"/>
-              <a:t>B</a:t>
-            </a:r>
-          </a:p>
-        </p:txBody>
-      </p:sp>
-      <p:sp>
-        <p:nvSpPr>
-          <p:cNvPr id="4" name="Foliennummernplatzhalter 3"/>
+              <a:rPr lang="de-DE" sz="1200" b="0" kern="1200" dirty="0">
+                <a:solidFill>
+                  <a:schemeClr val="tx1"/>
+                </a:solidFill>
+                <a:effectLst/>
+                <a:latin typeface="+mn-lt"/>
+                <a:ea typeface="+mn-ea"/>
+                <a:cs typeface="+mn-cs"/>
+              </a:rPr>
+              <a:t>Die Learning </a:t>
+            </a:r>
+            <a:r>
+              <a:rPr lang="de-DE" sz="1200" b="0" kern="1200" dirty="0" err="1">
+                <a:solidFill>
+                  <a:schemeClr val="tx1"/>
+                </a:solidFill>
+                <a:effectLst/>
+                <a:latin typeface="+mn-lt"/>
+                <a:ea typeface="+mn-ea"/>
+                <a:cs typeface="+mn-cs"/>
+              </a:rPr>
+              <a:t>Curves</a:t>
+            </a:r>
+            <a:r>
+              <a:rPr lang="de-DE" sz="1200" b="0" kern="1200" dirty="0">
+                <a:solidFill>
+                  <a:schemeClr val="tx1"/>
+                </a:solidFill>
+                <a:effectLst/>
+                <a:latin typeface="+mn-lt"/>
+                <a:ea typeface="+mn-ea"/>
+                <a:cs typeface="+mn-cs"/>
+              </a:rPr>
+              <a:t> zeigen, wie gut das Modell mit wachsender Trainingsmenge wird. Im aktuellen Split erreicht `Ch1` schon mit kleinen Trainingsmengen perfekte Entwicklungswerte. `Ch2` verbessert sich schrittweise und erreicht die perfekten Entwicklungswerte erst mit der gesamten Trainingsmenge.</a:t>
+            </a:r>
+          </a:p>
+        </p:txBody>
+      </p:sp>
+      <p:sp>
+        <p:nvSpPr>
+          <p:cNvPr id="4" name="Foliennummernplatzhalter 3">
+            <a:extLst>
+              <a:ext uri="{FF2B5EF4-FFF2-40B4-BE49-F238E27FC236}">
+                <a16:creationId xmlns:a16="http://schemas.microsoft.com/office/drawing/2014/main" id="{5714CD32-AC14-F66C-2FDB-9965745FDDFE}"/>
+              </a:ext>
+            </a:extLst>
+          </p:cNvPr>
           <p:cNvSpPr>
             <a:spLocks noGrp="1"/>
           </p:cNvSpPr>
@@ -1224,7 +1426,7 @@
     </p:spTree>
     <p:extLst>
       <p:ext uri="{BB962C8B-B14F-4D97-AF65-F5344CB8AC3E}">
-        <p14:creationId xmlns:p14="http://schemas.microsoft.com/office/powerpoint/2010/main" val="2133910754"/>
+        <p14:creationId xmlns:p14="http://schemas.microsoft.com/office/powerpoint/2010/main" val="3583877846"/>
       </p:ext>
     </p:extLst>
   </p:cSld>
@@ -1262,6 +1464,13 @@
           </p:nvPr>
         </p:nvSpPr>
         <p:spPr/>
+        <p:txBody>
+          <a:bodyPr/>
+          <a:lstStyle/>
+          <a:p>
+            <a:endParaRPr lang="de-DE"/>
+          </a:p>
+        </p:txBody>
       </p:sp>
       <p:sp>
         <p:nvSpPr>
@@ -1311,7 +1520,7 @@
     </p:spTree>
     <p:extLst>
       <p:ext uri="{BB962C8B-B14F-4D97-AF65-F5344CB8AC3E}">
-        <p14:creationId xmlns:p14="http://schemas.microsoft.com/office/powerpoint/2010/main" val="3954313880"/>
+        <p14:creationId xmlns:p14="http://schemas.microsoft.com/office/powerpoint/2010/main" val="2133910754"/>
       </p:ext>
     </p:extLst>
   </p:cSld>
@@ -1326,7 +1535,13 @@
   <p:cSld>
     <p:spTree>
       <p:nvGrpSpPr>
-        <p:cNvPr id="1" name=""/>
+        <p:cNvPr id="1" name="">
+          <a:extLst>
+            <a:ext uri="{FF2B5EF4-FFF2-40B4-BE49-F238E27FC236}">
+              <a16:creationId xmlns:a16="http://schemas.microsoft.com/office/drawing/2014/main" id="{63DFF985-53AC-E751-BA8C-BC7DEA5F3C7B}"/>
+            </a:ext>
+          </a:extLst>
+        </p:cNvPr>
         <p:cNvGrpSpPr/>
         <p:nvPr/>
       </p:nvGrpSpPr>
@@ -1340,7 +1555,13 @@
       </p:grpSpPr>
       <p:sp>
         <p:nvSpPr>
-          <p:cNvPr id="2" name="Folienbildplatzhalter 1"/>
+          <p:cNvPr id="2" name="Folienbildplatzhalter 1">
+            <a:extLst>
+              <a:ext uri="{FF2B5EF4-FFF2-40B4-BE49-F238E27FC236}">
+                <a16:creationId xmlns:a16="http://schemas.microsoft.com/office/drawing/2014/main" id="{7D88C51C-D20F-5D3F-AFB8-301D93D8137F}"/>
+              </a:ext>
+            </a:extLst>
+          </p:cNvPr>
           <p:cNvSpPr>
             <a:spLocks noGrp="1" noRot="1" noChangeAspect="1"/>
           </p:cNvSpPr>
@@ -1349,10 +1570,23 @@
           </p:nvPr>
         </p:nvSpPr>
         <p:spPr/>
-      </p:sp>
-      <p:sp>
-        <p:nvSpPr>
-          <p:cNvPr id="3" name="Notizenplatzhalter 2"/>
+        <p:txBody>
+          <a:bodyPr/>
+          <a:lstStyle/>
+          <a:p>
+            <a:endParaRPr lang="de-DE"/>
+          </a:p>
+        </p:txBody>
+      </p:sp>
+      <p:sp>
+        <p:nvSpPr>
+          <p:cNvPr id="3" name="Notizenplatzhalter 2">
+            <a:extLst>
+              <a:ext uri="{FF2B5EF4-FFF2-40B4-BE49-F238E27FC236}">
+                <a16:creationId xmlns:a16="http://schemas.microsoft.com/office/drawing/2014/main" id="{20285DFC-E835-86B2-BB91-E156E3F0C14C}"/>
+              </a:ext>
+            </a:extLst>
+          </p:cNvPr>
           <p:cNvSpPr>
             <a:spLocks noGrp="1"/>
           </p:cNvSpPr>
@@ -1374,7 +1608,13 @@
       </p:sp>
       <p:sp>
         <p:nvSpPr>
-          <p:cNvPr id="4" name="Foliennummernplatzhalter 3"/>
+          <p:cNvPr id="4" name="Foliennummernplatzhalter 3">
+            <a:extLst>
+              <a:ext uri="{FF2B5EF4-FFF2-40B4-BE49-F238E27FC236}">
+                <a16:creationId xmlns:a16="http://schemas.microsoft.com/office/drawing/2014/main" id="{A4A929B9-3971-4019-B480-8B92AE76D090}"/>
+              </a:ext>
+            </a:extLst>
+          </p:cNvPr>
           <p:cNvSpPr>
             <a:spLocks noGrp="1"/>
           </p:cNvSpPr>
@@ -1398,7 +1638,7 @@
     </p:spTree>
     <p:extLst>
       <p:ext uri="{BB962C8B-B14F-4D97-AF65-F5344CB8AC3E}">
-        <p14:creationId xmlns:p14="http://schemas.microsoft.com/office/powerpoint/2010/main" val="2265726828"/>
+        <p14:creationId xmlns:p14="http://schemas.microsoft.com/office/powerpoint/2010/main" val="434411322"/>
       </p:ext>
     </p:extLst>
   </p:cSld>
@@ -1436,6 +1676,13 @@
           </p:nvPr>
         </p:nvSpPr>
         <p:spPr/>
+        <p:txBody>
+          <a:bodyPr/>
+          <a:lstStyle/>
+          <a:p>
+            <a:endParaRPr lang="de-DE"/>
+          </a:p>
+        </p:txBody>
       </p:sp>
       <p:sp>
         <p:nvSpPr>
@@ -1454,7 +1701,7 @@
           <a:p>
             <a:r>
               <a:rPr lang="de-DE" dirty="0"/>
-              <a:t>V</a:t>
+              <a:t>B</a:t>
             </a:r>
           </a:p>
         </p:txBody>
@@ -1485,7 +1732,7 @@
     </p:spTree>
     <p:extLst>
       <p:ext uri="{BB962C8B-B14F-4D97-AF65-F5344CB8AC3E}">
-        <p14:creationId xmlns:p14="http://schemas.microsoft.com/office/powerpoint/2010/main" val="3001266698"/>
+        <p14:creationId xmlns:p14="http://schemas.microsoft.com/office/powerpoint/2010/main" val="3954313880"/>
       </p:ext>
     </p:extLst>
   </p:cSld>
@@ -1523,6 +1770,13 @@
           </p:nvPr>
         </p:nvSpPr>
         <p:spPr/>
+        <p:txBody>
+          <a:bodyPr/>
+          <a:lstStyle/>
+          <a:p>
+            <a:endParaRPr lang="de-DE"/>
+          </a:p>
+        </p:txBody>
       </p:sp>
       <p:sp>
         <p:nvSpPr>
@@ -1539,30 +1793,10 @@
           <a:bodyPr/>
           <a:lstStyle/>
           <a:p>
-            <a:pPr marL="0" marR="0" lvl="0" indent="0" algn="l" defTabSz="914400" rtl="0" eaLnBrk="1" fontAlgn="auto" latinLnBrk="0" hangingPunct="1">
-              <a:lnSpc>
-                <a:spcPct val="100000"/>
-              </a:lnSpc>
-              <a:spcBef>
-                <a:spcPts val="0"/>
-              </a:spcBef>
-              <a:spcAft>
-                <a:spcPts val="0"/>
-              </a:spcAft>
-              <a:buClrTx/>
-              <a:buSzTx/>
-              <a:buFontTx/>
-              <a:buNone/>
-              <a:tabLst/>
-              <a:defRPr/>
-            </a:pPr>
             <a:r>
               <a:rPr lang="de-DE" dirty="0"/>
-              <a:t>V</a:t>
-            </a:r>
-          </a:p>
-          <a:p>
-            <a:endParaRPr lang="de-DE" dirty="0"/>
+              <a:t>B</a:t>
+            </a:r>
           </a:p>
         </p:txBody>
       </p:sp>
@@ -1592,7 +1826,7 @@
     </p:spTree>
     <p:extLst>
       <p:ext uri="{BB962C8B-B14F-4D97-AF65-F5344CB8AC3E}">
-        <p14:creationId xmlns:p14="http://schemas.microsoft.com/office/powerpoint/2010/main" val="1794829908"/>
+        <p14:creationId xmlns:p14="http://schemas.microsoft.com/office/powerpoint/2010/main" val="2265726828"/>
       </p:ext>
     </p:extLst>
   </p:cSld>
@@ -1630,6 +1864,107 @@
           </p:nvPr>
         </p:nvSpPr>
         <p:spPr/>
+        <p:txBody>
+          <a:bodyPr/>
+          <a:lstStyle/>
+          <a:p>
+            <a:endParaRPr lang="de-DE"/>
+          </a:p>
+        </p:txBody>
+      </p:sp>
+      <p:sp>
+        <p:nvSpPr>
+          <p:cNvPr id="3" name="Notizenplatzhalter 2"/>
+          <p:cNvSpPr>
+            <a:spLocks noGrp="1"/>
+          </p:cNvSpPr>
+          <p:nvPr>
+            <p:ph type="body" idx="1"/>
+          </p:nvPr>
+        </p:nvSpPr>
+        <p:spPr/>
+        <p:txBody>
+          <a:bodyPr/>
+          <a:lstStyle/>
+          <a:p>
+            <a:r>
+              <a:rPr lang="de-DE" dirty="0"/>
+              <a:t>V</a:t>
+            </a:r>
+          </a:p>
+        </p:txBody>
+      </p:sp>
+      <p:sp>
+        <p:nvSpPr>
+          <p:cNvPr id="4" name="Foliennummernplatzhalter 3"/>
+          <p:cNvSpPr>
+            <a:spLocks noGrp="1"/>
+          </p:cNvSpPr>
+          <p:nvPr>
+            <p:ph type="sldNum" sz="quarter" idx="5"/>
+          </p:nvPr>
+        </p:nvSpPr>
+        <p:spPr/>
+        <p:txBody>
+          <a:bodyPr/>
+          <a:lstStyle/>
+          <a:p>
+            <a:fld id="{0492B7F2-6741-7346-B13A-366117EE2BBB}" type="slidenum">
+              <a:rPr lang="de-DE" smtClean="0"/>
+              <a:t>18</a:t>
+            </a:fld>
+            <a:endParaRPr lang="de-DE"/>
+          </a:p>
+        </p:txBody>
+      </p:sp>
+    </p:spTree>
+    <p:extLst>
+      <p:ext uri="{BB962C8B-B14F-4D97-AF65-F5344CB8AC3E}">
+        <p14:creationId xmlns:p14="http://schemas.microsoft.com/office/powerpoint/2010/main" val="3001266698"/>
+      </p:ext>
+    </p:extLst>
+  </p:cSld>
+  <p:clrMapOvr>
+    <a:masterClrMapping/>
+  </p:clrMapOvr>
+</p:notes>
+</file>
+
+<file path=ppt/notesSlides/notesSlide19.xml><?xml version="1.0" encoding="utf-8"?>
+<p:notes xmlns:a="http://schemas.openxmlformats.org/drawingml/2006/main" xmlns:r="http://schemas.openxmlformats.org/officeDocument/2006/relationships" xmlns:p="http://schemas.openxmlformats.org/presentationml/2006/main">
+  <p:cSld>
+    <p:spTree>
+      <p:nvGrpSpPr>
+        <p:cNvPr id="1" name=""/>
+        <p:cNvGrpSpPr/>
+        <p:nvPr/>
+      </p:nvGrpSpPr>
+      <p:grpSpPr>
+        <a:xfrm>
+          <a:off x="0" y="0"/>
+          <a:ext cx="0" cy="0"/>
+          <a:chOff x="0" y="0"/>
+          <a:chExt cx="0" cy="0"/>
+        </a:xfrm>
+      </p:grpSpPr>
+      <p:sp>
+        <p:nvSpPr>
+          <p:cNvPr id="2" name="Folienbildplatzhalter 1"/>
+          <p:cNvSpPr>
+            <a:spLocks noGrp="1" noRot="1" noChangeAspect="1"/>
+          </p:cNvSpPr>
+          <p:nvPr>
+            <p:ph type="sldImg"/>
+          </p:nvPr>
+        </p:nvSpPr>
+        <p:spPr/>
+        <p:txBody>
+          <a:bodyPr/>
+          <a:lstStyle/>
+          <a:p>
+            <a:endParaRPr lang="de-DE"/>
+          </a:p>
+        </p:txBody>
       </p:sp>
       <p:sp>
         <p:nvSpPr>
@@ -1690,7 +2025,7 @@
           <a:p>
             <a:fld id="{0492B7F2-6741-7346-B13A-366117EE2BBB}" type="slidenum">
               <a:rPr lang="de-DE" smtClean="0"/>
-              <a:t>18</a:t>
+              <a:t>19</a:t>
             </a:fld>
             <a:endParaRPr lang="de-DE"/>
           </a:p>
@@ -1699,7 +2034,7 @@
     </p:spTree>
     <p:extLst>
       <p:ext uri="{BB962C8B-B14F-4D97-AF65-F5344CB8AC3E}">
-        <p14:creationId xmlns:p14="http://schemas.microsoft.com/office/powerpoint/2010/main" val="177677867"/>
+        <p14:creationId xmlns:p14="http://schemas.microsoft.com/office/powerpoint/2010/main" val="1794829908"/>
       </p:ext>
     </p:extLst>
   </p:cSld>
@@ -1835,6 +2170,120 @@
 </p:notes>
 </file>
 
+<file path=ppt/notesSlides/notesSlide20.xml><?xml version="1.0" encoding="utf-8"?>
+<p:notes xmlns:a="http://schemas.openxmlformats.org/drawingml/2006/main" xmlns:r="http://schemas.openxmlformats.org/officeDocument/2006/relationships" xmlns:p="http://schemas.openxmlformats.org/presentationml/2006/main">
+  <p:cSld>
+    <p:spTree>
+      <p:nvGrpSpPr>
+        <p:cNvPr id="1" name=""/>
+        <p:cNvGrpSpPr/>
+        <p:nvPr/>
+      </p:nvGrpSpPr>
+      <p:grpSpPr>
+        <a:xfrm>
+          <a:off x="0" y="0"/>
+          <a:ext cx="0" cy="0"/>
+          <a:chOff x="0" y="0"/>
+          <a:chExt cx="0" cy="0"/>
+        </a:xfrm>
+      </p:grpSpPr>
+      <p:sp>
+        <p:nvSpPr>
+          <p:cNvPr id="2" name="Folienbildplatzhalter 1"/>
+          <p:cNvSpPr>
+            <a:spLocks noGrp="1" noRot="1" noChangeAspect="1"/>
+          </p:cNvSpPr>
+          <p:nvPr>
+            <p:ph type="sldImg"/>
+          </p:nvPr>
+        </p:nvSpPr>
+        <p:spPr/>
+        <p:txBody>
+          <a:bodyPr/>
+          <a:lstStyle/>
+          <a:p>
+            <a:endParaRPr lang="de-DE"/>
+          </a:p>
+        </p:txBody>
+      </p:sp>
+      <p:sp>
+        <p:nvSpPr>
+          <p:cNvPr id="3" name="Notizenplatzhalter 2"/>
+          <p:cNvSpPr>
+            <a:spLocks noGrp="1"/>
+          </p:cNvSpPr>
+          <p:nvPr>
+            <p:ph type="body" idx="1"/>
+          </p:nvPr>
+        </p:nvSpPr>
+        <p:spPr/>
+        <p:txBody>
+          <a:bodyPr/>
+          <a:lstStyle/>
+          <a:p>
+            <a:pPr marL="0" marR="0" lvl="0" indent="0" algn="l" defTabSz="914400" rtl="0" eaLnBrk="1" fontAlgn="auto" latinLnBrk="0" hangingPunct="1">
+              <a:lnSpc>
+                <a:spcPct val="100000"/>
+              </a:lnSpc>
+              <a:spcBef>
+                <a:spcPts val="0"/>
+              </a:spcBef>
+              <a:spcAft>
+                <a:spcPts val="0"/>
+              </a:spcAft>
+              <a:buClrTx/>
+              <a:buSzTx/>
+              <a:buFontTx/>
+              <a:buNone/>
+              <a:tabLst/>
+              <a:defRPr/>
+            </a:pPr>
+            <a:r>
+              <a:rPr lang="de-DE" dirty="0"/>
+              <a:t>V</a:t>
+            </a:r>
+          </a:p>
+          <a:p>
+            <a:endParaRPr lang="de-DE" dirty="0"/>
+          </a:p>
+        </p:txBody>
+      </p:sp>
+      <p:sp>
+        <p:nvSpPr>
+          <p:cNvPr id="4" name="Foliennummernplatzhalter 3"/>
+          <p:cNvSpPr>
+            <a:spLocks noGrp="1"/>
+          </p:cNvSpPr>
+          <p:nvPr>
+            <p:ph type="sldNum" sz="quarter" idx="5"/>
+          </p:nvPr>
+        </p:nvSpPr>
+        <p:spPr/>
+        <p:txBody>
+          <a:bodyPr/>
+          <a:lstStyle/>
+          <a:p>
+            <a:fld id="{0492B7F2-6741-7346-B13A-366117EE2BBB}" type="slidenum">
+              <a:rPr lang="de-DE" smtClean="0"/>
+              <a:t>20</a:t>
+            </a:fld>
+            <a:endParaRPr lang="de-DE"/>
+          </a:p>
+        </p:txBody>
+      </p:sp>
+    </p:spTree>
+    <p:extLst>
+      <p:ext uri="{BB962C8B-B14F-4D97-AF65-F5344CB8AC3E}">
+        <p14:creationId xmlns:p14="http://schemas.microsoft.com/office/powerpoint/2010/main" val="177677867"/>
+      </p:ext>
+    </p:extLst>
+  </p:cSld>
+  <p:clrMapOvr>
+    <a:masterClrMapping/>
+  </p:clrMapOvr>
+</p:notes>
+</file>
+
 <file path=ppt/notesSlides/notesSlide3.xml><?xml version="1.0" encoding="utf-8"?>
 <p:notes xmlns:a="http://schemas.openxmlformats.org/drawingml/2006/main" xmlns:r="http://schemas.openxmlformats.org/officeDocument/2006/relationships" xmlns:p="http://schemas.openxmlformats.org/presentationml/2006/main">
   <p:cSld>
@@ -1863,6 +2312,13 @@
           </p:nvPr>
         </p:nvSpPr>
         <p:spPr/>
+        <p:txBody>
+          <a:bodyPr/>
+          <a:lstStyle/>
+          <a:p>
+            <a:endParaRPr lang="de-DE"/>
+          </a:p>
+        </p:txBody>
       </p:sp>
       <p:sp>
         <p:nvSpPr>
@@ -2155,6 +2611,13 @@
           </p:nvPr>
         </p:nvSpPr>
         <p:spPr/>
+        <p:txBody>
+          <a:bodyPr/>
+          <a:lstStyle/>
+          <a:p>
+            <a:endParaRPr lang="de-DE"/>
+          </a:p>
+        </p:txBody>
       </p:sp>
       <p:sp>
         <p:nvSpPr>
@@ -2316,8 +2779,16 @@
           <a:lstStyle/>
           <a:p>
             <a:r>
-              <a:rPr lang="de-DE" dirty="0"/>
-              <a:t>T</a:t>
+              <a:rPr lang="de-DE" sz="1200" b="0" kern="1200" dirty="0">
+                <a:solidFill>
+                  <a:schemeClr val="tx1"/>
+                </a:solidFill>
+                <a:effectLst/>
+                <a:latin typeface="+mn-lt"/>
+                <a:ea typeface="+mn-ea"/>
+                <a:cs typeface="+mn-cs"/>
+              </a:rPr>
+              <a:t>Wir verwenden bewusst die Merkmale aus Aufgabe 2 weiter, weil diese bereits zu guten visuellen Trennungen geführt haben. Die Merkmale beschreiben sowohl zeitliche Eigenschaften als auch spektrale Eigenschaften des Signals. Dadurch muss das MLP nicht direkt auf den Rohsignalen lernen, sondern bekommt kompakte Signalbeschreibungen.</a:t>
             </a:r>
           </a:p>
           <a:p>
@@ -2395,6 +2866,13 @@
           </p:nvPr>
         </p:nvSpPr>
         <p:spPr/>
+        <p:txBody>
+          <a:bodyPr/>
+          <a:lstStyle/>
+          <a:p>
+            <a:endParaRPr lang="de-DE"/>
+          </a:p>
+        </p:txBody>
       </p:sp>
       <p:sp>
         <p:nvSpPr>
@@ -2411,60 +2889,62 @@
           <a:bodyPr/>
           <a:lstStyle/>
           <a:p>
-            <a:r>
-              <a:rPr lang="de-DE" dirty="0"/>
-              <a:t>T</a:t>
-            </a:r>
-          </a:p>
-          <a:p>
-            <a:pPr marL="171450" indent="-171450">
+            <a:pPr marL="0" marR="0" lvl="0" indent="0" algn="l" defTabSz="914400" rtl="0" eaLnBrk="1" fontAlgn="auto" latinLnBrk="0" hangingPunct="1">
+              <a:lnSpc>
+                <a:spcPct val="100000"/>
+              </a:lnSpc>
+              <a:spcBef>
+                <a:spcPts val="0"/>
+              </a:spcBef>
+              <a:spcAft>
+                <a:spcPts val="0"/>
+              </a:spcAft>
+              <a:buClrTx/>
+              <a:buSzTx/>
               <a:buFontTx/>
-              <a:buChar char="-"/>
+              <a:buNone/>
+              <a:tabLst/>
+              <a:defRPr/>
             </a:pPr>
             <a:r>
-              <a:rPr lang="de-DE" dirty="0"/>
-              <a:t>Lage der Mediane zueinander: wenn Mediane von Zahnrädern aus versch. </a:t>
-            </a:r>
-            <a:r>
-              <a:rPr lang="de-DE" dirty="0" err="1"/>
-              <a:t>klassen</a:t>
-            </a:r>
-            <a:r>
-              <a:rPr lang="de-DE" dirty="0"/>
-              <a:t> unterschiedlich stark sind hat dieses Merkmal einen indikativen Charakter  </a:t>
-            </a:r>
-            <a:br>
-              <a:rPr lang="de-DE" dirty="0"/>
-            </a:br>
-            <a:r>
-              <a:rPr lang="de-DE" dirty="0"/>
-              <a:t>- Überlappung: Boxen stark überlappen-&gt; einzelne Merkmal allein  nicht aussagekräftig genug für einfache Unterscheidung. In  KI-Anwendung mit anderen kombinieren- Größe der Boxen: </a:t>
-            </a:r>
-            <a:r>
-              <a:rPr lang="de-DE" dirty="0" err="1"/>
-              <a:t>stabilität</a:t>
-            </a:r>
-            <a:r>
-              <a:rPr lang="de-DE" dirty="0"/>
-              <a:t> von Merkmalen. Große Boxen -&gt; große Varianz, weniger sinnvoll für Klassifikation</a:t>
-            </a:r>
-            <a:br>
-              <a:rPr lang="de-DE" dirty="0"/>
-            </a:br>
-            <a:r>
-              <a:rPr lang="de-DE" dirty="0"/>
-              <a:t>- Ausreißer: auf Messfehler, Rauschen oder besondere Anomalien im Zahnrad hinweisen(die für eine KI als „Herausforderung“ oder „Indikator“ dienen können)</a:t>
-            </a:r>
-          </a:p>
-          <a:p>
-            <a:pPr marL="171450" indent="-171450">
-              <a:buFontTx/>
-              <a:buChar char="-"/>
-            </a:pPr>
-            <a:r>
-              <a:rPr lang="de-DE" dirty="0"/>
-              <a:t>=&gt; Zentral für Verständnis, nehmen trotzdem alle\man könnte gewichten</a:t>
-            </a:r>
+              <a:rPr lang="de-DE" sz="1200" b="0" kern="1200" dirty="0">
+                <a:solidFill>
+                  <a:schemeClr val="tx1"/>
+                </a:solidFill>
+                <a:effectLst/>
+                <a:latin typeface="+mn-lt"/>
+                <a:ea typeface="+mn-ea"/>
+                <a:cs typeface="+mn-cs"/>
+              </a:rPr>
+              <a:t>Wir extrahieren die Merkmale pro Roh-datei und mitteln danach die Feature-werte über alle `</a:t>
+            </a:r>
+            <a:r>
+              <a:rPr lang="de-DE" sz="1200" b="0" kern="1200" dirty="0" err="1">
+                <a:solidFill>
+                  <a:schemeClr val="tx1"/>
+                </a:solidFill>
+                <a:effectLst/>
+                <a:latin typeface="+mn-lt"/>
+                <a:ea typeface="+mn-ea"/>
+                <a:cs typeface="+mn-cs"/>
+              </a:rPr>
+              <a:t>mID</a:t>
+            </a:r>
+            <a:r>
+              <a:rPr lang="de-DE" sz="1200" b="0" kern="1200" dirty="0">
+                <a:solidFill>
+                  <a:schemeClr val="tx1"/>
+                </a:solidFill>
+                <a:effectLst/>
+                <a:latin typeface="+mn-lt"/>
+                <a:ea typeface="+mn-ea"/>
+                <a:cs typeface="+mn-cs"/>
+              </a:rPr>
+              <a:t>`. Dadurch werden Wiederholungsmessungen in der Merkmalsebene zusammengefasst. Der Split trennt die guten Zahnräder stärker nach Zahnrad-Identität: `Z04` ist nur im Entwicklungssatz, `Z03` nur im Testsatz. `Z05` muss als einziges beschädigtes Zahnrad weiterhin positionsbasiert auf Train, Dev und Test verteilt werden. `Ch1` und `Ch2` werden nicht als Feature codiert, sondern bekommen je ein eigenes Modell.</a:t>
+            </a:r>
+          </a:p>
+          <a:p>
+            <a:endParaRPr lang="de-DE" dirty="0"/>
           </a:p>
         </p:txBody>
       </p:sp>
@@ -2532,6 +3012,13 @@
           </p:nvPr>
         </p:nvSpPr>
         <p:spPr/>
+        <p:txBody>
+          <a:bodyPr/>
+          <a:lstStyle/>
+          <a:p>
+            <a:endParaRPr lang="de-DE"/>
+          </a:p>
+        </p:txBody>
       </p:sp>
       <p:sp>
         <p:nvSpPr>
@@ -2549,58 +3036,16 @@
           <a:lstStyle/>
           <a:p>
             <a:r>
-              <a:rPr lang="de-DE" dirty="0"/>
-              <a:t>T</a:t>
-            </a:r>
-          </a:p>
-          <a:p>
-            <a:pPr marL="171450" indent="-171450">
-              <a:buFontTx/>
-              <a:buChar char="-"/>
-            </a:pPr>
-            <a:r>
-              <a:rPr lang="de-DE" dirty="0"/>
-              <a:t>Lage der Mediane zueinander: wenn Mediane von Zahnrädern aus versch. </a:t>
-            </a:r>
-            <a:r>
-              <a:rPr lang="de-DE" dirty="0" err="1"/>
-              <a:t>klassen</a:t>
-            </a:r>
-            <a:r>
-              <a:rPr lang="de-DE" dirty="0"/>
-              <a:t> unterschiedlich stark sind hat dieses Merkmal einen indikativen Charakter  </a:t>
-            </a:r>
-            <a:br>
-              <a:rPr lang="de-DE" dirty="0"/>
-            </a:br>
-            <a:r>
-              <a:rPr lang="de-DE" dirty="0"/>
-              <a:t>- Überlappung: Boxen stark überlappen-&gt; einzelne Merkmal allein  nicht aussagekräftig genug für einfache Unterscheidung. In  KI-Anwendung mit anderen kombinieren- Größe der Boxen: </a:t>
-            </a:r>
-            <a:r>
-              <a:rPr lang="de-DE" dirty="0" err="1"/>
-              <a:t>stabilität</a:t>
-            </a:r>
-            <a:r>
-              <a:rPr lang="de-DE" dirty="0"/>
-              <a:t> von Merkmalen. Große Boxen -&gt; große Varianz, weniger sinnvoll für Klassifikation</a:t>
-            </a:r>
-            <a:br>
-              <a:rPr lang="de-DE" dirty="0"/>
-            </a:br>
-            <a:r>
-              <a:rPr lang="de-DE" dirty="0"/>
-              <a:t>- Ausreißer: auf Messfehler, Rauschen oder besondere Anomalien im Zahnrad hinweisen(die für eine KI als „Herausforderung“ oder „Indikator“ dienen können)</a:t>
-            </a:r>
-          </a:p>
-          <a:p>
-            <a:pPr marL="171450" indent="-171450">
-              <a:buFontTx/>
-              <a:buChar char="-"/>
-            </a:pPr>
-            <a:r>
-              <a:rPr lang="de-DE" dirty="0"/>
-              <a:t>=&gt; Zentral für Verständnis, nehmen trotzdem alle\man könnte gewichten</a:t>
+              <a:rPr lang="de-DE" sz="1200" b="0" kern="1200" dirty="0">
+                <a:solidFill>
+                  <a:schemeClr val="tx1"/>
+                </a:solidFill>
+                <a:effectLst/>
+                <a:latin typeface="+mn-lt"/>
+                <a:ea typeface="+mn-ea"/>
+                <a:cs typeface="+mn-cs"/>
+              </a:rPr>
+              <a:t>Das Verteilungsdiagramm macht sichtbar, warum wir vor dem Training mitteln. `Z01` und `Z04` hätten sonst deutlich mehr Einfluss als die anderen Zahnräder, weil dort mehr Wiederholungsmessungen vorhanden sind. Nach der Mittelung stehen für jedes gute Zahnrad pro Channel 20 Feature-Zeilen zur Verfügung. Danach werden die guten Zahnräder getrennt: `Z01` und `Z02` liegen im Training, `Z04` im Entwicklungssatz und `Z03` im Testsatz. Für die beschädigte Klasse ist eine solche Zahnrad-Trennung nicht möglich, weil nur `Z05` beschädigt ist. Deshalb wird `Z05` pro Channel positionsbasiert in 12 Training, 4 Entwicklung und 4 Test aufgeteilt. Daraus entstehen pro Channel 52 Trainings-, 24 Entwicklungs- und 24 Testbeispiele.</a:t>
             </a:r>
           </a:p>
         </p:txBody>
@@ -2711,8 +3156,16 @@
           <a:lstStyle/>
           <a:p>
             <a:r>
-              <a:rPr lang="de-DE" dirty="0"/>
-              <a:t>T</a:t>
+              <a:rPr lang="de-DE" sz="1200" b="0" kern="1200" dirty="0">
+                <a:solidFill>
+                  <a:schemeClr val="tx1"/>
+                </a:solidFill>
+                <a:effectLst/>
+                <a:latin typeface="+mn-lt"/>
+                <a:ea typeface="+mn-ea"/>
+                <a:cs typeface="+mn-cs"/>
+              </a:rPr>
+              <a:t>Vor dem MLP werden alle Features standardisiert. Das ist wichtig, weil die Merkmale unterschiedliche Wertebereiche besitzen. Pro Channel trainieren wir ein eigenes kleines Modell, da der Datensatz trotz Rohdateien klein bleibt. Ein zu großes Netz könnte leicht auswendig lernen.</a:t>
             </a:r>
           </a:p>
         </p:txBody>
@@ -2886,7 +3339,7 @@
           <a:p>
             <a:r>
               <a:rPr lang="de-DE"/>
-              <a:t>Materialdiagnostik: Task 2</a:t>
+              <a:t>Materialdiagnostik: Task 3</a:t>
             </a:r>
             <a:endParaRPr lang="de-DE" dirty="0"/>
           </a:p>
@@ -2915,7 +3368,7 @@
           <a:p>
             <a:r>
               <a:rPr lang="de-DE"/>
-              <a:t>25.06.2026</a:t>
+              <a:t>16.07.2026</a:t>
             </a:r>
           </a:p>
         </p:txBody>
@@ -3140,7 +3593,7 @@
           <a:p>
             <a:r>
               <a:rPr lang="de-DE"/>
-              <a:t>Materialdiagnostik: Task 2</a:t>
+              <a:t>Materialdiagnostik: Task 3</a:t>
             </a:r>
           </a:p>
         </p:txBody>
@@ -3168,7 +3621,7 @@
           <a:p>
             <a:r>
               <a:rPr lang="de-DE"/>
-              <a:t>25.06.2026</a:t>
+              <a:t>16.07.2026</a:t>
             </a:r>
           </a:p>
         </p:txBody>
@@ -3360,7 +3813,7 @@
           <a:p>
             <a:r>
               <a:rPr lang="de-DE"/>
-              <a:t>Materialdiagnostik: Task 2</a:t>
+              <a:t>Materialdiagnostik: Task 3</a:t>
             </a:r>
           </a:p>
         </p:txBody>
@@ -3388,7 +3841,7 @@
           <a:p>
             <a:r>
               <a:rPr lang="de-DE"/>
-              <a:t>25.06.2026</a:t>
+              <a:t>16.07.2026</a:t>
             </a:r>
           </a:p>
         </p:txBody>
@@ -3605,7 +4058,7 @@
           <a:p>
             <a:r>
               <a:rPr lang="de-DE"/>
-              <a:t>Materialdiagnostik: Task 2</a:t>
+              <a:t>Materialdiagnostik: Task 3</a:t>
             </a:r>
           </a:p>
         </p:txBody>
@@ -3633,7 +4086,7 @@
           <a:p>
             <a:r>
               <a:rPr lang="de-DE"/>
-              <a:t>25.06.2026</a:t>
+              <a:t>16.07.2026</a:t>
             </a:r>
           </a:p>
         </p:txBody>
@@ -3861,7 +4314,7 @@
           <a:p>
             <a:r>
               <a:rPr lang="de-DE"/>
-              <a:t>Materialdiagnostik: Task 2</a:t>
+              <a:t>Materialdiagnostik: Task 3</a:t>
             </a:r>
           </a:p>
         </p:txBody>
@@ -3889,7 +4342,7 @@
           <a:p>
             <a:r>
               <a:rPr lang="de-DE"/>
-              <a:t>25.06.2026</a:t>
+              <a:t>16.07.2026</a:t>
             </a:r>
           </a:p>
         </p:txBody>
@@ -4052,7 +4505,7 @@
           <a:p>
             <a:r>
               <a:rPr lang="de-DE"/>
-              <a:t>Materialdiagnostik: Task 2</a:t>
+              <a:t>Materialdiagnostik: Task 3</a:t>
             </a:r>
           </a:p>
         </p:txBody>
@@ -4080,7 +4533,7 @@
           <a:p>
             <a:r>
               <a:rPr lang="de-DE"/>
-              <a:t>25.06.2026</a:t>
+              <a:t>16.07.2026</a:t>
             </a:r>
           </a:p>
         </p:txBody>
@@ -4243,7 +4696,7 @@
           <a:p>
             <a:r>
               <a:rPr lang="de-DE"/>
-              <a:t>Materialdiagnostik: Task 2</a:t>
+              <a:t>Materialdiagnostik: Task 3</a:t>
             </a:r>
             <a:endParaRPr lang="de-DE" dirty="0"/>
           </a:p>
@@ -4272,7 +4725,7 @@
           <a:p>
             <a:r>
               <a:rPr lang="de-DE"/>
-              <a:t>25.06.2026</a:t>
+              <a:t>16.07.2026</a:t>
             </a:r>
           </a:p>
         </p:txBody>
@@ -4594,8 +5047,8 @@
           </a:lstStyle>
           <a:p>
             <a:r>
-              <a:rPr lang="de-DE"/>
-              <a:t>Materialdiagnostik: Task 2</a:t>
+              <a:rPr lang="de-DE" dirty="0"/>
+              <a:t>Materialdiagnostik: Task 3</a:t>
             </a:r>
           </a:p>
         </p:txBody>
@@ -4641,7 +5094,7 @@
           <a:p>
             <a:r>
               <a:rPr lang="de-DE"/>
-              <a:t>25.06.2026</a:t>
+              <a:t>16.07.2026</a:t>
             </a:r>
           </a:p>
         </p:txBody>
@@ -5293,45 +5746,150 @@
       </p:grpSpPr>
       <p:sp>
         <p:nvSpPr>
-          <p:cNvPr id="4" name="Foliennummernplatzhalter 3">
-            <a:extLst>
-              <a:ext uri="{FF2B5EF4-FFF2-40B4-BE49-F238E27FC236}">
-                <a16:creationId xmlns:a16="http://schemas.microsoft.com/office/drawing/2014/main" id="{953E53DE-A460-5286-4612-B8186AA66233}"/>
-              </a:ext>
-            </a:extLst>
-          </p:cNvPr>
-          <p:cNvSpPr>
-            <a:spLocks noGrp="1"/>
-          </p:cNvSpPr>
-          <p:nvPr>
-            <p:ph type="sldNum" sz="quarter" idx="10"/>
-          </p:nvPr>
-        </p:nvSpPr>
-        <p:spPr/>
+          <p:cNvPr id="5" name="Titel 4">
+            <a:extLst>
+              <a:ext uri="{FF2B5EF4-FFF2-40B4-BE49-F238E27FC236}">
+                <a16:creationId xmlns:a16="http://schemas.microsoft.com/office/drawing/2014/main" id="{D757B5A5-6051-FFCC-0340-6B2A2309AADC}"/>
+              </a:ext>
+            </a:extLst>
+          </p:cNvPr>
+          <p:cNvSpPr>
+            <a:spLocks noGrp="1"/>
+          </p:cNvSpPr>
+          <p:nvPr>
+            <p:ph type="title"/>
+          </p:nvPr>
+        </p:nvSpPr>
+        <p:spPr/>
+        <p:txBody>
+          <a:bodyPr/>
+          <a:lstStyle/>
+          <a:p>
+            <a:r>
+              <a:rPr lang="de-DE" sz="3200" dirty="0"/>
+              <a:t>Hyperparameter-Suche</a:t>
+            </a:r>
+          </a:p>
+        </p:txBody>
+      </p:sp>
+      <p:sp>
+        <p:nvSpPr>
+          <p:cNvPr id="6" name="Fußzeilenplatzhalter 5">
+            <a:extLst>
+              <a:ext uri="{FF2B5EF4-FFF2-40B4-BE49-F238E27FC236}">
+                <a16:creationId xmlns:a16="http://schemas.microsoft.com/office/drawing/2014/main" id="{8AEF4587-D828-91EE-B123-AA8CB8A7F45A}"/>
+              </a:ext>
+            </a:extLst>
+          </p:cNvPr>
+          <p:cNvSpPr>
+            <a:spLocks noGrp="1"/>
+          </p:cNvSpPr>
+          <p:nvPr>
+            <p:ph type="ftr" sz="quarter" idx="11"/>
+          </p:nvPr>
+        </p:nvSpPr>
+        <p:spPr/>
+        <p:txBody>
+          <a:bodyPr/>
+          <a:lstStyle/>
+          <a:p>
+            <a:r>
+              <a:rPr lang="de-DE"/>
+              <a:t>Materialdiagnostik: Task 3</a:t>
+            </a:r>
+            <a:endParaRPr lang="de-DE" dirty="0"/>
+          </a:p>
+        </p:txBody>
+      </p:sp>
+      <p:sp>
+        <p:nvSpPr>
+          <p:cNvPr id="2" name="Datumsplatzhalter 1">
+            <a:extLst>
+              <a:ext uri="{FF2B5EF4-FFF2-40B4-BE49-F238E27FC236}">
+                <a16:creationId xmlns:a16="http://schemas.microsoft.com/office/drawing/2014/main" id="{CE98F3A7-4DE5-447B-E8E2-5AA1A1F5B2C0}"/>
+              </a:ext>
+            </a:extLst>
+          </p:cNvPr>
+          <p:cNvSpPr>
+            <a:spLocks noGrp="1"/>
+          </p:cNvSpPr>
+          <p:nvPr>
+            <p:ph type="dt" sz="half" idx="12"/>
+          </p:nvPr>
+        </p:nvSpPr>
+        <p:spPr/>
+        <p:txBody>
+          <a:bodyPr/>
+          <a:lstStyle/>
+          <a:p>
+            <a:r>
+              <a:rPr lang="de-DE"/>
+              <a:t>16.07.2026</a:t>
+            </a:r>
+          </a:p>
+        </p:txBody>
+      </p:sp>
+      <p:sp>
+        <p:nvSpPr>
+          <p:cNvPr id="10" name="Inhaltsplatzhalter 9">
+            <a:extLst>
+              <a:ext uri="{FF2B5EF4-FFF2-40B4-BE49-F238E27FC236}">
+                <a16:creationId xmlns:a16="http://schemas.microsoft.com/office/drawing/2014/main" id="{20B76E1B-945A-5A48-7E66-249178791166}"/>
+              </a:ext>
+            </a:extLst>
+          </p:cNvPr>
+          <p:cNvSpPr>
+            <a:spLocks noGrp="1"/>
+          </p:cNvSpPr>
+          <p:nvPr>
+            <p:ph sz="quarter" idx="13"/>
+          </p:nvPr>
+        </p:nvSpPr>
+        <p:spPr>
+          <a:xfrm>
+            <a:off x="341312" y="1620000"/>
+            <a:ext cx="8476867" cy="965545"/>
+          </a:xfrm>
+        </p:spPr>
         <p:txBody>
           <a:bodyPr/>
           <a:lstStyle/>
           <a:p>
             <a:pPr>
-              <a:defRPr/>
+              <a:buFont typeface="Arial" panose="020B0604020202020204" pitchFamily="34" charset="0"/>
+              <a:buChar char="•"/>
             </a:pPr>
-            <a:fld id="{A0424531-ACBB-43B0-9536-C2FB0D769E6C}" type="slidenum">
-              <a:rPr lang="de-DE" altLang="de-DE" smtClean="0"/>
-              <a:pPr>
-                <a:defRPr/>
-              </a:pPr>
-              <a:t>10</a:t>
-            </a:fld>
-            <a:endParaRPr lang="de-DE" altLang="de-DE" dirty="0"/>
+            <a:r>
+              <a:rPr lang="de-DE" dirty="0"/>
+              <a:t>Optimierung auf Entwicklungssatz</a:t>
+            </a:r>
+          </a:p>
+          <a:p>
+            <a:pPr>
+              <a:buFont typeface="Arial" panose="020B0604020202020204" pitchFamily="34" charset="0"/>
+              <a:buChar char="•"/>
+            </a:pPr>
+            <a:r>
+              <a:rPr lang="de-DE" dirty="0"/>
+              <a:t>Hidden Layer, Lernrate, Batchgröße, Regularisierung </a:t>
+            </a:r>
+            <a:r>
+              <a:rPr lang="de-DE" dirty="0" err="1"/>
+              <a:t>alpha</a:t>
+            </a:r>
+            <a:endParaRPr lang="de-DE" dirty="0"/>
+          </a:p>
+          <a:p>
+            <a:endParaRPr lang="de-DE" dirty="0"/>
           </a:p>
         </p:txBody>
       </p:sp>
       <p:pic>
         <p:nvPicPr>
-          <p:cNvPr id="3" name="Inhaltsplatzhalter 2">
-            <a:extLst>
-              <a:ext uri="{FF2B5EF4-FFF2-40B4-BE49-F238E27FC236}">
-                <a16:creationId xmlns:a16="http://schemas.microsoft.com/office/drawing/2014/main" id="{D7C1B853-D0B1-D6E0-7F1E-5BADA4184D15}"/>
+          <p:cNvPr id="13" name="Inhaltsplatzhalter 12">
+            <a:extLst>
+              <a:ext uri="{FF2B5EF4-FFF2-40B4-BE49-F238E27FC236}">
+                <a16:creationId xmlns:a16="http://schemas.microsoft.com/office/drawing/2014/main" id="{3A09BFB8-89AB-C482-3A0A-A8AB1AA7F62E}"/>
               </a:ext>
             </a:extLst>
           </p:cNvPr>
@@ -5339,144 +5897,51 @@
             <a:picLocks noGrp="1" noChangeAspect="1"/>
           </p:cNvPicPr>
           <p:nvPr>
-            <p:ph sz="quarter" idx="13"/>
+            <p:ph sz="quarter" idx="14"/>
           </p:nvPr>
         </p:nvPicPr>
-        <p:blipFill rotWithShape="1">
+        <p:blipFill>
           <a:blip r:embed="rId3"/>
-          <a:srcRect b="66758"/>
           <a:stretch>
             <a:fillRect/>
           </a:stretch>
         </p:blipFill>
-        <p:spPr bwMode="auto">
+        <p:spPr>
           <a:xfrm>
-            <a:off x="343200" y="1361595"/>
-            <a:ext cx="11505600" cy="4928805"/>
+            <a:off x="1857566" y="2631831"/>
+            <a:ext cx="8476867" cy="3816026"/>
           </a:xfrm>
           <a:prstGeom prst="rect">
             <a:avLst/>
           </a:prstGeom>
-          <a:noFill/>
-          <a:ln>
-            <a:noFill/>
-          </a:ln>
-          <a:extLst>
-            <a:ext uri="{909E8E84-426E-40DD-AFC4-6F175D3DCCD1}">
-              <a14:hiddenFill xmlns:a14="http://schemas.microsoft.com/office/drawing/2010/main">
-                <a:solidFill>
-                  <a:srgbClr val="FFFFFF"/>
-                </a:solidFill>
-              </a14:hiddenFill>
-            </a:ext>
-            <a:ext uri="{91240B29-F687-4F45-9708-019B960494DF}">
-              <a14:hiddenLine xmlns:a14="http://schemas.microsoft.com/office/drawing/2010/main" w="9525">
-                <a:solidFill>
-                  <a:srgbClr val="000000"/>
-                </a:solidFill>
-                <a:miter lim="800000"/>
-                <a:headEnd/>
-                <a:tailEnd/>
-              </a14:hiddenLine>
-            </a:ext>
-          </a:extLst>
         </p:spPr>
       </p:pic>
       <p:sp>
         <p:nvSpPr>
-          <p:cNvPr id="5" name="Titel 4">
-            <a:extLst>
-              <a:ext uri="{FF2B5EF4-FFF2-40B4-BE49-F238E27FC236}">
-                <a16:creationId xmlns:a16="http://schemas.microsoft.com/office/drawing/2014/main" id="{D757B5A5-6051-FFCC-0340-6B2A2309AADC}"/>
-              </a:ext>
-            </a:extLst>
-          </p:cNvPr>
-          <p:cNvSpPr>
-            <a:spLocks noGrp="1"/>
-          </p:cNvSpPr>
-          <p:nvPr>
-            <p:ph type="title"/>
-          </p:nvPr>
-        </p:nvSpPr>
-        <p:spPr>
-          <a:xfrm>
-            <a:off x="341811" y="567600"/>
-            <a:ext cx="5009678" cy="706030"/>
-          </a:xfrm>
-        </p:spPr>
-        <p:txBody>
-          <a:bodyPr/>
-          <a:lstStyle/>
-          <a:p>
-            <a:r>
-              <a:rPr lang="de-DE" sz="3200" dirty="0"/>
-              <a:t>Visualisierung</a:t>
-            </a:r>
-            <a:br>
-              <a:rPr lang="de-DE" dirty="0"/>
-            </a:br>
-            <a:r>
-              <a:rPr lang="de-DE" sz="2400" dirty="0"/>
-              <a:t>Ansicht einer Position beider Channel</a:t>
-            </a:r>
-            <a:endParaRPr lang="de-DE" dirty="0"/>
-          </a:p>
-        </p:txBody>
-      </p:sp>
-      <p:sp>
-        <p:nvSpPr>
-          <p:cNvPr id="2" name="Datumsplatzhalter 1">
-            <a:extLst>
-              <a:ext uri="{FF2B5EF4-FFF2-40B4-BE49-F238E27FC236}">
-                <a16:creationId xmlns:a16="http://schemas.microsoft.com/office/drawing/2014/main" id="{CE98F3A7-4DE5-447B-E8E2-5AA1A1F5B2C0}"/>
-              </a:ext>
-            </a:extLst>
-          </p:cNvPr>
-          <p:cNvSpPr>
-            <a:spLocks noGrp="1"/>
-          </p:cNvSpPr>
-          <p:nvPr>
-            <p:ph type="dt" sz="half" idx="12"/>
-          </p:nvPr>
-        </p:nvSpPr>
-        <p:spPr/>
-        <p:txBody>
-          <a:bodyPr/>
-          <a:lstStyle/>
-          <a:p>
-            <a:r>
-              <a:rPr lang="de-DE"/>
-              <a:t>25.06.2026</a:t>
-            </a:r>
-          </a:p>
-        </p:txBody>
-      </p:sp>
-      <p:sp>
-        <p:nvSpPr>
-          <p:cNvPr id="6" name="Fußzeilenplatzhalter 5">
-            <a:extLst>
-              <a:ext uri="{FF2B5EF4-FFF2-40B4-BE49-F238E27FC236}">
-                <a16:creationId xmlns:a16="http://schemas.microsoft.com/office/drawing/2014/main" id="{8AEF4587-D828-91EE-B123-AA8CB8A7F45A}"/>
-              </a:ext>
-            </a:extLst>
-          </p:cNvPr>
-          <p:cNvSpPr>
-            <a:spLocks noGrp="1"/>
-          </p:cNvSpPr>
-          <p:nvPr>
-            <p:ph type="ftr" sz="quarter" idx="11"/>
-          </p:nvPr>
-        </p:nvSpPr>
-        <p:spPr/>
-        <p:txBody>
-          <a:bodyPr/>
-          <a:lstStyle/>
-          <a:p>
-            <a:r>
-              <a:rPr lang="de-DE"/>
-              <a:t>Materialdiagnostik: Task 2</a:t>
-            </a:r>
-            <a:endParaRPr lang="de-DE" dirty="0"/>
+          <p:cNvPr id="14" name="Foliennummernplatzhalter 13">
+            <a:extLst>
+              <a:ext uri="{FF2B5EF4-FFF2-40B4-BE49-F238E27FC236}">
+                <a16:creationId xmlns:a16="http://schemas.microsoft.com/office/drawing/2014/main" id="{F5D0BE65-A2B4-48E0-17C8-1A3BCBA53756}"/>
+              </a:ext>
+            </a:extLst>
+          </p:cNvPr>
+          <p:cNvSpPr>
+            <a:spLocks noGrp="1"/>
+          </p:cNvSpPr>
+          <p:nvPr>
+            <p:ph type="sldNum" sz="quarter" idx="10"/>
+          </p:nvPr>
+        </p:nvSpPr>
+        <p:spPr/>
+        <p:txBody>
+          <a:bodyPr/>
+          <a:lstStyle/>
+          <a:p>
+            <a:fld id="{80B4FCE6-DC73-4135-BC56-1F242D45A84C}" type="slidenum">
+              <a:rPr lang="de-DE" smtClean="0"/>
+              <a:t>10</a:t>
+            </a:fld>
+            <a:endParaRPr lang="de-DE"/>
           </a:p>
         </p:txBody>
       </p:sp>
@@ -5512,97 +5977,6 @@
       </p:grpSpPr>
       <p:sp>
         <p:nvSpPr>
-          <p:cNvPr id="4" name="Foliennummernplatzhalter 3">
-            <a:extLst>
-              <a:ext uri="{FF2B5EF4-FFF2-40B4-BE49-F238E27FC236}">
-                <a16:creationId xmlns:a16="http://schemas.microsoft.com/office/drawing/2014/main" id="{18FD1414-35C8-6A57-2C40-93B37217933C}"/>
-              </a:ext>
-            </a:extLst>
-          </p:cNvPr>
-          <p:cNvSpPr>
-            <a:spLocks noGrp="1"/>
-          </p:cNvSpPr>
-          <p:nvPr>
-            <p:ph type="sldNum" sz="quarter" idx="10"/>
-          </p:nvPr>
-        </p:nvSpPr>
-        <p:spPr/>
-        <p:txBody>
-          <a:bodyPr/>
-          <a:lstStyle/>
-          <a:p>
-            <a:pPr>
-              <a:defRPr/>
-            </a:pPr>
-            <a:fld id="{A0424531-ACBB-43B0-9536-C2FB0D769E6C}" type="slidenum">
-              <a:rPr lang="de-DE" altLang="de-DE" smtClean="0"/>
-              <a:pPr>
-                <a:defRPr/>
-              </a:pPr>
-              <a:t>11</a:t>
-            </a:fld>
-            <a:endParaRPr lang="de-DE" altLang="de-DE" dirty="0"/>
-          </a:p>
-        </p:txBody>
-      </p:sp>
-      <p:pic>
-        <p:nvPicPr>
-          <p:cNvPr id="6" name="Inhaltsplatzhalter 5">
-            <a:extLst>
-              <a:ext uri="{FF2B5EF4-FFF2-40B4-BE49-F238E27FC236}">
-                <a16:creationId xmlns:a16="http://schemas.microsoft.com/office/drawing/2014/main" id="{BA3F2AA0-8383-B2C0-5137-84EFD29BE71B}"/>
-              </a:ext>
-            </a:extLst>
-          </p:cNvPr>
-          <p:cNvPicPr>
-            <a:picLocks noGrp="1" noChangeAspect="1"/>
-          </p:cNvPicPr>
-          <p:nvPr>
-            <p:ph sz="quarter" idx="13"/>
-          </p:nvPr>
-        </p:nvPicPr>
-        <p:blipFill rotWithShape="1">
-          <a:blip r:embed="rId3"/>
-          <a:srcRect t="33412" b="33339"/>
-          <a:stretch>
-            <a:fillRect/>
-          </a:stretch>
-        </p:blipFill>
-        <p:spPr bwMode="auto">
-          <a:xfrm>
-            <a:off x="343200" y="1360800"/>
-            <a:ext cx="11505600" cy="4929857"/>
-          </a:xfrm>
-          <a:prstGeom prst="rect">
-            <a:avLst/>
-          </a:prstGeom>
-          <a:noFill/>
-          <a:ln>
-            <a:noFill/>
-          </a:ln>
-          <a:extLst>
-            <a:ext uri="{909E8E84-426E-40DD-AFC4-6F175D3DCCD1}">
-              <a14:hiddenFill xmlns:a14="http://schemas.microsoft.com/office/drawing/2010/main">
-                <a:solidFill>
-                  <a:srgbClr val="FFFFFF"/>
-                </a:solidFill>
-              </a14:hiddenFill>
-            </a:ext>
-            <a:ext uri="{91240B29-F687-4F45-9708-019B960494DF}">
-              <a14:hiddenLine xmlns:a14="http://schemas.microsoft.com/office/drawing/2010/main" w="9525">
-                <a:solidFill>
-                  <a:srgbClr val="000000"/>
-                </a:solidFill>
-                <a:miter lim="800000"/>
-                <a:headEnd/>
-                <a:tailEnd/>
-              </a14:hiddenLine>
-            </a:ext>
-          </a:extLst>
-        </p:spPr>
-      </p:pic>
-      <p:sp>
-        <p:nvSpPr>
           <p:cNvPr id="2" name="Titel 1">
             <a:extLst>
               <a:ext uri="{FF2B5EF4-FFF2-40B4-BE49-F238E27FC236}">
@@ -5629,73 +6003,224 @@
           <a:p>
             <a:r>
               <a:rPr lang="de-DE" sz="3200" dirty="0"/>
-              <a:t>Visualisierung</a:t>
-            </a:r>
-            <a:br>
+              <a:t>Code-Überblick</a:t>
+            </a:r>
+          </a:p>
+        </p:txBody>
+      </p:sp>
+      <p:sp>
+        <p:nvSpPr>
+          <p:cNvPr id="3" name="Datumsplatzhalter 2">
+            <a:extLst>
+              <a:ext uri="{FF2B5EF4-FFF2-40B4-BE49-F238E27FC236}">
+                <a16:creationId xmlns:a16="http://schemas.microsoft.com/office/drawing/2014/main" id="{10DEE32E-D555-A5C0-5E56-51A5968FB217}"/>
+              </a:ext>
+            </a:extLst>
+          </p:cNvPr>
+          <p:cNvSpPr>
+            <a:spLocks noGrp="1"/>
+          </p:cNvSpPr>
+          <p:nvPr>
+            <p:ph type="dt" sz="half" idx="12"/>
+          </p:nvPr>
+        </p:nvSpPr>
+        <p:spPr/>
+        <p:txBody>
+          <a:bodyPr/>
+          <a:lstStyle/>
+          <a:p>
+            <a:r>
+              <a:rPr lang="de-DE"/>
+              <a:t>16.07.2026</a:t>
+            </a:r>
+          </a:p>
+        </p:txBody>
+      </p:sp>
+      <p:sp>
+        <p:nvSpPr>
+          <p:cNvPr id="5" name="Fußzeilenplatzhalter 4">
+            <a:extLst>
+              <a:ext uri="{FF2B5EF4-FFF2-40B4-BE49-F238E27FC236}">
+                <a16:creationId xmlns:a16="http://schemas.microsoft.com/office/drawing/2014/main" id="{769D6D17-25F8-CC0D-9807-336DAF75B7C5}"/>
+              </a:ext>
+            </a:extLst>
+          </p:cNvPr>
+          <p:cNvSpPr>
+            <a:spLocks noGrp="1"/>
+          </p:cNvSpPr>
+          <p:nvPr>
+            <p:ph type="ftr" sz="quarter" idx="11"/>
+          </p:nvPr>
+        </p:nvSpPr>
+        <p:spPr/>
+        <p:txBody>
+          <a:bodyPr/>
+          <a:lstStyle/>
+          <a:p>
+            <a:r>
+              <a:rPr lang="de-DE"/>
+              <a:t>Materialdiagnostik: Task 3</a:t>
+            </a:r>
+            <a:endParaRPr lang="de-DE" dirty="0"/>
+          </a:p>
+        </p:txBody>
+      </p:sp>
+      <p:sp>
+        <p:nvSpPr>
+          <p:cNvPr id="7" name="Inhaltsplatzhalter 6">
+            <a:extLst>
+              <a:ext uri="{FF2B5EF4-FFF2-40B4-BE49-F238E27FC236}">
+                <a16:creationId xmlns:a16="http://schemas.microsoft.com/office/drawing/2014/main" id="{D292BAE9-0055-7A55-987D-2D8376847BEA}"/>
+              </a:ext>
+            </a:extLst>
+          </p:cNvPr>
+          <p:cNvSpPr>
+            <a:spLocks noGrp="1"/>
+          </p:cNvSpPr>
+          <p:nvPr>
+            <p:ph sz="quarter" idx="13"/>
+          </p:nvPr>
+        </p:nvSpPr>
+        <p:spPr>
+          <a:xfrm>
+            <a:off x="341811" y="1696595"/>
+            <a:ext cx="11512052" cy="4395788"/>
+          </a:xfrm>
+        </p:spPr>
+        <p:txBody>
+          <a:bodyPr/>
+          <a:lstStyle/>
+          <a:p>
+            <a:pPr>
+              <a:buFont typeface="Arial" panose="020B0604020202020204" pitchFamily="34" charset="0"/>
+              <a:buChar char="•"/>
+            </a:pPr>
+            <a:r>
               <a:rPr lang="de-DE" dirty="0"/>
-            </a:br>
-            <a:r>
-              <a:rPr lang="de-DE" sz="2400" dirty="0"/>
-              <a:t>Unterschiedlich viele Messungen der Zahnräder</a:t>
-            </a:r>
+              <a:t>main.py: </a:t>
+            </a:r>
+          </a:p>
+          <a:p>
+            <a:pPr lvl="1">
+              <a:buFont typeface="Arial" panose="020B0604020202020204" pitchFamily="34" charset="0"/>
+              <a:buChar char="•"/>
+            </a:pPr>
+            <a:r>
+              <a:rPr lang="de-DE" dirty="0"/>
+              <a:t>steuert die komplette Pipeline</a:t>
+            </a:r>
+          </a:p>
+          <a:p>
+            <a:pPr>
+              <a:buFont typeface="Arial" panose="020B0604020202020204" pitchFamily="34" charset="0"/>
+              <a:buChar char="•"/>
+            </a:pPr>
+            <a:r>
+              <a:rPr lang="de-DE" dirty="0"/>
+              <a:t>dataframe_manager.py: </a:t>
+            </a:r>
+          </a:p>
+          <a:p>
+            <a:pPr lvl="1">
+              <a:buFont typeface="Arial" panose="020B0604020202020204" pitchFamily="34" charset="0"/>
+              <a:buChar char="•"/>
+            </a:pPr>
+            <a:r>
+              <a:rPr lang="de-DE" dirty="0"/>
+              <a:t>lädt WAV-Dateien und Metadaten</a:t>
+            </a:r>
+          </a:p>
+          <a:p>
+            <a:pPr>
+              <a:buFont typeface="Arial" panose="020B0604020202020204" pitchFamily="34" charset="0"/>
+              <a:buChar char="•"/>
+            </a:pPr>
+            <a:r>
+              <a:rPr lang="de-DE" dirty="0"/>
+              <a:t>split.py: </a:t>
+            </a:r>
+          </a:p>
+          <a:p>
+            <a:pPr lvl="1">
+              <a:buFont typeface="Arial" panose="020B0604020202020204" pitchFamily="34" charset="0"/>
+              <a:buChar char="•"/>
+            </a:pPr>
+            <a:r>
+              <a:rPr lang="de-DE" dirty="0"/>
+              <a:t>ordnet Rohsignale Train, Dev und Test zu</a:t>
+            </a:r>
+          </a:p>
+          <a:p>
+            <a:pPr>
+              <a:buFont typeface="Arial" panose="020B0604020202020204" pitchFamily="34" charset="0"/>
+              <a:buChar char="•"/>
+            </a:pPr>
+            <a:r>
+              <a:rPr lang="de-DE" dirty="0"/>
+              <a:t>extraction.py: </a:t>
+            </a:r>
+          </a:p>
+          <a:p>
+            <a:pPr lvl="1">
+              <a:buFont typeface="Arial" panose="020B0604020202020204" pitchFamily="34" charset="0"/>
+              <a:buChar char="•"/>
+            </a:pPr>
+            <a:r>
+              <a:rPr lang="de-DE" dirty="0"/>
+              <a:t>berechnet Signalmerkmale pro Datei</a:t>
+            </a:r>
+          </a:p>
+          <a:p>
+            <a:pPr>
+              <a:buFont typeface="Arial" panose="020B0604020202020204" pitchFamily="34" charset="0"/>
+              <a:buChar char="•"/>
+            </a:pPr>
+            <a:r>
+              <a:rPr lang="de-DE" dirty="0"/>
+              <a:t>model.py: </a:t>
+            </a:r>
+          </a:p>
+          <a:p>
+            <a:pPr lvl="1">
+              <a:buFont typeface="Arial" panose="020B0604020202020204" pitchFamily="34" charset="0"/>
+              <a:buChar char="•"/>
+            </a:pPr>
+            <a:r>
+              <a:rPr lang="de-DE" dirty="0"/>
+              <a:t>trainiert, optimiert und bewertet die MLP-Modelle</a:t>
+            </a:r>
+          </a:p>
+          <a:p>
             <a:endParaRPr lang="de-DE" dirty="0"/>
           </a:p>
         </p:txBody>
       </p:sp>
       <p:sp>
         <p:nvSpPr>
-          <p:cNvPr id="3" name="Datumsplatzhalter 2">
-            <a:extLst>
-              <a:ext uri="{FF2B5EF4-FFF2-40B4-BE49-F238E27FC236}">
-                <a16:creationId xmlns:a16="http://schemas.microsoft.com/office/drawing/2014/main" id="{10DEE32E-D555-A5C0-5E56-51A5968FB217}"/>
-              </a:ext>
-            </a:extLst>
-          </p:cNvPr>
-          <p:cNvSpPr>
-            <a:spLocks noGrp="1"/>
-          </p:cNvSpPr>
-          <p:nvPr>
-            <p:ph type="dt" sz="half" idx="12"/>
-          </p:nvPr>
-        </p:nvSpPr>
-        <p:spPr/>
-        <p:txBody>
-          <a:bodyPr/>
-          <a:lstStyle/>
-          <a:p>
-            <a:r>
-              <a:rPr lang="de-DE"/>
-              <a:t>25.06.2026</a:t>
-            </a:r>
-          </a:p>
-        </p:txBody>
-      </p:sp>
-      <p:sp>
-        <p:nvSpPr>
-          <p:cNvPr id="5" name="Fußzeilenplatzhalter 4">
-            <a:extLst>
-              <a:ext uri="{FF2B5EF4-FFF2-40B4-BE49-F238E27FC236}">
-                <a16:creationId xmlns:a16="http://schemas.microsoft.com/office/drawing/2014/main" id="{769D6D17-25F8-CC0D-9807-336DAF75B7C5}"/>
-              </a:ext>
-            </a:extLst>
-          </p:cNvPr>
-          <p:cNvSpPr>
-            <a:spLocks noGrp="1"/>
-          </p:cNvSpPr>
-          <p:nvPr>
-            <p:ph type="ftr" sz="quarter" idx="11"/>
-          </p:nvPr>
-        </p:nvSpPr>
-        <p:spPr/>
-        <p:txBody>
-          <a:bodyPr/>
-          <a:lstStyle/>
-          <a:p>
-            <a:r>
-              <a:rPr lang="de-DE"/>
-              <a:t>Materialdiagnostik: Task 2</a:t>
-            </a:r>
-            <a:endParaRPr lang="de-DE" dirty="0"/>
+          <p:cNvPr id="8" name="Foliennummernplatzhalter 7">
+            <a:extLst>
+              <a:ext uri="{FF2B5EF4-FFF2-40B4-BE49-F238E27FC236}">
+                <a16:creationId xmlns:a16="http://schemas.microsoft.com/office/drawing/2014/main" id="{2F72B419-304B-ACE9-A0CD-B2C1E713F427}"/>
+              </a:ext>
+            </a:extLst>
+          </p:cNvPr>
+          <p:cNvSpPr>
+            <a:spLocks noGrp="1"/>
+          </p:cNvSpPr>
+          <p:nvPr>
+            <p:ph type="sldNum" sz="quarter" idx="10"/>
+          </p:nvPr>
+        </p:nvSpPr>
+        <p:spPr/>
+        <p:txBody>
+          <a:bodyPr/>
+          <a:lstStyle/>
+          <a:p>
+            <a:fld id="{80B4FCE6-DC73-4135-BC56-1F242D45A84C}" type="slidenum">
+              <a:rPr lang="de-DE" smtClean="0"/>
+              <a:t>11</a:t>
+            </a:fld>
+            <a:endParaRPr lang="de-DE"/>
           </a:p>
         </p:txBody>
       </p:sp>
@@ -5737,18 +6262,212 @@
       </p:grpSpPr>
       <p:sp>
         <p:nvSpPr>
-          <p:cNvPr id="4" name="Foliennummernplatzhalter 3">
-            <a:extLst>
-              <a:ext uri="{FF2B5EF4-FFF2-40B4-BE49-F238E27FC236}">
-                <a16:creationId xmlns:a16="http://schemas.microsoft.com/office/drawing/2014/main" id="{A702F702-44A1-66E4-2B59-8E21067E4DCF}"/>
-              </a:ext>
-            </a:extLst>
-          </p:cNvPr>
-          <p:cNvSpPr>
-            <a:spLocks noGrp="1"/>
-          </p:cNvSpPr>
-          <p:nvPr>
-            <p:ph type="sldNum" sz="quarter" idx="10"/>
+          <p:cNvPr id="13" name="Rechteck: eine Ecke abgerundet 12">
+            <a:extLst>
+              <a:ext uri="{FF2B5EF4-FFF2-40B4-BE49-F238E27FC236}">
+                <a16:creationId xmlns:a16="http://schemas.microsoft.com/office/drawing/2014/main" id="{C084ADCD-CF21-F408-4472-3372DC76ABC1}"/>
+              </a:ext>
+            </a:extLst>
+          </p:cNvPr>
+          <p:cNvSpPr/>
+          <p:nvPr/>
+        </p:nvSpPr>
+        <p:spPr bwMode="auto">
+          <a:xfrm>
+            <a:off x="6459536" y="1740625"/>
+            <a:ext cx="750559" cy="704193"/>
+          </a:xfrm>
+          <a:prstGeom prst="round1Rect">
+            <a:avLst/>
+          </a:prstGeom>
+          <a:solidFill>
+            <a:schemeClr val="bg2">
+              <a:lumMod val="40000"/>
+              <a:lumOff val="60000"/>
+            </a:schemeClr>
+          </a:solidFill>
+          <a:ln w="9525" cap="flat" cmpd="sng" algn="ctr">
+            <a:noFill/>
+            <a:prstDash val="solid"/>
+            <a:round/>
+            <a:headEnd type="none" w="med" len="med"/>
+            <a:tailEnd type="none" w="med" len="med"/>
+          </a:ln>
+          <a:effectLst/>
+        </p:spPr>
+        <p:txBody>
+          <a:bodyPr vert="horz" wrap="square" lIns="91440" tIns="45720" rIns="91440" bIns="45720" numCol="1" rtlCol="0" anchor="t" anchorCtr="0" compatLnSpc="1">
+            <a:prstTxWarp prst="textNoShape">
+              <a:avLst/>
+            </a:prstTxWarp>
+          </a:bodyPr>
+          <a:lstStyle/>
+          <a:p>
+            <a:pPr marL="0" marR="0" indent="0" algn="l" defTabSz="914400" rtl="0" eaLnBrk="0" fontAlgn="base" latinLnBrk="0" hangingPunct="0">
+              <a:lnSpc>
+                <a:spcPct val="100000"/>
+              </a:lnSpc>
+              <a:spcBef>
+                <a:spcPct val="0"/>
+              </a:spcBef>
+              <a:spcAft>
+                <a:spcPct val="0"/>
+              </a:spcAft>
+              <a:buClrTx/>
+              <a:buSzTx/>
+              <a:buFontTx/>
+              <a:buNone/>
+              <a:tabLst/>
+            </a:pPr>
+            <a:r>
+              <a:rPr kumimoji="0" lang="de-DE" sz="1800" b="0" i="0" u="none" strike="noStrike" cap="none" normalizeH="0" baseline="0" dirty="0" err="1">
+                <a:ln>
+                  <a:noFill/>
+                </a:ln>
+                <a:solidFill>
+                  <a:schemeClr val="tx1"/>
+                </a:solidFill>
+                <a:effectLst/>
+                <a:latin typeface="Arial" pitchFamily="-109" charset="0"/>
+                <a:ea typeface="ヒラギノ角ゴ Pro W3" pitchFamily="-109" charset="-128"/>
+                <a:cs typeface="ヒラギノ角ゴ Pro W3" pitchFamily="-109" charset="-128"/>
+              </a:rPr>
+              <a:t>Ch</a:t>
+            </a:r>
+            <a:r>
+              <a:rPr kumimoji="0" lang="de-DE" sz="1800" b="0" i="0" u="none" strike="noStrike" cap="none" normalizeH="0" baseline="0" dirty="0">
+                <a:ln>
+                  <a:noFill/>
+                </a:ln>
+                <a:solidFill>
+                  <a:schemeClr val="tx1"/>
+                </a:solidFill>
+                <a:effectLst/>
+                <a:latin typeface="Arial" pitchFamily="-109" charset="0"/>
+                <a:ea typeface="ヒラギノ角ゴ Pro W3" pitchFamily="-109" charset="-128"/>
+                <a:cs typeface="ヒラギノ角ゴ Pro W3" pitchFamily="-109" charset="-128"/>
+              </a:rPr>
+              <a:t> 1</a:t>
+            </a:r>
+            <a:endParaRPr kumimoji="0" lang="de-DE" sz="2400" b="0" i="0" u="none" strike="noStrike" cap="none" normalizeH="0" baseline="0" dirty="0">
+              <a:ln>
+                <a:noFill/>
+              </a:ln>
+              <a:solidFill>
+                <a:schemeClr val="tx1"/>
+              </a:solidFill>
+              <a:effectLst/>
+              <a:latin typeface="Arial" pitchFamily="-109" charset="0"/>
+              <a:ea typeface="ヒラギノ角ゴ Pro W3" pitchFamily="-109" charset="-128"/>
+              <a:cs typeface="ヒラギノ角ゴ Pro W3" pitchFamily="-109" charset="-128"/>
+            </a:endParaRPr>
+          </a:p>
+        </p:txBody>
+      </p:sp>
+      <p:sp>
+        <p:nvSpPr>
+          <p:cNvPr id="2" name="Titel 1">
+            <a:extLst>
+              <a:ext uri="{FF2B5EF4-FFF2-40B4-BE49-F238E27FC236}">
+                <a16:creationId xmlns:a16="http://schemas.microsoft.com/office/drawing/2014/main" id="{10501F1A-FCB7-133D-6F5D-FABA9A2F000C}"/>
+              </a:ext>
+            </a:extLst>
+          </p:cNvPr>
+          <p:cNvSpPr>
+            <a:spLocks noGrp="1"/>
+          </p:cNvSpPr>
+          <p:nvPr>
+            <p:ph type="title"/>
+          </p:nvPr>
+        </p:nvSpPr>
+        <p:spPr/>
+        <p:txBody>
+          <a:bodyPr/>
+          <a:lstStyle/>
+          <a:p>
+            <a:r>
+              <a:rPr lang="de-DE" sz="3200" dirty="0"/>
+              <a:t>Loss </a:t>
+            </a:r>
+            <a:r>
+              <a:rPr lang="de-DE" sz="3200" dirty="0" err="1"/>
+              <a:t>Curves</a:t>
+            </a:r>
+            <a:endParaRPr lang="de-DE" dirty="0"/>
+          </a:p>
+        </p:txBody>
+      </p:sp>
+      <p:sp>
+        <p:nvSpPr>
+          <p:cNvPr id="5" name="Fußzeilenplatzhalter 4">
+            <a:extLst>
+              <a:ext uri="{FF2B5EF4-FFF2-40B4-BE49-F238E27FC236}">
+                <a16:creationId xmlns:a16="http://schemas.microsoft.com/office/drawing/2014/main" id="{B326B563-4C74-A0AC-BD19-B0D9D3AA03C6}"/>
+              </a:ext>
+            </a:extLst>
+          </p:cNvPr>
+          <p:cNvSpPr>
+            <a:spLocks noGrp="1"/>
+          </p:cNvSpPr>
+          <p:nvPr>
+            <p:ph type="ftr" sz="quarter" idx="11"/>
+          </p:nvPr>
+        </p:nvSpPr>
+        <p:spPr/>
+        <p:txBody>
+          <a:bodyPr/>
+          <a:lstStyle/>
+          <a:p>
+            <a:r>
+              <a:rPr lang="de-DE"/>
+              <a:t>Materialdiagnostik: Task 3</a:t>
+            </a:r>
+            <a:endParaRPr lang="de-DE" dirty="0"/>
+          </a:p>
+        </p:txBody>
+      </p:sp>
+      <p:sp>
+        <p:nvSpPr>
+          <p:cNvPr id="3" name="Datumsplatzhalter 2">
+            <a:extLst>
+              <a:ext uri="{FF2B5EF4-FFF2-40B4-BE49-F238E27FC236}">
+                <a16:creationId xmlns:a16="http://schemas.microsoft.com/office/drawing/2014/main" id="{A6F37E5F-3907-6F85-DAC7-339604EB1496}"/>
+              </a:ext>
+            </a:extLst>
+          </p:cNvPr>
+          <p:cNvSpPr>
+            <a:spLocks noGrp="1"/>
+          </p:cNvSpPr>
+          <p:nvPr>
+            <p:ph type="dt" sz="half" idx="12"/>
+          </p:nvPr>
+        </p:nvSpPr>
+        <p:spPr/>
+        <p:txBody>
+          <a:bodyPr/>
+          <a:lstStyle/>
+          <a:p>
+            <a:r>
+              <a:rPr lang="de-DE"/>
+              <a:t>16.07.2026</a:t>
+            </a:r>
+          </a:p>
+        </p:txBody>
+      </p:sp>
+      <p:sp>
+        <p:nvSpPr>
+          <p:cNvPr id="8" name="Inhaltsplatzhalter 7">
+            <a:extLst>
+              <a:ext uri="{FF2B5EF4-FFF2-40B4-BE49-F238E27FC236}">
+                <a16:creationId xmlns:a16="http://schemas.microsoft.com/office/drawing/2014/main" id="{9E321134-F1B0-51A0-36A7-EE8C324D145B}"/>
+              </a:ext>
+            </a:extLst>
+          </p:cNvPr>
+          <p:cNvSpPr>
+            <a:spLocks noGrp="1"/>
+          </p:cNvSpPr>
+          <p:nvPr>
+            <p:ph sz="quarter" idx="13"/>
           </p:nvPr>
         </p:nvSpPr>
         <p:spPr/>
@@ -5757,25 +6476,67 @@
           <a:lstStyle/>
           <a:p>
             <a:pPr>
-              <a:defRPr/>
+              <a:buFont typeface="Arial" panose="020B0604020202020204" pitchFamily="34" charset="0"/>
+              <a:buChar char="•"/>
             </a:pPr>
-            <a:fld id="{A0424531-ACBB-43B0-9536-C2FB0D769E6C}" type="slidenum">
-              <a:rPr lang="de-DE" altLang="de-DE" smtClean="0"/>
-              <a:pPr>
-                <a:defRPr/>
-              </a:pPr>
-              <a:t>12</a:t>
-            </a:fld>
-            <a:endParaRPr lang="de-DE" altLang="de-DE" dirty="0"/>
+            <a:r>
+              <a:rPr lang="de-DE" dirty="0"/>
+              <a:t>Loss misst den Fehler der Modellvorhersagen</a:t>
+            </a:r>
+          </a:p>
+          <a:p>
+            <a:pPr>
+              <a:buFont typeface="Arial" panose="020B0604020202020204" pitchFamily="34" charset="0"/>
+              <a:buChar char="•"/>
+            </a:pPr>
+            <a:r>
+              <a:rPr lang="de-DE" dirty="0"/>
+              <a:t>Sinkende Kurve zeigt: Modell lernt</a:t>
+            </a:r>
+          </a:p>
+          <a:p>
+            <a:pPr>
+              <a:buFont typeface="Arial" panose="020B0604020202020204" pitchFamily="34" charset="0"/>
+              <a:buChar char="•"/>
+            </a:pPr>
+            <a:r>
+              <a:rPr lang="de-DE" dirty="0"/>
+              <a:t>Stabiler Verlauf zeigt: Training konvergiert</a:t>
+            </a:r>
+          </a:p>
+          <a:p>
+            <a:pPr>
+              <a:buFont typeface="Arial" panose="020B0604020202020204" pitchFamily="34" charset="0"/>
+              <a:buChar char="•"/>
+            </a:pPr>
+            <a:r>
+              <a:rPr lang="de-DE" dirty="0"/>
+              <a:t>Niedriger Loss allein beweist keine Generalisierung</a:t>
+            </a:r>
+          </a:p>
+          <a:p>
+            <a:pPr>
+              <a:buFont typeface="Arial" panose="020B0604020202020204" pitchFamily="34" charset="0"/>
+              <a:buChar char="•"/>
+            </a:pPr>
+            <a:r>
+              <a:rPr lang="de-DE" dirty="0"/>
+              <a:t>Deshalb zusätzlich: Dev/Test-Metriken, ROC/AUC, Learning </a:t>
+            </a:r>
+            <a:r>
+              <a:rPr lang="de-DE" dirty="0" err="1"/>
+              <a:t>Curves</a:t>
+            </a:r>
+            <a:endParaRPr lang="de-DE" dirty="0"/>
           </a:p>
         </p:txBody>
       </p:sp>
       <p:pic>
         <p:nvPicPr>
-          <p:cNvPr id="6" name="Inhaltsplatzhalter 5">
-            <a:extLst>
-              <a:ext uri="{FF2B5EF4-FFF2-40B4-BE49-F238E27FC236}">
-                <a16:creationId xmlns:a16="http://schemas.microsoft.com/office/drawing/2014/main" id="{70C101CF-2A7E-EB74-1C4A-B189FAC9EDAF}"/>
+          <p:cNvPr id="11" name="Inhaltsplatzhalter 10">
+            <a:extLst>
+              <a:ext uri="{FF2B5EF4-FFF2-40B4-BE49-F238E27FC236}">
+                <a16:creationId xmlns:a16="http://schemas.microsoft.com/office/drawing/2014/main" id="{C29B9310-6F11-0E1E-D9E3-58059F9BE356}"/>
               </a:ext>
             </a:extLst>
           </p:cNvPr>
@@ -5783,143 +6544,184 @@
             <a:picLocks noGrp="1" noChangeAspect="1"/>
           </p:cNvPicPr>
           <p:nvPr>
-            <p:ph sz="quarter" idx="13"/>
+            <p:ph sz="quarter" idx="14"/>
           </p:nvPr>
         </p:nvPicPr>
-        <p:blipFill rotWithShape="1">
+        <p:blipFill>
           <a:blip r:embed="rId3"/>
-          <a:srcRect t="66831"/>
           <a:stretch>
             <a:fillRect/>
           </a:stretch>
         </p:blipFill>
-        <p:spPr bwMode="auto">
+        <p:spPr>
           <a:xfrm>
-            <a:off x="341809" y="1360800"/>
-            <a:ext cx="11505600" cy="4918008"/>
+            <a:off x="6459538" y="2092722"/>
+            <a:ext cx="5391150" cy="3369468"/>
           </a:xfrm>
           <a:prstGeom prst="rect">
             <a:avLst/>
           </a:prstGeom>
-          <a:noFill/>
-          <a:ln>
-            <a:noFill/>
-          </a:ln>
-          <a:extLst>
-            <a:ext uri="{909E8E84-426E-40DD-AFC4-6F175D3DCCD1}">
-              <a14:hiddenFill xmlns:a14="http://schemas.microsoft.com/office/drawing/2010/main">
-                <a:solidFill>
-                  <a:srgbClr val="FFFFFF"/>
-                </a:solidFill>
-              </a14:hiddenFill>
-            </a:ext>
-            <a:ext uri="{91240B29-F687-4F45-9708-019B960494DF}">
-              <a14:hiddenLine xmlns:a14="http://schemas.microsoft.com/office/drawing/2010/main" w="9525">
-                <a:solidFill>
-                  <a:srgbClr val="000000"/>
-                </a:solidFill>
-                <a:miter lim="800000"/>
-                <a:headEnd/>
-                <a:tailEnd/>
-              </a14:hiddenLine>
-            </a:ext>
-          </a:extLst>
         </p:spPr>
       </p:pic>
       <p:sp>
         <p:nvSpPr>
-          <p:cNvPr id="2" name="Titel 1">
-            <a:extLst>
-              <a:ext uri="{FF2B5EF4-FFF2-40B4-BE49-F238E27FC236}">
-                <a16:creationId xmlns:a16="http://schemas.microsoft.com/office/drawing/2014/main" id="{10501F1A-FCB7-133D-6F5D-FABA9A2F000C}"/>
-              </a:ext>
-            </a:extLst>
-          </p:cNvPr>
-          <p:cNvSpPr>
-            <a:spLocks noGrp="1"/>
-          </p:cNvSpPr>
-          <p:nvPr>
-            <p:ph type="title"/>
-          </p:nvPr>
-        </p:nvSpPr>
+          <p:cNvPr id="15" name="Rechteck: eine Ecke abgerundet 14">
+            <a:extLst>
+              <a:ext uri="{FF2B5EF4-FFF2-40B4-BE49-F238E27FC236}">
+                <a16:creationId xmlns:a16="http://schemas.microsoft.com/office/drawing/2014/main" id="{00B6B237-AAA7-0524-D844-6633D85D7E7C}"/>
+              </a:ext>
+            </a:extLst>
+          </p:cNvPr>
+          <p:cNvSpPr/>
+          <p:nvPr/>
+        </p:nvSpPr>
+        <p:spPr bwMode="auto">
+          <a:xfrm>
+            <a:off x="6459535" y="1740625"/>
+            <a:ext cx="750559" cy="704193"/>
+          </a:xfrm>
+          <a:prstGeom prst="round1Rect">
+            <a:avLst/>
+          </a:prstGeom>
+          <a:solidFill>
+            <a:schemeClr val="bg2">
+              <a:lumMod val="40000"/>
+              <a:lumOff val="60000"/>
+            </a:schemeClr>
+          </a:solidFill>
+          <a:ln w="9525" cap="flat" cmpd="sng" algn="ctr">
+            <a:noFill/>
+            <a:prstDash val="solid"/>
+            <a:round/>
+            <a:headEnd type="none" w="med" len="med"/>
+            <a:tailEnd type="none" w="med" len="med"/>
+          </a:ln>
+          <a:effectLst/>
+        </p:spPr>
+        <p:txBody>
+          <a:bodyPr vert="horz" wrap="square" lIns="91440" tIns="45720" rIns="91440" bIns="45720" numCol="1" rtlCol="0" anchor="t" anchorCtr="0" compatLnSpc="1">
+            <a:prstTxWarp prst="textNoShape">
+              <a:avLst/>
+            </a:prstTxWarp>
+          </a:bodyPr>
+          <a:lstStyle/>
+          <a:p>
+            <a:pPr marL="0" marR="0" indent="0" algn="l" defTabSz="914400" rtl="0" eaLnBrk="0" fontAlgn="base" latinLnBrk="0" hangingPunct="0">
+              <a:lnSpc>
+                <a:spcPct val="100000"/>
+              </a:lnSpc>
+              <a:spcBef>
+                <a:spcPct val="0"/>
+              </a:spcBef>
+              <a:spcAft>
+                <a:spcPct val="0"/>
+              </a:spcAft>
+              <a:buClrTx/>
+              <a:buSzTx/>
+              <a:buFontTx/>
+              <a:buNone/>
+              <a:tabLst/>
+            </a:pPr>
+            <a:r>
+              <a:rPr kumimoji="0" lang="de-DE" sz="1800" b="0" i="0" u="none" strike="noStrike" cap="none" normalizeH="0" baseline="0" dirty="0" err="1">
+                <a:ln>
+                  <a:noFill/>
+                </a:ln>
+                <a:solidFill>
+                  <a:schemeClr val="tx1"/>
+                </a:solidFill>
+                <a:effectLst/>
+                <a:latin typeface="Arial" pitchFamily="-109" charset="0"/>
+                <a:ea typeface="ヒラギノ角ゴ Pro W3" pitchFamily="-109" charset="-128"/>
+                <a:cs typeface="ヒラギノ角ゴ Pro W3" pitchFamily="-109" charset="-128"/>
+              </a:rPr>
+              <a:t>Ch</a:t>
+            </a:r>
+            <a:r>
+              <a:rPr kumimoji="0" lang="de-DE" sz="1800" b="0" i="0" u="none" strike="noStrike" cap="none" normalizeH="0" baseline="0" dirty="0">
+                <a:ln>
+                  <a:noFill/>
+                </a:ln>
+                <a:solidFill>
+                  <a:schemeClr val="tx1"/>
+                </a:solidFill>
+                <a:effectLst/>
+                <a:latin typeface="Arial" pitchFamily="-109" charset="0"/>
+                <a:ea typeface="ヒラギノ角ゴ Pro W3" pitchFamily="-109" charset="-128"/>
+                <a:cs typeface="ヒラギノ角ゴ Pro W3" pitchFamily="-109" charset="-128"/>
+              </a:rPr>
+              <a:t> 2</a:t>
+            </a:r>
+            <a:endParaRPr kumimoji="0" lang="de-DE" sz="2400" b="0" i="0" u="none" strike="noStrike" cap="none" normalizeH="0" baseline="0" dirty="0">
+              <a:ln>
+                <a:noFill/>
+              </a:ln>
+              <a:solidFill>
+                <a:schemeClr val="tx1"/>
+              </a:solidFill>
+              <a:effectLst/>
+              <a:latin typeface="Arial" pitchFamily="-109" charset="0"/>
+              <a:ea typeface="ヒラギノ角ゴ Pro W3" pitchFamily="-109" charset="-128"/>
+              <a:cs typeface="ヒラギノ角ゴ Pro W3" pitchFamily="-109" charset="-128"/>
+            </a:endParaRPr>
+          </a:p>
+        </p:txBody>
+      </p:sp>
+      <p:pic>
+        <p:nvPicPr>
+          <p:cNvPr id="12" name="Inhaltsplatzhalter 10">
+            <a:extLst>
+              <a:ext uri="{FF2B5EF4-FFF2-40B4-BE49-F238E27FC236}">
+                <a16:creationId xmlns:a16="http://schemas.microsoft.com/office/drawing/2014/main" id="{737B854A-413A-5164-83D6-D96C58A53D53}"/>
+              </a:ext>
+            </a:extLst>
+          </p:cNvPr>
+          <p:cNvPicPr>
+            <a:picLocks noChangeAspect="1"/>
+          </p:cNvPicPr>
+          <p:nvPr/>
+        </p:nvPicPr>
+        <p:blipFill>
+          <a:blip r:embed="rId4"/>
+          <a:srcRect/>
+          <a:stretch/>
+        </p:blipFill>
         <p:spPr>
           <a:xfrm>
-            <a:off x="341810" y="567600"/>
-            <a:ext cx="6306327" cy="706030"/>
+            <a:off x="6459538" y="2092721"/>
+            <a:ext cx="5391149" cy="3369468"/>
           </a:xfrm>
+          <a:prstGeom prst="rect">
+            <a:avLst/>
+          </a:prstGeom>
         </p:spPr>
-        <p:txBody>
-          <a:bodyPr/>
-          <a:lstStyle/>
-          <a:p>
-            <a:r>
-              <a:rPr lang="de-DE" sz="3200" dirty="0"/>
-              <a:t>Visualisierung</a:t>
-            </a:r>
-            <a:br>
-              <a:rPr lang="de-DE" dirty="0"/>
-            </a:br>
-            <a:r>
-              <a:rPr lang="de-DE" dirty="0"/>
-              <a:t>Durchschnitt-Methode</a:t>
-            </a:r>
-          </a:p>
-        </p:txBody>
-      </p:sp>
-      <p:sp>
-        <p:nvSpPr>
-          <p:cNvPr id="3" name="Datumsplatzhalter 2">
-            <a:extLst>
-              <a:ext uri="{FF2B5EF4-FFF2-40B4-BE49-F238E27FC236}">
-                <a16:creationId xmlns:a16="http://schemas.microsoft.com/office/drawing/2014/main" id="{A6F37E5F-3907-6F85-DAC7-339604EB1496}"/>
-              </a:ext>
-            </a:extLst>
-          </p:cNvPr>
-          <p:cNvSpPr>
-            <a:spLocks noGrp="1"/>
-          </p:cNvSpPr>
-          <p:nvPr>
-            <p:ph type="dt" sz="half" idx="12"/>
-          </p:nvPr>
-        </p:nvSpPr>
-        <p:spPr/>
-        <p:txBody>
-          <a:bodyPr/>
-          <a:lstStyle/>
-          <a:p>
-            <a:r>
-              <a:rPr lang="de-DE"/>
-              <a:t>25.06.2026</a:t>
-            </a:r>
-          </a:p>
-        </p:txBody>
-      </p:sp>
-      <p:sp>
-        <p:nvSpPr>
-          <p:cNvPr id="5" name="Fußzeilenplatzhalter 4">
-            <a:extLst>
-              <a:ext uri="{FF2B5EF4-FFF2-40B4-BE49-F238E27FC236}">
-                <a16:creationId xmlns:a16="http://schemas.microsoft.com/office/drawing/2014/main" id="{B326B563-4C74-A0AC-BD19-B0D9D3AA03C6}"/>
-              </a:ext>
-            </a:extLst>
-          </p:cNvPr>
-          <p:cNvSpPr>
-            <a:spLocks noGrp="1"/>
-          </p:cNvSpPr>
-          <p:nvPr>
-            <p:ph type="ftr" sz="quarter" idx="11"/>
-          </p:nvPr>
-        </p:nvSpPr>
-        <p:spPr/>
-        <p:txBody>
-          <a:bodyPr/>
-          <a:lstStyle/>
-          <a:p>
-            <a:r>
-              <a:rPr lang="de-DE"/>
-              <a:t>Materialdiagnostik: Task 2</a:t>
-            </a:r>
-            <a:endParaRPr lang="de-DE" dirty="0"/>
+      </p:pic>
+      <p:sp>
+        <p:nvSpPr>
+          <p:cNvPr id="16" name="Foliennummernplatzhalter 15">
+            <a:extLst>
+              <a:ext uri="{FF2B5EF4-FFF2-40B4-BE49-F238E27FC236}">
+                <a16:creationId xmlns:a16="http://schemas.microsoft.com/office/drawing/2014/main" id="{13BD7E67-86CA-510A-9CDB-07DDA5F2BEF9}"/>
+              </a:ext>
+            </a:extLst>
+          </p:cNvPr>
+          <p:cNvSpPr>
+            <a:spLocks noGrp="1"/>
+          </p:cNvSpPr>
+          <p:nvPr>
+            <p:ph type="sldNum" sz="quarter" idx="10"/>
+          </p:nvPr>
+        </p:nvSpPr>
+        <p:spPr/>
+        <p:txBody>
+          <a:bodyPr/>
+          <a:lstStyle/>
+          <a:p>
+            <a:fld id="{80B4FCE6-DC73-4135-BC56-1F242D45A84C}" type="slidenum">
+              <a:rPr lang="de-DE" smtClean="0"/>
+              <a:t>12</a:t>
+            </a:fld>
+            <a:endParaRPr lang="de-DE"/>
           </a:p>
         </p:txBody>
       </p:sp>
@@ -5933,10 +6735,718 @@
   <p:clrMapOvr>
     <a:masterClrMapping/>
   </p:clrMapOvr>
+  <p:timing>
+    <p:tnLst>
+      <p:par>
+        <p:cTn id="1" dur="indefinite" restart="never" nodeType="tmRoot">
+          <p:childTnLst>
+            <p:seq concurrent="1" nextAc="seek">
+              <p:cTn id="2" dur="indefinite" nodeType="mainSeq">
+                <p:childTnLst>
+                  <p:par>
+                    <p:cTn id="3" fill="hold">
+                      <p:stCondLst>
+                        <p:cond delay="indefinite"/>
+                      </p:stCondLst>
+                      <p:childTnLst>
+                        <p:par>
+                          <p:cTn id="4" fill="hold">
+                            <p:stCondLst>
+                              <p:cond delay="0"/>
+                            </p:stCondLst>
+                            <p:childTnLst>
+                              <p:par>
+                                <p:cTn id="5" presetID="1" presetClass="entr" presetSubtype="0" fill="hold" nodeType="clickEffect">
+                                  <p:stCondLst>
+                                    <p:cond delay="0"/>
+                                  </p:stCondLst>
+                                  <p:childTnLst>
+                                    <p:set>
+                                      <p:cBhvr>
+                                        <p:cTn id="6" dur="1" fill="hold">
+                                          <p:stCondLst>
+                                            <p:cond delay="0"/>
+                                          </p:stCondLst>
+                                        </p:cTn>
+                                        <p:tgtEl>
+                                          <p:spTgt spid="12"/>
+                                        </p:tgtEl>
+                                        <p:attrNameLst>
+                                          <p:attrName>style.visibility</p:attrName>
+                                        </p:attrNameLst>
+                                      </p:cBhvr>
+                                      <p:to>
+                                        <p:strVal val="visible"/>
+                                      </p:to>
+                                    </p:set>
+                                  </p:childTnLst>
+                                </p:cTn>
+                              </p:par>
+                              <p:par>
+                                <p:cTn id="7" presetID="1" presetClass="entr" presetSubtype="0" fill="hold" grpId="0" nodeType="withEffect">
+                                  <p:stCondLst>
+                                    <p:cond delay="0"/>
+                                  </p:stCondLst>
+                                  <p:childTnLst>
+                                    <p:set>
+                                      <p:cBhvr>
+                                        <p:cTn id="8" dur="1" fill="hold">
+                                          <p:stCondLst>
+                                            <p:cond delay="0"/>
+                                          </p:stCondLst>
+                                        </p:cTn>
+                                        <p:tgtEl>
+                                          <p:spTgt spid="15"/>
+                                        </p:tgtEl>
+                                        <p:attrNameLst>
+                                          <p:attrName>style.visibility</p:attrName>
+                                        </p:attrNameLst>
+                                      </p:cBhvr>
+                                      <p:to>
+                                        <p:strVal val="visible"/>
+                                      </p:to>
+                                    </p:set>
+                                  </p:childTnLst>
+                                </p:cTn>
+                              </p:par>
+                            </p:childTnLst>
+                          </p:cTn>
+                        </p:par>
+                      </p:childTnLst>
+                    </p:cTn>
+                  </p:par>
+                </p:childTnLst>
+              </p:cTn>
+              <p:prevCondLst>
+                <p:cond evt="onPrev" delay="0">
+                  <p:tgtEl>
+                    <p:sldTgt/>
+                  </p:tgtEl>
+                </p:cond>
+              </p:prevCondLst>
+              <p:nextCondLst>
+                <p:cond evt="onNext" delay="0">
+                  <p:tgtEl>
+                    <p:sldTgt/>
+                  </p:tgtEl>
+                </p:cond>
+              </p:nextCondLst>
+            </p:seq>
+          </p:childTnLst>
+        </p:cTn>
+      </p:par>
+    </p:tnLst>
+    <p:bldLst>
+      <p:bldP spid="15" grpId="0" animBg="1"/>
+    </p:bldLst>
+  </p:timing>
 </p:sld>
 </file>
 
 <file path=ppt/slides/slide13.xml><?xml version="1.0" encoding="utf-8"?>
+<p:sld xmlns:a="http://schemas.openxmlformats.org/drawingml/2006/main" xmlns:r="http://schemas.openxmlformats.org/officeDocument/2006/relationships" xmlns:p="http://schemas.openxmlformats.org/presentationml/2006/main">
+  <p:cSld>
+    <p:spTree>
+      <p:nvGrpSpPr>
+        <p:cNvPr id="1" name="">
+          <a:extLst>
+            <a:ext uri="{FF2B5EF4-FFF2-40B4-BE49-F238E27FC236}">
+              <a16:creationId xmlns:a16="http://schemas.microsoft.com/office/drawing/2014/main" id="{36E692F4-4654-12E9-0B81-867C770DCA55}"/>
+            </a:ext>
+          </a:extLst>
+        </p:cNvPr>
+        <p:cNvGrpSpPr/>
+        <p:nvPr/>
+      </p:nvGrpSpPr>
+      <p:grpSpPr>
+        <a:xfrm>
+          <a:off x="0" y="0"/>
+          <a:ext cx="0" cy="0"/>
+          <a:chOff x="0" y="0"/>
+          <a:chExt cx="0" cy="0"/>
+        </a:xfrm>
+      </p:grpSpPr>
+      <p:sp>
+        <p:nvSpPr>
+          <p:cNvPr id="13" name="Rechteck: eine Ecke abgerundet 12">
+            <a:extLst>
+              <a:ext uri="{FF2B5EF4-FFF2-40B4-BE49-F238E27FC236}">
+                <a16:creationId xmlns:a16="http://schemas.microsoft.com/office/drawing/2014/main" id="{D05955E5-D0B7-9962-B4D8-6BCD6AE466DA}"/>
+              </a:ext>
+            </a:extLst>
+          </p:cNvPr>
+          <p:cNvSpPr/>
+          <p:nvPr/>
+        </p:nvSpPr>
+        <p:spPr bwMode="auto">
+          <a:xfrm>
+            <a:off x="6459536" y="1740625"/>
+            <a:ext cx="750559" cy="704193"/>
+          </a:xfrm>
+          <a:prstGeom prst="round1Rect">
+            <a:avLst/>
+          </a:prstGeom>
+          <a:solidFill>
+            <a:schemeClr val="bg2">
+              <a:lumMod val="40000"/>
+              <a:lumOff val="60000"/>
+            </a:schemeClr>
+          </a:solidFill>
+          <a:ln w="9525" cap="flat" cmpd="sng" algn="ctr">
+            <a:noFill/>
+            <a:prstDash val="solid"/>
+            <a:round/>
+            <a:headEnd type="none" w="med" len="med"/>
+            <a:tailEnd type="none" w="med" len="med"/>
+          </a:ln>
+          <a:effectLst/>
+        </p:spPr>
+        <p:txBody>
+          <a:bodyPr vert="horz" wrap="square" lIns="91440" tIns="45720" rIns="91440" bIns="45720" numCol="1" rtlCol="0" anchor="t" anchorCtr="0" compatLnSpc="1">
+            <a:prstTxWarp prst="textNoShape">
+              <a:avLst/>
+            </a:prstTxWarp>
+          </a:bodyPr>
+          <a:lstStyle/>
+          <a:p>
+            <a:pPr marL="0" marR="0" indent="0" algn="l" defTabSz="914400" rtl="0" eaLnBrk="0" fontAlgn="base" latinLnBrk="0" hangingPunct="0">
+              <a:lnSpc>
+                <a:spcPct val="100000"/>
+              </a:lnSpc>
+              <a:spcBef>
+                <a:spcPct val="0"/>
+              </a:spcBef>
+              <a:spcAft>
+                <a:spcPct val="0"/>
+              </a:spcAft>
+              <a:buClrTx/>
+              <a:buSzTx/>
+              <a:buFontTx/>
+              <a:buNone/>
+              <a:tabLst/>
+            </a:pPr>
+            <a:r>
+              <a:rPr kumimoji="0" lang="de-DE" sz="1800" b="0" i="0" u="none" strike="noStrike" cap="none" normalizeH="0" baseline="0" dirty="0" err="1">
+                <a:ln>
+                  <a:noFill/>
+                </a:ln>
+                <a:solidFill>
+                  <a:schemeClr val="tx1"/>
+                </a:solidFill>
+                <a:effectLst/>
+                <a:latin typeface="Arial" pitchFamily="-109" charset="0"/>
+                <a:ea typeface="ヒラギノ角ゴ Pro W3" pitchFamily="-109" charset="-128"/>
+                <a:cs typeface="ヒラギノ角ゴ Pro W3" pitchFamily="-109" charset="-128"/>
+              </a:rPr>
+              <a:t>Ch</a:t>
+            </a:r>
+            <a:r>
+              <a:rPr kumimoji="0" lang="de-DE" sz="1800" b="0" i="0" u="none" strike="noStrike" cap="none" normalizeH="0" baseline="0" dirty="0">
+                <a:ln>
+                  <a:noFill/>
+                </a:ln>
+                <a:solidFill>
+                  <a:schemeClr val="tx1"/>
+                </a:solidFill>
+                <a:effectLst/>
+                <a:latin typeface="Arial" pitchFamily="-109" charset="0"/>
+                <a:ea typeface="ヒラギノ角ゴ Pro W3" pitchFamily="-109" charset="-128"/>
+                <a:cs typeface="ヒラギノ角ゴ Pro W3" pitchFamily="-109" charset="-128"/>
+              </a:rPr>
+              <a:t> 1</a:t>
+            </a:r>
+            <a:endParaRPr kumimoji="0" lang="de-DE" sz="2400" b="0" i="0" u="none" strike="noStrike" cap="none" normalizeH="0" baseline="0" dirty="0">
+              <a:ln>
+                <a:noFill/>
+              </a:ln>
+              <a:solidFill>
+                <a:schemeClr val="tx1"/>
+              </a:solidFill>
+              <a:effectLst/>
+              <a:latin typeface="Arial" pitchFamily="-109" charset="0"/>
+              <a:ea typeface="ヒラギノ角ゴ Pro W3" pitchFamily="-109" charset="-128"/>
+              <a:cs typeface="ヒラギノ角ゴ Pro W3" pitchFamily="-109" charset="-128"/>
+            </a:endParaRPr>
+          </a:p>
+        </p:txBody>
+      </p:sp>
+      <p:sp>
+        <p:nvSpPr>
+          <p:cNvPr id="2" name="Titel 1">
+            <a:extLst>
+              <a:ext uri="{FF2B5EF4-FFF2-40B4-BE49-F238E27FC236}">
+                <a16:creationId xmlns:a16="http://schemas.microsoft.com/office/drawing/2014/main" id="{6EABEA5B-6080-FBE9-6DA6-10DB7E45DD2D}"/>
+              </a:ext>
+            </a:extLst>
+          </p:cNvPr>
+          <p:cNvSpPr>
+            <a:spLocks noGrp="1"/>
+          </p:cNvSpPr>
+          <p:nvPr>
+            <p:ph type="title"/>
+          </p:nvPr>
+        </p:nvSpPr>
+        <p:spPr/>
+        <p:txBody>
+          <a:bodyPr/>
+          <a:lstStyle/>
+          <a:p>
+            <a:r>
+              <a:rPr lang="de-DE" sz="3200" dirty="0"/>
+              <a:t>Learning </a:t>
+            </a:r>
+            <a:r>
+              <a:rPr lang="de-DE" sz="3200" dirty="0" err="1"/>
+              <a:t>Curves</a:t>
+            </a:r>
+            <a:endParaRPr lang="de-DE" dirty="0"/>
+          </a:p>
+        </p:txBody>
+      </p:sp>
+      <p:sp>
+        <p:nvSpPr>
+          <p:cNvPr id="5" name="Fußzeilenplatzhalter 4">
+            <a:extLst>
+              <a:ext uri="{FF2B5EF4-FFF2-40B4-BE49-F238E27FC236}">
+                <a16:creationId xmlns:a16="http://schemas.microsoft.com/office/drawing/2014/main" id="{C21741FB-233F-9B62-BDE5-78CC9DF1F194}"/>
+              </a:ext>
+            </a:extLst>
+          </p:cNvPr>
+          <p:cNvSpPr>
+            <a:spLocks noGrp="1"/>
+          </p:cNvSpPr>
+          <p:nvPr>
+            <p:ph type="ftr" sz="quarter" idx="11"/>
+          </p:nvPr>
+        </p:nvSpPr>
+        <p:spPr/>
+        <p:txBody>
+          <a:bodyPr/>
+          <a:lstStyle/>
+          <a:p>
+            <a:r>
+              <a:rPr lang="de-DE"/>
+              <a:t>Materialdiagnostik: Task 3</a:t>
+            </a:r>
+            <a:endParaRPr lang="de-DE" dirty="0"/>
+          </a:p>
+        </p:txBody>
+      </p:sp>
+      <p:sp>
+        <p:nvSpPr>
+          <p:cNvPr id="3" name="Datumsplatzhalter 2">
+            <a:extLst>
+              <a:ext uri="{FF2B5EF4-FFF2-40B4-BE49-F238E27FC236}">
+                <a16:creationId xmlns:a16="http://schemas.microsoft.com/office/drawing/2014/main" id="{0F533060-8BC0-E7A8-47E6-F36742E1101E}"/>
+              </a:ext>
+            </a:extLst>
+          </p:cNvPr>
+          <p:cNvSpPr>
+            <a:spLocks noGrp="1"/>
+          </p:cNvSpPr>
+          <p:nvPr>
+            <p:ph type="dt" sz="half" idx="12"/>
+          </p:nvPr>
+        </p:nvSpPr>
+        <p:spPr/>
+        <p:txBody>
+          <a:bodyPr/>
+          <a:lstStyle/>
+          <a:p>
+            <a:r>
+              <a:rPr lang="de-DE"/>
+              <a:t>16.07.2026</a:t>
+            </a:r>
+          </a:p>
+        </p:txBody>
+      </p:sp>
+      <p:sp>
+        <p:nvSpPr>
+          <p:cNvPr id="8" name="Inhaltsplatzhalter 7">
+            <a:extLst>
+              <a:ext uri="{FF2B5EF4-FFF2-40B4-BE49-F238E27FC236}">
+                <a16:creationId xmlns:a16="http://schemas.microsoft.com/office/drawing/2014/main" id="{66F2D5E8-ACE1-A626-1A4C-3BEEED0736C2}"/>
+              </a:ext>
+            </a:extLst>
+          </p:cNvPr>
+          <p:cNvSpPr>
+            <a:spLocks noGrp="1"/>
+          </p:cNvSpPr>
+          <p:nvPr>
+            <p:ph sz="quarter" idx="13"/>
+          </p:nvPr>
+        </p:nvSpPr>
+        <p:spPr/>
+        <p:txBody>
+          <a:bodyPr/>
+          <a:lstStyle/>
+          <a:p>
+            <a:pPr>
+              <a:buFont typeface="Arial" panose="020B0604020202020204" pitchFamily="34" charset="0"/>
+              <a:buChar char="•"/>
+            </a:pPr>
+            <a:r>
+              <a:rPr lang="de-DE" dirty="0"/>
+              <a:t>Train- und Dev-Score pro Trainingsmenge</a:t>
+            </a:r>
+          </a:p>
+          <a:p>
+            <a:pPr>
+              <a:buFont typeface="Arial" panose="020B0604020202020204" pitchFamily="34" charset="0"/>
+              <a:buChar char="•"/>
+            </a:pPr>
+            <a:r>
+              <a:rPr lang="de-DE" dirty="0"/>
+              <a:t>Kurven zeigen Datenbedarf des Modells</a:t>
+            </a:r>
+          </a:p>
+          <a:p>
+            <a:pPr>
+              <a:buFont typeface="Arial" panose="020B0604020202020204" pitchFamily="34" charset="0"/>
+              <a:buChar char="•"/>
+            </a:pPr>
+            <a:r>
+              <a:rPr lang="de-DE" dirty="0"/>
+              <a:t>Bereits kleine Trainingsmenge trennt fast perfekt</a:t>
+            </a:r>
+          </a:p>
+          <a:p>
+            <a:pPr>
+              <a:buFont typeface="Arial" panose="020B0604020202020204" pitchFamily="34" charset="0"/>
+              <a:buChar char="•"/>
+            </a:pPr>
+            <a:r>
+              <a:rPr lang="de-DE" dirty="0"/>
+              <a:t>Ch1 erreicht früh perfekte Dev-Werte</a:t>
+            </a:r>
+          </a:p>
+          <a:p>
+            <a:pPr>
+              <a:buFont typeface="Arial" panose="020B0604020202020204" pitchFamily="34" charset="0"/>
+              <a:buChar char="•"/>
+            </a:pPr>
+            <a:r>
+              <a:rPr lang="de-DE" dirty="0"/>
+              <a:t>Ch2 braucht im aktuellen Split die volle Trainingsmenge für perfekte Dev-Werte</a:t>
+            </a:r>
+          </a:p>
+          <a:p>
+            <a:endParaRPr lang="de-DE" dirty="0"/>
+          </a:p>
+        </p:txBody>
+      </p:sp>
+      <p:pic>
+        <p:nvPicPr>
+          <p:cNvPr id="11" name="Inhaltsplatzhalter 10">
+            <a:extLst>
+              <a:ext uri="{FF2B5EF4-FFF2-40B4-BE49-F238E27FC236}">
+                <a16:creationId xmlns:a16="http://schemas.microsoft.com/office/drawing/2014/main" id="{4DF0D70F-DBE3-307B-70EE-0B255331894E}"/>
+              </a:ext>
+            </a:extLst>
+          </p:cNvPr>
+          <p:cNvPicPr>
+            <a:picLocks noGrp="1" noChangeAspect="1"/>
+          </p:cNvPicPr>
+          <p:nvPr>
+            <p:ph sz="quarter" idx="14"/>
+          </p:nvPr>
+        </p:nvPicPr>
+        <p:blipFill>
+          <a:blip r:embed="rId3"/>
+          <a:srcRect/>
+          <a:stretch/>
+        </p:blipFill>
+        <p:spPr>
+          <a:xfrm>
+            <a:off x="6459538" y="2092722"/>
+            <a:ext cx="5391150" cy="3369468"/>
+          </a:xfrm>
+          <a:prstGeom prst="rect">
+            <a:avLst/>
+          </a:prstGeom>
+        </p:spPr>
+      </p:pic>
+      <p:sp>
+        <p:nvSpPr>
+          <p:cNvPr id="15" name="Rechteck: eine Ecke abgerundet 14">
+            <a:extLst>
+              <a:ext uri="{FF2B5EF4-FFF2-40B4-BE49-F238E27FC236}">
+                <a16:creationId xmlns:a16="http://schemas.microsoft.com/office/drawing/2014/main" id="{221FC070-FA1A-089D-1456-55000A5089FD}"/>
+              </a:ext>
+            </a:extLst>
+          </p:cNvPr>
+          <p:cNvSpPr/>
+          <p:nvPr/>
+        </p:nvSpPr>
+        <p:spPr bwMode="auto">
+          <a:xfrm>
+            <a:off x="6459535" y="1740625"/>
+            <a:ext cx="750559" cy="704193"/>
+          </a:xfrm>
+          <a:prstGeom prst="round1Rect">
+            <a:avLst/>
+          </a:prstGeom>
+          <a:solidFill>
+            <a:schemeClr val="bg2">
+              <a:lumMod val="40000"/>
+              <a:lumOff val="60000"/>
+            </a:schemeClr>
+          </a:solidFill>
+          <a:ln w="9525" cap="flat" cmpd="sng" algn="ctr">
+            <a:noFill/>
+            <a:prstDash val="solid"/>
+            <a:round/>
+            <a:headEnd type="none" w="med" len="med"/>
+            <a:tailEnd type="none" w="med" len="med"/>
+          </a:ln>
+          <a:effectLst/>
+        </p:spPr>
+        <p:txBody>
+          <a:bodyPr vert="horz" wrap="square" lIns="91440" tIns="45720" rIns="91440" bIns="45720" numCol="1" rtlCol="0" anchor="t" anchorCtr="0" compatLnSpc="1">
+            <a:prstTxWarp prst="textNoShape">
+              <a:avLst/>
+            </a:prstTxWarp>
+          </a:bodyPr>
+          <a:lstStyle/>
+          <a:p>
+            <a:pPr marL="0" marR="0" indent="0" algn="l" defTabSz="914400" rtl="0" eaLnBrk="0" fontAlgn="base" latinLnBrk="0" hangingPunct="0">
+              <a:lnSpc>
+                <a:spcPct val="100000"/>
+              </a:lnSpc>
+              <a:spcBef>
+                <a:spcPct val="0"/>
+              </a:spcBef>
+              <a:spcAft>
+                <a:spcPct val="0"/>
+              </a:spcAft>
+              <a:buClrTx/>
+              <a:buSzTx/>
+              <a:buFontTx/>
+              <a:buNone/>
+              <a:tabLst/>
+            </a:pPr>
+            <a:r>
+              <a:rPr kumimoji="0" lang="de-DE" sz="1800" b="0" i="0" u="none" strike="noStrike" cap="none" normalizeH="0" baseline="0" dirty="0" err="1">
+                <a:ln>
+                  <a:noFill/>
+                </a:ln>
+                <a:solidFill>
+                  <a:schemeClr val="tx1"/>
+                </a:solidFill>
+                <a:effectLst/>
+                <a:latin typeface="Arial" pitchFamily="-109" charset="0"/>
+                <a:ea typeface="ヒラギノ角ゴ Pro W3" pitchFamily="-109" charset="-128"/>
+                <a:cs typeface="ヒラギノ角ゴ Pro W3" pitchFamily="-109" charset="-128"/>
+              </a:rPr>
+              <a:t>Ch</a:t>
+            </a:r>
+            <a:r>
+              <a:rPr kumimoji="0" lang="de-DE" sz="1800" b="0" i="0" u="none" strike="noStrike" cap="none" normalizeH="0" baseline="0" dirty="0">
+                <a:ln>
+                  <a:noFill/>
+                </a:ln>
+                <a:solidFill>
+                  <a:schemeClr val="tx1"/>
+                </a:solidFill>
+                <a:effectLst/>
+                <a:latin typeface="Arial" pitchFamily="-109" charset="0"/>
+                <a:ea typeface="ヒラギノ角ゴ Pro W3" pitchFamily="-109" charset="-128"/>
+                <a:cs typeface="ヒラギノ角ゴ Pro W3" pitchFamily="-109" charset="-128"/>
+              </a:rPr>
+              <a:t> 2</a:t>
+            </a:r>
+            <a:endParaRPr kumimoji="0" lang="de-DE" sz="2400" b="0" i="0" u="none" strike="noStrike" cap="none" normalizeH="0" baseline="0" dirty="0">
+              <a:ln>
+                <a:noFill/>
+              </a:ln>
+              <a:solidFill>
+                <a:schemeClr val="tx1"/>
+              </a:solidFill>
+              <a:effectLst/>
+              <a:latin typeface="Arial" pitchFamily="-109" charset="0"/>
+              <a:ea typeface="ヒラギノ角ゴ Pro W3" pitchFamily="-109" charset="-128"/>
+              <a:cs typeface="ヒラギノ角ゴ Pro W3" pitchFamily="-109" charset="-128"/>
+            </a:endParaRPr>
+          </a:p>
+        </p:txBody>
+      </p:sp>
+      <p:pic>
+        <p:nvPicPr>
+          <p:cNvPr id="12" name="Inhaltsplatzhalter 10">
+            <a:extLst>
+              <a:ext uri="{FF2B5EF4-FFF2-40B4-BE49-F238E27FC236}">
+                <a16:creationId xmlns:a16="http://schemas.microsoft.com/office/drawing/2014/main" id="{B661D436-2233-506D-7A2F-E10C843CD71E}"/>
+              </a:ext>
+            </a:extLst>
+          </p:cNvPr>
+          <p:cNvPicPr>
+            <a:picLocks noChangeAspect="1"/>
+          </p:cNvPicPr>
+          <p:nvPr/>
+        </p:nvPicPr>
+        <p:blipFill>
+          <a:blip r:embed="rId4"/>
+          <a:srcRect/>
+          <a:stretch/>
+        </p:blipFill>
+        <p:spPr>
+          <a:xfrm>
+            <a:off x="6459538" y="2092721"/>
+            <a:ext cx="5391149" cy="3369467"/>
+          </a:xfrm>
+          <a:prstGeom prst="rect">
+            <a:avLst/>
+          </a:prstGeom>
+        </p:spPr>
+      </p:pic>
+      <p:sp>
+        <p:nvSpPr>
+          <p:cNvPr id="6" name="Foliennummernplatzhalter 5">
+            <a:extLst>
+              <a:ext uri="{FF2B5EF4-FFF2-40B4-BE49-F238E27FC236}">
+                <a16:creationId xmlns:a16="http://schemas.microsoft.com/office/drawing/2014/main" id="{FDDD861D-7BC1-A08C-170C-81699AAD47C7}"/>
+              </a:ext>
+            </a:extLst>
+          </p:cNvPr>
+          <p:cNvSpPr>
+            <a:spLocks noGrp="1"/>
+          </p:cNvSpPr>
+          <p:nvPr>
+            <p:ph type="sldNum" sz="quarter" idx="10"/>
+          </p:nvPr>
+        </p:nvSpPr>
+        <p:spPr/>
+        <p:txBody>
+          <a:bodyPr/>
+          <a:lstStyle/>
+          <a:p>
+            <a:fld id="{80B4FCE6-DC73-4135-BC56-1F242D45A84C}" type="slidenum">
+              <a:rPr lang="de-DE" smtClean="0"/>
+              <a:t>13</a:t>
+            </a:fld>
+            <a:endParaRPr lang="de-DE"/>
+          </a:p>
+        </p:txBody>
+      </p:sp>
+    </p:spTree>
+    <p:extLst>
+      <p:ext uri="{BB962C8B-B14F-4D97-AF65-F5344CB8AC3E}">
+        <p14:creationId xmlns:p14="http://schemas.microsoft.com/office/powerpoint/2010/main" val="3382246788"/>
+      </p:ext>
+    </p:extLst>
+  </p:cSld>
+  <p:clrMapOvr>
+    <a:masterClrMapping/>
+  </p:clrMapOvr>
+  <p:timing>
+    <p:tnLst>
+      <p:par>
+        <p:cTn id="1" dur="indefinite" restart="never" nodeType="tmRoot">
+          <p:childTnLst>
+            <p:seq concurrent="1" nextAc="seek">
+              <p:cTn id="2" dur="indefinite" nodeType="mainSeq">
+                <p:childTnLst>
+                  <p:par>
+                    <p:cTn id="3" fill="hold">
+                      <p:stCondLst>
+                        <p:cond delay="indefinite"/>
+                      </p:stCondLst>
+                      <p:childTnLst>
+                        <p:par>
+                          <p:cTn id="4" fill="hold">
+                            <p:stCondLst>
+                              <p:cond delay="0"/>
+                            </p:stCondLst>
+                            <p:childTnLst>
+                              <p:par>
+                                <p:cTn id="5" presetID="1" presetClass="entr" presetSubtype="0" fill="hold" nodeType="clickEffect">
+                                  <p:stCondLst>
+                                    <p:cond delay="0"/>
+                                  </p:stCondLst>
+                                  <p:childTnLst>
+                                    <p:set>
+                                      <p:cBhvr>
+                                        <p:cTn id="6" dur="1" fill="hold">
+                                          <p:stCondLst>
+                                            <p:cond delay="0"/>
+                                          </p:stCondLst>
+                                        </p:cTn>
+                                        <p:tgtEl>
+                                          <p:spTgt spid="12"/>
+                                        </p:tgtEl>
+                                        <p:attrNameLst>
+                                          <p:attrName>style.visibility</p:attrName>
+                                        </p:attrNameLst>
+                                      </p:cBhvr>
+                                      <p:to>
+                                        <p:strVal val="visible"/>
+                                      </p:to>
+                                    </p:set>
+                                  </p:childTnLst>
+                                </p:cTn>
+                              </p:par>
+                              <p:par>
+                                <p:cTn id="7" presetID="1" presetClass="entr" presetSubtype="0" fill="hold" grpId="0" nodeType="withEffect">
+                                  <p:stCondLst>
+                                    <p:cond delay="0"/>
+                                  </p:stCondLst>
+                                  <p:childTnLst>
+                                    <p:set>
+                                      <p:cBhvr>
+                                        <p:cTn id="8" dur="1" fill="hold">
+                                          <p:stCondLst>
+                                            <p:cond delay="0"/>
+                                          </p:stCondLst>
+                                        </p:cTn>
+                                        <p:tgtEl>
+                                          <p:spTgt spid="15"/>
+                                        </p:tgtEl>
+                                        <p:attrNameLst>
+                                          <p:attrName>style.visibility</p:attrName>
+                                        </p:attrNameLst>
+                                      </p:cBhvr>
+                                      <p:to>
+                                        <p:strVal val="visible"/>
+                                      </p:to>
+                                    </p:set>
+                                  </p:childTnLst>
+                                </p:cTn>
+                              </p:par>
+                            </p:childTnLst>
+                          </p:cTn>
+                        </p:par>
+                      </p:childTnLst>
+                    </p:cTn>
+                  </p:par>
+                </p:childTnLst>
+              </p:cTn>
+              <p:prevCondLst>
+                <p:cond evt="onPrev" delay="0">
+                  <p:tgtEl>
+                    <p:sldTgt/>
+                  </p:tgtEl>
+                </p:cond>
+              </p:prevCondLst>
+              <p:nextCondLst>
+                <p:cond evt="onNext" delay="0">
+                  <p:tgtEl>
+                    <p:sldTgt/>
+                  </p:tgtEl>
+                </p:cond>
+              </p:nextCondLst>
+            </p:seq>
+          </p:childTnLst>
+        </p:cTn>
+      </p:par>
+    </p:tnLst>
+    <p:bldLst>
+      <p:bldP spid="15" grpId="0" animBg="1"/>
+    </p:bldLst>
+  </p:timing>
+</p:sld>
+</file>
+
+<file path=ppt/slides/slide14.xml><?xml version="1.0" encoding="utf-8"?>
 <p:sld xmlns:a="http://schemas.openxmlformats.org/drawingml/2006/main" xmlns:r="http://schemas.openxmlformats.org/officeDocument/2006/relationships" xmlns:p="http://schemas.openxmlformats.org/presentationml/2006/main">
   <p:cSld>
     <p:spTree>
@@ -5961,41 +7471,6 @@
       </p:grpSpPr>
       <p:sp>
         <p:nvSpPr>
-          <p:cNvPr id="4" name="Foliennummernplatzhalter 3">
-            <a:extLst>
-              <a:ext uri="{FF2B5EF4-FFF2-40B4-BE49-F238E27FC236}">
-                <a16:creationId xmlns:a16="http://schemas.microsoft.com/office/drawing/2014/main" id="{A159F460-EDFE-F390-52E2-C60A9F313BDA}"/>
-              </a:ext>
-            </a:extLst>
-          </p:cNvPr>
-          <p:cNvSpPr>
-            <a:spLocks noGrp="1"/>
-          </p:cNvSpPr>
-          <p:nvPr>
-            <p:ph type="sldNum" sz="quarter" idx="10"/>
-          </p:nvPr>
-        </p:nvSpPr>
-        <p:spPr/>
-        <p:txBody>
-          <a:bodyPr/>
-          <a:lstStyle/>
-          <a:p>
-            <a:pPr>
-              <a:defRPr/>
-            </a:pPr>
-            <a:fld id="{A0424531-ACBB-43B0-9536-C2FB0D769E6C}" type="slidenum">
-              <a:rPr lang="de-DE" altLang="de-DE" smtClean="0"/>
-              <a:pPr>
-                <a:defRPr/>
-              </a:pPr>
-              <a:t>13</a:t>
-            </a:fld>
-            <a:endParaRPr lang="de-DE" altLang="de-DE" dirty="0"/>
-          </a:p>
-        </p:txBody>
-      </p:sp>
-      <p:sp>
-        <p:nvSpPr>
           <p:cNvPr id="2" name="Titel 1">
             <a:extLst>
               <a:ext uri="{FF2B5EF4-FFF2-40B4-BE49-F238E27FC236}">
@@ -6013,7 +7488,7 @@
         <p:spPr>
           <a:xfrm>
             <a:off x="341811" y="567600"/>
-            <a:ext cx="4844786" cy="706030"/>
+            <a:ext cx="5753662" cy="706030"/>
           </a:xfrm>
         </p:spPr>
         <p:txBody>
@@ -6022,52 +7497,160 @@
           <a:p>
             <a:r>
               <a:rPr lang="de-DE" sz="3200" dirty="0"/>
-              <a:t>Visualisierung</a:t>
-            </a:r>
-            <a:br>
+              <a:t>Entscheidungsgrenze im Training</a:t>
+            </a:r>
+            <a:endParaRPr lang="de-DE" dirty="0"/>
+          </a:p>
+        </p:txBody>
+      </p:sp>
+      <p:sp>
+        <p:nvSpPr>
+          <p:cNvPr id="7" name="Fußzeilenplatzhalter 6">
+            <a:extLst>
+              <a:ext uri="{FF2B5EF4-FFF2-40B4-BE49-F238E27FC236}">
+                <a16:creationId xmlns:a16="http://schemas.microsoft.com/office/drawing/2014/main" id="{577BF275-4CD1-7013-A879-C0A89D49357B}"/>
+              </a:ext>
+            </a:extLst>
+          </p:cNvPr>
+          <p:cNvSpPr>
+            <a:spLocks noGrp="1"/>
+          </p:cNvSpPr>
+          <p:nvPr>
+            <p:ph type="ftr" sz="quarter" idx="11"/>
+          </p:nvPr>
+        </p:nvSpPr>
+        <p:spPr/>
+        <p:txBody>
+          <a:bodyPr/>
+          <a:lstStyle/>
+          <a:p>
+            <a:r>
+              <a:rPr lang="de-DE"/>
+              <a:t>Materialdiagnostik: Task 3</a:t>
+            </a:r>
+            <a:endParaRPr lang="de-DE" dirty="0"/>
+          </a:p>
+        </p:txBody>
+      </p:sp>
+      <p:sp>
+        <p:nvSpPr>
+          <p:cNvPr id="6" name="Datumsplatzhalter 5">
+            <a:extLst>
+              <a:ext uri="{FF2B5EF4-FFF2-40B4-BE49-F238E27FC236}">
+                <a16:creationId xmlns:a16="http://schemas.microsoft.com/office/drawing/2014/main" id="{71B4C461-0198-1068-BC96-763CE6D3F62D}"/>
+              </a:ext>
+            </a:extLst>
+          </p:cNvPr>
+          <p:cNvSpPr>
+            <a:spLocks noGrp="1"/>
+          </p:cNvSpPr>
+          <p:nvPr>
+            <p:ph type="dt" sz="half" idx="12"/>
+          </p:nvPr>
+        </p:nvSpPr>
+        <p:spPr/>
+        <p:txBody>
+          <a:bodyPr/>
+          <a:lstStyle/>
+          <a:p>
+            <a:r>
+              <a:rPr lang="de-DE"/>
+              <a:t>16.07.2026</a:t>
+            </a:r>
+          </a:p>
+        </p:txBody>
+      </p:sp>
+      <p:sp>
+        <p:nvSpPr>
+          <p:cNvPr id="3" name="Inhaltsplatzhalter 2">
+            <a:extLst>
+              <a:ext uri="{FF2B5EF4-FFF2-40B4-BE49-F238E27FC236}">
+                <a16:creationId xmlns:a16="http://schemas.microsoft.com/office/drawing/2014/main" id="{E2941D31-2190-EAE9-0CC8-F35EF0683372}"/>
+              </a:ext>
+            </a:extLst>
+          </p:cNvPr>
+          <p:cNvSpPr>
+            <a:spLocks noGrp="1"/>
+          </p:cNvSpPr>
+          <p:nvPr>
+            <p:ph sz="quarter" idx="13"/>
+          </p:nvPr>
+        </p:nvSpPr>
+        <p:spPr/>
+        <p:txBody>
+          <a:bodyPr/>
+          <a:lstStyle/>
+          <a:p>
+            <a:pPr>
+              <a:buFont typeface="Arial" panose="020B0604020202020204" pitchFamily="34" charset="0"/>
+              <a:buChar char="•"/>
+            </a:pPr>
+            <a:r>
               <a:rPr lang="de-DE" dirty="0"/>
-            </a:br>
-            <a:r>
-              <a:rPr lang="de-DE" sz="2400" dirty="0"/>
-              <a:t>Ausgewählte „</a:t>
-            </a:r>
-            <a:r>
-              <a:rPr lang="de-DE" sz="2400" dirty="0" err="1"/>
-              <a:t>mID</a:t>
-            </a:r>
-            <a:r>
-              <a:rPr lang="de-DE" sz="2400" dirty="0"/>
-              <a:t>“ für Z01 und Z04</a:t>
-            </a:r>
+              <a:t>Punkte: Trainingsdaten in 2D-PCA-Projektion</a:t>
+            </a:r>
+          </a:p>
+          <a:p>
+            <a:pPr>
+              <a:buFont typeface="Arial" panose="020B0604020202020204" pitchFamily="34" charset="0"/>
+              <a:buChar char="•"/>
+            </a:pPr>
+            <a:r>
+              <a:rPr lang="de-DE" dirty="0"/>
+              <a:t>Linie: lineare Entscheidungsgrenze in der PCA-Ebene</a:t>
+            </a:r>
+          </a:p>
+          <a:p>
+            <a:pPr>
+              <a:buFont typeface="Arial" panose="020B0604020202020204" pitchFamily="34" charset="0"/>
+              <a:buChar char="•"/>
+            </a:pPr>
+            <a:r>
+              <a:rPr lang="de-DE" dirty="0"/>
+              <a:t>Rot: beschädigt `0`</a:t>
+            </a:r>
+          </a:p>
+          <a:p>
+            <a:pPr>
+              <a:buFont typeface="Arial" panose="020B0604020202020204" pitchFamily="34" charset="0"/>
+              <a:buChar char="•"/>
+            </a:pPr>
+            <a:r>
+              <a:rPr lang="de-DE" dirty="0"/>
+              <a:t>Blau: gut `1`</a:t>
+            </a:r>
+          </a:p>
+          <a:p>
             <a:endParaRPr lang="de-DE" dirty="0"/>
           </a:p>
         </p:txBody>
       </p:sp>
       <p:pic>
         <p:nvPicPr>
-          <p:cNvPr id="5" name="Grafik 4">
-            <a:extLst>
-              <a:ext uri="{FF2B5EF4-FFF2-40B4-BE49-F238E27FC236}">
-                <a16:creationId xmlns:a16="http://schemas.microsoft.com/office/drawing/2014/main" id="{E031110A-4272-FAC2-BA3D-2894E70F2763}"/>
+          <p:cNvPr id="10" name="Inhaltsplatzhalter 9">
+            <a:extLst>
+              <a:ext uri="{FF2B5EF4-FFF2-40B4-BE49-F238E27FC236}">
+                <a16:creationId xmlns:a16="http://schemas.microsoft.com/office/drawing/2014/main" id="{D4CDC262-EB45-F7AD-7318-38B1E600D84C}"/>
               </a:ext>
             </a:extLst>
           </p:cNvPr>
           <p:cNvPicPr>
-            <a:picLocks noChangeAspect="1"/>
+            <a:picLocks noGrp="1" noChangeAspect="1"/>
           </p:cNvPicPr>
-          <p:nvPr/>
+          <p:nvPr>
+            <p:ph sz="quarter" idx="14"/>
+          </p:nvPr>
         </p:nvPicPr>
         <p:blipFill>
           <a:blip r:embed="rId3"/>
-          <a:srcRect t="-36" b="75054"/>
           <a:stretch>
             <a:fillRect/>
           </a:stretch>
         </p:blipFill>
         <p:spPr>
           <a:xfrm>
-            <a:off x="341810" y="1360799"/>
-            <a:ext cx="11505600" cy="5122398"/>
+            <a:off x="6095473" y="1755774"/>
+            <a:ext cx="5755215" cy="4316411"/>
           </a:xfrm>
           <a:prstGeom prst="rect">
             <a:avLst/>
@@ -6076,58 +7659,30 @@
       </p:pic>
       <p:sp>
         <p:nvSpPr>
-          <p:cNvPr id="6" name="Datumsplatzhalter 5">
-            <a:extLst>
-              <a:ext uri="{FF2B5EF4-FFF2-40B4-BE49-F238E27FC236}">
-                <a16:creationId xmlns:a16="http://schemas.microsoft.com/office/drawing/2014/main" id="{71B4C461-0198-1068-BC96-763CE6D3F62D}"/>
-              </a:ext>
-            </a:extLst>
-          </p:cNvPr>
-          <p:cNvSpPr>
-            <a:spLocks noGrp="1"/>
-          </p:cNvSpPr>
-          <p:nvPr>
-            <p:ph type="dt" sz="half" idx="12"/>
-          </p:nvPr>
-        </p:nvSpPr>
-        <p:spPr/>
-        <p:txBody>
-          <a:bodyPr/>
-          <a:lstStyle/>
-          <a:p>
-            <a:r>
-              <a:rPr lang="de-DE"/>
-              <a:t>25.06.2026</a:t>
-            </a:r>
-          </a:p>
-        </p:txBody>
-      </p:sp>
-      <p:sp>
-        <p:nvSpPr>
-          <p:cNvPr id="7" name="Fußzeilenplatzhalter 6">
-            <a:extLst>
-              <a:ext uri="{FF2B5EF4-FFF2-40B4-BE49-F238E27FC236}">
-                <a16:creationId xmlns:a16="http://schemas.microsoft.com/office/drawing/2014/main" id="{577BF275-4CD1-7013-A879-C0A89D49357B}"/>
-              </a:ext>
-            </a:extLst>
-          </p:cNvPr>
-          <p:cNvSpPr>
-            <a:spLocks noGrp="1"/>
-          </p:cNvSpPr>
-          <p:nvPr>
-            <p:ph type="ftr" sz="quarter" idx="11"/>
-          </p:nvPr>
-        </p:nvSpPr>
-        <p:spPr/>
-        <p:txBody>
-          <a:bodyPr/>
-          <a:lstStyle/>
-          <a:p>
-            <a:r>
-              <a:rPr lang="de-DE"/>
-              <a:t>Materialdiagnostik: Task 2</a:t>
-            </a:r>
-            <a:endParaRPr lang="de-DE" dirty="0"/>
+          <p:cNvPr id="11" name="Foliennummernplatzhalter 10">
+            <a:extLst>
+              <a:ext uri="{FF2B5EF4-FFF2-40B4-BE49-F238E27FC236}">
+                <a16:creationId xmlns:a16="http://schemas.microsoft.com/office/drawing/2014/main" id="{58E06D0E-653E-42A5-34F5-C3CC178A4CE6}"/>
+              </a:ext>
+            </a:extLst>
+          </p:cNvPr>
+          <p:cNvSpPr>
+            <a:spLocks noGrp="1"/>
+          </p:cNvSpPr>
+          <p:nvPr>
+            <p:ph type="sldNum" sz="quarter" idx="10"/>
+          </p:nvPr>
+        </p:nvSpPr>
+        <p:spPr/>
+        <p:txBody>
+          <a:bodyPr/>
+          <a:lstStyle/>
+          <a:p>
+            <a:fld id="{80B4FCE6-DC73-4135-BC56-1F242D45A84C}" type="slidenum">
+              <a:rPr lang="de-DE" smtClean="0"/>
+              <a:t>14</a:t>
+            </a:fld>
+            <a:endParaRPr lang="de-DE"/>
           </a:p>
         </p:txBody>
       </p:sp>
@@ -6144,7 +7699,259 @@
 </p:sld>
 </file>
 
-<file path=ppt/slides/slide14.xml><?xml version="1.0" encoding="utf-8"?>
+<file path=ppt/slides/slide15.xml><?xml version="1.0" encoding="utf-8"?>
+<p:sld xmlns:a="http://schemas.openxmlformats.org/drawingml/2006/main" xmlns:r="http://schemas.openxmlformats.org/officeDocument/2006/relationships" xmlns:p="http://schemas.openxmlformats.org/presentationml/2006/main">
+  <p:cSld>
+    <p:spTree>
+      <p:nvGrpSpPr>
+        <p:cNvPr id="1" name="">
+          <a:extLst>
+            <a:ext uri="{FF2B5EF4-FFF2-40B4-BE49-F238E27FC236}">
+              <a16:creationId xmlns:a16="http://schemas.microsoft.com/office/drawing/2014/main" id="{34E937EF-8FA5-3B82-EE02-E696CA86C502}"/>
+            </a:ext>
+          </a:extLst>
+        </p:cNvPr>
+        <p:cNvGrpSpPr/>
+        <p:nvPr/>
+      </p:nvGrpSpPr>
+      <p:grpSpPr>
+        <a:xfrm>
+          <a:off x="0" y="0"/>
+          <a:ext cx="0" cy="0"/>
+          <a:chOff x="0" y="0"/>
+          <a:chExt cx="0" cy="0"/>
+        </a:xfrm>
+      </p:grpSpPr>
+      <p:sp>
+        <p:nvSpPr>
+          <p:cNvPr id="2" name="Titel 1">
+            <a:extLst>
+              <a:ext uri="{FF2B5EF4-FFF2-40B4-BE49-F238E27FC236}">
+                <a16:creationId xmlns:a16="http://schemas.microsoft.com/office/drawing/2014/main" id="{2E8ED65B-A4A9-8253-D3F5-86AF9FABE744}"/>
+              </a:ext>
+            </a:extLst>
+          </p:cNvPr>
+          <p:cNvSpPr>
+            <a:spLocks noGrp="1"/>
+          </p:cNvSpPr>
+          <p:nvPr>
+            <p:ph type="title"/>
+          </p:nvPr>
+        </p:nvSpPr>
+        <p:spPr>
+          <a:xfrm>
+            <a:off x="341811" y="567600"/>
+            <a:ext cx="5753662" cy="706030"/>
+          </a:xfrm>
+        </p:spPr>
+        <p:txBody>
+          <a:bodyPr/>
+          <a:lstStyle/>
+          <a:p>
+            <a:r>
+              <a:rPr lang="de-DE" sz="3200" dirty="0"/>
+              <a:t>Entscheidungsgrenze im Training</a:t>
+            </a:r>
+            <a:endParaRPr lang="de-DE" dirty="0"/>
+          </a:p>
+        </p:txBody>
+      </p:sp>
+      <p:sp>
+        <p:nvSpPr>
+          <p:cNvPr id="7" name="Fußzeilenplatzhalter 6">
+            <a:extLst>
+              <a:ext uri="{FF2B5EF4-FFF2-40B4-BE49-F238E27FC236}">
+                <a16:creationId xmlns:a16="http://schemas.microsoft.com/office/drawing/2014/main" id="{B92395F9-CFA2-195F-9385-397DB9FE5811}"/>
+              </a:ext>
+            </a:extLst>
+          </p:cNvPr>
+          <p:cNvSpPr>
+            <a:spLocks noGrp="1"/>
+          </p:cNvSpPr>
+          <p:nvPr>
+            <p:ph type="ftr" sz="quarter" idx="11"/>
+          </p:nvPr>
+        </p:nvSpPr>
+        <p:spPr/>
+        <p:txBody>
+          <a:bodyPr/>
+          <a:lstStyle/>
+          <a:p>
+            <a:r>
+              <a:rPr lang="de-DE"/>
+              <a:t>Materialdiagnostik: Task 3</a:t>
+            </a:r>
+            <a:endParaRPr lang="de-DE" dirty="0"/>
+          </a:p>
+        </p:txBody>
+      </p:sp>
+      <p:sp>
+        <p:nvSpPr>
+          <p:cNvPr id="6" name="Datumsplatzhalter 5">
+            <a:extLst>
+              <a:ext uri="{FF2B5EF4-FFF2-40B4-BE49-F238E27FC236}">
+                <a16:creationId xmlns:a16="http://schemas.microsoft.com/office/drawing/2014/main" id="{1847D22D-9F17-A821-E459-143396AD6852}"/>
+              </a:ext>
+            </a:extLst>
+          </p:cNvPr>
+          <p:cNvSpPr>
+            <a:spLocks noGrp="1"/>
+          </p:cNvSpPr>
+          <p:nvPr>
+            <p:ph type="dt" sz="half" idx="12"/>
+          </p:nvPr>
+        </p:nvSpPr>
+        <p:spPr/>
+        <p:txBody>
+          <a:bodyPr/>
+          <a:lstStyle/>
+          <a:p>
+            <a:r>
+              <a:rPr lang="de-DE"/>
+              <a:t>16.07.2026</a:t>
+            </a:r>
+          </a:p>
+        </p:txBody>
+      </p:sp>
+      <p:sp>
+        <p:nvSpPr>
+          <p:cNvPr id="3" name="Inhaltsplatzhalter 2">
+            <a:extLst>
+              <a:ext uri="{FF2B5EF4-FFF2-40B4-BE49-F238E27FC236}">
+                <a16:creationId xmlns:a16="http://schemas.microsoft.com/office/drawing/2014/main" id="{471E2137-723A-08A3-959D-6D24A2077FF4}"/>
+              </a:ext>
+            </a:extLst>
+          </p:cNvPr>
+          <p:cNvSpPr>
+            <a:spLocks noGrp="1"/>
+          </p:cNvSpPr>
+          <p:nvPr>
+            <p:ph sz="quarter" idx="13"/>
+          </p:nvPr>
+        </p:nvSpPr>
+        <p:spPr/>
+        <p:txBody>
+          <a:bodyPr/>
+          <a:lstStyle/>
+          <a:p>
+            <a:pPr>
+              <a:buFont typeface="Arial" panose="020B0604020202020204" pitchFamily="34" charset="0"/>
+              <a:buChar char="•"/>
+            </a:pPr>
+            <a:r>
+              <a:rPr lang="de-DE" dirty="0"/>
+              <a:t>Punkte: Trainingsdaten in 2D-PCA-Projektion</a:t>
+            </a:r>
+          </a:p>
+          <a:p>
+            <a:pPr>
+              <a:buFont typeface="Arial" panose="020B0604020202020204" pitchFamily="34" charset="0"/>
+              <a:buChar char="•"/>
+            </a:pPr>
+            <a:r>
+              <a:rPr lang="de-DE" dirty="0"/>
+              <a:t>Linie: lineare Entscheidungsgrenze in der PCA-Ebene</a:t>
+            </a:r>
+          </a:p>
+          <a:p>
+            <a:pPr>
+              <a:buFont typeface="Arial" panose="020B0604020202020204" pitchFamily="34" charset="0"/>
+              <a:buChar char="•"/>
+            </a:pPr>
+            <a:r>
+              <a:rPr lang="de-DE" dirty="0"/>
+              <a:t>Rot: beschädigt `0`</a:t>
+            </a:r>
+          </a:p>
+          <a:p>
+            <a:pPr>
+              <a:buFont typeface="Arial" panose="020B0604020202020204" pitchFamily="34" charset="0"/>
+              <a:buChar char="•"/>
+            </a:pPr>
+            <a:r>
+              <a:rPr lang="de-DE" dirty="0"/>
+              <a:t>Blau: gut `1`</a:t>
+            </a:r>
+          </a:p>
+          <a:p>
+            <a:endParaRPr lang="de-DE" dirty="0"/>
+          </a:p>
+        </p:txBody>
+      </p:sp>
+      <p:pic>
+        <p:nvPicPr>
+          <p:cNvPr id="10" name="Inhaltsplatzhalter 9">
+            <a:extLst>
+              <a:ext uri="{FF2B5EF4-FFF2-40B4-BE49-F238E27FC236}">
+                <a16:creationId xmlns:a16="http://schemas.microsoft.com/office/drawing/2014/main" id="{D7DFFD06-9975-6A88-DD50-841259834DAE}"/>
+              </a:ext>
+            </a:extLst>
+          </p:cNvPr>
+          <p:cNvPicPr>
+            <a:picLocks noGrp="1" noChangeAspect="1"/>
+          </p:cNvPicPr>
+          <p:nvPr>
+            <p:ph sz="quarter" idx="14"/>
+          </p:nvPr>
+        </p:nvPicPr>
+        <p:blipFill>
+          <a:blip r:embed="rId3"/>
+          <a:srcRect/>
+          <a:stretch/>
+        </p:blipFill>
+        <p:spPr>
+          <a:xfrm>
+            <a:off x="6095473" y="1755774"/>
+            <a:ext cx="5755215" cy="4316411"/>
+          </a:xfrm>
+          <a:prstGeom prst="rect">
+            <a:avLst/>
+          </a:prstGeom>
+        </p:spPr>
+      </p:pic>
+      <p:sp>
+        <p:nvSpPr>
+          <p:cNvPr id="5" name="Foliennummernplatzhalter 4">
+            <a:extLst>
+              <a:ext uri="{FF2B5EF4-FFF2-40B4-BE49-F238E27FC236}">
+                <a16:creationId xmlns:a16="http://schemas.microsoft.com/office/drawing/2014/main" id="{01107926-37B1-CA57-B637-A5F611C3389F}"/>
+              </a:ext>
+            </a:extLst>
+          </p:cNvPr>
+          <p:cNvSpPr>
+            <a:spLocks noGrp="1"/>
+          </p:cNvSpPr>
+          <p:nvPr>
+            <p:ph type="sldNum" sz="quarter" idx="10"/>
+          </p:nvPr>
+        </p:nvSpPr>
+        <p:spPr/>
+        <p:txBody>
+          <a:bodyPr/>
+          <a:lstStyle/>
+          <a:p>
+            <a:fld id="{80B4FCE6-DC73-4135-BC56-1F242D45A84C}" type="slidenum">
+              <a:rPr lang="de-DE" smtClean="0"/>
+              <a:t>15</a:t>
+            </a:fld>
+            <a:endParaRPr lang="de-DE"/>
+          </a:p>
+        </p:txBody>
+      </p:sp>
+    </p:spTree>
+    <p:extLst>
+      <p:ext uri="{BB962C8B-B14F-4D97-AF65-F5344CB8AC3E}">
+        <p14:creationId xmlns:p14="http://schemas.microsoft.com/office/powerpoint/2010/main" val="3463300181"/>
+      </p:ext>
+    </p:extLst>
+  </p:cSld>
+  <p:clrMapOvr>
+    <a:masterClrMapping/>
+  </p:clrMapOvr>
+</p:sld>
+</file>
+
+<file path=ppt/slides/slide16.xml><?xml version="1.0" encoding="utf-8"?>
 <p:sld xmlns:a="http://schemas.openxmlformats.org/drawingml/2006/main" xmlns:r="http://schemas.openxmlformats.org/officeDocument/2006/relationships" xmlns:p="http://schemas.openxmlformats.org/presentationml/2006/main">
   <p:cSld>
     <p:spTree>
@@ -6169,41 +7976,6 @@
       </p:grpSpPr>
       <p:sp>
         <p:nvSpPr>
-          <p:cNvPr id="4" name="Foliennummernplatzhalter 3">
-            <a:extLst>
-              <a:ext uri="{FF2B5EF4-FFF2-40B4-BE49-F238E27FC236}">
-                <a16:creationId xmlns:a16="http://schemas.microsoft.com/office/drawing/2014/main" id="{763FBD9B-FA60-4D7A-9530-63A817FC9A2C}"/>
-              </a:ext>
-            </a:extLst>
-          </p:cNvPr>
-          <p:cNvSpPr>
-            <a:spLocks noGrp="1"/>
-          </p:cNvSpPr>
-          <p:nvPr>
-            <p:ph type="sldNum" sz="quarter" idx="10"/>
-          </p:nvPr>
-        </p:nvSpPr>
-        <p:spPr/>
-        <p:txBody>
-          <a:bodyPr/>
-          <a:lstStyle/>
-          <a:p>
-            <a:pPr>
-              <a:defRPr/>
-            </a:pPr>
-            <a:fld id="{A0424531-ACBB-43B0-9536-C2FB0D769E6C}" type="slidenum">
-              <a:rPr lang="de-DE" altLang="de-DE" smtClean="0"/>
-              <a:pPr>
-                <a:defRPr/>
-              </a:pPr>
-              <a:t>14</a:t>
-            </a:fld>
-            <a:endParaRPr lang="de-DE" altLang="de-DE" dirty="0"/>
-          </a:p>
-        </p:txBody>
-      </p:sp>
-      <p:sp>
-        <p:nvSpPr>
           <p:cNvPr id="2" name="Titel 1">
             <a:extLst>
               <a:ext uri="{FF2B5EF4-FFF2-40B4-BE49-F238E27FC236}">
@@ -6305,7 +8077,7 @@
           <a:p>
             <a:r>
               <a:rPr lang="de-DE"/>
-              <a:t>25.06.2026</a:t>
+              <a:t>16.07.2026</a:t>
             </a:r>
           </a:p>
         </p:txBody>
@@ -6333,9 +8105,38 @@
           <a:p>
             <a:r>
               <a:rPr lang="de-DE"/>
-              <a:t>Materialdiagnostik: Task 2</a:t>
+              <a:t>Materialdiagnostik: Task 3</a:t>
             </a:r>
             <a:endParaRPr lang="de-DE" dirty="0"/>
+          </a:p>
+        </p:txBody>
+      </p:sp>
+      <p:sp>
+        <p:nvSpPr>
+          <p:cNvPr id="3" name="Foliennummernplatzhalter 2">
+            <a:extLst>
+              <a:ext uri="{FF2B5EF4-FFF2-40B4-BE49-F238E27FC236}">
+                <a16:creationId xmlns:a16="http://schemas.microsoft.com/office/drawing/2014/main" id="{86D9B423-944C-1C30-B5CC-D3E5B59E7598}"/>
+              </a:ext>
+            </a:extLst>
+          </p:cNvPr>
+          <p:cNvSpPr>
+            <a:spLocks noGrp="1"/>
+          </p:cNvSpPr>
+          <p:nvPr>
+            <p:ph type="sldNum" sz="quarter" idx="10"/>
+          </p:nvPr>
+        </p:nvSpPr>
+        <p:spPr/>
+        <p:txBody>
+          <a:bodyPr/>
+          <a:lstStyle/>
+          <a:p>
+            <a:fld id="{80B4FCE6-DC73-4135-BC56-1F242D45A84C}" type="slidenum">
+              <a:rPr lang="de-DE" smtClean="0"/>
+              <a:t>16</a:t>
+            </a:fld>
+            <a:endParaRPr lang="de-DE"/>
           </a:p>
         </p:txBody>
       </p:sp>
@@ -6352,7 +8153,7 @@
 </p:sld>
 </file>
 
-<file path=ppt/slides/slide15.xml><?xml version="1.0" encoding="utf-8"?>
+<file path=ppt/slides/slide17.xml><?xml version="1.0" encoding="utf-8"?>
 <p:sld xmlns:a="http://schemas.openxmlformats.org/drawingml/2006/main" xmlns:r="http://schemas.openxmlformats.org/officeDocument/2006/relationships" xmlns:p="http://schemas.openxmlformats.org/presentationml/2006/main">
   <p:cSld>
     <p:spTree>
@@ -6377,41 +8178,6 @@
       </p:grpSpPr>
       <p:sp>
         <p:nvSpPr>
-          <p:cNvPr id="4" name="Foliennummernplatzhalter 3">
-            <a:extLst>
-              <a:ext uri="{FF2B5EF4-FFF2-40B4-BE49-F238E27FC236}">
-                <a16:creationId xmlns:a16="http://schemas.microsoft.com/office/drawing/2014/main" id="{AE2A0D2F-9C7B-D07B-E152-6D17F2779EF2}"/>
-              </a:ext>
-            </a:extLst>
-          </p:cNvPr>
-          <p:cNvSpPr>
-            <a:spLocks noGrp="1"/>
-          </p:cNvSpPr>
-          <p:nvPr>
-            <p:ph type="sldNum" sz="quarter" idx="10"/>
-          </p:nvPr>
-        </p:nvSpPr>
-        <p:spPr/>
-        <p:txBody>
-          <a:bodyPr/>
-          <a:lstStyle/>
-          <a:p>
-            <a:pPr>
-              <a:defRPr/>
-            </a:pPr>
-            <a:fld id="{A0424531-ACBB-43B0-9536-C2FB0D769E6C}" type="slidenum">
-              <a:rPr lang="de-DE" altLang="de-DE" smtClean="0"/>
-              <a:pPr>
-                <a:defRPr/>
-              </a:pPr>
-              <a:t>15</a:t>
-            </a:fld>
-            <a:endParaRPr lang="de-DE" altLang="de-DE" dirty="0"/>
-          </a:p>
-        </p:txBody>
-      </p:sp>
-      <p:sp>
-        <p:nvSpPr>
           <p:cNvPr id="2" name="Titel 1">
             <a:extLst>
               <a:ext uri="{FF2B5EF4-FFF2-40B4-BE49-F238E27FC236}">
@@ -6516,7 +8282,7 @@
           <a:p>
             <a:r>
               <a:rPr lang="de-DE"/>
-              <a:t>25.06.2026</a:t>
+              <a:t>16.07.2026</a:t>
             </a:r>
           </a:p>
         </p:txBody>
@@ -6544,9 +8310,38 @@
           <a:p>
             <a:r>
               <a:rPr lang="de-DE"/>
-              <a:t>Materialdiagnostik: Task 2</a:t>
+              <a:t>Materialdiagnostik: Task 3</a:t>
             </a:r>
             <a:endParaRPr lang="de-DE" dirty="0"/>
+          </a:p>
+        </p:txBody>
+      </p:sp>
+      <p:sp>
+        <p:nvSpPr>
+          <p:cNvPr id="3" name="Foliennummernplatzhalter 2">
+            <a:extLst>
+              <a:ext uri="{FF2B5EF4-FFF2-40B4-BE49-F238E27FC236}">
+                <a16:creationId xmlns:a16="http://schemas.microsoft.com/office/drawing/2014/main" id="{58211961-23B0-E5D4-DD50-236DA340FDDE}"/>
+              </a:ext>
+            </a:extLst>
+          </p:cNvPr>
+          <p:cNvSpPr>
+            <a:spLocks noGrp="1"/>
+          </p:cNvSpPr>
+          <p:nvPr>
+            <p:ph type="sldNum" sz="quarter" idx="10"/>
+          </p:nvPr>
+        </p:nvSpPr>
+        <p:spPr/>
+        <p:txBody>
+          <a:bodyPr/>
+          <a:lstStyle/>
+          <a:p>
+            <a:fld id="{80B4FCE6-DC73-4135-BC56-1F242D45A84C}" type="slidenum">
+              <a:rPr lang="de-DE" smtClean="0"/>
+              <a:t>17</a:t>
+            </a:fld>
+            <a:endParaRPr lang="de-DE"/>
           </a:p>
         </p:txBody>
       </p:sp>
@@ -6563,7 +8358,7 @@
 </p:sld>
 </file>
 
-<file path=ppt/slides/slide16.xml><?xml version="1.0" encoding="utf-8"?>
+<file path=ppt/slides/slide18.xml><?xml version="1.0" encoding="utf-8"?>
 <p:sld xmlns:a="http://schemas.openxmlformats.org/drawingml/2006/main" xmlns:r="http://schemas.openxmlformats.org/officeDocument/2006/relationships" xmlns:p="http://schemas.openxmlformats.org/presentationml/2006/main">
   <p:cSld>
     <p:spTree>
@@ -6582,41 +8377,6 @@
       </p:grpSpPr>
       <p:sp>
         <p:nvSpPr>
-          <p:cNvPr id="4" name="Foliennummernplatzhalter 3">
-            <a:extLst>
-              <a:ext uri="{FF2B5EF4-FFF2-40B4-BE49-F238E27FC236}">
-                <a16:creationId xmlns:a16="http://schemas.microsoft.com/office/drawing/2014/main" id="{3375FB55-D6ED-C35B-B368-0D1BE8E0FB23}"/>
-              </a:ext>
-            </a:extLst>
-          </p:cNvPr>
-          <p:cNvSpPr>
-            <a:spLocks noGrp="1"/>
-          </p:cNvSpPr>
-          <p:nvPr>
-            <p:ph type="sldNum" sz="quarter" idx="10"/>
-          </p:nvPr>
-        </p:nvSpPr>
-        <p:spPr/>
-        <p:txBody>
-          <a:bodyPr/>
-          <a:lstStyle/>
-          <a:p>
-            <a:pPr>
-              <a:defRPr/>
-            </a:pPr>
-            <a:fld id="{A0424531-ACBB-43B0-9536-C2FB0D769E6C}" type="slidenum">
-              <a:rPr lang="de-DE" altLang="de-DE" smtClean="0"/>
-              <a:pPr>
-                <a:defRPr/>
-              </a:pPr>
-              <a:t>16</a:t>
-            </a:fld>
-            <a:endParaRPr lang="de-DE" altLang="de-DE" dirty="0"/>
-          </a:p>
-        </p:txBody>
-      </p:sp>
-      <p:sp>
-        <p:nvSpPr>
           <p:cNvPr id="3" name="Inhaltsplatzhalter 2">
             <a:extLst>
               <a:ext uri="{FF2B5EF4-FFF2-40B4-BE49-F238E27FC236}">
@@ -6738,7 +8498,7 @@
           <a:p>
             <a:r>
               <a:rPr lang="de-DE"/>
-              <a:t>25.06.2026</a:t>
+              <a:t>16.07.2026</a:t>
             </a:r>
           </a:p>
         </p:txBody>
@@ -6766,9 +8526,38 @@
           <a:p>
             <a:r>
               <a:rPr lang="de-DE"/>
-              <a:t>Materialdiagnostik: Task 2</a:t>
+              <a:t>Materialdiagnostik: Task 3</a:t>
             </a:r>
             <a:endParaRPr lang="de-DE" dirty="0"/>
+          </a:p>
+        </p:txBody>
+      </p:sp>
+      <p:sp>
+        <p:nvSpPr>
+          <p:cNvPr id="7" name="Foliennummernplatzhalter 6">
+            <a:extLst>
+              <a:ext uri="{FF2B5EF4-FFF2-40B4-BE49-F238E27FC236}">
+                <a16:creationId xmlns:a16="http://schemas.microsoft.com/office/drawing/2014/main" id="{A8EACD8A-4E1D-8443-CADB-49E8F22A8887}"/>
+              </a:ext>
+            </a:extLst>
+          </p:cNvPr>
+          <p:cNvSpPr>
+            <a:spLocks noGrp="1"/>
+          </p:cNvSpPr>
+          <p:nvPr>
+            <p:ph type="sldNum" sz="quarter" idx="10"/>
+          </p:nvPr>
+        </p:nvSpPr>
+        <p:spPr/>
+        <p:txBody>
+          <a:bodyPr/>
+          <a:lstStyle/>
+          <a:p>
+            <a:fld id="{80B4FCE6-DC73-4135-BC56-1F242D45A84C}" type="slidenum">
+              <a:rPr lang="de-DE" smtClean="0"/>
+              <a:t>18</a:t>
+            </a:fld>
+            <a:endParaRPr lang="de-DE"/>
           </a:p>
         </p:txBody>
       </p:sp>
@@ -6785,7 +8574,7 @@
 </p:sld>
 </file>
 
-<file path=ppt/slides/slide17.xml><?xml version="1.0" encoding="utf-8"?>
+<file path=ppt/slides/slide19.xml><?xml version="1.0" encoding="utf-8"?>
 <p:sld xmlns:a="http://schemas.openxmlformats.org/drawingml/2006/main" xmlns:r="http://schemas.openxmlformats.org/officeDocument/2006/relationships" xmlns:p="http://schemas.openxmlformats.org/presentationml/2006/main">
   <p:cSld>
     <p:spTree>
@@ -6808,41 +8597,6 @@
           <a:chExt cx="0" cy="0"/>
         </a:xfrm>
       </p:grpSpPr>
-      <p:sp>
-        <p:nvSpPr>
-          <p:cNvPr id="4" name="Foliennummernplatzhalter 3">
-            <a:extLst>
-              <a:ext uri="{FF2B5EF4-FFF2-40B4-BE49-F238E27FC236}">
-                <a16:creationId xmlns:a16="http://schemas.microsoft.com/office/drawing/2014/main" id="{5FDE66EE-D1C7-077E-9546-55B1FA2DC8E7}"/>
-              </a:ext>
-            </a:extLst>
-          </p:cNvPr>
-          <p:cNvSpPr>
-            <a:spLocks noGrp="1"/>
-          </p:cNvSpPr>
-          <p:nvPr>
-            <p:ph type="sldNum" sz="quarter" idx="10"/>
-          </p:nvPr>
-        </p:nvSpPr>
-        <p:spPr/>
-        <p:txBody>
-          <a:bodyPr/>
-          <a:lstStyle/>
-          <a:p>
-            <a:pPr>
-              <a:defRPr/>
-            </a:pPr>
-            <a:fld id="{A0424531-ACBB-43B0-9536-C2FB0D769E6C}" type="slidenum">
-              <a:rPr lang="de-DE" altLang="de-DE" smtClean="0"/>
-              <a:pPr>
-                <a:defRPr/>
-              </a:pPr>
-              <a:t>17</a:t>
-            </a:fld>
-            <a:endParaRPr lang="de-DE" altLang="de-DE" dirty="0"/>
-          </a:p>
-        </p:txBody>
-      </p:sp>
       <p:sp>
         <p:nvSpPr>
           <p:cNvPr id="2" name="Titel 1">
@@ -7289,7 +9043,7 @@
           <a:p>
             <a:r>
               <a:rPr lang="de-DE"/>
-              <a:t>25.06.2026</a:t>
+              <a:t>16.07.2026</a:t>
             </a:r>
           </a:p>
         </p:txBody>
@@ -7317,9 +9071,38 @@
           <a:p>
             <a:r>
               <a:rPr lang="de-DE"/>
-              <a:t>Materialdiagnostik: Task 2</a:t>
+              <a:t>Materialdiagnostik: Task 3</a:t>
             </a:r>
             <a:endParaRPr lang="de-DE" dirty="0"/>
+          </a:p>
+        </p:txBody>
+      </p:sp>
+      <p:sp>
+        <p:nvSpPr>
+          <p:cNvPr id="7" name="Foliennummernplatzhalter 6">
+            <a:extLst>
+              <a:ext uri="{FF2B5EF4-FFF2-40B4-BE49-F238E27FC236}">
+                <a16:creationId xmlns:a16="http://schemas.microsoft.com/office/drawing/2014/main" id="{FBA2F6E1-9867-0406-CC76-41DC939AC1E4}"/>
+              </a:ext>
+            </a:extLst>
+          </p:cNvPr>
+          <p:cNvSpPr>
+            <a:spLocks noGrp="1"/>
+          </p:cNvSpPr>
+          <p:nvPr>
+            <p:ph type="sldNum" sz="quarter" idx="10"/>
+          </p:nvPr>
+        </p:nvSpPr>
+        <p:spPr/>
+        <p:txBody>
+          <a:bodyPr/>
+          <a:lstStyle/>
+          <a:p>
+            <a:fld id="{80B4FCE6-DC73-4135-BC56-1F242D45A84C}" type="slidenum">
+              <a:rPr lang="de-DE" smtClean="0"/>
+              <a:t>19</a:t>
+            </a:fld>
+            <a:endParaRPr lang="de-DE"/>
           </a:p>
         </p:txBody>
       </p:sp>
@@ -7700,64 +9483,6 @@
 </p:sld>
 </file>
 
-<file path=ppt/slides/slide18.xml><?xml version="1.0" encoding="utf-8"?>
-<p:sld xmlns:a="http://schemas.openxmlformats.org/drawingml/2006/main" xmlns:r="http://schemas.openxmlformats.org/officeDocument/2006/relationships" xmlns:p="http://schemas.openxmlformats.org/presentationml/2006/main">
-  <p:cSld>
-    <p:spTree>
-      <p:nvGrpSpPr>
-        <p:cNvPr id="1" name=""/>
-        <p:cNvGrpSpPr/>
-        <p:nvPr/>
-      </p:nvGrpSpPr>
-      <p:grpSpPr>
-        <a:xfrm>
-          <a:off x="0" y="0"/>
-          <a:ext cx="0" cy="0"/>
-          <a:chOff x="0" y="0"/>
-          <a:chExt cx="0" cy="0"/>
-        </a:xfrm>
-      </p:grpSpPr>
-      <p:sp>
-        <p:nvSpPr>
-          <p:cNvPr id="2" name="Titel 1">
-            <a:extLst>
-              <a:ext uri="{FF2B5EF4-FFF2-40B4-BE49-F238E27FC236}">
-                <a16:creationId xmlns:a16="http://schemas.microsoft.com/office/drawing/2014/main" id="{77E9BDB3-AF05-698B-206C-6C9919554531}"/>
-              </a:ext>
-            </a:extLst>
-          </p:cNvPr>
-          <p:cNvSpPr>
-            <a:spLocks noGrp="1"/>
-          </p:cNvSpPr>
-          <p:nvPr>
-            <p:ph type="title"/>
-          </p:nvPr>
-        </p:nvSpPr>
-        <p:spPr/>
-        <p:txBody>
-          <a:bodyPr/>
-          <a:lstStyle/>
-          <a:p>
-            <a:r>
-              <a:rPr lang="de-DE" dirty="0"/>
-              <a:t>Ende</a:t>
-            </a:r>
-          </a:p>
-        </p:txBody>
-      </p:sp>
-    </p:spTree>
-    <p:extLst>
-      <p:ext uri="{BB962C8B-B14F-4D97-AF65-F5344CB8AC3E}">
-        <p14:creationId xmlns:p14="http://schemas.microsoft.com/office/powerpoint/2010/main" val="467022224"/>
-      </p:ext>
-    </p:extLst>
-  </p:cSld>
-  <p:clrMapOvr>
-    <a:masterClrMapping/>
-  </p:clrMapOvr>
-</p:sld>
-</file>
-
 <file path=ppt/slides/slide2.xml><?xml version="1.0" encoding="utf-8"?>
 <p:sld xmlns:a="http://schemas.openxmlformats.org/drawingml/2006/main" xmlns:r="http://schemas.openxmlformats.org/officeDocument/2006/relationships" xmlns:p="http://schemas.openxmlformats.org/presentationml/2006/main">
   <p:cSld>
@@ -7846,10 +9571,66 @@
       </p:sp>
       <p:sp>
         <p:nvSpPr>
-          <p:cNvPr id="4" name="Foliennummernplatzhalter 3">
-            <a:extLst>
-              <a:ext uri="{FF2B5EF4-FFF2-40B4-BE49-F238E27FC236}">
-                <a16:creationId xmlns:a16="http://schemas.microsoft.com/office/drawing/2014/main" id="{6F571C89-E11C-49E9-88F9-60110C29C197}"/>
+          <p:cNvPr id="6" name="Datumsplatzhalter 5">
+            <a:extLst>
+              <a:ext uri="{FF2B5EF4-FFF2-40B4-BE49-F238E27FC236}">
+                <a16:creationId xmlns:a16="http://schemas.microsoft.com/office/drawing/2014/main" id="{2ADE982B-BFE5-5848-F763-33D2FC31C6DC}"/>
+              </a:ext>
+            </a:extLst>
+          </p:cNvPr>
+          <p:cNvSpPr>
+            <a:spLocks noGrp="1"/>
+          </p:cNvSpPr>
+          <p:nvPr>
+            <p:ph type="dt" sz="half" idx="12"/>
+          </p:nvPr>
+        </p:nvSpPr>
+        <p:spPr/>
+        <p:txBody>
+          <a:bodyPr/>
+          <a:lstStyle/>
+          <a:p>
+            <a:r>
+              <a:rPr lang="de-DE"/>
+              <a:t>16.07.2026</a:t>
+            </a:r>
+          </a:p>
+        </p:txBody>
+      </p:sp>
+      <p:sp>
+        <p:nvSpPr>
+          <p:cNvPr id="7" name="Fußzeilenplatzhalter 6">
+            <a:extLst>
+              <a:ext uri="{FF2B5EF4-FFF2-40B4-BE49-F238E27FC236}">
+                <a16:creationId xmlns:a16="http://schemas.microsoft.com/office/drawing/2014/main" id="{9D942951-2681-5B98-DB4E-AACA25F87A2D}"/>
+              </a:ext>
+            </a:extLst>
+          </p:cNvPr>
+          <p:cNvSpPr>
+            <a:spLocks noGrp="1"/>
+          </p:cNvSpPr>
+          <p:nvPr>
+            <p:ph type="ftr" sz="quarter" idx="11"/>
+          </p:nvPr>
+        </p:nvSpPr>
+        <p:spPr/>
+        <p:txBody>
+          <a:bodyPr/>
+          <a:lstStyle/>
+          <a:p>
+            <a:r>
+              <a:rPr lang="de-DE"/>
+              <a:t>Materialdiagnostik: Task 3</a:t>
+            </a:r>
+          </a:p>
+        </p:txBody>
+      </p:sp>
+      <p:sp>
+        <p:nvSpPr>
+          <p:cNvPr id="2" name="Foliennummernplatzhalter 1">
+            <a:extLst>
+              <a:ext uri="{FF2B5EF4-FFF2-40B4-BE49-F238E27FC236}">
+                <a16:creationId xmlns:a16="http://schemas.microsoft.com/office/drawing/2014/main" id="{4A95B1DA-C9BF-39EB-E4C5-A5750A2C5C28}"/>
               </a:ext>
             </a:extLst>
           </p:cNvPr>
@@ -7873,66 +9654,68 @@
           </a:p>
         </p:txBody>
       </p:sp>
-      <p:sp>
-        <p:nvSpPr>
-          <p:cNvPr id="6" name="Datumsplatzhalter 5">
-            <a:extLst>
-              <a:ext uri="{FF2B5EF4-FFF2-40B4-BE49-F238E27FC236}">
-                <a16:creationId xmlns:a16="http://schemas.microsoft.com/office/drawing/2014/main" id="{2ADE982B-BFE5-5848-F763-33D2FC31C6DC}"/>
-              </a:ext>
-            </a:extLst>
-          </p:cNvPr>
-          <p:cNvSpPr>
-            <a:spLocks noGrp="1"/>
-          </p:cNvSpPr>
-          <p:nvPr>
-            <p:ph type="dt" sz="half" idx="12"/>
-          </p:nvPr>
-        </p:nvSpPr>
-        <p:spPr/>
-        <p:txBody>
-          <a:bodyPr/>
-          <a:lstStyle/>
-          <a:p>
-            <a:r>
-              <a:rPr lang="de-DE"/>
-              <a:t>25.06.2026</a:t>
-            </a:r>
-          </a:p>
-        </p:txBody>
-      </p:sp>
-      <p:sp>
-        <p:nvSpPr>
-          <p:cNvPr id="7" name="Fußzeilenplatzhalter 6">
-            <a:extLst>
-              <a:ext uri="{FF2B5EF4-FFF2-40B4-BE49-F238E27FC236}">
-                <a16:creationId xmlns:a16="http://schemas.microsoft.com/office/drawing/2014/main" id="{9D942951-2681-5B98-DB4E-AACA25F87A2D}"/>
-              </a:ext>
-            </a:extLst>
-          </p:cNvPr>
-          <p:cNvSpPr>
-            <a:spLocks noGrp="1"/>
-          </p:cNvSpPr>
-          <p:nvPr>
-            <p:ph type="ftr" sz="quarter" idx="11"/>
-          </p:nvPr>
-        </p:nvSpPr>
-        <p:spPr/>
-        <p:txBody>
-          <a:bodyPr/>
-          <a:lstStyle/>
-          <a:p>
-            <a:r>
-              <a:rPr lang="de-DE"/>
-              <a:t>Materialdiagnostik: Task 2</a:t>
-            </a:r>
-          </a:p>
-        </p:txBody>
-      </p:sp>
     </p:spTree>
     <p:extLst>
       <p:ext uri="{BB962C8B-B14F-4D97-AF65-F5344CB8AC3E}">
         <p14:creationId xmlns:p14="http://schemas.microsoft.com/office/powerpoint/2010/main" val="1606180384"/>
+      </p:ext>
+    </p:extLst>
+  </p:cSld>
+  <p:clrMapOvr>
+    <a:masterClrMapping/>
+  </p:clrMapOvr>
+</p:sld>
+</file>
+
+<file path=ppt/slides/slide20.xml><?xml version="1.0" encoding="utf-8"?>
+<p:sld xmlns:a="http://schemas.openxmlformats.org/drawingml/2006/main" xmlns:r="http://schemas.openxmlformats.org/officeDocument/2006/relationships" xmlns:p="http://schemas.openxmlformats.org/presentationml/2006/main">
+  <p:cSld>
+    <p:spTree>
+      <p:nvGrpSpPr>
+        <p:cNvPr id="1" name=""/>
+        <p:cNvGrpSpPr/>
+        <p:nvPr/>
+      </p:nvGrpSpPr>
+      <p:grpSpPr>
+        <a:xfrm>
+          <a:off x="0" y="0"/>
+          <a:ext cx="0" cy="0"/>
+          <a:chOff x="0" y="0"/>
+          <a:chExt cx="0" cy="0"/>
+        </a:xfrm>
+      </p:grpSpPr>
+      <p:sp>
+        <p:nvSpPr>
+          <p:cNvPr id="2" name="Titel 1">
+            <a:extLst>
+              <a:ext uri="{FF2B5EF4-FFF2-40B4-BE49-F238E27FC236}">
+                <a16:creationId xmlns:a16="http://schemas.microsoft.com/office/drawing/2014/main" id="{77E9BDB3-AF05-698B-206C-6C9919554531}"/>
+              </a:ext>
+            </a:extLst>
+          </p:cNvPr>
+          <p:cNvSpPr>
+            <a:spLocks noGrp="1"/>
+          </p:cNvSpPr>
+          <p:nvPr>
+            <p:ph type="title"/>
+          </p:nvPr>
+        </p:nvSpPr>
+        <p:spPr/>
+        <p:txBody>
+          <a:bodyPr/>
+          <a:lstStyle/>
+          <a:p>
+            <a:r>
+              <a:rPr lang="de-DE" dirty="0"/>
+              <a:t>Ende</a:t>
+            </a:r>
+          </a:p>
+        </p:txBody>
+      </p:sp>
+    </p:spTree>
+    <p:extLst>
+      <p:ext uri="{BB962C8B-B14F-4D97-AF65-F5344CB8AC3E}">
+        <p14:creationId xmlns:p14="http://schemas.microsoft.com/office/powerpoint/2010/main" val="467022224"/>
       </p:ext>
     </p:extLst>
   </p:cSld>
@@ -7961,41 +9744,6 @@
       </p:grpSpPr>
       <p:sp>
         <p:nvSpPr>
-          <p:cNvPr id="4" name="Foliennummernplatzhalter 3">
-            <a:extLst>
-              <a:ext uri="{FF2B5EF4-FFF2-40B4-BE49-F238E27FC236}">
-                <a16:creationId xmlns:a16="http://schemas.microsoft.com/office/drawing/2014/main" id="{82F1A48E-1B1B-0EF1-7B0E-C43B96540887}"/>
-              </a:ext>
-            </a:extLst>
-          </p:cNvPr>
-          <p:cNvSpPr>
-            <a:spLocks noGrp="1"/>
-          </p:cNvSpPr>
-          <p:nvPr>
-            <p:ph type="sldNum" sz="quarter" idx="10"/>
-          </p:nvPr>
-        </p:nvSpPr>
-        <p:spPr/>
-        <p:txBody>
-          <a:bodyPr/>
-          <a:lstStyle/>
-          <a:p>
-            <a:pPr>
-              <a:defRPr/>
-            </a:pPr>
-            <a:fld id="{A0424531-ACBB-43B0-9536-C2FB0D769E6C}" type="slidenum">
-              <a:rPr lang="de-DE" altLang="de-DE" smtClean="0"/>
-              <a:pPr>
-                <a:defRPr/>
-              </a:pPr>
-              <a:t>3</a:t>
-            </a:fld>
-            <a:endParaRPr lang="de-DE" altLang="de-DE" dirty="0"/>
-          </a:p>
-        </p:txBody>
-      </p:sp>
-      <p:sp>
-        <p:nvSpPr>
           <p:cNvPr id="3" name="Inhaltsplatzhalter 2">
             <a:extLst>
               <a:ext uri="{FF2B5EF4-FFF2-40B4-BE49-F238E27FC236}">
@@ -8157,7 +9905,7 @@
           <a:p>
             <a:r>
               <a:rPr lang="de-DE"/>
-              <a:t>25.06.2026</a:t>
+              <a:t>16.07.2026</a:t>
             </a:r>
           </a:p>
         </p:txBody>
@@ -8185,9 +9933,38 @@
           <a:p>
             <a:r>
               <a:rPr lang="de-DE"/>
-              <a:t>Materialdiagnostik: Task 2</a:t>
+              <a:t>Materialdiagnostik: Task 3</a:t>
             </a:r>
             <a:endParaRPr lang="de-DE" dirty="0"/>
+          </a:p>
+        </p:txBody>
+      </p:sp>
+      <p:sp>
+        <p:nvSpPr>
+          <p:cNvPr id="5" name="Foliennummernplatzhalter 4">
+            <a:extLst>
+              <a:ext uri="{FF2B5EF4-FFF2-40B4-BE49-F238E27FC236}">
+                <a16:creationId xmlns:a16="http://schemas.microsoft.com/office/drawing/2014/main" id="{F8958667-57AC-BE1E-6BEA-1C93A1AE3BF9}"/>
+              </a:ext>
+            </a:extLst>
+          </p:cNvPr>
+          <p:cNvSpPr>
+            <a:spLocks noGrp="1"/>
+          </p:cNvSpPr>
+          <p:nvPr>
+            <p:ph type="sldNum" sz="quarter" idx="10"/>
+          </p:nvPr>
+        </p:nvSpPr>
+        <p:spPr/>
+        <p:txBody>
+          <a:bodyPr/>
+          <a:lstStyle/>
+          <a:p>
+            <a:fld id="{80B4FCE6-DC73-4135-BC56-1F242D45A84C}" type="slidenum">
+              <a:rPr lang="de-DE" smtClean="0"/>
+              <a:t>3</a:t>
+            </a:fld>
+            <a:endParaRPr lang="de-DE"/>
           </a:p>
         </p:txBody>
       </p:sp>
@@ -8223,41 +10000,6 @@
       </p:grpSpPr>
       <p:sp>
         <p:nvSpPr>
-          <p:cNvPr id="4" name="Foliennummernplatzhalter 3">
-            <a:extLst>
-              <a:ext uri="{FF2B5EF4-FFF2-40B4-BE49-F238E27FC236}">
-                <a16:creationId xmlns:a16="http://schemas.microsoft.com/office/drawing/2014/main" id="{9D07ED7A-1406-D77F-FB1A-4675A86C9D75}"/>
-              </a:ext>
-            </a:extLst>
-          </p:cNvPr>
-          <p:cNvSpPr>
-            <a:spLocks noGrp="1"/>
-          </p:cNvSpPr>
-          <p:nvPr>
-            <p:ph type="sldNum" sz="quarter" idx="10"/>
-          </p:nvPr>
-        </p:nvSpPr>
-        <p:spPr/>
-        <p:txBody>
-          <a:bodyPr/>
-          <a:lstStyle/>
-          <a:p>
-            <a:pPr>
-              <a:defRPr/>
-            </a:pPr>
-            <a:fld id="{A0424531-ACBB-43B0-9536-C2FB0D769E6C}" type="slidenum">
-              <a:rPr lang="de-DE" altLang="de-DE" smtClean="0"/>
-              <a:pPr>
-                <a:defRPr/>
-              </a:pPr>
-              <a:t>4</a:t>
-            </a:fld>
-            <a:endParaRPr lang="de-DE" altLang="de-DE" dirty="0"/>
-          </a:p>
-        </p:txBody>
-      </p:sp>
-      <p:sp>
-        <p:nvSpPr>
           <p:cNvPr id="10" name="Inhaltsplatzhalter 9">
             <a:extLst>
               <a:ext uri="{FF2B5EF4-FFF2-40B4-BE49-F238E27FC236}">
@@ -8410,7 +10152,7 @@
           <a:p>
             <a:r>
               <a:rPr lang="de-DE"/>
-              <a:t>25.06.2026</a:t>
+              <a:t>16.07.2026</a:t>
             </a:r>
           </a:p>
         </p:txBody>
@@ -8438,7 +10180,7 @@
           <a:p>
             <a:r>
               <a:rPr lang="de-DE"/>
-              <a:t>Materialdiagnostik: Task 2</a:t>
+              <a:t>Materialdiagnostik: Task 3</a:t>
             </a:r>
             <a:endParaRPr lang="de-DE" dirty="0"/>
           </a:p>
@@ -8474,6 +10216,35 @@
           </a:prstGeom>
         </p:spPr>
       </p:pic>
+      <p:sp>
+        <p:nvSpPr>
+          <p:cNvPr id="2" name="Foliennummernplatzhalter 1">
+            <a:extLst>
+              <a:ext uri="{FF2B5EF4-FFF2-40B4-BE49-F238E27FC236}">
+                <a16:creationId xmlns:a16="http://schemas.microsoft.com/office/drawing/2014/main" id="{604D00BA-4E18-605F-D34D-D84794623B18}"/>
+              </a:ext>
+            </a:extLst>
+          </p:cNvPr>
+          <p:cNvSpPr>
+            <a:spLocks noGrp="1"/>
+          </p:cNvSpPr>
+          <p:nvPr>
+            <p:ph type="sldNum" sz="quarter" idx="10"/>
+          </p:nvPr>
+        </p:nvSpPr>
+        <p:spPr/>
+        <p:txBody>
+          <a:bodyPr/>
+          <a:lstStyle/>
+          <a:p>
+            <a:fld id="{80B4FCE6-DC73-4135-BC56-1F242D45A84C}" type="slidenum">
+              <a:rPr lang="de-DE" smtClean="0"/>
+              <a:t>4</a:t>
+            </a:fld>
+            <a:endParaRPr lang="de-DE"/>
+          </a:p>
+        </p:txBody>
+      </p:sp>
     </p:spTree>
     <p:extLst>
       <p:ext uri="{BB962C8B-B14F-4D97-AF65-F5344CB8AC3E}">
@@ -8553,54 +10324,6 @@
       </p:sp>
       <p:sp>
         <p:nvSpPr>
-          <p:cNvPr id="4" name="Foliennummernplatzhalter 3">
-            <a:extLst>
-              <a:ext uri="{FF2B5EF4-FFF2-40B4-BE49-F238E27FC236}">
-                <a16:creationId xmlns:a16="http://schemas.microsoft.com/office/drawing/2014/main" id="{D5EAB245-0953-ACDB-0AB6-BCE17E472796}"/>
-              </a:ext>
-            </a:extLst>
-          </p:cNvPr>
-          <p:cNvSpPr>
-            <a:spLocks noGrp="1"/>
-          </p:cNvSpPr>
-          <p:nvPr>
-            <p:ph type="sldNum" sz="quarter" idx="10"/>
-          </p:nvPr>
-        </p:nvSpPr>
-        <p:spPr>
-          <a:xfrm>
-            <a:off x="11582400" y="6447859"/>
-            <a:ext cx="496388" cy="365125"/>
-          </a:xfrm>
-        </p:spPr>
-        <p:txBody>
-          <a:bodyPr anchor="ctr">
-            <a:normAutofit/>
-          </a:bodyPr>
-          <a:lstStyle/>
-          <a:p>
-            <a:pPr>
-              <a:spcAft>
-                <a:spcPts val="600"/>
-              </a:spcAft>
-              <a:defRPr/>
-            </a:pPr>
-            <a:fld id="{A0424531-ACBB-43B0-9536-C2FB0D769E6C}" type="slidenum">
-              <a:rPr lang="de-DE" altLang="de-DE" smtClean="0"/>
-              <a:pPr>
-                <a:spcAft>
-                  <a:spcPts val="600"/>
-                </a:spcAft>
-                <a:defRPr/>
-              </a:pPr>
-              <a:t>5</a:t>
-            </a:fld>
-            <a:endParaRPr lang="de-DE" altLang="de-DE"/>
-          </a:p>
-        </p:txBody>
-      </p:sp>
-      <p:sp>
-        <p:nvSpPr>
           <p:cNvPr id="10" name="Inhaltsplatzhalter 9">
             <a:extLst>
               <a:ext uri="{FF2B5EF4-FFF2-40B4-BE49-F238E27FC236}">
@@ -8714,7 +10437,7 @@
           <a:p>
             <a:r>
               <a:rPr lang="de-DE"/>
-              <a:t>25.06.2026</a:t>
+              <a:t>16.07.2026</a:t>
             </a:r>
           </a:p>
         </p:txBody>
@@ -8742,8 +10465,37 @@
           <a:p>
             <a:r>
               <a:rPr lang="de-DE"/>
-              <a:t>Materialdiagnostik: Task 2</a:t>
-            </a:r>
+              <a:t>Materialdiagnostik: Task 3</a:t>
+            </a:r>
+          </a:p>
+        </p:txBody>
+      </p:sp>
+      <p:sp>
+        <p:nvSpPr>
+          <p:cNvPr id="2" name="Foliennummernplatzhalter 1">
+            <a:extLst>
+              <a:ext uri="{FF2B5EF4-FFF2-40B4-BE49-F238E27FC236}">
+                <a16:creationId xmlns:a16="http://schemas.microsoft.com/office/drawing/2014/main" id="{A01E9335-BE43-12DC-80C0-D25BC6A0C1D7}"/>
+              </a:ext>
+            </a:extLst>
+          </p:cNvPr>
+          <p:cNvSpPr>
+            <a:spLocks noGrp="1"/>
+          </p:cNvSpPr>
+          <p:nvPr>
+            <p:ph type="sldNum" sz="quarter" idx="10"/>
+          </p:nvPr>
+        </p:nvSpPr>
+        <p:spPr/>
+        <p:txBody>
+          <a:bodyPr/>
+          <a:lstStyle/>
+          <a:p>
+            <a:fld id="{80B4FCE6-DC73-4135-BC56-1F242D45A84C}" type="slidenum">
+              <a:rPr lang="de-DE" smtClean="0"/>
+              <a:t>5</a:t>
+            </a:fld>
+            <a:endParaRPr lang="de-DE"/>
           </a:p>
         </p:txBody>
       </p:sp>
@@ -8785,18 +10537,18 @@
       </p:grpSpPr>
       <p:sp>
         <p:nvSpPr>
-          <p:cNvPr id="4" name="Foliennummernplatzhalter 3">
-            <a:extLst>
-              <a:ext uri="{FF2B5EF4-FFF2-40B4-BE49-F238E27FC236}">
-                <a16:creationId xmlns:a16="http://schemas.microsoft.com/office/drawing/2014/main" id="{8925611F-2E54-B9F6-1387-380500D28BD7}"/>
-              </a:ext>
-            </a:extLst>
-          </p:cNvPr>
-          <p:cNvSpPr>
-            <a:spLocks noGrp="1"/>
-          </p:cNvSpPr>
-          <p:nvPr>
-            <p:ph type="sldNum" sz="quarter" idx="10"/>
+          <p:cNvPr id="10" name="Inhaltsplatzhalter 9">
+            <a:extLst>
+              <a:ext uri="{FF2B5EF4-FFF2-40B4-BE49-F238E27FC236}">
+                <a16:creationId xmlns:a16="http://schemas.microsoft.com/office/drawing/2014/main" id="{3CFC55D7-9A46-28B7-DCDC-9006970AADA8}"/>
+              </a:ext>
+            </a:extLst>
+          </p:cNvPr>
+          <p:cNvSpPr>
+            <a:spLocks noGrp="1"/>
+          </p:cNvSpPr>
+          <p:nvPr>
+            <p:ph sz="quarter" idx="13"/>
           </p:nvPr>
         </p:nvSpPr>
         <p:spPr/>
@@ -8805,86 +10557,69 @@
           <a:lstStyle/>
           <a:p>
             <a:pPr>
-              <a:defRPr/>
-            </a:pPr>
-            <a:fld id="{A0424531-ACBB-43B0-9536-C2FB0D769E6C}" type="slidenum">
-              <a:rPr lang="de-DE" altLang="de-DE" smtClean="0"/>
-              <a:pPr>
-                <a:defRPr/>
-              </a:pPr>
-              <a:t>6</a:t>
-            </a:fld>
-            <a:endParaRPr lang="de-DE" altLang="de-DE" dirty="0"/>
-          </a:p>
-        </p:txBody>
-      </p:sp>
-      <p:sp>
-        <p:nvSpPr>
-          <p:cNvPr id="10" name="Inhaltsplatzhalter 9">
-            <a:extLst>
-              <a:ext uri="{FF2B5EF4-FFF2-40B4-BE49-F238E27FC236}">
-                <a16:creationId xmlns:a16="http://schemas.microsoft.com/office/drawing/2014/main" id="{3CFC55D7-9A46-28B7-DCDC-9006970AADA8}"/>
-              </a:ext>
-            </a:extLst>
-          </p:cNvPr>
-          <p:cNvSpPr>
-            <a:spLocks noGrp="1"/>
-          </p:cNvSpPr>
-          <p:nvPr>
-            <p:ph sz="quarter" idx="13"/>
-          </p:nvPr>
-        </p:nvSpPr>
-        <p:spPr/>
-        <p:txBody>
-          <a:bodyPr/>
-          <a:lstStyle/>
-          <a:p>
-            <a:pPr algn="l" fontAlgn="base">
-              <a:spcAft>
-                <a:spcPts val="300"/>
-              </a:spcAft>
               <a:buFont typeface="Arial" panose="020B0604020202020204" pitchFamily="34" charset="0"/>
               <a:buChar char="•"/>
             </a:pPr>
-            <a:r>
-              <a:rPr lang="de-DE" b="0" i="0" dirty="0">
-                <a:effectLst/>
-              </a:rPr>
-              <a:t>Merkmale haben unterschiedliche Einheiten und Größenordnungen</a:t>
-            </a:r>
-          </a:p>
-          <a:p>
-            <a:pPr lvl="1">
-              <a:spcAft>
-                <a:spcPts val="300"/>
-              </a:spcAft>
+            <a:endParaRPr lang="de-DE" dirty="0"/>
+          </a:p>
+          <a:p>
+            <a:pPr>
               <a:buFont typeface="Arial" panose="020B0604020202020204" pitchFamily="34" charset="0"/>
               <a:buChar char="•"/>
             </a:pPr>
             <a:r>
-              <a:rPr lang="de-DE" b="0" i="0" dirty="0">
-                <a:effectLst/>
-              </a:rPr>
-              <a:t>Standardisieren auf Mittelwert 0 und Standardabweichung 1</a:t>
+              <a:rPr lang="de-DE" dirty="0"/>
+              <a:t>Gleiche Merkmalsfamilien wie in Aufgabe 2</a:t>
             </a:r>
           </a:p>
           <a:p>
             <a:pPr lvl="1">
-              <a:spcAft>
-                <a:spcPts val="300"/>
-              </a:spcAft>
               <a:buFont typeface="Arial" panose="020B0604020202020204" pitchFamily="34" charset="0"/>
               <a:buChar char="•"/>
             </a:pPr>
             <a:r>
               <a:rPr lang="de-DE" dirty="0"/>
-              <a:t>Da z.B.</a:t>
-            </a:r>
-            <a:r>
-              <a:rPr lang="de-DE" b="0" i="0" dirty="0">
-                <a:effectLst/>
-              </a:rPr>
-              <a:t> Frequenzwerte nicht automatisch wichtiger als kleinere dimensionslose Werte sind</a:t>
+              <a:t>MFCC und Delta-MFCC</a:t>
+            </a:r>
+          </a:p>
+          <a:p>
+            <a:pPr lvl="1">
+              <a:buFont typeface="Arial" panose="020B0604020202020204" pitchFamily="34" charset="0"/>
+              <a:buChar char="•"/>
+            </a:pPr>
+            <a:r>
+              <a:rPr lang="de-DE" dirty="0"/>
+              <a:t>Spektralzentrum, Bandbreite, Roll-off</a:t>
+            </a:r>
+          </a:p>
+          <a:p>
+            <a:pPr lvl="1">
+              <a:buFont typeface="Arial" panose="020B0604020202020204" pitchFamily="34" charset="0"/>
+              <a:buChar char="•"/>
+            </a:pPr>
+            <a:r>
+              <a:rPr lang="de-DE" dirty="0"/>
+              <a:t>Spektralkontrast</a:t>
+            </a:r>
+          </a:p>
+          <a:p>
+            <a:pPr lvl="1">
+              <a:buFont typeface="Arial" panose="020B0604020202020204" pitchFamily="34" charset="0"/>
+              <a:buChar char="•"/>
+            </a:pPr>
+            <a:r>
+              <a:rPr lang="de-DE" dirty="0"/>
+              <a:t>Chroma-STFT und Chroma-CENS</a:t>
+            </a:r>
+          </a:p>
+          <a:p>
+            <a:pPr lvl="1">
+              <a:buFont typeface="Arial" panose="020B0604020202020204" pitchFamily="34" charset="0"/>
+              <a:buChar char="•"/>
+            </a:pPr>
+            <a:r>
+              <a:rPr lang="de-DE" dirty="0"/>
+              <a:t>Zero-Crossing-Rate und RMS-Energie</a:t>
             </a:r>
           </a:p>
         </p:txBody>
@@ -8923,42 +10658,12 @@
                 <a:uFillTx/>
                 <a:ea typeface="ヒラギノ角ゴ Pro W3"/>
               </a:rPr>
-              <a:t>Standardisierung</a:t>
+              <a:t>Merkmalsextraktion</a:t>
             </a:r>
             <a:endParaRPr lang="de-DE" dirty="0"/>
           </a:p>
         </p:txBody>
       </p:sp>
-      <p:pic>
-        <p:nvPicPr>
-          <p:cNvPr id="12" name="Grafik 11">
-            <a:extLst>
-              <a:ext uri="{FF2B5EF4-FFF2-40B4-BE49-F238E27FC236}">
-                <a16:creationId xmlns:a16="http://schemas.microsoft.com/office/drawing/2014/main" id="{83AF4FFF-43A2-A94E-D9CF-F66A42D8AC69}"/>
-              </a:ext>
-            </a:extLst>
-          </p:cNvPr>
-          <p:cNvPicPr>
-            <a:picLocks noChangeAspect="1"/>
-          </p:cNvPicPr>
-          <p:nvPr/>
-        </p:nvPicPr>
-        <p:blipFill>
-          <a:blip r:embed="rId3"/>
-          <a:stretch>
-            <a:fillRect/>
-          </a:stretch>
-        </p:blipFill>
-        <p:spPr>
-          <a:xfrm>
-            <a:off x="1162788" y="3699361"/>
-            <a:ext cx="9866424" cy="1159262"/>
-          </a:xfrm>
-          <a:prstGeom prst="rect">
-            <a:avLst/>
-          </a:prstGeom>
-        </p:spPr>
-      </p:pic>
       <p:sp>
         <p:nvSpPr>
           <p:cNvPr id="6" name="Datumsplatzhalter 5">
@@ -8982,7 +10687,7 @@
           <a:p>
             <a:r>
               <a:rPr lang="de-DE"/>
-              <a:t>25.06.2026</a:t>
+              <a:t>16.07.2026</a:t>
             </a:r>
           </a:p>
         </p:txBody>
@@ -9010,9 +10715,38 @@
           <a:p>
             <a:r>
               <a:rPr lang="de-DE"/>
-              <a:t>Materialdiagnostik: Task 2</a:t>
+              <a:t>Materialdiagnostik: Task 3</a:t>
             </a:r>
             <a:endParaRPr lang="de-DE" dirty="0"/>
+          </a:p>
+        </p:txBody>
+      </p:sp>
+      <p:sp>
+        <p:nvSpPr>
+          <p:cNvPr id="2" name="Foliennummernplatzhalter 1">
+            <a:extLst>
+              <a:ext uri="{FF2B5EF4-FFF2-40B4-BE49-F238E27FC236}">
+                <a16:creationId xmlns:a16="http://schemas.microsoft.com/office/drawing/2014/main" id="{384EE6BD-0A8A-C35A-ACE5-8487FF073395}"/>
+              </a:ext>
+            </a:extLst>
+          </p:cNvPr>
+          <p:cNvSpPr>
+            <a:spLocks noGrp="1"/>
+          </p:cNvSpPr>
+          <p:nvPr>
+            <p:ph type="sldNum" sz="quarter" idx="10"/>
+          </p:nvPr>
+        </p:nvSpPr>
+        <p:spPr/>
+        <p:txBody>
+          <a:bodyPr/>
+          <a:lstStyle/>
+          <a:p>
+            <a:fld id="{80B4FCE6-DC73-4135-BC56-1F242D45A84C}" type="slidenum">
+              <a:rPr lang="de-DE" smtClean="0"/>
+              <a:t>6</a:t>
+            </a:fld>
+            <a:endParaRPr lang="de-DE"/>
           </a:p>
         </p:txBody>
       </p:sp>
@@ -9054,97 +10788,6 @@
       </p:grpSpPr>
       <p:sp>
         <p:nvSpPr>
-          <p:cNvPr id="4" name="Foliennummernplatzhalter 3">
-            <a:extLst>
-              <a:ext uri="{FF2B5EF4-FFF2-40B4-BE49-F238E27FC236}">
-                <a16:creationId xmlns:a16="http://schemas.microsoft.com/office/drawing/2014/main" id="{4261BA00-8F21-42B1-B753-4444F47505B5}"/>
-              </a:ext>
-            </a:extLst>
-          </p:cNvPr>
-          <p:cNvSpPr>
-            <a:spLocks noGrp="1"/>
-          </p:cNvSpPr>
-          <p:nvPr>
-            <p:ph type="sldNum" sz="quarter" idx="10"/>
-          </p:nvPr>
-        </p:nvSpPr>
-        <p:spPr/>
-        <p:txBody>
-          <a:bodyPr/>
-          <a:lstStyle/>
-          <a:p>
-            <a:pPr>
-              <a:defRPr/>
-            </a:pPr>
-            <a:fld id="{A0424531-ACBB-43B0-9536-C2FB0D769E6C}" type="slidenum">
-              <a:rPr lang="de-DE" altLang="de-DE" smtClean="0"/>
-              <a:pPr>
-                <a:defRPr/>
-              </a:pPr>
-              <a:t>7</a:t>
-            </a:fld>
-            <a:endParaRPr lang="de-DE" altLang="de-DE" dirty="0"/>
-          </a:p>
-        </p:txBody>
-      </p:sp>
-      <p:pic>
-        <p:nvPicPr>
-          <p:cNvPr id="3" name="Inhaltsplatzhalter 2">
-            <a:extLst>
-              <a:ext uri="{FF2B5EF4-FFF2-40B4-BE49-F238E27FC236}">
-                <a16:creationId xmlns:a16="http://schemas.microsoft.com/office/drawing/2014/main" id="{979B5319-8740-7A92-1452-B0AE766BD9F4}"/>
-              </a:ext>
-            </a:extLst>
-          </p:cNvPr>
-          <p:cNvPicPr>
-            <a:picLocks noGrp="1" noChangeAspect="1"/>
-          </p:cNvPicPr>
-          <p:nvPr>
-            <p:ph sz="quarter" idx="13"/>
-          </p:nvPr>
-        </p:nvPicPr>
-        <p:blipFill rotWithShape="1">
-          <a:blip r:embed="rId3"/>
-          <a:srcRect b="46888"/>
-          <a:stretch>
-            <a:fillRect/>
-          </a:stretch>
-        </p:blipFill>
-        <p:spPr bwMode="auto">
-          <a:xfrm>
-            <a:off x="343622" y="1414962"/>
-            <a:ext cx="11504756" cy="4028076"/>
-          </a:xfrm>
-          <a:prstGeom prst="rect">
-            <a:avLst/>
-          </a:prstGeom>
-          <a:noFill/>
-          <a:ln>
-            <a:noFill/>
-          </a:ln>
-          <a:extLst>
-            <a:ext uri="{909E8E84-426E-40DD-AFC4-6F175D3DCCD1}">
-              <a14:hiddenFill xmlns:a14="http://schemas.microsoft.com/office/drawing/2010/main">
-                <a:solidFill>
-                  <a:srgbClr val="FFFFFF"/>
-                </a:solidFill>
-              </a14:hiddenFill>
-            </a:ext>
-            <a:ext uri="{91240B29-F687-4F45-9708-019B960494DF}">
-              <a14:hiddenLine xmlns:a14="http://schemas.microsoft.com/office/drawing/2010/main" w="9525">
-                <a:solidFill>
-                  <a:srgbClr val="000000"/>
-                </a:solidFill>
-                <a:miter lim="800000"/>
-                <a:headEnd/>
-                <a:tailEnd/>
-              </a14:hiddenLine>
-            </a:ext>
-          </a:extLst>
-        </p:spPr>
-      </p:pic>
-      <p:sp>
-        <p:nvSpPr>
           <p:cNvPr id="5" name="Titel 4">
             <a:extLst>
               <a:ext uri="{FF2B5EF4-FFF2-40B4-BE49-F238E27FC236}">
@@ -9162,7 +10805,7 @@
         <p:spPr>
           <a:xfrm>
             <a:off x="341811" y="567600"/>
-            <a:ext cx="4500012" cy="706030"/>
+            <a:ext cx="5470410" cy="706030"/>
           </a:xfrm>
         </p:spPr>
         <p:txBody>
@@ -9171,8 +10814,37 @@
           <a:p>
             <a:r>
               <a:rPr lang="de-DE" sz="3200" dirty="0"/>
-              <a:t>Explorative Datenanalyse</a:t>
-            </a:r>
+              <a:t>Split und Channel-Behandlung</a:t>
+            </a:r>
+          </a:p>
+        </p:txBody>
+      </p:sp>
+      <p:sp>
+        <p:nvSpPr>
+          <p:cNvPr id="6" name="Fußzeilenplatzhalter 5">
+            <a:extLst>
+              <a:ext uri="{FF2B5EF4-FFF2-40B4-BE49-F238E27FC236}">
+                <a16:creationId xmlns:a16="http://schemas.microsoft.com/office/drawing/2014/main" id="{C652A9E7-E0BD-8249-90D0-97B3A7CD27DF}"/>
+              </a:ext>
+            </a:extLst>
+          </p:cNvPr>
+          <p:cNvSpPr>
+            <a:spLocks noGrp="1"/>
+          </p:cNvSpPr>
+          <p:nvPr>
+            <p:ph type="ftr" sz="quarter" idx="11"/>
+          </p:nvPr>
+        </p:nvSpPr>
+        <p:spPr/>
+        <p:txBody>
+          <a:bodyPr/>
+          <a:lstStyle/>
+          <a:p>
+            <a:r>
+              <a:rPr lang="de-DE"/>
+              <a:t>Materialdiagnostik: Task 3</a:t>
+            </a:r>
+            <a:endParaRPr lang="de-DE" dirty="0"/>
           </a:p>
         </p:txBody>
       </p:sp>
@@ -9199,37 +10871,175 @@
           <a:p>
             <a:r>
               <a:rPr lang="de-DE"/>
-              <a:t>25.06.2026</a:t>
-            </a:r>
-          </a:p>
-        </p:txBody>
-      </p:sp>
-      <p:sp>
-        <p:nvSpPr>
-          <p:cNvPr id="6" name="Fußzeilenplatzhalter 5">
-            <a:extLst>
-              <a:ext uri="{FF2B5EF4-FFF2-40B4-BE49-F238E27FC236}">
-                <a16:creationId xmlns:a16="http://schemas.microsoft.com/office/drawing/2014/main" id="{C652A9E7-E0BD-8249-90D0-97B3A7CD27DF}"/>
-              </a:ext>
-            </a:extLst>
-          </p:cNvPr>
-          <p:cNvSpPr>
-            <a:spLocks noGrp="1"/>
-          </p:cNvSpPr>
-          <p:nvPr>
-            <p:ph type="ftr" sz="quarter" idx="11"/>
-          </p:nvPr>
-        </p:nvSpPr>
-        <p:spPr/>
-        <p:txBody>
-          <a:bodyPr/>
-          <a:lstStyle/>
-          <a:p>
-            <a:r>
-              <a:rPr lang="de-DE"/>
-              <a:t>Materialdiagnostik: Task 2</a:t>
-            </a:r>
+              <a:t>16.07.2026</a:t>
+            </a:r>
+          </a:p>
+        </p:txBody>
+      </p:sp>
+      <p:sp>
+        <p:nvSpPr>
+          <p:cNvPr id="8" name="Inhaltsplatzhalter 7">
+            <a:extLst>
+              <a:ext uri="{FF2B5EF4-FFF2-40B4-BE49-F238E27FC236}">
+                <a16:creationId xmlns:a16="http://schemas.microsoft.com/office/drawing/2014/main" id="{A1313EF0-A9CF-8B6D-B55B-1752680076A4}"/>
+              </a:ext>
+            </a:extLst>
+          </p:cNvPr>
+          <p:cNvSpPr>
+            <a:spLocks noGrp="1"/>
+          </p:cNvSpPr>
+          <p:nvPr>
+            <p:ph sz="quarter" idx="13"/>
+          </p:nvPr>
+        </p:nvSpPr>
+        <p:spPr>
+          <a:xfrm>
+            <a:off x="341312" y="1620000"/>
+            <a:ext cx="7467874" cy="4316412"/>
+          </a:xfrm>
+        </p:spPr>
+        <p:txBody>
+          <a:bodyPr/>
+          <a:lstStyle/>
+          <a:p>
+            <a:pPr>
+              <a:buFont typeface="Arial" panose="020B0604020202020204" pitchFamily="34" charset="0"/>
+              <a:buChar char="•"/>
+            </a:pPr>
+            <a:r>
+              <a:rPr lang="de-DE" dirty="0"/>
+              <a:t>Feature-Mittelung über `</a:t>
+            </a:r>
+            <a:r>
+              <a:rPr lang="de-DE" dirty="0" err="1"/>
+              <a:t>mID</a:t>
+            </a:r>
+            <a:r>
+              <a:rPr lang="de-DE" dirty="0"/>
+              <a:t>`</a:t>
+            </a:r>
+          </a:p>
+          <a:p>
+            <a:pPr>
+              <a:buFont typeface="Arial" panose="020B0604020202020204" pitchFamily="34" charset="0"/>
+              <a:buChar char="•"/>
+            </a:pPr>
+            <a:r>
+              <a:rPr lang="de-DE" dirty="0"/>
+              <a:t>Merkmalsextraktion pro Datei vor der Mittelung</a:t>
+            </a:r>
+          </a:p>
+          <a:p>
+            <a:pPr>
+              <a:buFont typeface="Arial" panose="020B0604020202020204" pitchFamily="34" charset="0"/>
+              <a:buChar char="•"/>
+            </a:pPr>
+            <a:r>
+              <a:rPr lang="de-DE" dirty="0"/>
+              <a:t>Fester Split über Zahnräder:</a:t>
+            </a:r>
+          </a:p>
+          <a:p>
+            <a:pPr lvl="1">
+              <a:buFont typeface="Arial" panose="020B0604020202020204" pitchFamily="34" charset="0"/>
+              <a:buChar char="•"/>
+            </a:pPr>
+            <a:r>
+              <a:rPr lang="de-DE" dirty="0"/>
+              <a:t>Train: Z01, Z02</a:t>
+            </a:r>
+          </a:p>
+          <a:p>
+            <a:pPr lvl="1">
+              <a:buFont typeface="Arial" panose="020B0604020202020204" pitchFamily="34" charset="0"/>
+              <a:buChar char="•"/>
+            </a:pPr>
+            <a:r>
+              <a:rPr lang="de-DE" dirty="0"/>
+              <a:t>Dev: Z04</a:t>
+            </a:r>
+          </a:p>
+          <a:p>
+            <a:pPr lvl="1">
+              <a:buFont typeface="Arial" panose="020B0604020202020204" pitchFamily="34" charset="0"/>
+              <a:buChar char="•"/>
+            </a:pPr>
+            <a:r>
+              <a:rPr lang="de-DE" dirty="0"/>
+              <a:t>Test: Z03</a:t>
+            </a:r>
+          </a:p>
+          <a:p>
+            <a:pPr>
+              <a:buFont typeface="Arial" panose="020B0604020202020204" pitchFamily="34" charset="0"/>
+              <a:buChar char="•"/>
+            </a:pPr>
+            <a:r>
+              <a:rPr lang="de-DE" dirty="0"/>
+              <a:t>Z05 positionsbasiert auf alle Splits verteilt</a:t>
+            </a:r>
+          </a:p>
+          <a:p>
+            <a:pPr>
+              <a:buFont typeface="Arial" panose="020B0604020202020204" pitchFamily="34" charset="0"/>
+              <a:buChar char="•"/>
+            </a:pPr>
+            <a:r>
+              <a:rPr lang="de-DE" dirty="0"/>
+              <a:t>Zwei Modelle:</a:t>
+            </a:r>
+          </a:p>
+          <a:p>
+            <a:pPr lvl="1">
+              <a:buFont typeface="Arial" panose="020B0604020202020204" pitchFamily="34" charset="0"/>
+              <a:buChar char="•"/>
+            </a:pPr>
+            <a:r>
+              <a:rPr lang="de-DE" dirty="0"/>
+              <a:t>Ch1</a:t>
+            </a:r>
+          </a:p>
+          <a:p>
+            <a:pPr lvl="1">
+              <a:buFont typeface="Arial" panose="020B0604020202020204" pitchFamily="34" charset="0"/>
+              <a:buChar char="•"/>
+            </a:pPr>
+            <a:r>
+              <a:rPr lang="de-DE" dirty="0"/>
+              <a:t>Ch2</a:t>
+            </a:r>
+          </a:p>
+          <a:p>
             <a:endParaRPr lang="de-DE" dirty="0"/>
+          </a:p>
+        </p:txBody>
+      </p:sp>
+      <p:sp>
+        <p:nvSpPr>
+          <p:cNvPr id="10" name="Foliennummernplatzhalter 9">
+            <a:extLst>
+              <a:ext uri="{FF2B5EF4-FFF2-40B4-BE49-F238E27FC236}">
+                <a16:creationId xmlns:a16="http://schemas.microsoft.com/office/drawing/2014/main" id="{6165C6EB-C140-CDAA-785E-DDE0FB76E230}"/>
+              </a:ext>
+            </a:extLst>
+          </p:cNvPr>
+          <p:cNvSpPr>
+            <a:spLocks noGrp="1"/>
+          </p:cNvSpPr>
+          <p:nvPr>
+            <p:ph type="sldNum" sz="quarter" idx="10"/>
+          </p:nvPr>
+        </p:nvSpPr>
+        <p:spPr/>
+        <p:txBody>
+          <a:bodyPr/>
+          <a:lstStyle/>
+          <a:p>
+            <a:fld id="{80B4FCE6-DC73-4135-BC56-1F242D45A84C}" type="slidenum">
+              <a:rPr lang="de-DE" smtClean="0"/>
+              <a:t>7</a:t>
+            </a:fld>
+            <a:endParaRPr lang="de-DE"/>
           </a:p>
         </p:txBody>
       </p:sp>
@@ -9271,45 +11081,96 @@
       </p:grpSpPr>
       <p:sp>
         <p:nvSpPr>
-          <p:cNvPr id="4" name="Foliennummernplatzhalter 3">
-            <a:extLst>
-              <a:ext uri="{FF2B5EF4-FFF2-40B4-BE49-F238E27FC236}">
-                <a16:creationId xmlns:a16="http://schemas.microsoft.com/office/drawing/2014/main" id="{668000FF-5C0D-F793-7E08-F6647F058BF1}"/>
-              </a:ext>
-            </a:extLst>
-          </p:cNvPr>
-          <p:cNvSpPr>
-            <a:spLocks noGrp="1"/>
-          </p:cNvSpPr>
-          <p:nvPr>
-            <p:ph type="sldNum" sz="quarter" idx="10"/>
-          </p:nvPr>
-        </p:nvSpPr>
-        <p:spPr/>
-        <p:txBody>
-          <a:bodyPr/>
-          <a:lstStyle/>
-          <a:p>
-            <a:pPr>
-              <a:defRPr/>
-            </a:pPr>
-            <a:fld id="{A0424531-ACBB-43B0-9536-C2FB0D769E6C}" type="slidenum">
-              <a:rPr lang="de-DE" altLang="de-DE" smtClean="0"/>
-              <a:pPr>
-                <a:defRPr/>
-              </a:pPr>
-              <a:t>8</a:t>
-            </a:fld>
-            <a:endParaRPr lang="de-DE" altLang="de-DE" dirty="0"/>
+          <p:cNvPr id="5" name="Titel 4">
+            <a:extLst>
+              <a:ext uri="{FF2B5EF4-FFF2-40B4-BE49-F238E27FC236}">
+                <a16:creationId xmlns:a16="http://schemas.microsoft.com/office/drawing/2014/main" id="{23FF9676-A75A-6AB8-50C5-C4EED7B6A7C1}"/>
+              </a:ext>
+            </a:extLst>
+          </p:cNvPr>
+          <p:cNvSpPr>
+            <a:spLocks noGrp="1"/>
+          </p:cNvSpPr>
+          <p:nvPr>
+            <p:ph type="title"/>
+          </p:nvPr>
+        </p:nvSpPr>
+        <p:spPr/>
+        <p:txBody>
+          <a:bodyPr/>
+          <a:lstStyle/>
+          <a:p>
+            <a:r>
+              <a:rPr lang="de-DE" sz="3200" dirty="0"/>
+              <a:t>Train-, Dev- und Testsplit</a:t>
+            </a:r>
+            <a:endParaRPr lang="de-DE" dirty="0"/>
+          </a:p>
+        </p:txBody>
+      </p:sp>
+      <p:sp>
+        <p:nvSpPr>
+          <p:cNvPr id="7" name="Fußzeilenplatzhalter 6">
+            <a:extLst>
+              <a:ext uri="{FF2B5EF4-FFF2-40B4-BE49-F238E27FC236}">
+                <a16:creationId xmlns:a16="http://schemas.microsoft.com/office/drawing/2014/main" id="{6F3361E2-F2B2-2257-211E-2EC99788AC7F}"/>
+              </a:ext>
+            </a:extLst>
+          </p:cNvPr>
+          <p:cNvSpPr>
+            <a:spLocks noGrp="1"/>
+          </p:cNvSpPr>
+          <p:nvPr>
+            <p:ph type="ftr" sz="quarter" idx="11"/>
+          </p:nvPr>
+        </p:nvSpPr>
+        <p:spPr/>
+        <p:txBody>
+          <a:bodyPr/>
+          <a:lstStyle/>
+          <a:p>
+            <a:r>
+              <a:rPr lang="de-DE"/>
+              <a:t>Materialdiagnostik: Task 3</a:t>
+            </a:r>
+            <a:endParaRPr lang="de-DE" dirty="0"/>
+          </a:p>
+        </p:txBody>
+      </p:sp>
+      <p:sp>
+        <p:nvSpPr>
+          <p:cNvPr id="2" name="Datumsplatzhalter 1">
+            <a:extLst>
+              <a:ext uri="{FF2B5EF4-FFF2-40B4-BE49-F238E27FC236}">
+                <a16:creationId xmlns:a16="http://schemas.microsoft.com/office/drawing/2014/main" id="{BE9FD257-CB15-1E41-8906-263322E6C4EE}"/>
+              </a:ext>
+            </a:extLst>
+          </p:cNvPr>
+          <p:cNvSpPr>
+            <a:spLocks noGrp="1"/>
+          </p:cNvSpPr>
+          <p:nvPr>
+            <p:ph type="dt" sz="half" idx="12"/>
+          </p:nvPr>
+        </p:nvSpPr>
+        <p:spPr/>
+        <p:txBody>
+          <a:bodyPr/>
+          <a:lstStyle/>
+          <a:p>
+            <a:r>
+              <a:rPr lang="de-DE"/>
+              <a:t>16.07.2026</a:t>
+            </a:r>
           </a:p>
         </p:txBody>
       </p:sp>
       <p:pic>
         <p:nvPicPr>
-          <p:cNvPr id="3" name="Inhaltsplatzhalter 2">
-            <a:extLst>
-              <a:ext uri="{FF2B5EF4-FFF2-40B4-BE49-F238E27FC236}">
-                <a16:creationId xmlns:a16="http://schemas.microsoft.com/office/drawing/2014/main" id="{B45411E6-140F-B59E-A64B-D3B346EC85B1}"/>
+          <p:cNvPr id="9" name="Inhaltsplatzhalter 8">
+            <a:extLst>
+              <a:ext uri="{FF2B5EF4-FFF2-40B4-BE49-F238E27FC236}">
+                <a16:creationId xmlns:a16="http://schemas.microsoft.com/office/drawing/2014/main" id="{5AD18B85-441C-A6ED-1F44-169EB76A5913}"/>
               </a:ext>
             </a:extLst>
           </p:cNvPr>
@@ -9320,134 +11181,147 @@
             <p:ph sz="quarter" idx="13"/>
           </p:nvPr>
         </p:nvPicPr>
-        <p:blipFill rotWithShape="1">
+        <p:blipFill>
           <a:blip r:embed="rId3"/>
-          <a:srcRect t="53112"/>
           <a:stretch>
             <a:fillRect/>
           </a:stretch>
         </p:blipFill>
-        <p:spPr bwMode="auto">
+        <p:spPr>
           <a:xfrm>
-            <a:off x="343200" y="1650836"/>
-            <a:ext cx="11505600" cy="3556327"/>
+            <a:off x="341312" y="1942409"/>
+            <a:ext cx="6028951" cy="2973181"/>
           </a:xfrm>
           <a:prstGeom prst="rect">
             <a:avLst/>
           </a:prstGeom>
-          <a:noFill/>
-          <a:ln>
-            <a:noFill/>
-          </a:ln>
-          <a:extLst>
-            <a:ext uri="{909E8E84-426E-40DD-AFC4-6F175D3DCCD1}">
-              <a14:hiddenFill xmlns:a14="http://schemas.microsoft.com/office/drawing/2010/main">
-                <a:solidFill>
-                  <a:srgbClr val="FFFFFF"/>
-                </a:solidFill>
-              </a14:hiddenFill>
-            </a:ext>
-            <a:ext uri="{91240B29-F687-4F45-9708-019B960494DF}">
-              <a14:hiddenLine xmlns:a14="http://schemas.microsoft.com/office/drawing/2010/main" w="9525">
-                <a:solidFill>
-                  <a:srgbClr val="000000"/>
-                </a:solidFill>
-                <a:miter lim="800000"/>
-                <a:headEnd/>
-                <a:tailEnd/>
-              </a14:hiddenLine>
-            </a:ext>
-          </a:extLst>
         </p:spPr>
       </p:pic>
       <p:sp>
         <p:nvSpPr>
-          <p:cNvPr id="5" name="Titel 4">
-            <a:extLst>
-              <a:ext uri="{FF2B5EF4-FFF2-40B4-BE49-F238E27FC236}">
-                <a16:creationId xmlns:a16="http://schemas.microsoft.com/office/drawing/2014/main" id="{23FF9676-A75A-6AB8-50C5-C4EED7B6A7C1}"/>
-              </a:ext>
-            </a:extLst>
-          </p:cNvPr>
-          <p:cNvSpPr>
-            <a:spLocks noGrp="1"/>
-          </p:cNvSpPr>
-          <p:nvPr>
-            <p:ph type="title"/>
-          </p:nvPr>
-        </p:nvSpPr>
-        <p:spPr>
-          <a:xfrm>
-            <a:off x="341811" y="567600"/>
-            <a:ext cx="4544982" cy="706030"/>
-          </a:xfrm>
-        </p:spPr>
-        <p:txBody>
-          <a:bodyPr/>
-          <a:lstStyle/>
-          <a:p>
-            <a:r>
-              <a:rPr lang="de-DE" sz="3200" dirty="0"/>
-              <a:t>Explorative Datenanalyse</a:t>
-            </a:r>
+          <p:cNvPr id="10" name="Inhaltsplatzhalter 9">
+            <a:extLst>
+              <a:ext uri="{FF2B5EF4-FFF2-40B4-BE49-F238E27FC236}">
+                <a16:creationId xmlns:a16="http://schemas.microsoft.com/office/drawing/2014/main" id="{F6F33955-C302-D8CD-0F72-37CDC29CBBA0}"/>
+              </a:ext>
+            </a:extLst>
+          </p:cNvPr>
+          <p:cNvSpPr>
+            <a:spLocks noGrp="1"/>
+          </p:cNvSpPr>
+          <p:nvPr>
+            <p:ph sz="quarter" idx="14"/>
+          </p:nvPr>
+        </p:nvSpPr>
+        <p:spPr/>
+        <p:txBody>
+          <a:bodyPr/>
+          <a:lstStyle/>
+          <a:p>
+            <a:pPr marL="400050">
+              <a:buFont typeface="Arial" panose="020B0604020202020204" pitchFamily="34" charset="0"/>
+              <a:buChar char="•"/>
+            </a:pPr>
+            <a:r>
+              <a:rPr lang="de-DE" dirty="0"/>
+              <a:t>Train: </a:t>
+            </a:r>
+          </a:p>
+          <a:p>
+            <a:pPr lvl="1">
+              <a:buFont typeface="Arial" panose="020B0604020202020204" pitchFamily="34" charset="0"/>
+              <a:buChar char="•"/>
+            </a:pPr>
+            <a:r>
+              <a:rPr lang="de-DE" dirty="0"/>
+              <a:t>Z01, Z02 + </a:t>
+            </a:r>
+            <a:br>
+              <a:rPr lang="de-DE" dirty="0"/>
+            </a:br>
+            <a:r>
+              <a:rPr lang="de-DE" dirty="0"/>
+              <a:t>Z05-Positionen </a:t>
+            </a:r>
+            <a:br>
+              <a:rPr lang="de-DE" dirty="0"/>
+            </a:br>
+            <a:r>
+              <a:rPr lang="de-DE" dirty="0"/>
+              <a:t>Pos00, Pos01, Pos02, Pos04, Pos06, Pos08</a:t>
+            </a:r>
+          </a:p>
+          <a:p>
+            <a:pPr>
+              <a:buFont typeface="Arial" panose="020B0604020202020204" pitchFamily="34" charset="0"/>
+              <a:buChar char="•"/>
+            </a:pPr>
+            <a:r>
+              <a:rPr lang="de-DE" dirty="0"/>
+              <a:t>Dev:  </a:t>
+            </a:r>
+          </a:p>
+          <a:p>
+            <a:pPr lvl="1">
+              <a:buFont typeface="Arial" panose="020B0604020202020204" pitchFamily="34" charset="0"/>
+              <a:buChar char="•"/>
+            </a:pPr>
+            <a:r>
+              <a:rPr lang="de-DE" dirty="0"/>
+              <a:t>Z04      + Z05-Positionen Pos03, Pos05</a:t>
+            </a:r>
+          </a:p>
+          <a:p>
+            <a:pPr>
+              <a:buFont typeface="Arial" panose="020B0604020202020204" pitchFamily="34" charset="0"/>
+              <a:buChar char="•"/>
+            </a:pPr>
+            <a:r>
+              <a:rPr lang="de-DE" dirty="0"/>
+              <a:t>Test:  </a:t>
+            </a:r>
+          </a:p>
+          <a:p>
+            <a:pPr lvl="1">
+              <a:buFont typeface="Arial" panose="020B0604020202020204" pitchFamily="34" charset="0"/>
+              <a:buChar char="•"/>
+            </a:pPr>
+            <a:r>
+              <a:rPr lang="de-DE" dirty="0"/>
+              <a:t>Z03      + Z05-Positionen Pos07, Pos09</a:t>
+            </a:r>
+          </a:p>
+          <a:p>
             <a:endParaRPr lang="de-DE" dirty="0"/>
           </a:p>
         </p:txBody>
       </p:sp>
       <p:sp>
         <p:nvSpPr>
-          <p:cNvPr id="2" name="Datumsplatzhalter 1">
-            <a:extLst>
-              <a:ext uri="{FF2B5EF4-FFF2-40B4-BE49-F238E27FC236}">
-                <a16:creationId xmlns:a16="http://schemas.microsoft.com/office/drawing/2014/main" id="{BE9FD257-CB15-1E41-8906-263322E6C4EE}"/>
-              </a:ext>
-            </a:extLst>
-          </p:cNvPr>
-          <p:cNvSpPr>
-            <a:spLocks noGrp="1"/>
-          </p:cNvSpPr>
-          <p:nvPr>
-            <p:ph type="dt" sz="half" idx="12"/>
-          </p:nvPr>
-        </p:nvSpPr>
-        <p:spPr/>
-        <p:txBody>
-          <a:bodyPr/>
-          <a:lstStyle/>
-          <a:p>
-            <a:r>
-              <a:rPr lang="de-DE"/>
-              <a:t>25.06.2026</a:t>
-            </a:r>
-          </a:p>
-        </p:txBody>
-      </p:sp>
-      <p:sp>
-        <p:nvSpPr>
-          <p:cNvPr id="7" name="Fußzeilenplatzhalter 6">
-            <a:extLst>
-              <a:ext uri="{FF2B5EF4-FFF2-40B4-BE49-F238E27FC236}">
-                <a16:creationId xmlns:a16="http://schemas.microsoft.com/office/drawing/2014/main" id="{6F3361E2-F2B2-2257-211E-2EC99788AC7F}"/>
-              </a:ext>
-            </a:extLst>
-          </p:cNvPr>
-          <p:cNvSpPr>
-            <a:spLocks noGrp="1"/>
-          </p:cNvSpPr>
-          <p:nvPr>
-            <p:ph type="ftr" sz="quarter" idx="11"/>
-          </p:nvPr>
-        </p:nvSpPr>
-        <p:spPr/>
-        <p:txBody>
-          <a:bodyPr/>
-          <a:lstStyle/>
-          <a:p>
-            <a:r>
-              <a:rPr lang="de-DE"/>
-              <a:t>Materialdiagnostik: Task 2</a:t>
-            </a:r>
-            <a:endParaRPr lang="de-DE" dirty="0"/>
+          <p:cNvPr id="11" name="Foliennummernplatzhalter 10">
+            <a:extLst>
+              <a:ext uri="{FF2B5EF4-FFF2-40B4-BE49-F238E27FC236}">
+                <a16:creationId xmlns:a16="http://schemas.microsoft.com/office/drawing/2014/main" id="{156E314E-BF1C-F73F-2354-4146EF630ABE}"/>
+              </a:ext>
+            </a:extLst>
+          </p:cNvPr>
+          <p:cNvSpPr>
+            <a:spLocks noGrp="1"/>
+          </p:cNvSpPr>
+          <p:nvPr>
+            <p:ph type="sldNum" sz="quarter" idx="10"/>
+          </p:nvPr>
+        </p:nvSpPr>
+        <p:spPr/>
+        <p:txBody>
+          <a:bodyPr/>
+          <a:lstStyle/>
+          <a:p>
+            <a:fld id="{80B4FCE6-DC73-4135-BC56-1F242D45A84C}" type="slidenum">
+              <a:rPr lang="de-DE" smtClean="0"/>
+              <a:t>8</a:t>
+            </a:fld>
+            <a:endParaRPr lang="de-DE"/>
           </a:p>
         </p:txBody>
       </p:sp>
@@ -9489,70 +11363,6 @@
       </p:grpSpPr>
       <p:sp>
         <p:nvSpPr>
-          <p:cNvPr id="4" name="Foliennummernplatzhalter 3">
-            <a:extLst>
-              <a:ext uri="{FF2B5EF4-FFF2-40B4-BE49-F238E27FC236}">
-                <a16:creationId xmlns:a16="http://schemas.microsoft.com/office/drawing/2014/main" id="{F25C558F-068E-467F-FEA0-9A2B9590AB17}"/>
-              </a:ext>
-            </a:extLst>
-          </p:cNvPr>
-          <p:cNvSpPr>
-            <a:spLocks noGrp="1"/>
-          </p:cNvSpPr>
-          <p:nvPr>
-            <p:ph type="sldNum" sz="quarter" idx="10"/>
-          </p:nvPr>
-        </p:nvSpPr>
-        <p:spPr/>
-        <p:txBody>
-          <a:bodyPr/>
-          <a:lstStyle/>
-          <a:p>
-            <a:pPr>
-              <a:defRPr/>
-            </a:pPr>
-            <a:fld id="{A0424531-ACBB-43B0-9536-C2FB0D769E6C}" type="slidenum">
-              <a:rPr lang="de-DE" altLang="de-DE" smtClean="0"/>
-              <a:pPr>
-                <a:defRPr/>
-              </a:pPr>
-              <a:t>9</a:t>
-            </a:fld>
-            <a:endParaRPr lang="de-DE" altLang="de-DE" dirty="0"/>
-          </a:p>
-        </p:txBody>
-      </p:sp>
-      <p:pic>
-        <p:nvPicPr>
-          <p:cNvPr id="3" name="Inhaltsplatzhalter 2" descr="Ein Bild, das Text, Screenshot, Schrift enthält.&#10;&#10;KI-generierte Inhalte können fehlerhaft sein.">
-            <a:extLst>
-              <a:ext uri="{FF2B5EF4-FFF2-40B4-BE49-F238E27FC236}">
-                <a16:creationId xmlns:a16="http://schemas.microsoft.com/office/drawing/2014/main" id="{FA97D665-B2B0-6A98-0F8B-3D58A024C42B}"/>
-              </a:ext>
-            </a:extLst>
-          </p:cNvPr>
-          <p:cNvPicPr>
-            <a:picLocks noGrp="1" noChangeAspect="1"/>
-          </p:cNvPicPr>
-          <p:nvPr>
-            <p:ph sz="quarter" idx="13"/>
-          </p:nvPr>
-        </p:nvPicPr>
-        <p:blipFill rotWithShape="1">
-          <a:blip r:embed="rId3"/>
-          <a:stretch>
-            <a:fillRect/>
-          </a:stretch>
-        </p:blipFill>
-        <p:spPr>
-          <a:xfrm>
-            <a:off x="1162200" y="3048854"/>
-            <a:ext cx="9867600" cy="2914686"/>
-          </a:xfrm>
-        </p:spPr>
-      </p:pic>
-      <p:sp>
-        <p:nvSpPr>
           <p:cNvPr id="5" name="Titel 4">
             <a:extLst>
               <a:ext uri="{FF2B5EF4-FFF2-40B4-BE49-F238E27FC236}">
@@ -9581,7 +11391,7 @@
               <a:rPr lang="de-DE" sz="3200" dirty="0">
                 <a:ea typeface="ヒラギノ角ゴ Pro W3"/>
               </a:rPr>
-              <a:t>Hauptkomponentenanalyse</a:t>
+              <a:t>MLP-Modell</a:t>
             </a:r>
             <a:endParaRPr lang="de-DE" dirty="0"/>
           </a:p>
@@ -9604,7 +11414,7 @@
         <p:spPr bwMode="auto">
           <a:xfrm>
             <a:off x="341811" y="1509009"/>
-            <a:ext cx="9737766" cy="2105607"/>
+            <a:ext cx="8203099" cy="4250660"/>
           </a:xfrm>
           <a:prstGeom prst="rect">
             <a:avLst/>
@@ -9803,9 +11613,57 @@
             </a:pPr>
             <a:r>
               <a:rPr lang="de-DE" dirty="0"/>
-              <a:t>PCA fasst viele Merkmale in zwei Hauptachsen zusammen, die möglichst viel Varianz erklären. Dadurch können wir sehen, ob sich Zahnradzustände räumlich trennen.</a:t>
-            </a:r>
-            <a:endParaRPr lang="de-DE" kern="0" dirty="0"/>
+              <a:t>Pipeline je Channel:</a:t>
+            </a:r>
+          </a:p>
+          <a:p>
+            <a:pPr lvl="1">
+              <a:buFont typeface="Arial" panose="020B0604020202020204" pitchFamily="34" charset="0"/>
+              <a:buChar char="•"/>
+            </a:pPr>
+            <a:r>
+              <a:rPr lang="de-DE" dirty="0" err="1"/>
+              <a:t>StandardScaler</a:t>
+            </a:r>
+            <a:r>
+              <a:rPr lang="de-DE" dirty="0"/>
+              <a:t> -&gt; </a:t>
+            </a:r>
+            <a:r>
+              <a:rPr lang="de-DE" dirty="0" err="1"/>
+              <a:t>MLPClassifier</a:t>
+            </a:r>
+            <a:endParaRPr lang="de-DE" dirty="0"/>
+          </a:p>
+          <a:p>
+            <a:pPr>
+              <a:buFont typeface="Arial" panose="020B0604020202020204" pitchFamily="34" charset="0"/>
+              <a:buChar char="•"/>
+            </a:pPr>
+            <a:r>
+              <a:rPr lang="de-DE" dirty="0"/>
+              <a:t>Skalierung nur auf Training fitten</a:t>
+            </a:r>
+          </a:p>
+          <a:p>
+            <a:pPr>
+              <a:buFont typeface="Arial" panose="020B0604020202020204" pitchFamily="34" charset="0"/>
+              <a:buChar char="•"/>
+            </a:pPr>
+            <a:r>
+              <a:rPr lang="de-DE" dirty="0"/>
+              <a:t>Finale Features: nur Signalmerkmale des jeweiligen Channels</a:t>
+            </a:r>
+          </a:p>
+          <a:p>
+            <a:pPr>
+              <a:buFont typeface="Arial" panose="020B0604020202020204" pitchFamily="34" charset="0"/>
+              <a:buChar char="•"/>
+            </a:pPr>
+            <a:r>
+              <a:rPr lang="de-DE" dirty="0"/>
+              <a:t>Kleine Netze wegen kleinem Datensatz</a:t>
+            </a:r>
           </a:p>
         </p:txBody>
       </p:sp>
@@ -9832,7 +11690,7 @@
           <a:p>
             <a:r>
               <a:rPr lang="de-DE"/>
-              <a:t>25.06.2026</a:t>
+              <a:t>16.07.2026</a:t>
             </a:r>
           </a:p>
         </p:txBody>
@@ -9860,9 +11718,38 @@
           <a:p>
             <a:r>
               <a:rPr lang="de-DE"/>
-              <a:t>Materialdiagnostik: Task 2</a:t>
+              <a:t>Materialdiagnostik: Task 3</a:t>
             </a:r>
             <a:endParaRPr lang="de-DE" dirty="0"/>
+          </a:p>
+        </p:txBody>
+      </p:sp>
+      <p:sp>
+        <p:nvSpPr>
+          <p:cNvPr id="10" name="Foliennummernplatzhalter 9">
+            <a:extLst>
+              <a:ext uri="{FF2B5EF4-FFF2-40B4-BE49-F238E27FC236}">
+                <a16:creationId xmlns:a16="http://schemas.microsoft.com/office/drawing/2014/main" id="{774AB4C3-4602-6C57-8EB1-7749D74FE5AF}"/>
+              </a:ext>
+            </a:extLst>
+          </p:cNvPr>
+          <p:cNvSpPr>
+            <a:spLocks noGrp="1"/>
+          </p:cNvSpPr>
+          <p:nvPr>
+            <p:ph type="sldNum" sz="quarter" idx="10"/>
+          </p:nvPr>
+        </p:nvSpPr>
+        <p:spPr/>
+        <p:txBody>
+          <a:bodyPr/>
+          <a:lstStyle/>
+          <a:p>
+            <a:fld id="{80B4FCE6-DC73-4135-BC56-1F242D45A84C}" type="slidenum">
+              <a:rPr lang="de-DE" smtClean="0"/>
+              <a:t>9</a:t>
+            </a:fld>
+            <a:endParaRPr lang="de-DE"/>
           </a:p>
         </p:txBody>
       </p:sp>

--- a/Task_3/Task3Powerpoint.pptx
+++ b/Task_3/Task3Powerpoint.pptx
@@ -26,10 +26,10 @@
     <p:sldId id="278" r:id="rId14"/>
     <p:sldId id="272" r:id="rId15"/>
     <p:sldId id="279" r:id="rId16"/>
-    <p:sldId id="273" r:id="rId17"/>
-    <p:sldId id="274" r:id="rId18"/>
-    <p:sldId id="275" r:id="rId19"/>
-    <p:sldId id="276" r:id="rId20"/>
+    <p:sldId id="280" r:id="rId17"/>
+    <p:sldId id="273" r:id="rId18"/>
+    <p:sldId id="274" r:id="rId19"/>
+    <p:sldId id="275" r:id="rId20"/>
     <p:sldId id="277" r:id="rId21"/>
   </p:sldIdLst>
   <p:sldSz cx="12192000" cy="6858000"/>
@@ -275,7 +275,7 @@
           <a:p>
             <a:fld id="{75AB4CA9-CCE6-4DE5-84AD-E1F7B6CB5CBB}" type="datetimeFigureOut">
               <a:rPr lang="de-DE" smtClean="0"/>
-              <a:t>07.07.2026</a:t>
+              <a:t>09.07.2026</a:t>
             </a:fld>
             <a:endParaRPr lang="de-DE"/>
           </a:p>
@@ -452,7 +452,7 @@
           <a:p>
             <a:fld id="{52D5829F-2F94-0B44-A96D-AE852A87AC61}" type="datetimeFigureOut">
               <a:rPr lang="de-DE" smtClean="0"/>
-              <a:t>07.07.2026</a:t>
+              <a:t>09.07.2026</a:t>
             </a:fld>
             <a:endParaRPr lang="de-DE"/>
           </a:p>
@@ -770,10 +770,7 @@
           <a:bodyPr/>
           <a:lstStyle/>
           <a:p>
-            <a:r>
-              <a:rPr lang="de-DE" dirty="0"/>
-              <a:t>D</a:t>
-            </a:r>
+            <a:endParaRPr lang="de-DE" dirty="0"/>
           </a:p>
           <a:p>
             <a:endParaRPr lang="de-DE" dirty="0"/>
@@ -1653,7 +1650,13 @@
   <p:cSld>
     <p:spTree>
       <p:nvGrpSpPr>
-        <p:cNvPr id="1" name=""/>
+        <p:cNvPr id="1" name="">
+          <a:extLst>
+            <a:ext uri="{FF2B5EF4-FFF2-40B4-BE49-F238E27FC236}">
+              <a16:creationId xmlns:a16="http://schemas.microsoft.com/office/drawing/2014/main" id="{D796223C-46EC-F132-120C-79DCC285922F}"/>
+            </a:ext>
+          </a:extLst>
+        </p:cNvPr>
         <p:cNvGrpSpPr/>
         <p:nvPr/>
       </p:nvGrpSpPr>
@@ -1667,7 +1670,13 @@
       </p:grpSpPr>
       <p:sp>
         <p:nvSpPr>
-          <p:cNvPr id="2" name="Folienbildplatzhalter 1"/>
+          <p:cNvPr id="2" name="Folienbildplatzhalter 1">
+            <a:extLst>
+              <a:ext uri="{FF2B5EF4-FFF2-40B4-BE49-F238E27FC236}">
+                <a16:creationId xmlns:a16="http://schemas.microsoft.com/office/drawing/2014/main" id="{B31AB49A-A181-E6C4-52A9-32F54132F86C}"/>
+              </a:ext>
+            </a:extLst>
+          </p:cNvPr>
           <p:cNvSpPr>
             <a:spLocks noGrp="1" noRot="1" noChangeAspect="1"/>
           </p:cNvSpPr>
@@ -1686,7 +1695,13 @@
       </p:sp>
       <p:sp>
         <p:nvSpPr>
-          <p:cNvPr id="3" name="Notizenplatzhalter 2"/>
+          <p:cNvPr id="3" name="Notizenplatzhalter 2">
+            <a:extLst>
+              <a:ext uri="{FF2B5EF4-FFF2-40B4-BE49-F238E27FC236}">
+                <a16:creationId xmlns:a16="http://schemas.microsoft.com/office/drawing/2014/main" id="{1A1B5407-2556-B13C-8BA6-1F2CF5FC46B8}"/>
+              </a:ext>
+            </a:extLst>
+          </p:cNvPr>
           <p:cNvSpPr>
             <a:spLocks noGrp="1"/>
           </p:cNvSpPr>
@@ -1700,15 +1715,77 @@
           <a:lstStyle/>
           <a:p>
             <a:r>
-              <a:rPr lang="de-DE" dirty="0"/>
-              <a:t>B</a:t>
-            </a:r>
-          </a:p>
-        </p:txBody>
-      </p:sp>
-      <p:sp>
-        <p:nvSpPr>
-          <p:cNvPr id="4" name="Foliennummernplatzhalter 3"/>
+              <a:rPr lang="de-DE" sz="1200" b="0" kern="1200" dirty="0">
+                <a:solidFill>
+                  <a:schemeClr val="tx1"/>
+                </a:solidFill>
+                <a:effectLst/>
+                <a:latin typeface="+mn-lt"/>
+                <a:ea typeface="+mn-ea"/>
+                <a:cs typeface="+mn-cs"/>
+              </a:rPr>
+              <a:t>Die </a:t>
+            </a:r>
+            <a:r>
+              <a:rPr lang="de-DE" sz="1200" b="0" kern="1200" dirty="0" err="1">
+                <a:solidFill>
+                  <a:schemeClr val="tx1"/>
+                </a:solidFill>
+                <a:effectLst/>
+                <a:latin typeface="+mn-lt"/>
+                <a:ea typeface="+mn-ea"/>
+                <a:cs typeface="+mn-cs"/>
+              </a:rPr>
+              <a:t>Confusion</a:t>
+            </a:r>
+            <a:r>
+              <a:rPr lang="de-DE" sz="1200" b="0" kern="1200" dirty="0">
+                <a:solidFill>
+                  <a:schemeClr val="tx1"/>
+                </a:solidFill>
+                <a:effectLst/>
+                <a:latin typeface="+mn-lt"/>
+                <a:ea typeface="+mn-ea"/>
+                <a:cs typeface="+mn-cs"/>
+              </a:rPr>
+              <a:t> Matrix zeigt, dass im aktuellen Testsatz alle Beispiele korrekt klassifiziert wurden. Besonders wichtig ist der Recall </a:t>
+            </a:r>
+            <a:r>
+              <a:rPr lang="de-DE" sz="1200" b="0" kern="1200" dirty="0" err="1">
+                <a:solidFill>
+                  <a:schemeClr val="tx1"/>
+                </a:solidFill>
+                <a:effectLst/>
+                <a:latin typeface="+mn-lt"/>
+                <a:ea typeface="+mn-ea"/>
+                <a:cs typeface="+mn-cs"/>
+              </a:rPr>
+              <a:t>fuer</a:t>
+            </a:r>
+            <a:r>
+              <a:rPr lang="de-DE" sz="1200" b="0" kern="1200" dirty="0">
+                <a:solidFill>
+                  <a:schemeClr val="tx1"/>
+                </a:solidFill>
+                <a:effectLst/>
+                <a:latin typeface="+mn-lt"/>
+                <a:ea typeface="+mn-ea"/>
+                <a:cs typeface="+mn-cs"/>
+              </a:rPr>
+              <a:t> Klasse 0, also für beschädigte Signale. Dieser ist hier 1.0. Trotzdem müssen wir das Ergebnis kritisch einordnen, weil der Datensatz klein ist.</a:t>
+            </a:r>
+          </a:p>
+        </p:txBody>
+      </p:sp>
+      <p:sp>
+        <p:nvSpPr>
+          <p:cNvPr id="4" name="Foliennummernplatzhalter 3">
+            <a:extLst>
+              <a:ext uri="{FF2B5EF4-FFF2-40B4-BE49-F238E27FC236}">
+                <a16:creationId xmlns:a16="http://schemas.microsoft.com/office/drawing/2014/main" id="{71FC3C16-880E-E124-F68B-73B6A73B0C69}"/>
+              </a:ext>
+            </a:extLst>
+          </p:cNvPr>
           <p:cNvSpPr>
             <a:spLocks noGrp="1"/>
           </p:cNvSpPr>
@@ -1732,7 +1809,7 @@
     </p:spTree>
     <p:extLst>
       <p:ext uri="{BB962C8B-B14F-4D97-AF65-F5344CB8AC3E}">
-        <p14:creationId xmlns:p14="http://schemas.microsoft.com/office/powerpoint/2010/main" val="3954313880"/>
+        <p14:creationId xmlns:p14="http://schemas.microsoft.com/office/powerpoint/2010/main" val="2066585660"/>
       </p:ext>
     </p:extLst>
   </p:cSld>
@@ -1794,8 +1871,64 @@
           <a:lstStyle/>
           <a:p>
             <a:r>
-              <a:rPr lang="de-DE" dirty="0"/>
-              <a:t>B</a:t>
+              <a:rPr lang="de-DE" sz="1200" b="0" kern="1200" dirty="0">
+                <a:solidFill>
+                  <a:schemeClr val="tx1"/>
+                </a:solidFill>
+                <a:effectLst/>
+                <a:latin typeface="+mn-lt"/>
+                <a:ea typeface="+mn-ea"/>
+                <a:cs typeface="+mn-cs"/>
+              </a:rPr>
+              <a:t>Die ROC-Kurve zeigt, wie gut das Modell zwischen </a:t>
+            </a:r>
+            <a:r>
+              <a:rPr lang="de-DE" sz="1200" b="0" kern="1200" dirty="0" err="1">
+                <a:solidFill>
+                  <a:schemeClr val="tx1"/>
+                </a:solidFill>
+                <a:effectLst/>
+                <a:latin typeface="+mn-lt"/>
+                <a:ea typeface="+mn-ea"/>
+                <a:cs typeface="+mn-cs"/>
+              </a:rPr>
+              <a:t>beschaedigt</a:t>
+            </a:r>
+            <a:r>
+              <a:rPr lang="de-DE" sz="1200" b="0" kern="1200" dirty="0">
+                <a:solidFill>
+                  <a:schemeClr val="tx1"/>
+                </a:solidFill>
+                <a:effectLst/>
+                <a:latin typeface="+mn-lt"/>
+                <a:ea typeface="+mn-ea"/>
+                <a:cs typeface="+mn-cs"/>
+              </a:rPr>
+              <a:t> und gut trennt, wenn man den Entscheidungsschwellwert </a:t>
+            </a:r>
+            <a:r>
+              <a:rPr lang="de-DE" sz="1200" b="0" kern="1200" dirty="0" err="1">
+                <a:solidFill>
+                  <a:schemeClr val="tx1"/>
+                </a:solidFill>
+                <a:effectLst/>
+                <a:latin typeface="+mn-lt"/>
+                <a:ea typeface="+mn-ea"/>
+                <a:cs typeface="+mn-cs"/>
+              </a:rPr>
+              <a:t>veraendert</a:t>
+            </a:r>
+            <a:r>
+              <a:rPr lang="de-DE" sz="1200" b="0" kern="1200" dirty="0">
+                <a:solidFill>
+                  <a:schemeClr val="tx1"/>
+                </a:solidFill>
+                <a:effectLst/>
+                <a:latin typeface="+mn-lt"/>
+                <a:ea typeface="+mn-ea"/>
+                <a:cs typeface="+mn-cs"/>
+              </a:rPr>
+              <a:t>. Eine AUC von 1.0 bedeutet perfekte Trennung im aktuellen Testsatz. Auch hier gilt: Das ist ein starkes Ergebnis, aber wegen der Datenlage vorsichtig zu interpretieren.</a:t>
             </a:r>
           </a:p>
         </p:txBody>
@@ -1826,7 +1959,7 @@
     </p:spTree>
     <p:extLst>
       <p:ext uri="{BB962C8B-B14F-4D97-AF65-F5344CB8AC3E}">
-        <p14:creationId xmlns:p14="http://schemas.microsoft.com/office/powerpoint/2010/main" val="2265726828"/>
+        <p14:creationId xmlns:p14="http://schemas.microsoft.com/office/powerpoint/2010/main" val="3954313880"/>
       </p:ext>
     </p:extLst>
   </p:cSld>
@@ -1887,10 +2020,38 @@
           <a:bodyPr/>
           <a:lstStyle/>
           <a:p>
-            <a:r>
-              <a:rPr lang="de-DE" dirty="0"/>
-              <a:t>V</a:t>
-            </a:r>
+            <a:pPr marL="0" marR="0" lvl="0" indent="0" algn="l" defTabSz="914400" rtl="0" eaLnBrk="1" fontAlgn="auto" latinLnBrk="0" hangingPunct="1">
+              <a:lnSpc>
+                <a:spcPct val="100000"/>
+              </a:lnSpc>
+              <a:spcBef>
+                <a:spcPts val="0"/>
+              </a:spcBef>
+              <a:spcAft>
+                <a:spcPts val="0"/>
+              </a:spcAft>
+              <a:buClrTx/>
+              <a:buSzTx/>
+              <a:buFontTx/>
+              <a:buNone/>
+              <a:tabLst/>
+              <a:defRPr/>
+            </a:pPr>
+            <a:r>
+              <a:rPr lang="de-DE" sz="1200" b="0" kern="1200" dirty="0">
+                <a:solidFill>
+                  <a:schemeClr val="tx1"/>
+                </a:solidFill>
+                <a:effectLst/>
+                <a:latin typeface="+mn-lt"/>
+                <a:ea typeface="+mn-ea"/>
+                <a:cs typeface="+mn-cs"/>
+              </a:rPr>
+              <a:t>Der wichtigste Diskussionsteil ist die Einordnung. Der neue Split prüft die guten Zahnräder strenger, weil `Z03` im Test nicht im Training vorkommt. Für die beschädigte Klasse bleibt die Aussage begrenzt, weil alle beschädigten Signale aus `Z05` stammen. Für eine robuste Aussage bräuchte man weitere beschädigte Zahnräder.</a:t>
+            </a:r>
+          </a:p>
+          <a:p>
+            <a:endParaRPr lang="de-DE" dirty="0"/>
           </a:p>
         </p:txBody>
       </p:sp>
@@ -1920,7 +2081,7 @@
     </p:spTree>
     <p:extLst>
       <p:ext uri="{BB962C8B-B14F-4D97-AF65-F5344CB8AC3E}">
-        <p14:creationId xmlns:p14="http://schemas.microsoft.com/office/powerpoint/2010/main" val="3001266698"/>
+        <p14:creationId xmlns:p14="http://schemas.microsoft.com/office/powerpoint/2010/main" val="2265726828"/>
       </p:ext>
     </p:extLst>
   </p:cSld>
@@ -1999,8 +2160,40 @@
               <a:defRPr/>
             </a:pPr>
             <a:r>
-              <a:rPr lang="de-DE" dirty="0"/>
-              <a:t>V</a:t>
+              <a:rPr lang="de-DE" sz="1200" b="0" kern="1200" dirty="0">
+                <a:solidFill>
+                  <a:schemeClr val="tx1"/>
+                </a:solidFill>
+                <a:effectLst/>
+                <a:latin typeface="+mn-lt"/>
+                <a:ea typeface="+mn-ea"/>
+                <a:cs typeface="+mn-cs"/>
+              </a:rPr>
+              <a:t>Zusammenfassend haben wir eine vollständige Klassifikationspipeline aufgebaut. Die wichtigsten methodischen Entscheidungen waren die Feature-Mittelung über `</a:t>
+            </a:r>
+            <a:r>
+              <a:rPr lang="de-DE" sz="1200" b="0" kern="1200" dirty="0" err="1">
+                <a:solidFill>
+                  <a:schemeClr val="tx1"/>
+                </a:solidFill>
+                <a:effectLst/>
+                <a:latin typeface="+mn-lt"/>
+                <a:ea typeface="+mn-ea"/>
+                <a:cs typeface="+mn-cs"/>
+              </a:rPr>
+              <a:t>mID</a:t>
+            </a:r>
+            <a:r>
+              <a:rPr lang="de-DE" sz="1200" b="0" kern="1200" dirty="0">
+                <a:solidFill>
+                  <a:schemeClr val="tx1"/>
+                </a:solidFill>
+                <a:effectLst/>
+                <a:latin typeface="+mn-lt"/>
+                <a:ea typeface="+mn-ea"/>
+                <a:cs typeface="+mn-cs"/>
+              </a:rPr>
+              <a:t>`, der zahnradbasierte Split und zwei getrennte Modelle für `Ch1` und `Ch2`. Das Ergebnis ist sehr gut, muss aber wegen der begrenzten Datenbasis kritisch diskutiert werden. Für eine robustere Aussage wären weitere beschädigte Zahnräder notwendig.</a:t>
             </a:r>
           </a:p>
           <a:p>
@@ -2034,7 +2227,7 @@
     </p:spTree>
     <p:extLst>
       <p:ext uri="{BB962C8B-B14F-4D97-AF65-F5344CB8AC3E}">
-        <p14:creationId xmlns:p14="http://schemas.microsoft.com/office/powerpoint/2010/main" val="1794829908"/>
+        <p14:creationId xmlns:p14="http://schemas.microsoft.com/office/powerpoint/2010/main" val="3001266698"/>
       </p:ext>
     </p:extLst>
   </p:cSld>
@@ -2095,42 +2288,15 @@
           <a:bodyPr/>
           <a:lstStyle/>
           <a:p>
-            <a:r>
-              <a:rPr lang="de-DE" sz="1200" b="0" kern="1200" dirty="0">
-                <a:solidFill>
-                  <a:schemeClr val="tx1"/>
-                </a:solidFill>
-                <a:effectLst/>
-                <a:latin typeface="+mn-lt"/>
-                <a:ea typeface="+mn-ea"/>
-                <a:cs typeface="+mn-cs"/>
-              </a:rPr>
-              <a:t>Die Verarbeitung ist in mehrere Module aufgeteilt. `dataframe_manager.py` lädt Signale und Metadaten. Danach ordnet `split.py` jede Roh-datei anhand der Zahnrad-ID und bei `Z05` anhand fester Positionen Train, Entwicklung oder Test zu. `extraction.py` berechnet die Merkmale pro Datei. In `main.py` werden diese Merkmale anschließend über alle `</a:t>
-            </a:r>
-            <a:r>
-              <a:rPr lang="de-DE" sz="1200" b="0" kern="1200" dirty="0" err="1">
-                <a:solidFill>
-                  <a:schemeClr val="tx1"/>
-                </a:solidFill>
-                <a:effectLst/>
-                <a:latin typeface="+mn-lt"/>
-                <a:ea typeface="+mn-ea"/>
-                <a:cs typeface="+mn-cs"/>
-              </a:rPr>
-              <a:t>mID</a:t>
-            </a:r>
-            <a:r>
-              <a:rPr lang="de-DE" sz="1200" b="0" kern="1200" dirty="0">
-                <a:solidFill>
-                  <a:schemeClr val="tx1"/>
-                </a:solidFill>
-                <a:effectLst/>
-                <a:latin typeface="+mn-lt"/>
-                <a:ea typeface="+mn-ea"/>
-                <a:cs typeface="+mn-cs"/>
-              </a:rPr>
-              <a:t>` derselben Messsituation gemittelt.</a:t>
-            </a:r>
+            <a:endParaRPr lang="de-DE" sz="1200" b="0" kern="1200" dirty="0">
+              <a:solidFill>
+                <a:schemeClr val="tx1"/>
+              </a:solidFill>
+              <a:effectLst/>
+              <a:latin typeface="+mn-lt"/>
+              <a:ea typeface="+mn-ea"/>
+              <a:cs typeface="+mn-cs"/>
+            </a:endParaRPr>
           </a:p>
         </p:txBody>
       </p:sp>
@@ -2238,10 +2404,7 @@
               <a:tabLst/>
               <a:defRPr/>
             </a:pPr>
-            <a:r>
-              <a:rPr lang="de-DE" dirty="0"/>
-              <a:t>V</a:t>
-            </a:r>
+            <a:endParaRPr lang="de-DE" dirty="0"/>
           </a:p>
           <a:p>
             <a:endParaRPr lang="de-DE" dirty="0"/>
@@ -7959,7 +8122,7 @@
         <p:cNvPr id="1" name="">
           <a:extLst>
             <a:ext uri="{FF2B5EF4-FFF2-40B4-BE49-F238E27FC236}">
-              <a16:creationId xmlns:a16="http://schemas.microsoft.com/office/drawing/2014/main" id="{487AAFDA-5709-6898-CE4E-940E6A34EADE}"/>
+              <a16:creationId xmlns:a16="http://schemas.microsoft.com/office/drawing/2014/main" id="{8493E163-6174-0335-CC5D-4CCB2676747C}"/>
             </a:ext>
           </a:extLst>
         </p:cNvPr>
@@ -7976,717 +8139,32 @@
       </p:grpSpPr>
       <p:sp>
         <p:nvSpPr>
-          <p:cNvPr id="2" name="Titel 1">
-            <a:extLst>
-              <a:ext uri="{FF2B5EF4-FFF2-40B4-BE49-F238E27FC236}">
-                <a16:creationId xmlns:a16="http://schemas.microsoft.com/office/drawing/2014/main" id="{11DF8090-BADC-27B4-F673-12947654E7F5}"/>
-              </a:ext>
-            </a:extLst>
-          </p:cNvPr>
-          <p:cNvSpPr>
-            <a:spLocks noGrp="1"/>
-          </p:cNvSpPr>
-          <p:nvPr>
-            <p:ph type="title"/>
-          </p:nvPr>
-        </p:nvSpPr>
-        <p:spPr>
+          <p:cNvPr id="13" name="Rechteck: eine Ecke abgerundet 12">
+            <a:extLst>
+              <a:ext uri="{FF2B5EF4-FFF2-40B4-BE49-F238E27FC236}">
+                <a16:creationId xmlns:a16="http://schemas.microsoft.com/office/drawing/2014/main" id="{F8E8A0BF-6C91-BB25-F574-EF1EB3FFC47E}"/>
+              </a:ext>
+            </a:extLst>
+          </p:cNvPr>
+          <p:cNvSpPr/>
+          <p:nvPr/>
+        </p:nvSpPr>
+        <p:spPr bwMode="auto">
           <a:xfrm>
-            <a:off x="341810" y="567600"/>
-            <a:ext cx="5354451" cy="706030"/>
+            <a:off x="6459536" y="1740625"/>
+            <a:ext cx="750559" cy="704193"/>
           </a:xfrm>
-        </p:spPr>
-        <p:txBody>
-          <a:bodyPr/>
-          <a:lstStyle/>
-          <a:p>
-            <a:r>
-              <a:rPr lang="de-DE" sz="3200" dirty="0"/>
-              <a:t>Visualisierung</a:t>
-            </a:r>
-            <a:br>
-              <a:rPr lang="de-DE" dirty="0"/>
-            </a:br>
-            <a:r>
-              <a:rPr lang="de-DE" sz="2400" dirty="0"/>
-              <a:t>Durchschnitts-Methode mit beiden „</a:t>
-            </a:r>
-            <a:r>
-              <a:rPr lang="de-DE" sz="2400" dirty="0" err="1"/>
-              <a:t>rID</a:t>
-            </a:r>
-            <a:r>
-              <a:rPr lang="de-DE" sz="2400" dirty="0"/>
-              <a:t>“</a:t>
-            </a:r>
-            <a:endParaRPr lang="de-DE" dirty="0"/>
-          </a:p>
-        </p:txBody>
-      </p:sp>
-      <p:pic>
-        <p:nvPicPr>
-          <p:cNvPr id="5" name="Grafik 4">
-            <a:extLst>
-              <a:ext uri="{FF2B5EF4-FFF2-40B4-BE49-F238E27FC236}">
-                <a16:creationId xmlns:a16="http://schemas.microsoft.com/office/drawing/2014/main" id="{C977AD44-41FF-8C67-A8C2-47E0CA46A5AC}"/>
-              </a:ext>
-            </a:extLst>
-          </p:cNvPr>
-          <p:cNvPicPr>
-            <a:picLocks noChangeAspect="1"/>
-          </p:cNvPicPr>
-          <p:nvPr/>
-        </p:nvPicPr>
-        <p:blipFill>
-          <a:blip r:embed="rId3"/>
-          <a:srcRect l="67" t="74907" r="-67" b="111"/>
-          <a:stretch>
-            <a:fillRect/>
-          </a:stretch>
-        </p:blipFill>
-        <p:spPr>
-          <a:xfrm>
-            <a:off x="343200" y="1360800"/>
-            <a:ext cx="11505600" cy="5122398"/>
-          </a:xfrm>
-          <a:prstGeom prst="rect">
+          <a:prstGeom prst="round1Rect">
             <a:avLst/>
           </a:prstGeom>
-        </p:spPr>
-      </p:pic>
-      <p:sp>
-        <p:nvSpPr>
-          <p:cNvPr id="6" name="Datumsplatzhalter 5">
-            <a:extLst>
-              <a:ext uri="{FF2B5EF4-FFF2-40B4-BE49-F238E27FC236}">
-                <a16:creationId xmlns:a16="http://schemas.microsoft.com/office/drawing/2014/main" id="{9CD15804-53A8-F6A6-4020-8B7067A69EC8}"/>
-              </a:ext>
-            </a:extLst>
-          </p:cNvPr>
-          <p:cNvSpPr>
-            <a:spLocks noGrp="1"/>
-          </p:cNvSpPr>
-          <p:nvPr>
-            <p:ph type="dt" sz="half" idx="12"/>
-          </p:nvPr>
-        </p:nvSpPr>
-        <p:spPr/>
-        <p:txBody>
-          <a:bodyPr/>
-          <a:lstStyle/>
-          <a:p>
-            <a:r>
-              <a:rPr lang="de-DE"/>
-              <a:t>16.07.2026</a:t>
-            </a:r>
-          </a:p>
-        </p:txBody>
-      </p:sp>
-      <p:sp>
-        <p:nvSpPr>
-          <p:cNvPr id="7" name="Fußzeilenplatzhalter 6">
-            <a:extLst>
-              <a:ext uri="{FF2B5EF4-FFF2-40B4-BE49-F238E27FC236}">
-                <a16:creationId xmlns:a16="http://schemas.microsoft.com/office/drawing/2014/main" id="{61398641-4C2C-6031-67B2-033E0BC9BEAF}"/>
-              </a:ext>
-            </a:extLst>
-          </p:cNvPr>
-          <p:cNvSpPr>
-            <a:spLocks noGrp="1"/>
-          </p:cNvSpPr>
-          <p:nvPr>
-            <p:ph type="ftr" sz="quarter" idx="11"/>
-          </p:nvPr>
-        </p:nvSpPr>
-        <p:spPr/>
-        <p:txBody>
-          <a:bodyPr/>
-          <a:lstStyle/>
-          <a:p>
-            <a:r>
-              <a:rPr lang="de-DE"/>
-              <a:t>Materialdiagnostik: Task 3</a:t>
-            </a:r>
-            <a:endParaRPr lang="de-DE" dirty="0"/>
-          </a:p>
-        </p:txBody>
-      </p:sp>
-      <p:sp>
-        <p:nvSpPr>
-          <p:cNvPr id="3" name="Foliennummernplatzhalter 2">
-            <a:extLst>
-              <a:ext uri="{FF2B5EF4-FFF2-40B4-BE49-F238E27FC236}">
-                <a16:creationId xmlns:a16="http://schemas.microsoft.com/office/drawing/2014/main" id="{86D9B423-944C-1C30-B5CC-D3E5B59E7598}"/>
-              </a:ext>
-            </a:extLst>
-          </p:cNvPr>
-          <p:cNvSpPr>
-            <a:spLocks noGrp="1"/>
-          </p:cNvSpPr>
-          <p:nvPr>
-            <p:ph type="sldNum" sz="quarter" idx="10"/>
-          </p:nvPr>
-        </p:nvSpPr>
-        <p:spPr/>
-        <p:txBody>
-          <a:bodyPr/>
-          <a:lstStyle/>
-          <a:p>
-            <a:fld id="{80B4FCE6-DC73-4135-BC56-1F242D45A84C}" type="slidenum">
-              <a:rPr lang="de-DE" smtClean="0"/>
-              <a:t>16</a:t>
-            </a:fld>
-            <a:endParaRPr lang="de-DE"/>
-          </a:p>
-        </p:txBody>
-      </p:sp>
-    </p:spTree>
-    <p:extLst>
-      <p:ext uri="{BB962C8B-B14F-4D97-AF65-F5344CB8AC3E}">
-        <p14:creationId xmlns:p14="http://schemas.microsoft.com/office/powerpoint/2010/main" val="2916641920"/>
-      </p:ext>
-    </p:extLst>
-  </p:cSld>
-  <p:clrMapOvr>
-    <a:masterClrMapping/>
-  </p:clrMapOvr>
-</p:sld>
-</file>
-
-<file path=ppt/slides/slide17.xml><?xml version="1.0" encoding="utf-8"?>
-<p:sld xmlns:a="http://schemas.openxmlformats.org/drawingml/2006/main" xmlns:r="http://schemas.openxmlformats.org/officeDocument/2006/relationships" xmlns:p="http://schemas.openxmlformats.org/presentationml/2006/main">
-  <p:cSld>
-    <p:spTree>
-      <p:nvGrpSpPr>
-        <p:cNvPr id="1" name="">
-          <a:extLst>
-            <a:ext uri="{FF2B5EF4-FFF2-40B4-BE49-F238E27FC236}">
-              <a16:creationId xmlns:a16="http://schemas.microsoft.com/office/drawing/2014/main" id="{29BA22DC-F88E-99AF-A1B7-63C4E1E70CFE}"/>
-            </a:ext>
-          </a:extLst>
-        </p:cNvPr>
-        <p:cNvGrpSpPr/>
-        <p:nvPr/>
-      </p:nvGrpSpPr>
-      <p:grpSpPr>
-        <a:xfrm>
-          <a:off x="0" y="0"/>
-          <a:ext cx="0" cy="0"/>
-          <a:chOff x="0" y="0"/>
-          <a:chExt cx="0" cy="0"/>
-        </a:xfrm>
-      </p:grpSpPr>
-      <p:sp>
-        <p:nvSpPr>
-          <p:cNvPr id="2" name="Titel 1">
-            <a:extLst>
-              <a:ext uri="{FF2B5EF4-FFF2-40B4-BE49-F238E27FC236}">
-                <a16:creationId xmlns:a16="http://schemas.microsoft.com/office/drawing/2014/main" id="{6697FF2F-4ABD-DBF1-1A9F-CD59B441583D}"/>
-              </a:ext>
-            </a:extLst>
-          </p:cNvPr>
-          <p:cNvSpPr>
-            <a:spLocks noGrp="1"/>
-          </p:cNvSpPr>
-          <p:nvPr>
-            <p:ph type="title"/>
-          </p:nvPr>
-        </p:nvSpPr>
-        <p:spPr>
-          <a:xfrm>
-            <a:off x="341810" y="567600"/>
-            <a:ext cx="5391927" cy="706030"/>
-          </a:xfrm>
-        </p:spPr>
-        <p:txBody>
-          <a:bodyPr/>
-          <a:lstStyle/>
-          <a:p>
-            <a:r>
-              <a:rPr lang="de-DE" sz="3200" dirty="0"/>
-              <a:t>Visualisierung</a:t>
-            </a:r>
-            <a:br>
-              <a:rPr lang="de-DE" dirty="0"/>
-            </a:br>
-            <a:r>
-              <a:rPr lang="de-DE" sz="2400" dirty="0"/>
-              <a:t>Kompletter Datensatz </a:t>
-            </a:r>
-            <a:r>
-              <a:rPr lang="de-DE" dirty="0"/>
-              <a:t>mit allen „</a:t>
-            </a:r>
-            <a:r>
-              <a:rPr lang="de-DE" dirty="0" err="1"/>
-              <a:t>mID</a:t>
-            </a:r>
-            <a:r>
-              <a:rPr lang="de-DE" dirty="0"/>
-              <a:t>“</a:t>
-            </a:r>
-          </a:p>
-        </p:txBody>
-      </p:sp>
-      <p:pic>
-        <p:nvPicPr>
-          <p:cNvPr id="5" name="Grafik 4">
-            <a:extLst>
-              <a:ext uri="{FF2B5EF4-FFF2-40B4-BE49-F238E27FC236}">
-                <a16:creationId xmlns:a16="http://schemas.microsoft.com/office/drawing/2014/main" id="{CF898B92-B545-00D3-5767-0C02FD697DAD}"/>
-              </a:ext>
-            </a:extLst>
-          </p:cNvPr>
-          <p:cNvPicPr>
-            <a:picLocks noChangeAspect="1"/>
-          </p:cNvPicPr>
-          <p:nvPr/>
-        </p:nvPicPr>
-        <p:blipFill>
-          <a:blip r:embed="rId3"/>
-          <a:srcRect t="49902" b="25116"/>
-          <a:stretch>
-            <a:fillRect/>
-          </a:stretch>
-        </p:blipFill>
-        <p:spPr>
-          <a:xfrm>
-            <a:off x="341810" y="1360799"/>
-            <a:ext cx="11505600" cy="5122398"/>
-          </a:xfrm>
-          <a:prstGeom prst="rect">
-            <a:avLst/>
-          </a:prstGeom>
-        </p:spPr>
-      </p:pic>
-      <p:sp>
-        <p:nvSpPr>
-          <p:cNvPr id="6" name="Datumsplatzhalter 5">
-            <a:extLst>
-              <a:ext uri="{FF2B5EF4-FFF2-40B4-BE49-F238E27FC236}">
-                <a16:creationId xmlns:a16="http://schemas.microsoft.com/office/drawing/2014/main" id="{6285D009-B3CD-3F2A-D8EE-96546325CCDB}"/>
-              </a:ext>
-            </a:extLst>
-          </p:cNvPr>
-          <p:cNvSpPr>
-            <a:spLocks noGrp="1"/>
-          </p:cNvSpPr>
-          <p:nvPr>
-            <p:ph type="dt" sz="half" idx="12"/>
-          </p:nvPr>
-        </p:nvSpPr>
-        <p:spPr/>
-        <p:txBody>
-          <a:bodyPr/>
-          <a:lstStyle/>
-          <a:p>
-            <a:r>
-              <a:rPr lang="de-DE"/>
-              <a:t>16.07.2026</a:t>
-            </a:r>
-          </a:p>
-        </p:txBody>
-      </p:sp>
-      <p:sp>
-        <p:nvSpPr>
-          <p:cNvPr id="7" name="Fußzeilenplatzhalter 6">
-            <a:extLst>
-              <a:ext uri="{FF2B5EF4-FFF2-40B4-BE49-F238E27FC236}">
-                <a16:creationId xmlns:a16="http://schemas.microsoft.com/office/drawing/2014/main" id="{F90F7BFF-E634-F432-B716-E8CCB89A7606}"/>
-              </a:ext>
-            </a:extLst>
-          </p:cNvPr>
-          <p:cNvSpPr>
-            <a:spLocks noGrp="1"/>
-          </p:cNvSpPr>
-          <p:nvPr>
-            <p:ph type="ftr" sz="quarter" idx="11"/>
-          </p:nvPr>
-        </p:nvSpPr>
-        <p:spPr/>
-        <p:txBody>
-          <a:bodyPr/>
-          <a:lstStyle/>
-          <a:p>
-            <a:r>
-              <a:rPr lang="de-DE"/>
-              <a:t>Materialdiagnostik: Task 3</a:t>
-            </a:r>
-            <a:endParaRPr lang="de-DE" dirty="0"/>
-          </a:p>
-        </p:txBody>
-      </p:sp>
-      <p:sp>
-        <p:nvSpPr>
-          <p:cNvPr id="3" name="Foliennummernplatzhalter 2">
-            <a:extLst>
-              <a:ext uri="{FF2B5EF4-FFF2-40B4-BE49-F238E27FC236}">
-                <a16:creationId xmlns:a16="http://schemas.microsoft.com/office/drawing/2014/main" id="{58211961-23B0-E5D4-DD50-236DA340FDDE}"/>
-              </a:ext>
-            </a:extLst>
-          </p:cNvPr>
-          <p:cNvSpPr>
-            <a:spLocks noGrp="1"/>
-          </p:cNvSpPr>
-          <p:nvPr>
-            <p:ph type="sldNum" sz="quarter" idx="10"/>
-          </p:nvPr>
-        </p:nvSpPr>
-        <p:spPr/>
-        <p:txBody>
-          <a:bodyPr/>
-          <a:lstStyle/>
-          <a:p>
-            <a:fld id="{80B4FCE6-DC73-4135-BC56-1F242D45A84C}" type="slidenum">
-              <a:rPr lang="de-DE" smtClean="0"/>
-              <a:t>17</a:t>
-            </a:fld>
-            <a:endParaRPr lang="de-DE"/>
-          </a:p>
-        </p:txBody>
-      </p:sp>
-    </p:spTree>
-    <p:extLst>
-      <p:ext uri="{BB962C8B-B14F-4D97-AF65-F5344CB8AC3E}">
-        <p14:creationId xmlns:p14="http://schemas.microsoft.com/office/powerpoint/2010/main" val="2865727699"/>
-      </p:ext>
-    </p:extLst>
-  </p:cSld>
-  <p:clrMapOvr>
-    <a:masterClrMapping/>
-  </p:clrMapOvr>
-</p:sld>
-</file>
-
-<file path=ppt/slides/slide18.xml><?xml version="1.0" encoding="utf-8"?>
-<p:sld xmlns:a="http://schemas.openxmlformats.org/drawingml/2006/main" xmlns:r="http://schemas.openxmlformats.org/officeDocument/2006/relationships" xmlns:p="http://schemas.openxmlformats.org/presentationml/2006/main">
-  <p:cSld>
-    <p:spTree>
-      <p:nvGrpSpPr>
-        <p:cNvPr id="1" name=""/>
-        <p:cNvGrpSpPr/>
-        <p:nvPr/>
-      </p:nvGrpSpPr>
-      <p:grpSpPr>
-        <a:xfrm>
-          <a:off x="0" y="0"/>
-          <a:ext cx="0" cy="0"/>
-          <a:chOff x="0" y="0"/>
-          <a:chExt cx="0" cy="0"/>
-        </a:xfrm>
-      </p:grpSpPr>
-      <p:sp>
-        <p:nvSpPr>
-          <p:cNvPr id="3" name="Inhaltsplatzhalter 2">
-            <a:extLst>
-              <a:ext uri="{FF2B5EF4-FFF2-40B4-BE49-F238E27FC236}">
-                <a16:creationId xmlns:a16="http://schemas.microsoft.com/office/drawing/2014/main" id="{EC792880-C870-78F8-FD9F-3732660E48D9}"/>
-              </a:ext>
-            </a:extLst>
-          </p:cNvPr>
-          <p:cNvSpPr>
-            <a:spLocks noGrp="1"/>
-          </p:cNvSpPr>
-          <p:nvPr>
-            <p:ph sz="quarter" idx="13"/>
-          </p:nvPr>
-        </p:nvSpPr>
-        <p:spPr/>
-        <p:txBody>
-          <a:bodyPr/>
-          <a:lstStyle/>
-          <a:p>
-            <a:pPr>
-              <a:buFont typeface="Arial" panose="020B0604020202020204" pitchFamily="34" charset="0"/>
-              <a:buChar char="•"/>
-            </a:pPr>
-            <a:r>
-              <a:rPr lang="de-DE" dirty="0"/>
-              <a:t>PCA-Darstellung der extrahierten Merkmale zeigt</a:t>
-            </a:r>
-          </a:p>
-          <a:p>
-            <a:pPr lvl="1">
-              <a:buFont typeface="Arial" panose="020B0604020202020204" pitchFamily="34" charset="0"/>
-              <a:buChar char="•"/>
-            </a:pPr>
-            <a:r>
-              <a:rPr lang="de-DE" dirty="0"/>
-              <a:t>Z05 klar separiert von den übrigen Zahnrädern</a:t>
-            </a:r>
-          </a:p>
-          <a:p>
-            <a:pPr lvl="1">
-              <a:buFont typeface="Arial" panose="020B0604020202020204" pitchFamily="34" charset="0"/>
-              <a:buChar char="•"/>
-            </a:pPr>
-            <a:r>
-              <a:rPr lang="de-DE" dirty="0"/>
-              <a:t>Signalcharakteristik von Z05 unterscheidet sich signifikant von den anderen </a:t>
-            </a:r>
-          </a:p>
-          <a:p>
-            <a:pPr>
-              <a:buFont typeface="Arial" panose="020B0604020202020204" pitchFamily="34" charset="0"/>
-              <a:buChar char="•"/>
-            </a:pPr>
-            <a:r>
-              <a:rPr lang="de-DE" dirty="0"/>
-              <a:t>Signale wurden in eine Merkmalsform überführt </a:t>
-            </a:r>
-          </a:p>
-          <a:p>
-            <a:pPr lvl="1">
-              <a:buFont typeface="Arial" panose="020B0604020202020204" pitchFamily="34" charset="0"/>
-              <a:buChar char="•"/>
-            </a:pPr>
-            <a:r>
-              <a:rPr lang="de-DE" dirty="0"/>
-              <a:t>Eignet sich für eine automatisierte Klassifikation oder Anomalie Erkennung</a:t>
-            </a:r>
-          </a:p>
-        </p:txBody>
-      </p:sp>
-      <p:sp>
-        <p:nvSpPr>
-          <p:cNvPr id="2" name="Titel 1">
-            <a:extLst>
-              <a:ext uri="{FF2B5EF4-FFF2-40B4-BE49-F238E27FC236}">
-                <a16:creationId xmlns:a16="http://schemas.microsoft.com/office/drawing/2014/main" id="{C254BBB6-51EB-B8DF-B124-F43AAB73DC5D}"/>
-              </a:ext>
-            </a:extLst>
-          </p:cNvPr>
-          <p:cNvSpPr>
-            <a:spLocks noGrp="1"/>
-          </p:cNvSpPr>
-          <p:nvPr>
-            <p:ph type="title"/>
-          </p:nvPr>
-        </p:nvSpPr>
-        <p:spPr/>
-        <p:txBody>
-          <a:bodyPr/>
-          <a:lstStyle/>
-          <a:p>
-            <a:r>
-              <a:rPr lang="de-DE" sz="3200" dirty="0"/>
-              <a:t>Ergebnisse</a:t>
-            </a:r>
-          </a:p>
-        </p:txBody>
-      </p:sp>
-      <p:sp>
-        <p:nvSpPr>
-          <p:cNvPr id="5" name="Datumsplatzhalter 4">
-            <a:extLst>
-              <a:ext uri="{FF2B5EF4-FFF2-40B4-BE49-F238E27FC236}">
-                <a16:creationId xmlns:a16="http://schemas.microsoft.com/office/drawing/2014/main" id="{A1BB0821-ACF4-FAAA-FCFD-FE000BACD3BE}"/>
-              </a:ext>
-            </a:extLst>
-          </p:cNvPr>
-          <p:cNvSpPr>
-            <a:spLocks noGrp="1"/>
-          </p:cNvSpPr>
-          <p:nvPr>
-            <p:ph type="dt" sz="half" idx="12"/>
-          </p:nvPr>
-        </p:nvSpPr>
-        <p:spPr/>
-        <p:txBody>
-          <a:bodyPr/>
-          <a:lstStyle/>
-          <a:p>
-            <a:r>
-              <a:rPr lang="de-DE"/>
-              <a:t>16.07.2026</a:t>
-            </a:r>
-          </a:p>
-        </p:txBody>
-      </p:sp>
-      <p:sp>
-        <p:nvSpPr>
-          <p:cNvPr id="6" name="Fußzeilenplatzhalter 5">
-            <a:extLst>
-              <a:ext uri="{FF2B5EF4-FFF2-40B4-BE49-F238E27FC236}">
-                <a16:creationId xmlns:a16="http://schemas.microsoft.com/office/drawing/2014/main" id="{44504410-AB8A-471C-1D33-002F641A2C98}"/>
-              </a:ext>
-            </a:extLst>
-          </p:cNvPr>
-          <p:cNvSpPr>
-            <a:spLocks noGrp="1"/>
-          </p:cNvSpPr>
-          <p:nvPr>
-            <p:ph type="ftr" sz="quarter" idx="11"/>
-          </p:nvPr>
-        </p:nvSpPr>
-        <p:spPr/>
-        <p:txBody>
-          <a:bodyPr/>
-          <a:lstStyle/>
-          <a:p>
-            <a:r>
-              <a:rPr lang="de-DE"/>
-              <a:t>Materialdiagnostik: Task 3</a:t>
-            </a:r>
-            <a:endParaRPr lang="de-DE" dirty="0"/>
-          </a:p>
-        </p:txBody>
-      </p:sp>
-      <p:sp>
-        <p:nvSpPr>
-          <p:cNvPr id="7" name="Foliennummernplatzhalter 6">
-            <a:extLst>
-              <a:ext uri="{FF2B5EF4-FFF2-40B4-BE49-F238E27FC236}">
-                <a16:creationId xmlns:a16="http://schemas.microsoft.com/office/drawing/2014/main" id="{A8EACD8A-4E1D-8443-CADB-49E8F22A8887}"/>
-              </a:ext>
-            </a:extLst>
-          </p:cNvPr>
-          <p:cNvSpPr>
-            <a:spLocks noGrp="1"/>
-          </p:cNvSpPr>
-          <p:nvPr>
-            <p:ph type="sldNum" sz="quarter" idx="10"/>
-          </p:nvPr>
-        </p:nvSpPr>
-        <p:spPr/>
-        <p:txBody>
-          <a:bodyPr/>
-          <a:lstStyle/>
-          <a:p>
-            <a:fld id="{80B4FCE6-DC73-4135-BC56-1F242D45A84C}" type="slidenum">
-              <a:rPr lang="de-DE" smtClean="0"/>
-              <a:t>18</a:t>
-            </a:fld>
-            <a:endParaRPr lang="de-DE"/>
-          </a:p>
-        </p:txBody>
-      </p:sp>
-    </p:spTree>
-    <p:extLst>
-      <p:ext uri="{BB962C8B-B14F-4D97-AF65-F5344CB8AC3E}">
-        <p14:creationId xmlns:p14="http://schemas.microsoft.com/office/powerpoint/2010/main" val="176930895"/>
-      </p:ext>
-    </p:extLst>
-  </p:cSld>
-  <p:clrMapOvr>
-    <a:masterClrMapping/>
-  </p:clrMapOvr>
-</p:sld>
-</file>
-
-<file path=ppt/slides/slide19.xml><?xml version="1.0" encoding="utf-8"?>
-<p:sld xmlns:a="http://schemas.openxmlformats.org/drawingml/2006/main" xmlns:r="http://schemas.openxmlformats.org/officeDocument/2006/relationships" xmlns:p="http://schemas.openxmlformats.org/presentationml/2006/main">
-  <p:cSld>
-    <p:spTree>
-      <p:nvGrpSpPr>
-        <p:cNvPr id="1" name="">
-          <a:extLst>
-            <a:ext uri="{FF2B5EF4-FFF2-40B4-BE49-F238E27FC236}">
-              <a16:creationId xmlns:a16="http://schemas.microsoft.com/office/drawing/2014/main" id="{ADFB2192-37A0-7AD0-AE14-22BFEAF4E142}"/>
-            </a:ext>
-          </a:extLst>
-        </p:cNvPr>
-        <p:cNvGrpSpPr/>
-        <p:nvPr/>
-      </p:nvGrpSpPr>
-      <p:grpSpPr>
-        <a:xfrm>
-          <a:off x="0" y="0"/>
-          <a:ext cx="0" cy="0"/>
-          <a:chOff x="0" y="0"/>
-          <a:chExt cx="0" cy="0"/>
-        </a:xfrm>
-      </p:grpSpPr>
-      <p:sp>
-        <p:nvSpPr>
-          <p:cNvPr id="2" name="Titel 1">
-            <a:extLst>
-              <a:ext uri="{FF2B5EF4-FFF2-40B4-BE49-F238E27FC236}">
-                <a16:creationId xmlns:a16="http://schemas.microsoft.com/office/drawing/2014/main" id="{855CE2B4-9BA0-9AC0-F40D-53D5E9298211}"/>
-              </a:ext>
-            </a:extLst>
-          </p:cNvPr>
-          <p:cNvSpPr>
-            <a:spLocks noGrp="1"/>
-          </p:cNvSpPr>
-          <p:nvPr>
-            <p:ph type="title"/>
-          </p:nvPr>
-        </p:nvSpPr>
-        <p:spPr>
-          <a:xfrm>
-            <a:off x="341811" y="567600"/>
-            <a:ext cx="5264510" cy="706030"/>
-          </a:xfrm>
-        </p:spPr>
-        <p:txBody>
-          <a:bodyPr/>
-          <a:lstStyle/>
-          <a:p>
-            <a:r>
-              <a:rPr lang="de-DE" sz="3200" dirty="0"/>
-              <a:t>Ergebnisse</a:t>
-            </a:r>
-            <a:endParaRPr lang="de-DE" dirty="0"/>
-          </a:p>
-        </p:txBody>
-      </p:sp>
-      <p:pic>
-        <p:nvPicPr>
-          <p:cNvPr id="5" name="Grafik 4">
-            <a:extLst>
-              <a:ext uri="{FF2B5EF4-FFF2-40B4-BE49-F238E27FC236}">
-                <a16:creationId xmlns:a16="http://schemas.microsoft.com/office/drawing/2014/main" id="{0048D6D3-2E0E-7BD8-7237-FA9BCBF8D10A}"/>
-              </a:ext>
-            </a:extLst>
-          </p:cNvPr>
-          <p:cNvPicPr>
-            <a:picLocks noChangeAspect="1"/>
-          </p:cNvPicPr>
-          <p:nvPr/>
-        </p:nvPicPr>
-        <p:blipFill>
-          <a:blip r:embed="rId3"/>
-          <a:srcRect t="75053" b="-35"/>
-          <a:stretch>
-            <a:fillRect/>
-          </a:stretch>
-        </p:blipFill>
-        <p:spPr>
-          <a:xfrm>
-            <a:off x="341810" y="1360799"/>
-            <a:ext cx="11505600" cy="5122398"/>
-          </a:xfrm>
-          <a:prstGeom prst="rect">
-            <a:avLst/>
-          </a:prstGeom>
-        </p:spPr>
-      </p:pic>
-      <p:sp>
-        <p:nvSpPr>
-          <p:cNvPr id="3" name="Ellipse 2">
-            <a:extLst>
-              <a:ext uri="{FF2B5EF4-FFF2-40B4-BE49-F238E27FC236}">
-                <a16:creationId xmlns:a16="http://schemas.microsoft.com/office/drawing/2014/main" id="{ACDBC10B-6EAA-F6BE-EF46-CD4ADE54D3B0}"/>
-              </a:ext>
-            </a:extLst>
-          </p:cNvPr>
-          <p:cNvSpPr/>
-          <p:nvPr/>
-        </p:nvSpPr>
-        <p:spPr bwMode="auto">
-          <a:xfrm>
-            <a:off x="2840636" y="1533302"/>
-            <a:ext cx="3584026" cy="2432147"/>
-          </a:xfrm>
-          <a:prstGeom prst="ellipse">
-            <a:avLst/>
-          </a:prstGeom>
-          <a:noFill/>
-          <a:ln w="38100" cap="flat" cmpd="sng" algn="ctr">
-            <a:solidFill>
-              <a:srgbClr val="FFC000"/>
-            </a:solidFill>
+          <a:solidFill>
+            <a:schemeClr val="bg2">
+              <a:lumMod val="40000"/>
+              <a:lumOff val="60000"/>
+            </a:schemeClr>
+          </a:solidFill>
+          <a:ln w="9525" cap="flat" cmpd="sng" algn="ctr">
+            <a:noFill/>
             <a:prstDash val="solid"/>
             <a:round/>
             <a:headEnd type="none" w="med" len="med"/>
@@ -8718,7 +8196,37 @@
               <a:buNone/>
               <a:tabLst/>
             </a:pPr>
-            <a:endParaRPr kumimoji="0" lang="de-DE" sz="2400" b="0" i="0" u="none" strike="noStrike" cap="none" normalizeH="0" baseline="0">
+            <a:r>
+              <a:rPr kumimoji="0" lang="de-DE" sz="1800" b="0" i="0" u="none" strike="noStrike" cap="none" normalizeH="0" baseline="0" dirty="0" err="1">
+                <a:ln>
+                  <a:noFill/>
+                </a:ln>
+                <a:solidFill>
+                  <a:schemeClr val="tx1"/>
+                </a:solidFill>
+                <a:effectLst/>
+                <a:latin typeface="Arial" pitchFamily="-109" charset="0"/>
+                <a:ea typeface="ヒラギノ角ゴ Pro W3" pitchFamily="-109" charset="-128"/>
+                <a:cs typeface="ヒラギノ角ゴ Pro W3" pitchFamily="-109" charset="-128"/>
+              </a:rPr>
+              <a:t>Ch</a:t>
+            </a:r>
+            <a:r>
+              <a:rPr kumimoji="0" lang="de-DE" sz="1800" b="0" i="0" u="none" strike="noStrike" cap="none" normalizeH="0" baseline="0" dirty="0">
+                <a:ln>
+                  <a:noFill/>
+                </a:ln>
+                <a:solidFill>
+                  <a:schemeClr val="tx1"/>
+                </a:solidFill>
+                <a:effectLst/>
+                <a:latin typeface="Arial" pitchFamily="-109" charset="0"/>
+                <a:ea typeface="ヒラギノ角ゴ Pro W3" pitchFamily="-109" charset="-128"/>
+                <a:cs typeface="ヒラギノ角ゴ Pro W3" pitchFamily="-109" charset="-128"/>
+              </a:rPr>
+              <a:t> 1</a:t>
+            </a:r>
+            <a:endParaRPr kumimoji="0" lang="de-DE" sz="2400" b="0" i="0" u="none" strike="noStrike" cap="none" normalizeH="0" baseline="0" dirty="0">
               <a:ln>
                 <a:noFill/>
               </a:ln>
@@ -8735,10 +8243,233 @@
       </p:sp>
       <p:sp>
         <p:nvSpPr>
-          <p:cNvPr id="6" name="Ellipse 5">
-            <a:extLst>
-              <a:ext uri="{FF2B5EF4-FFF2-40B4-BE49-F238E27FC236}">
-                <a16:creationId xmlns:a16="http://schemas.microsoft.com/office/drawing/2014/main" id="{D37839B8-4B21-EBB6-F137-5A809E7017FD}"/>
+          <p:cNvPr id="2" name="Titel 1">
+            <a:extLst>
+              <a:ext uri="{FF2B5EF4-FFF2-40B4-BE49-F238E27FC236}">
+                <a16:creationId xmlns:a16="http://schemas.microsoft.com/office/drawing/2014/main" id="{FF7BE80C-ADD9-4B83-0F35-FABC25DABF97}"/>
+              </a:ext>
+            </a:extLst>
+          </p:cNvPr>
+          <p:cNvSpPr>
+            <a:spLocks noGrp="1"/>
+          </p:cNvSpPr>
+          <p:nvPr>
+            <p:ph type="title"/>
+          </p:nvPr>
+        </p:nvSpPr>
+        <p:spPr/>
+        <p:txBody>
+          <a:bodyPr/>
+          <a:lstStyle/>
+          <a:p>
+            <a:r>
+              <a:rPr lang="de-DE" sz="3200" dirty="0"/>
+              <a:t>Testergebnisse</a:t>
+            </a:r>
+            <a:endParaRPr lang="de-DE" dirty="0"/>
+          </a:p>
+        </p:txBody>
+      </p:sp>
+      <p:sp>
+        <p:nvSpPr>
+          <p:cNvPr id="5" name="Fußzeilenplatzhalter 4">
+            <a:extLst>
+              <a:ext uri="{FF2B5EF4-FFF2-40B4-BE49-F238E27FC236}">
+                <a16:creationId xmlns:a16="http://schemas.microsoft.com/office/drawing/2014/main" id="{3700FFC5-AF95-B68C-5F71-A8EF47B9C797}"/>
+              </a:ext>
+            </a:extLst>
+          </p:cNvPr>
+          <p:cNvSpPr>
+            <a:spLocks noGrp="1"/>
+          </p:cNvSpPr>
+          <p:nvPr>
+            <p:ph type="ftr" sz="quarter" idx="11"/>
+          </p:nvPr>
+        </p:nvSpPr>
+        <p:spPr/>
+        <p:txBody>
+          <a:bodyPr/>
+          <a:lstStyle/>
+          <a:p>
+            <a:r>
+              <a:rPr lang="de-DE"/>
+              <a:t>Materialdiagnostik: Task 3</a:t>
+            </a:r>
+            <a:endParaRPr lang="de-DE" dirty="0"/>
+          </a:p>
+        </p:txBody>
+      </p:sp>
+      <p:sp>
+        <p:nvSpPr>
+          <p:cNvPr id="3" name="Datumsplatzhalter 2">
+            <a:extLst>
+              <a:ext uri="{FF2B5EF4-FFF2-40B4-BE49-F238E27FC236}">
+                <a16:creationId xmlns:a16="http://schemas.microsoft.com/office/drawing/2014/main" id="{34CADDE5-67A5-2686-564A-CA60BE28A110}"/>
+              </a:ext>
+            </a:extLst>
+          </p:cNvPr>
+          <p:cNvSpPr>
+            <a:spLocks noGrp="1"/>
+          </p:cNvSpPr>
+          <p:nvPr>
+            <p:ph type="dt" sz="half" idx="12"/>
+          </p:nvPr>
+        </p:nvSpPr>
+        <p:spPr/>
+        <p:txBody>
+          <a:bodyPr/>
+          <a:lstStyle/>
+          <a:p>
+            <a:r>
+              <a:rPr lang="de-DE"/>
+              <a:t>16.07.2026</a:t>
+            </a:r>
+          </a:p>
+        </p:txBody>
+      </p:sp>
+      <p:sp>
+        <p:nvSpPr>
+          <p:cNvPr id="8" name="Inhaltsplatzhalter 7">
+            <a:extLst>
+              <a:ext uri="{FF2B5EF4-FFF2-40B4-BE49-F238E27FC236}">
+                <a16:creationId xmlns:a16="http://schemas.microsoft.com/office/drawing/2014/main" id="{75AFD3C3-3EFB-85A6-8836-7191C35AF37E}"/>
+              </a:ext>
+            </a:extLst>
+          </p:cNvPr>
+          <p:cNvSpPr>
+            <a:spLocks noGrp="1"/>
+          </p:cNvSpPr>
+          <p:nvPr>
+            <p:ph sz="quarter" idx="13"/>
+          </p:nvPr>
+        </p:nvSpPr>
+        <p:spPr/>
+        <p:txBody>
+          <a:bodyPr/>
+          <a:lstStyle/>
+          <a:p>
+            <a:pPr>
+              <a:buFont typeface="Arial" panose="020B0604020202020204" pitchFamily="34" charset="0"/>
+              <a:buChar char="•"/>
+            </a:pPr>
+            <a:r>
+              <a:rPr lang="de-DE" dirty="0"/>
+              <a:t>Finale Bewertung auf Testsatz</a:t>
+            </a:r>
+          </a:p>
+          <a:p>
+            <a:pPr>
+              <a:buFont typeface="Arial" panose="020B0604020202020204" pitchFamily="34" charset="0"/>
+              <a:buChar char="•"/>
+            </a:pPr>
+            <a:r>
+              <a:rPr lang="de-DE" dirty="0"/>
+              <a:t>Aktuelle </a:t>
+            </a:r>
+            <a:r>
+              <a:rPr lang="de-DE" dirty="0" err="1"/>
+              <a:t>Testmetriken</a:t>
+            </a:r>
+            <a:r>
+              <a:rPr lang="de-DE" dirty="0"/>
+              <a:t>:</a:t>
+            </a:r>
+          </a:p>
+          <a:p>
+            <a:pPr lvl="1">
+              <a:buFont typeface="Arial" panose="020B0604020202020204" pitchFamily="34" charset="0"/>
+              <a:buChar char="•"/>
+            </a:pPr>
+            <a:r>
+              <a:rPr lang="de-DE" dirty="0" err="1"/>
+              <a:t>Accuracy</a:t>
+            </a:r>
+            <a:r>
+              <a:rPr lang="de-DE" dirty="0"/>
+              <a:t>: `1.00`</a:t>
+            </a:r>
+          </a:p>
+          <a:p>
+            <a:pPr lvl="1">
+              <a:buFont typeface="Arial" panose="020B0604020202020204" pitchFamily="34" charset="0"/>
+              <a:buChar char="•"/>
+            </a:pPr>
+            <a:r>
+              <a:rPr lang="de-DE" dirty="0" err="1"/>
+              <a:t>Balanced</a:t>
+            </a:r>
+            <a:r>
+              <a:rPr lang="de-DE" dirty="0"/>
+              <a:t> </a:t>
+            </a:r>
+            <a:r>
+              <a:rPr lang="de-DE" dirty="0" err="1"/>
+              <a:t>Accuracy</a:t>
+            </a:r>
+            <a:r>
+              <a:rPr lang="de-DE" dirty="0"/>
+              <a:t>: `1.00`</a:t>
+            </a:r>
+          </a:p>
+          <a:p>
+            <a:pPr lvl="1">
+              <a:buFont typeface="Arial" panose="020B0604020202020204" pitchFamily="34" charset="0"/>
+              <a:buChar char="•"/>
+            </a:pPr>
+            <a:r>
+              <a:rPr lang="de-DE" dirty="0"/>
+              <a:t>F1 für beschädigt: `1.00`</a:t>
+            </a:r>
+          </a:p>
+          <a:p>
+            <a:pPr>
+              <a:buFont typeface="Arial" panose="020B0604020202020204" pitchFamily="34" charset="0"/>
+              <a:buChar char="•"/>
+            </a:pPr>
+            <a:r>
+              <a:rPr lang="de-DE" dirty="0"/>
+              <a:t>Keine Fehlklassifikation im aktuellen Split</a:t>
+            </a:r>
+          </a:p>
+        </p:txBody>
+      </p:sp>
+      <p:pic>
+        <p:nvPicPr>
+          <p:cNvPr id="11" name="Inhaltsplatzhalter 10">
+            <a:extLst>
+              <a:ext uri="{FF2B5EF4-FFF2-40B4-BE49-F238E27FC236}">
+                <a16:creationId xmlns:a16="http://schemas.microsoft.com/office/drawing/2014/main" id="{6A6044F3-D308-6354-A347-71E8B0322F88}"/>
+              </a:ext>
+            </a:extLst>
+          </p:cNvPr>
+          <p:cNvPicPr>
+            <a:picLocks noGrp="1" noChangeAspect="1"/>
+          </p:cNvPicPr>
+          <p:nvPr>
+            <p:ph sz="quarter" idx="14"/>
+          </p:nvPr>
+        </p:nvPicPr>
+        <p:blipFill>
+          <a:blip r:embed="rId3"/>
+          <a:srcRect/>
+          <a:stretch/>
+        </p:blipFill>
+        <p:spPr>
+          <a:xfrm>
+            <a:off x="6459536" y="2092721"/>
+            <a:ext cx="5196437" cy="4354385"/>
+          </a:xfrm>
+          <a:prstGeom prst="rect">
+            <a:avLst/>
+          </a:prstGeom>
+        </p:spPr>
+      </p:pic>
+      <p:sp>
+        <p:nvSpPr>
+          <p:cNvPr id="15" name="Rechteck: eine Ecke abgerundet 14">
+            <a:extLst>
+              <a:ext uri="{FF2B5EF4-FFF2-40B4-BE49-F238E27FC236}">
+                <a16:creationId xmlns:a16="http://schemas.microsoft.com/office/drawing/2014/main" id="{8A72FF3C-2C7B-8705-2775-AB010BAE17F4}"/>
               </a:ext>
             </a:extLst>
           </p:cNvPr>
@@ -8747,17 +8478,20 @@
         </p:nvSpPr>
         <p:spPr bwMode="auto">
           <a:xfrm>
-            <a:off x="7685880" y="1472182"/>
-            <a:ext cx="4096389" cy="2357805"/>
+            <a:off x="6459536" y="1740625"/>
+            <a:ext cx="750559" cy="704193"/>
           </a:xfrm>
-          <a:prstGeom prst="ellipse">
+          <a:prstGeom prst="round1Rect">
             <a:avLst/>
           </a:prstGeom>
-          <a:noFill/>
-          <a:ln w="38100" cap="flat" cmpd="sng" algn="ctr">
-            <a:solidFill>
-              <a:srgbClr val="FFC000"/>
-            </a:solidFill>
+          <a:solidFill>
+            <a:schemeClr val="bg2">
+              <a:lumMod val="40000"/>
+              <a:lumOff val="60000"/>
+            </a:schemeClr>
+          </a:solidFill>
+          <a:ln w="9525" cap="flat" cmpd="sng" algn="ctr">
+            <a:noFill/>
             <a:prstDash val="solid"/>
             <a:round/>
             <a:headEnd type="none" w="med" len="med"/>
@@ -8789,7 +8523,37 @@
               <a:buNone/>
               <a:tabLst/>
             </a:pPr>
-            <a:endParaRPr kumimoji="0" lang="de-DE" sz="2400" b="0" i="0" u="none" strike="noStrike" cap="none" normalizeH="0" baseline="0">
+            <a:r>
+              <a:rPr kumimoji="0" lang="de-DE" sz="1800" b="0" i="0" u="none" strike="noStrike" cap="none" normalizeH="0" baseline="0" dirty="0" err="1">
+                <a:ln>
+                  <a:noFill/>
+                </a:ln>
+                <a:solidFill>
+                  <a:schemeClr val="tx1"/>
+                </a:solidFill>
+                <a:effectLst/>
+                <a:latin typeface="Arial" pitchFamily="-109" charset="0"/>
+                <a:ea typeface="ヒラギノ角ゴ Pro W3" pitchFamily="-109" charset="-128"/>
+                <a:cs typeface="ヒラギノ角ゴ Pro W3" pitchFamily="-109" charset="-128"/>
+              </a:rPr>
+              <a:t>Ch</a:t>
+            </a:r>
+            <a:r>
+              <a:rPr kumimoji="0" lang="de-DE" sz="1800" b="0" i="0" u="none" strike="noStrike" cap="none" normalizeH="0" baseline="0" dirty="0">
+                <a:ln>
+                  <a:noFill/>
+                </a:ln>
+                <a:solidFill>
+                  <a:schemeClr val="tx1"/>
+                </a:solidFill>
+                <a:effectLst/>
+                <a:latin typeface="Arial" pitchFamily="-109" charset="0"/>
+                <a:ea typeface="ヒラギノ角ゴ Pro W3" pitchFamily="-109" charset="-128"/>
+                <a:cs typeface="ヒラギノ角ゴ Pro W3" pitchFamily="-109" charset="-128"/>
+              </a:rPr>
+              <a:t> 2</a:t>
+            </a:r>
+            <a:endParaRPr kumimoji="0" lang="de-DE" sz="2400" b="0" i="0" u="none" strike="noStrike" cap="none" normalizeH="0" baseline="0" dirty="0">
               <a:ln>
                 <a:noFill/>
               </a:ln>
@@ -8804,285 +8568,41 @@
           </a:p>
         </p:txBody>
       </p:sp>
-      <p:cxnSp>
-        <p:nvCxnSpPr>
-          <p:cNvPr id="8" name="Gerader Verbinder 7">
-            <a:extLst>
-              <a:ext uri="{FF2B5EF4-FFF2-40B4-BE49-F238E27FC236}">
-                <a16:creationId xmlns:a16="http://schemas.microsoft.com/office/drawing/2014/main" id="{69F7DD7D-654D-6481-809F-2B3BF2DCB2C0}"/>
-              </a:ext>
-            </a:extLst>
-          </p:cNvPr>
-          <p:cNvCxnSpPr>
-            <a:cxnSpLocks/>
-          </p:cNvCxnSpPr>
+      <p:pic>
+        <p:nvPicPr>
+          <p:cNvPr id="12" name="Inhaltsplatzhalter 10">
+            <a:extLst>
+              <a:ext uri="{FF2B5EF4-FFF2-40B4-BE49-F238E27FC236}">
+                <a16:creationId xmlns:a16="http://schemas.microsoft.com/office/drawing/2014/main" id="{C2D05996-D3A4-BF54-4EB7-5C95131B19A7}"/>
+              </a:ext>
+            </a:extLst>
+          </p:cNvPr>
+          <p:cNvPicPr>
+            <a:picLocks noChangeAspect="1"/>
+          </p:cNvPicPr>
           <p:nvPr/>
-        </p:nvCxnSpPr>
-        <p:spPr bwMode="auto">
+        </p:nvPicPr>
+        <p:blipFill>
+          <a:blip r:embed="rId3"/>
+          <a:srcRect/>
+          <a:stretch/>
+        </p:blipFill>
+        <p:spPr>
           <a:xfrm>
-            <a:off x="734518" y="2563318"/>
-            <a:ext cx="5306518" cy="2315980"/>
+            <a:off x="6459536" y="2091968"/>
+            <a:ext cx="5196437" cy="4330365"/>
           </a:xfrm>
-          <a:prstGeom prst="line">
+          <a:prstGeom prst="rect">
             <a:avLst/>
           </a:prstGeom>
-          <a:solidFill>
-            <a:schemeClr val="accent1"/>
-          </a:solidFill>
-          <a:ln w="38100" cap="flat" cmpd="sng" algn="ctr">
-            <a:solidFill>
-              <a:srgbClr val="FF0000"/>
-            </a:solidFill>
-            <a:prstDash val="solid"/>
-            <a:round/>
-            <a:headEnd type="none" w="med" len="med"/>
-            <a:tailEnd type="none" w="med" len="med"/>
-          </a:ln>
-          <a:effectLst/>
         </p:spPr>
-      </p:cxnSp>
-      <p:cxnSp>
-        <p:nvCxnSpPr>
-          <p:cNvPr id="10" name="Gerader Verbinder 9">
-            <a:extLst>
-              <a:ext uri="{FF2B5EF4-FFF2-40B4-BE49-F238E27FC236}">
-                <a16:creationId xmlns:a16="http://schemas.microsoft.com/office/drawing/2014/main" id="{91CA1D6C-3643-C6AE-3F44-33BAF53B12E8}"/>
-              </a:ext>
-            </a:extLst>
-          </p:cNvPr>
-          <p:cNvCxnSpPr>
-            <a:cxnSpLocks/>
-          </p:cNvCxnSpPr>
-          <p:nvPr/>
-        </p:nvCxnSpPr>
-        <p:spPr bwMode="auto">
-          <a:xfrm>
-            <a:off x="6475751" y="3357797"/>
-            <a:ext cx="5306518" cy="694821"/>
-          </a:xfrm>
-          <a:prstGeom prst="line">
-            <a:avLst/>
-          </a:prstGeom>
-          <a:solidFill>
-            <a:schemeClr val="accent1"/>
-          </a:solidFill>
-          <a:ln w="38100" cap="flat" cmpd="sng" algn="ctr">
-            <a:solidFill>
-              <a:srgbClr val="FF0000"/>
-            </a:solidFill>
-            <a:prstDash val="solid"/>
-            <a:round/>
-            <a:headEnd type="none" w="med" len="med"/>
-            <a:tailEnd type="none" w="med" len="med"/>
-          </a:ln>
-          <a:effectLst/>
-        </p:spPr>
-      </p:cxnSp>
-      <p:sp>
-        <p:nvSpPr>
-          <p:cNvPr id="16" name="Ellipse 15">
-            <a:extLst>
-              <a:ext uri="{FF2B5EF4-FFF2-40B4-BE49-F238E27FC236}">
-                <a16:creationId xmlns:a16="http://schemas.microsoft.com/office/drawing/2014/main" id="{F2D93268-F655-8E29-AEDD-BEC246926421}"/>
-              </a:ext>
-            </a:extLst>
-          </p:cNvPr>
-          <p:cNvSpPr/>
-          <p:nvPr/>
-        </p:nvSpPr>
-        <p:spPr bwMode="auto">
-          <a:xfrm>
-            <a:off x="734518" y="3777521"/>
-            <a:ext cx="3814997" cy="2315980"/>
-          </a:xfrm>
-          <a:prstGeom prst="ellipse">
-            <a:avLst/>
-          </a:prstGeom>
-          <a:noFill/>
-          <a:ln w="38100" cap="flat" cmpd="sng" algn="ctr">
-            <a:solidFill>
-              <a:srgbClr val="00B050"/>
-            </a:solidFill>
-            <a:prstDash val="solid"/>
-            <a:round/>
-            <a:headEnd type="none" w="med" len="med"/>
-            <a:tailEnd type="none" w="med" len="med"/>
-          </a:ln>
-          <a:effectLst/>
-        </p:spPr>
-        <p:txBody>
-          <a:bodyPr vert="horz" wrap="square" lIns="91440" tIns="45720" rIns="91440" bIns="45720" numCol="1" rtlCol="0" anchor="t" anchorCtr="0" compatLnSpc="1">
-            <a:prstTxWarp prst="textNoShape">
-              <a:avLst/>
-            </a:prstTxWarp>
-          </a:bodyPr>
-          <a:lstStyle/>
-          <a:p>
-            <a:pPr marL="0" marR="0" indent="0" algn="l" defTabSz="914400" rtl="0" eaLnBrk="0" fontAlgn="base" latinLnBrk="0" hangingPunct="0">
-              <a:lnSpc>
-                <a:spcPct val="100000"/>
-              </a:lnSpc>
-              <a:spcBef>
-                <a:spcPct val="0"/>
-              </a:spcBef>
-              <a:spcAft>
-                <a:spcPct val="0"/>
-              </a:spcAft>
-              <a:buClrTx/>
-              <a:buSzTx/>
-              <a:buFontTx/>
-              <a:buNone/>
-              <a:tabLst/>
-            </a:pPr>
-            <a:endParaRPr kumimoji="0" lang="de-DE" sz="2400" b="0" i="0" u="none" strike="noStrike" cap="none" normalizeH="0" baseline="0">
-              <a:ln>
-                <a:noFill/>
-              </a:ln>
-              <a:solidFill>
-                <a:schemeClr val="tx1"/>
-              </a:solidFill>
-              <a:effectLst/>
-              <a:latin typeface="Arial" pitchFamily="-109" charset="0"/>
-              <a:ea typeface="ヒラギノ角ゴ Pro W3" pitchFamily="-109" charset="-128"/>
-              <a:cs typeface="ヒラギノ角ゴ Pro W3" pitchFamily="-109" charset="-128"/>
-            </a:endParaRPr>
-          </a:p>
-        </p:txBody>
-      </p:sp>
-      <p:sp>
-        <p:nvSpPr>
-          <p:cNvPr id="18" name="Ellipse 17">
-            <a:extLst>
-              <a:ext uri="{FF2B5EF4-FFF2-40B4-BE49-F238E27FC236}">
-                <a16:creationId xmlns:a16="http://schemas.microsoft.com/office/drawing/2014/main" id="{B54FFD05-4AA3-52DA-5754-BAC5D449CAED}"/>
-              </a:ext>
-            </a:extLst>
-          </p:cNvPr>
-          <p:cNvSpPr/>
-          <p:nvPr/>
-        </p:nvSpPr>
-        <p:spPr bwMode="auto">
-          <a:xfrm>
-            <a:off x="6244373" y="3758771"/>
-            <a:ext cx="4203771" cy="2514613"/>
-          </a:xfrm>
-          <a:prstGeom prst="ellipse">
-            <a:avLst/>
-          </a:prstGeom>
-          <a:noFill/>
-          <a:ln w="38100" cap="flat" cmpd="sng" algn="ctr">
-            <a:solidFill>
-              <a:srgbClr val="00B050"/>
-            </a:solidFill>
-            <a:prstDash val="solid"/>
-            <a:round/>
-            <a:headEnd type="none" w="med" len="med"/>
-            <a:tailEnd type="none" w="med" len="med"/>
-          </a:ln>
-          <a:effectLst/>
-        </p:spPr>
-        <p:txBody>
-          <a:bodyPr vert="horz" wrap="square" lIns="91440" tIns="45720" rIns="91440" bIns="45720" numCol="1" rtlCol="0" anchor="t" anchorCtr="0" compatLnSpc="1">
-            <a:prstTxWarp prst="textNoShape">
-              <a:avLst/>
-            </a:prstTxWarp>
-          </a:bodyPr>
-          <a:lstStyle/>
-          <a:p>
-            <a:pPr marL="0" marR="0" indent="0" algn="l" defTabSz="914400" rtl="0" eaLnBrk="0" fontAlgn="base" latinLnBrk="0" hangingPunct="0">
-              <a:lnSpc>
-                <a:spcPct val="100000"/>
-              </a:lnSpc>
-              <a:spcBef>
-                <a:spcPct val="0"/>
-              </a:spcBef>
-              <a:spcAft>
-                <a:spcPct val="0"/>
-              </a:spcAft>
-              <a:buClrTx/>
-              <a:buSzTx/>
-              <a:buFontTx/>
-              <a:buNone/>
-              <a:tabLst/>
-            </a:pPr>
-            <a:endParaRPr kumimoji="0" lang="de-DE" sz="2400" b="0" i="0" u="none" strike="noStrike" cap="none" normalizeH="0" baseline="0">
-              <a:ln>
-                <a:noFill/>
-              </a:ln>
-              <a:solidFill>
-                <a:schemeClr val="tx1"/>
-              </a:solidFill>
-              <a:effectLst/>
-              <a:latin typeface="Arial" pitchFamily="-109" charset="0"/>
-              <a:ea typeface="ヒラギノ角ゴ Pro W3" pitchFamily="-109" charset="-128"/>
-              <a:cs typeface="ヒラギノ角ゴ Pro W3" pitchFamily="-109" charset="-128"/>
-            </a:endParaRPr>
-          </a:p>
-        </p:txBody>
-      </p:sp>
-      <p:sp>
-        <p:nvSpPr>
-          <p:cNvPr id="19" name="Datumsplatzhalter 18">
-            <a:extLst>
-              <a:ext uri="{FF2B5EF4-FFF2-40B4-BE49-F238E27FC236}">
-                <a16:creationId xmlns:a16="http://schemas.microsoft.com/office/drawing/2014/main" id="{05DF70C5-E878-2CD5-F644-CF5B1E5CE975}"/>
-              </a:ext>
-            </a:extLst>
-          </p:cNvPr>
-          <p:cNvSpPr>
-            <a:spLocks noGrp="1"/>
-          </p:cNvSpPr>
-          <p:nvPr>
-            <p:ph type="dt" sz="half" idx="12"/>
-          </p:nvPr>
-        </p:nvSpPr>
-        <p:spPr/>
-        <p:txBody>
-          <a:bodyPr/>
-          <a:lstStyle/>
-          <a:p>
-            <a:r>
-              <a:rPr lang="de-DE"/>
-              <a:t>16.07.2026</a:t>
-            </a:r>
-          </a:p>
-        </p:txBody>
-      </p:sp>
-      <p:sp>
-        <p:nvSpPr>
-          <p:cNvPr id="20" name="Fußzeilenplatzhalter 19">
-            <a:extLst>
-              <a:ext uri="{FF2B5EF4-FFF2-40B4-BE49-F238E27FC236}">
-                <a16:creationId xmlns:a16="http://schemas.microsoft.com/office/drawing/2014/main" id="{BC8C3934-629F-B7C3-1416-9C60B85BAAC1}"/>
-              </a:ext>
-            </a:extLst>
-          </p:cNvPr>
-          <p:cNvSpPr>
-            <a:spLocks noGrp="1"/>
-          </p:cNvSpPr>
-          <p:nvPr>
-            <p:ph type="ftr" sz="quarter" idx="11"/>
-          </p:nvPr>
-        </p:nvSpPr>
-        <p:spPr/>
-        <p:txBody>
-          <a:bodyPr/>
-          <a:lstStyle/>
-          <a:p>
-            <a:r>
-              <a:rPr lang="de-DE"/>
-              <a:t>Materialdiagnostik: Task 3</a:t>
-            </a:r>
-            <a:endParaRPr lang="de-DE" dirty="0"/>
-          </a:p>
-        </p:txBody>
-      </p:sp>
-      <p:sp>
-        <p:nvSpPr>
-          <p:cNvPr id="7" name="Foliennummernplatzhalter 6">
-            <a:extLst>
-              <a:ext uri="{FF2B5EF4-FFF2-40B4-BE49-F238E27FC236}">
-                <a16:creationId xmlns:a16="http://schemas.microsoft.com/office/drawing/2014/main" id="{FBA2F6E1-9867-0406-CC76-41DC939AC1E4}"/>
+      </p:pic>
+      <p:sp>
+        <p:nvSpPr>
+          <p:cNvPr id="6" name="Foliennummernplatzhalter 5">
+            <a:extLst>
+              <a:ext uri="{FF2B5EF4-FFF2-40B4-BE49-F238E27FC236}">
+                <a16:creationId xmlns:a16="http://schemas.microsoft.com/office/drawing/2014/main" id="{375A9587-B8AB-9FF9-3DB6-4B6D8BB7397F}"/>
               </a:ext>
             </a:extLst>
           </p:cNvPr>
@@ -9100,7 +8620,7 @@
           <a:p>
             <a:fld id="{80B4FCE6-DC73-4135-BC56-1F242D45A84C}" type="slidenum">
               <a:rPr lang="de-DE" smtClean="0"/>
-              <a:t>19</a:t>
+              <a:t>16</a:t>
             </a:fld>
             <a:endParaRPr lang="de-DE"/>
           </a:p>
@@ -9109,7 +8629,7 @@
     </p:spTree>
     <p:extLst>
       <p:ext uri="{BB962C8B-B14F-4D97-AF65-F5344CB8AC3E}">
-        <p14:creationId xmlns:p14="http://schemas.microsoft.com/office/powerpoint/2010/main" val="344667624"/>
+        <p14:creationId xmlns:p14="http://schemas.microsoft.com/office/powerpoint/2010/main" val="2351703905"/>
       </p:ext>
     </p:extLst>
   </p:cSld>
@@ -9137,7 +8657,7 @@
                             </p:stCondLst>
                             <p:childTnLst>
                               <p:par>
-                                <p:cTn id="5" presetID="1" presetClass="entr" presetSubtype="0" fill="hold" grpId="0" nodeType="clickEffect">
+                                <p:cTn id="5" presetID="1" presetClass="entr" presetSubtype="0" fill="hold" nodeType="clickEffect">
                                   <p:stCondLst>
                                     <p:cond delay="0"/>
                                   </p:stCondLst>
@@ -9150,7 +8670,7 @@
                                           </p:stCondLst>
                                         </p:cTn>
                                         <p:tgtEl>
-                                          <p:spTgt spid="6"/>
+                                          <p:spTgt spid="12"/>
                                         </p:tgtEl>
                                         <p:attrNameLst>
                                           <p:attrName>style.visibility</p:attrName>
@@ -9177,259 +8697,7 @@
                                           </p:stCondLst>
                                         </p:cTn>
                                         <p:tgtEl>
-                                          <p:spTgt spid="3"/>
-                                        </p:tgtEl>
-                                        <p:attrNameLst>
-                                          <p:attrName>style.visibility</p:attrName>
-                                        </p:attrNameLst>
-                                      </p:cBhvr>
-                                      <p:to>
-                                        <p:strVal val="visible"/>
-                                      </p:to>
-                                    </p:set>
-                                  </p:childTnLst>
-                                </p:cTn>
-                              </p:par>
-                              <p:par>
-                                <p:cTn id="9" presetID="1" presetClass="entr" presetSubtype="0" fill="hold" grpId="0" nodeType="withEffect">
-                                  <p:stCondLst>
-                                    <p:cond delay="0"/>
-                                  </p:stCondLst>
-                                  <p:childTnLst>
-                                    <p:set>
-                                      <p:cBhvr>
-                                        <p:cTn id="10" dur="1" fill="hold">
-                                          <p:stCondLst>
-                                            <p:cond delay="0"/>
-                                          </p:stCondLst>
-                                        </p:cTn>
-                                        <p:tgtEl>
-                                          <p:spTgt spid="18"/>
-                                        </p:tgtEl>
-                                        <p:attrNameLst>
-                                          <p:attrName>style.visibility</p:attrName>
-                                        </p:attrNameLst>
-                                      </p:cBhvr>
-                                      <p:to>
-                                        <p:strVal val="visible"/>
-                                      </p:to>
-                                    </p:set>
-                                  </p:childTnLst>
-                                </p:cTn>
-                              </p:par>
-                              <p:par>
-                                <p:cTn id="11" presetID="1" presetClass="entr" presetSubtype="0" fill="hold" grpId="0" nodeType="withEffect">
-                                  <p:stCondLst>
-                                    <p:cond delay="0"/>
-                                  </p:stCondLst>
-                                  <p:childTnLst>
-                                    <p:set>
-                                      <p:cBhvr>
-                                        <p:cTn id="12" dur="1" fill="hold">
-                                          <p:stCondLst>
-                                            <p:cond delay="0"/>
-                                          </p:stCondLst>
-                                        </p:cTn>
-                                        <p:tgtEl>
-                                          <p:spTgt spid="16"/>
-                                        </p:tgtEl>
-                                        <p:attrNameLst>
-                                          <p:attrName>style.visibility</p:attrName>
-                                        </p:attrNameLst>
-                                      </p:cBhvr>
-                                      <p:to>
-                                        <p:strVal val="visible"/>
-                                      </p:to>
-                                    </p:set>
-                                  </p:childTnLst>
-                                </p:cTn>
-                              </p:par>
-                            </p:childTnLst>
-                          </p:cTn>
-                        </p:par>
-                      </p:childTnLst>
-                    </p:cTn>
-                  </p:par>
-                  <p:par>
-                    <p:cTn id="13" fill="hold">
-                      <p:stCondLst>
-                        <p:cond delay="indefinite"/>
-                      </p:stCondLst>
-                      <p:childTnLst>
-                        <p:par>
-                          <p:cTn id="14" fill="hold">
-                            <p:stCondLst>
-                              <p:cond delay="0"/>
-                            </p:stCondLst>
-                            <p:childTnLst>
-                              <p:par>
-                                <p:cTn id="15" presetID="1" presetClass="exit" presetSubtype="0" fill="hold" grpId="1" nodeType="clickEffect">
-                                  <p:stCondLst>
-                                    <p:cond delay="0"/>
-                                  </p:stCondLst>
-                                  <p:childTnLst>
-                                    <p:set>
-                                      <p:cBhvr>
-                                        <p:cTn id="16" dur="1" fill="hold">
-                                          <p:stCondLst>
-                                            <p:cond delay="0"/>
-                                          </p:stCondLst>
-                                        </p:cTn>
-                                        <p:tgtEl>
-                                          <p:spTgt spid="3"/>
-                                        </p:tgtEl>
-                                        <p:attrNameLst>
-                                          <p:attrName>style.visibility</p:attrName>
-                                        </p:attrNameLst>
-                                      </p:cBhvr>
-                                      <p:to>
-                                        <p:strVal val="hidden"/>
-                                      </p:to>
-                                    </p:set>
-                                  </p:childTnLst>
-                                </p:cTn>
-                              </p:par>
-                              <p:par>
-                                <p:cTn id="17" presetID="1" presetClass="exit" presetSubtype="0" fill="hold" grpId="1" nodeType="withEffect">
-                                  <p:stCondLst>
-                                    <p:cond delay="0"/>
-                                  </p:stCondLst>
-                                  <p:childTnLst>
-                                    <p:set>
-                                      <p:cBhvr>
-                                        <p:cTn id="18" dur="1" fill="hold">
-                                          <p:stCondLst>
-                                            <p:cond delay="0"/>
-                                          </p:stCondLst>
-                                        </p:cTn>
-                                        <p:tgtEl>
-                                          <p:spTgt spid="6"/>
-                                        </p:tgtEl>
-                                        <p:attrNameLst>
-                                          <p:attrName>style.visibility</p:attrName>
-                                        </p:attrNameLst>
-                                      </p:cBhvr>
-                                      <p:to>
-                                        <p:strVal val="hidden"/>
-                                      </p:to>
-                                    </p:set>
-                                  </p:childTnLst>
-                                </p:cTn>
-                              </p:par>
-                              <p:par>
-                                <p:cTn id="19" presetID="1" presetClass="exit" presetSubtype="0" fill="hold" grpId="1" nodeType="withEffect">
-                                  <p:stCondLst>
-                                    <p:cond delay="0"/>
-                                  </p:stCondLst>
-                                  <p:childTnLst>
-                                    <p:set>
-                                      <p:cBhvr>
-                                        <p:cTn id="20" dur="1" fill="hold">
-                                          <p:stCondLst>
-                                            <p:cond delay="0"/>
-                                          </p:stCondLst>
-                                        </p:cTn>
-                                        <p:tgtEl>
-                                          <p:spTgt spid="18"/>
-                                        </p:tgtEl>
-                                        <p:attrNameLst>
-                                          <p:attrName>style.visibility</p:attrName>
-                                        </p:attrNameLst>
-                                      </p:cBhvr>
-                                      <p:to>
-                                        <p:strVal val="hidden"/>
-                                      </p:to>
-                                    </p:set>
-                                  </p:childTnLst>
-                                </p:cTn>
-                              </p:par>
-                              <p:par>
-                                <p:cTn id="21" presetID="1" presetClass="exit" presetSubtype="0" fill="hold" grpId="1" nodeType="withEffect">
-                                  <p:stCondLst>
-                                    <p:cond delay="0"/>
-                                  </p:stCondLst>
-                                  <p:childTnLst>
-                                    <p:set>
-                                      <p:cBhvr>
-                                        <p:cTn id="22" dur="1" fill="hold">
-                                          <p:stCondLst>
-                                            <p:cond delay="0"/>
-                                          </p:stCondLst>
-                                        </p:cTn>
-                                        <p:tgtEl>
-                                          <p:spTgt spid="16"/>
-                                        </p:tgtEl>
-                                        <p:attrNameLst>
-                                          <p:attrName>style.visibility</p:attrName>
-                                        </p:attrNameLst>
-                                      </p:cBhvr>
-                                      <p:to>
-                                        <p:strVal val="hidden"/>
-                                      </p:to>
-                                    </p:set>
-                                  </p:childTnLst>
-                                </p:cTn>
-                              </p:par>
-                            </p:childTnLst>
-                          </p:cTn>
-                        </p:par>
-                      </p:childTnLst>
-                    </p:cTn>
-                  </p:par>
-                  <p:par>
-                    <p:cTn id="23" fill="hold">
-                      <p:stCondLst>
-                        <p:cond delay="indefinite"/>
-                      </p:stCondLst>
-                      <p:childTnLst>
-                        <p:par>
-                          <p:cTn id="24" fill="hold">
-                            <p:stCondLst>
-                              <p:cond delay="0"/>
-                            </p:stCondLst>
-                            <p:childTnLst>
-                              <p:par>
-                                <p:cTn id="25" presetID="1" presetClass="entr" presetSubtype="0" fill="hold" nodeType="clickEffect">
-                                  <p:stCondLst>
-                                    <p:cond delay="0"/>
-                                  </p:stCondLst>
-                                  <p:childTnLst>
-                                    <p:set>
-                                      <p:cBhvr>
-                                        <p:cTn id="26" dur="1" fill="hold">
-                                          <p:stCondLst>
-                                            <p:cond delay="0"/>
-                                          </p:stCondLst>
-                                        </p:cTn>
-                                        <p:tgtEl>
-                                          <p:spTgt spid="10"/>
-                                        </p:tgtEl>
-                                        <p:attrNameLst>
-                                          <p:attrName>style.visibility</p:attrName>
-                                        </p:attrNameLst>
-                                      </p:cBhvr>
-                                      <p:to>
-                                        <p:strVal val="visible"/>
-                                      </p:to>
-                                    </p:set>
-                                  </p:childTnLst>
-                                </p:cTn>
-                              </p:par>
-                              <p:par>
-                                <p:cTn id="27" presetID="1" presetClass="entr" presetSubtype="0" fill="hold" nodeType="withEffect">
-                                  <p:stCondLst>
-                                    <p:cond delay="0"/>
-                                  </p:stCondLst>
-                                  <p:childTnLst>
-                                    <p:set>
-                                      <p:cBhvr>
-                                        <p:cTn id="28" dur="1" fill="hold">
-                                          <p:stCondLst>
-                                            <p:cond delay="0"/>
-                                          </p:stCondLst>
-                                        </p:cTn>
-                                        <p:tgtEl>
-                                          <p:spTgt spid="8"/>
+                                          <p:spTgt spid="15"/>
                                         </p:tgtEl>
                                         <p:attrNameLst>
                                           <p:attrName>style.visibility</p:attrName>
@@ -9470,16 +8738,729 @@
       </p:par>
     </p:tnLst>
     <p:bldLst>
-      <p:bldP spid="3" grpId="0" animBg="1"/>
-      <p:bldP spid="3" grpId="1" animBg="1"/>
-      <p:bldP spid="6" grpId="0" animBg="1"/>
-      <p:bldP spid="6" grpId="1" animBg="1"/>
-      <p:bldP spid="16" grpId="0" animBg="1"/>
-      <p:bldP spid="16" grpId="1" animBg="1"/>
-      <p:bldP spid="18" grpId="0" animBg="1"/>
-      <p:bldP spid="18" grpId="1" animBg="1"/>
+      <p:bldP spid="15" grpId="0" animBg="1"/>
     </p:bldLst>
   </p:timing>
+</p:sld>
+</file>
+
+<file path=ppt/slides/slide17.xml><?xml version="1.0" encoding="utf-8"?>
+<p:sld xmlns:a="http://schemas.openxmlformats.org/drawingml/2006/main" xmlns:r="http://schemas.openxmlformats.org/officeDocument/2006/relationships" xmlns:p="http://schemas.openxmlformats.org/presentationml/2006/main">
+  <p:cSld>
+    <p:spTree>
+      <p:nvGrpSpPr>
+        <p:cNvPr id="1" name="">
+          <a:extLst>
+            <a:ext uri="{FF2B5EF4-FFF2-40B4-BE49-F238E27FC236}">
+              <a16:creationId xmlns:a16="http://schemas.microsoft.com/office/drawing/2014/main" id="{487AAFDA-5709-6898-CE4E-940E6A34EADE}"/>
+            </a:ext>
+          </a:extLst>
+        </p:cNvPr>
+        <p:cNvGrpSpPr/>
+        <p:nvPr/>
+      </p:nvGrpSpPr>
+      <p:grpSpPr>
+        <a:xfrm>
+          <a:off x="0" y="0"/>
+          <a:ext cx="0" cy="0"/>
+          <a:chOff x="0" y="0"/>
+          <a:chExt cx="0" cy="0"/>
+        </a:xfrm>
+      </p:grpSpPr>
+      <p:sp>
+        <p:nvSpPr>
+          <p:cNvPr id="2" name="Titel 1">
+            <a:extLst>
+              <a:ext uri="{FF2B5EF4-FFF2-40B4-BE49-F238E27FC236}">
+                <a16:creationId xmlns:a16="http://schemas.microsoft.com/office/drawing/2014/main" id="{11DF8090-BADC-27B4-F673-12947654E7F5}"/>
+              </a:ext>
+            </a:extLst>
+          </p:cNvPr>
+          <p:cNvSpPr>
+            <a:spLocks noGrp="1"/>
+          </p:cNvSpPr>
+          <p:nvPr>
+            <p:ph type="title"/>
+          </p:nvPr>
+        </p:nvSpPr>
+        <p:spPr/>
+        <p:txBody>
+          <a:bodyPr/>
+          <a:lstStyle/>
+          <a:p>
+            <a:r>
+              <a:rPr lang="de-DE" dirty="0"/>
+              <a:t>ROC und AUC</a:t>
+            </a:r>
+            <a:endParaRPr lang="de-DE" b="0" dirty="0"/>
+          </a:p>
+        </p:txBody>
+      </p:sp>
+      <p:sp>
+        <p:nvSpPr>
+          <p:cNvPr id="3" name="Foliennummernplatzhalter 2">
+            <a:extLst>
+              <a:ext uri="{FF2B5EF4-FFF2-40B4-BE49-F238E27FC236}">
+                <a16:creationId xmlns:a16="http://schemas.microsoft.com/office/drawing/2014/main" id="{86D9B423-944C-1C30-B5CC-D3E5B59E7598}"/>
+              </a:ext>
+            </a:extLst>
+          </p:cNvPr>
+          <p:cNvSpPr>
+            <a:spLocks noGrp="1"/>
+          </p:cNvSpPr>
+          <p:nvPr>
+            <p:ph type="sldNum" sz="quarter" idx="10"/>
+          </p:nvPr>
+        </p:nvSpPr>
+        <p:spPr/>
+        <p:txBody>
+          <a:bodyPr/>
+          <a:lstStyle/>
+          <a:p>
+            <a:fld id="{80B4FCE6-DC73-4135-BC56-1F242D45A84C}" type="slidenum">
+              <a:rPr lang="de-DE" smtClean="0"/>
+              <a:t>17</a:t>
+            </a:fld>
+            <a:endParaRPr lang="de-DE"/>
+          </a:p>
+        </p:txBody>
+      </p:sp>
+      <p:sp>
+        <p:nvSpPr>
+          <p:cNvPr id="7" name="Fußzeilenplatzhalter 6">
+            <a:extLst>
+              <a:ext uri="{FF2B5EF4-FFF2-40B4-BE49-F238E27FC236}">
+                <a16:creationId xmlns:a16="http://schemas.microsoft.com/office/drawing/2014/main" id="{61398641-4C2C-6031-67B2-033E0BC9BEAF}"/>
+              </a:ext>
+            </a:extLst>
+          </p:cNvPr>
+          <p:cNvSpPr>
+            <a:spLocks noGrp="1"/>
+          </p:cNvSpPr>
+          <p:nvPr>
+            <p:ph type="ftr" sz="quarter" idx="11"/>
+          </p:nvPr>
+        </p:nvSpPr>
+        <p:spPr/>
+        <p:txBody>
+          <a:bodyPr/>
+          <a:lstStyle/>
+          <a:p>
+            <a:r>
+              <a:rPr lang="de-DE"/>
+              <a:t>Materialdiagnostik: Task 3</a:t>
+            </a:r>
+            <a:endParaRPr lang="de-DE" dirty="0"/>
+          </a:p>
+        </p:txBody>
+      </p:sp>
+      <p:sp>
+        <p:nvSpPr>
+          <p:cNvPr id="6" name="Datumsplatzhalter 5">
+            <a:extLst>
+              <a:ext uri="{FF2B5EF4-FFF2-40B4-BE49-F238E27FC236}">
+                <a16:creationId xmlns:a16="http://schemas.microsoft.com/office/drawing/2014/main" id="{9CD15804-53A8-F6A6-4020-8B7067A69EC8}"/>
+              </a:ext>
+            </a:extLst>
+          </p:cNvPr>
+          <p:cNvSpPr>
+            <a:spLocks noGrp="1"/>
+          </p:cNvSpPr>
+          <p:nvPr>
+            <p:ph type="dt" sz="half" idx="12"/>
+          </p:nvPr>
+        </p:nvSpPr>
+        <p:spPr/>
+        <p:txBody>
+          <a:bodyPr/>
+          <a:lstStyle/>
+          <a:p>
+            <a:r>
+              <a:rPr lang="de-DE"/>
+              <a:t>16.07.2026</a:t>
+            </a:r>
+          </a:p>
+        </p:txBody>
+      </p:sp>
+      <p:sp>
+        <p:nvSpPr>
+          <p:cNvPr id="4" name="Inhaltsplatzhalter 3">
+            <a:extLst>
+              <a:ext uri="{FF2B5EF4-FFF2-40B4-BE49-F238E27FC236}">
+                <a16:creationId xmlns:a16="http://schemas.microsoft.com/office/drawing/2014/main" id="{9E24C8D9-E4E3-E9CF-1805-31E38BF75F4C}"/>
+              </a:ext>
+            </a:extLst>
+          </p:cNvPr>
+          <p:cNvSpPr>
+            <a:spLocks noGrp="1"/>
+          </p:cNvSpPr>
+          <p:nvPr>
+            <p:ph sz="quarter" idx="13"/>
+          </p:nvPr>
+        </p:nvSpPr>
+        <p:spPr/>
+        <p:txBody>
+          <a:bodyPr/>
+          <a:lstStyle/>
+          <a:p>
+            <a:pPr>
+              <a:buFont typeface="Arial" panose="020B0604020202020204" pitchFamily="34" charset="0"/>
+              <a:buChar char="•"/>
+            </a:pPr>
+            <a:endParaRPr lang="de-DE" dirty="0"/>
+          </a:p>
+          <a:p>
+            <a:pPr>
+              <a:buFont typeface="Arial" panose="020B0604020202020204" pitchFamily="34" charset="0"/>
+              <a:buChar char="•"/>
+            </a:pPr>
+            <a:r>
+              <a:rPr lang="de-DE" dirty="0"/>
+              <a:t>ROC für Klasse 0 = beschädigt</a:t>
+            </a:r>
+          </a:p>
+          <a:p>
+            <a:pPr>
+              <a:buFont typeface="Arial" panose="020B0604020202020204" pitchFamily="34" charset="0"/>
+              <a:buChar char="•"/>
+            </a:pPr>
+            <a:r>
+              <a:rPr lang="de-DE" dirty="0"/>
+              <a:t>AUC: 1.00</a:t>
+            </a:r>
+          </a:p>
+          <a:p>
+            <a:pPr>
+              <a:buFont typeface="Arial" panose="020B0604020202020204" pitchFamily="34" charset="0"/>
+              <a:buChar char="•"/>
+            </a:pPr>
+            <a:r>
+              <a:rPr lang="de-DE" dirty="0"/>
+              <a:t>Kurve liegt ideal links oben</a:t>
+            </a:r>
+          </a:p>
+          <a:p>
+            <a:endParaRPr lang="de-DE" dirty="0"/>
+          </a:p>
+        </p:txBody>
+      </p:sp>
+      <p:pic>
+        <p:nvPicPr>
+          <p:cNvPr id="10" name="Inhaltsplatzhalter 9">
+            <a:extLst>
+              <a:ext uri="{FF2B5EF4-FFF2-40B4-BE49-F238E27FC236}">
+                <a16:creationId xmlns:a16="http://schemas.microsoft.com/office/drawing/2014/main" id="{C5D9F17E-32D1-AC34-CA50-AD008C0C61A7}"/>
+              </a:ext>
+            </a:extLst>
+          </p:cNvPr>
+          <p:cNvPicPr>
+            <a:picLocks noGrp="1" noChangeAspect="1"/>
+          </p:cNvPicPr>
+          <p:nvPr>
+            <p:ph sz="quarter" idx="14"/>
+          </p:nvPr>
+        </p:nvPicPr>
+        <p:blipFill>
+          <a:blip r:embed="rId3"/>
+          <a:stretch>
+            <a:fillRect/>
+          </a:stretch>
+        </p:blipFill>
+        <p:spPr>
+          <a:xfrm>
+            <a:off x="6637205" y="1619250"/>
+            <a:ext cx="5035815" cy="4316413"/>
+          </a:xfrm>
+          <a:prstGeom prst="rect">
+            <a:avLst/>
+          </a:prstGeom>
+        </p:spPr>
+      </p:pic>
+    </p:spTree>
+    <p:extLst>
+      <p:ext uri="{BB962C8B-B14F-4D97-AF65-F5344CB8AC3E}">
+        <p14:creationId xmlns:p14="http://schemas.microsoft.com/office/powerpoint/2010/main" val="2916641920"/>
+      </p:ext>
+    </p:extLst>
+  </p:cSld>
+  <p:clrMapOvr>
+    <a:masterClrMapping/>
+  </p:clrMapOvr>
+</p:sld>
+</file>
+
+<file path=ppt/slides/slide18.xml><?xml version="1.0" encoding="utf-8"?>
+<p:sld xmlns:a="http://schemas.openxmlformats.org/drawingml/2006/main" xmlns:r="http://schemas.openxmlformats.org/officeDocument/2006/relationships" xmlns:p="http://schemas.openxmlformats.org/presentationml/2006/main">
+  <p:cSld>
+    <p:spTree>
+      <p:nvGrpSpPr>
+        <p:cNvPr id="1" name="">
+          <a:extLst>
+            <a:ext uri="{FF2B5EF4-FFF2-40B4-BE49-F238E27FC236}">
+              <a16:creationId xmlns:a16="http://schemas.microsoft.com/office/drawing/2014/main" id="{29BA22DC-F88E-99AF-A1B7-63C4E1E70CFE}"/>
+            </a:ext>
+          </a:extLst>
+        </p:cNvPr>
+        <p:cNvGrpSpPr/>
+        <p:nvPr/>
+      </p:nvGrpSpPr>
+      <p:grpSpPr>
+        <a:xfrm>
+          <a:off x="0" y="0"/>
+          <a:ext cx="0" cy="0"/>
+          <a:chOff x="0" y="0"/>
+          <a:chExt cx="0" cy="0"/>
+        </a:xfrm>
+      </p:grpSpPr>
+      <p:sp>
+        <p:nvSpPr>
+          <p:cNvPr id="3" name="Foliennummernplatzhalter 2">
+            <a:extLst>
+              <a:ext uri="{FF2B5EF4-FFF2-40B4-BE49-F238E27FC236}">
+                <a16:creationId xmlns:a16="http://schemas.microsoft.com/office/drawing/2014/main" id="{58211961-23B0-E5D4-DD50-236DA340FDDE}"/>
+              </a:ext>
+            </a:extLst>
+          </p:cNvPr>
+          <p:cNvSpPr>
+            <a:spLocks noGrp="1"/>
+          </p:cNvSpPr>
+          <p:nvPr>
+            <p:ph type="sldNum" sz="quarter" idx="10"/>
+          </p:nvPr>
+        </p:nvSpPr>
+        <p:spPr/>
+        <p:txBody>
+          <a:bodyPr/>
+          <a:lstStyle/>
+          <a:p>
+            <a:fld id="{80B4FCE6-DC73-4135-BC56-1F242D45A84C}" type="slidenum">
+              <a:rPr lang="de-DE" smtClean="0"/>
+              <a:t>18</a:t>
+            </a:fld>
+            <a:endParaRPr lang="de-DE"/>
+          </a:p>
+        </p:txBody>
+      </p:sp>
+      <p:sp>
+        <p:nvSpPr>
+          <p:cNvPr id="7" name="Fußzeilenplatzhalter 6">
+            <a:extLst>
+              <a:ext uri="{FF2B5EF4-FFF2-40B4-BE49-F238E27FC236}">
+                <a16:creationId xmlns:a16="http://schemas.microsoft.com/office/drawing/2014/main" id="{F90F7BFF-E634-F432-B716-E8CCB89A7606}"/>
+              </a:ext>
+            </a:extLst>
+          </p:cNvPr>
+          <p:cNvSpPr>
+            <a:spLocks noGrp="1"/>
+          </p:cNvSpPr>
+          <p:nvPr>
+            <p:ph type="ftr" sz="quarter" idx="11"/>
+          </p:nvPr>
+        </p:nvSpPr>
+        <p:spPr/>
+        <p:txBody>
+          <a:bodyPr/>
+          <a:lstStyle/>
+          <a:p>
+            <a:r>
+              <a:rPr lang="de-DE" dirty="0"/>
+              <a:t>Materialdiagnostik: Task 3</a:t>
+            </a:r>
+          </a:p>
+        </p:txBody>
+      </p:sp>
+      <p:sp>
+        <p:nvSpPr>
+          <p:cNvPr id="6" name="Datumsplatzhalter 5">
+            <a:extLst>
+              <a:ext uri="{FF2B5EF4-FFF2-40B4-BE49-F238E27FC236}">
+                <a16:creationId xmlns:a16="http://schemas.microsoft.com/office/drawing/2014/main" id="{6285D009-B3CD-3F2A-D8EE-96546325CCDB}"/>
+              </a:ext>
+            </a:extLst>
+          </p:cNvPr>
+          <p:cNvSpPr>
+            <a:spLocks noGrp="1"/>
+          </p:cNvSpPr>
+          <p:nvPr>
+            <p:ph type="dt" sz="half" idx="12"/>
+          </p:nvPr>
+        </p:nvSpPr>
+        <p:spPr/>
+        <p:txBody>
+          <a:bodyPr/>
+          <a:lstStyle/>
+          <a:p>
+            <a:r>
+              <a:rPr lang="de-DE"/>
+              <a:t>16.07.2026</a:t>
+            </a:r>
+          </a:p>
+        </p:txBody>
+      </p:sp>
+      <p:sp>
+        <p:nvSpPr>
+          <p:cNvPr id="11" name="Inhaltsplatzhalter 10">
+            <a:extLst>
+              <a:ext uri="{FF2B5EF4-FFF2-40B4-BE49-F238E27FC236}">
+                <a16:creationId xmlns:a16="http://schemas.microsoft.com/office/drawing/2014/main" id="{32197734-3134-43BC-590B-CFFB46F37A9B}"/>
+              </a:ext>
+            </a:extLst>
+          </p:cNvPr>
+          <p:cNvSpPr>
+            <a:spLocks noGrp="1"/>
+          </p:cNvSpPr>
+          <p:nvPr>
+            <p:ph sz="quarter" idx="13"/>
+          </p:nvPr>
+        </p:nvSpPr>
+        <p:spPr/>
+        <p:txBody>
+          <a:bodyPr/>
+          <a:lstStyle/>
+          <a:p>
+            <a:pPr>
+              <a:buFont typeface="Arial" panose="020B0604020202020204" pitchFamily="34" charset="0"/>
+              <a:buChar char="•"/>
+            </a:pPr>
+            <a:endParaRPr lang="de-DE" dirty="0"/>
+          </a:p>
+          <a:p>
+            <a:pPr>
+              <a:buFont typeface="Arial" panose="020B0604020202020204" pitchFamily="34" charset="0"/>
+              <a:buChar char="•"/>
+            </a:pPr>
+            <a:r>
+              <a:rPr lang="de-DE" dirty="0"/>
+              <a:t>Sehr gute Ergebnisse im aktuellen Split</a:t>
+            </a:r>
+          </a:p>
+          <a:p>
+            <a:pPr>
+              <a:buFont typeface="Arial" panose="020B0604020202020204" pitchFamily="34" charset="0"/>
+              <a:buChar char="•"/>
+            </a:pPr>
+            <a:r>
+              <a:rPr lang="de-DE" dirty="0"/>
+              <a:t>Aber:</a:t>
+            </a:r>
+          </a:p>
+          <a:p>
+            <a:pPr lvl="1">
+              <a:buFont typeface="Arial" panose="020B0604020202020204" pitchFamily="34" charset="0"/>
+              <a:buChar char="•"/>
+            </a:pPr>
+            <a:r>
+              <a:rPr lang="de-DE" dirty="0"/>
+              <a:t>kleiner Datensatz</a:t>
+            </a:r>
+          </a:p>
+          <a:p>
+            <a:pPr lvl="1">
+              <a:buFont typeface="Arial" panose="020B0604020202020204" pitchFamily="34" charset="0"/>
+              <a:buChar char="•"/>
+            </a:pPr>
+            <a:r>
+              <a:rPr lang="de-DE" dirty="0"/>
+              <a:t>nur Z05 ist beschädigt</a:t>
+            </a:r>
+          </a:p>
+          <a:p>
+            <a:pPr lvl="1">
+              <a:buFont typeface="Arial" panose="020B0604020202020204" pitchFamily="34" charset="0"/>
+              <a:buChar char="•"/>
+            </a:pPr>
+            <a:r>
+              <a:rPr lang="de-DE" dirty="0"/>
+              <a:t>gute Testdaten stammen aus unbekanntem Zahnrad Z03</a:t>
+            </a:r>
+          </a:p>
+          <a:p>
+            <a:pPr lvl="1">
+              <a:buFont typeface="Arial" panose="020B0604020202020204" pitchFamily="34" charset="0"/>
+              <a:buChar char="•"/>
+            </a:pPr>
+            <a:r>
+              <a:rPr lang="de-DE" dirty="0"/>
+              <a:t>beschädigte Klasse stammt weiterhin nur aus Z05</a:t>
+            </a:r>
+          </a:p>
+          <a:p>
+            <a:pPr lvl="1">
+              <a:buFont typeface="Arial" panose="020B0604020202020204" pitchFamily="34" charset="0"/>
+              <a:buChar char="•"/>
+            </a:pPr>
+            <a:r>
+              <a:rPr lang="de-DE" dirty="0"/>
+              <a:t>Generalisierung auf neue beschädigte Zahnräder offen</a:t>
+            </a:r>
+          </a:p>
+          <a:p>
+            <a:endParaRPr lang="de-DE" dirty="0"/>
+          </a:p>
+        </p:txBody>
+      </p:sp>
+      <p:sp>
+        <p:nvSpPr>
+          <p:cNvPr id="2" name="Titel 1">
+            <a:extLst>
+              <a:ext uri="{FF2B5EF4-FFF2-40B4-BE49-F238E27FC236}">
+                <a16:creationId xmlns:a16="http://schemas.microsoft.com/office/drawing/2014/main" id="{6697FF2F-4ABD-DBF1-1A9F-CD59B441583D}"/>
+              </a:ext>
+            </a:extLst>
+          </p:cNvPr>
+          <p:cNvSpPr>
+            <a:spLocks noGrp="1"/>
+          </p:cNvSpPr>
+          <p:nvPr>
+            <p:ph type="title"/>
+          </p:nvPr>
+        </p:nvSpPr>
+        <p:spPr/>
+        <p:txBody>
+          <a:bodyPr/>
+          <a:lstStyle/>
+          <a:p>
+            <a:r>
+              <a:rPr lang="de-DE" sz="3200" dirty="0"/>
+              <a:t>Kritische Diskussion</a:t>
+            </a:r>
+            <a:endParaRPr lang="de-DE" dirty="0"/>
+          </a:p>
+        </p:txBody>
+      </p:sp>
+    </p:spTree>
+    <p:extLst>
+      <p:ext uri="{BB962C8B-B14F-4D97-AF65-F5344CB8AC3E}">
+        <p14:creationId xmlns:p14="http://schemas.microsoft.com/office/powerpoint/2010/main" val="2865727699"/>
+      </p:ext>
+    </p:extLst>
+  </p:cSld>
+  <p:clrMapOvr>
+    <a:masterClrMapping/>
+  </p:clrMapOvr>
+</p:sld>
+</file>
+
+<file path=ppt/slides/slide19.xml><?xml version="1.0" encoding="utf-8"?>
+<p:sld xmlns:a="http://schemas.openxmlformats.org/drawingml/2006/main" xmlns:r="http://schemas.openxmlformats.org/officeDocument/2006/relationships" xmlns:p="http://schemas.openxmlformats.org/presentationml/2006/main">
+  <p:cSld>
+    <p:spTree>
+      <p:nvGrpSpPr>
+        <p:cNvPr id="1" name=""/>
+        <p:cNvGrpSpPr/>
+        <p:nvPr/>
+      </p:nvGrpSpPr>
+      <p:grpSpPr>
+        <a:xfrm>
+          <a:off x="0" y="0"/>
+          <a:ext cx="0" cy="0"/>
+          <a:chOff x="0" y="0"/>
+          <a:chExt cx="0" cy="0"/>
+        </a:xfrm>
+      </p:grpSpPr>
+      <p:sp>
+        <p:nvSpPr>
+          <p:cNvPr id="3" name="Inhaltsplatzhalter 2">
+            <a:extLst>
+              <a:ext uri="{FF2B5EF4-FFF2-40B4-BE49-F238E27FC236}">
+                <a16:creationId xmlns:a16="http://schemas.microsoft.com/office/drawing/2014/main" id="{EC792880-C870-78F8-FD9F-3732660E48D9}"/>
+              </a:ext>
+            </a:extLst>
+          </p:cNvPr>
+          <p:cNvSpPr>
+            <a:spLocks noGrp="1"/>
+          </p:cNvSpPr>
+          <p:nvPr>
+            <p:ph sz="quarter" idx="13"/>
+          </p:nvPr>
+        </p:nvSpPr>
+        <p:spPr/>
+        <p:txBody>
+          <a:bodyPr/>
+          <a:lstStyle/>
+          <a:p>
+            <a:pPr>
+              <a:buFont typeface="Arial" panose="020B0604020202020204" pitchFamily="34" charset="0"/>
+              <a:buChar char="•"/>
+            </a:pPr>
+            <a:endParaRPr lang="de-DE" dirty="0"/>
+          </a:p>
+          <a:p>
+            <a:pPr>
+              <a:buFont typeface="Arial" panose="020B0604020202020204" pitchFamily="34" charset="0"/>
+              <a:buChar char="•"/>
+            </a:pPr>
+            <a:r>
+              <a:rPr lang="de-DE" dirty="0"/>
+              <a:t>Saubere Pipeline von gemittelten Merkmalen zu zwei Channel-MLPs</a:t>
+            </a:r>
+          </a:p>
+          <a:p>
+            <a:pPr>
+              <a:buFont typeface="Arial" panose="020B0604020202020204" pitchFamily="34" charset="0"/>
+              <a:buChar char="•"/>
+            </a:pPr>
+            <a:r>
+              <a:rPr lang="de-DE" dirty="0"/>
+              <a:t>Zahnrad basierter Split statt zufälligem Dateisplit</a:t>
+            </a:r>
+          </a:p>
+          <a:p>
+            <a:pPr>
+              <a:buFont typeface="Arial" panose="020B0604020202020204" pitchFamily="34" charset="0"/>
+              <a:buChar char="•"/>
+            </a:pPr>
+            <a:r>
+              <a:rPr lang="de-DE" dirty="0"/>
+              <a:t>Testsignale werden nach Channel geroutet</a:t>
+            </a:r>
+          </a:p>
+          <a:p>
+            <a:pPr>
+              <a:buFont typeface="Arial" panose="020B0604020202020204" pitchFamily="34" charset="0"/>
+              <a:buChar char="•"/>
+            </a:pPr>
+            <a:r>
+              <a:rPr lang="de-DE" dirty="0"/>
+              <a:t>Beide MLPs erreichen perfekte Testwerte im aktuellen Datensatz</a:t>
+            </a:r>
+          </a:p>
+          <a:p>
+            <a:pPr>
+              <a:buFont typeface="Arial" panose="020B0604020202020204" pitchFamily="34" charset="0"/>
+              <a:buChar char="•"/>
+            </a:pPr>
+            <a:r>
+              <a:rPr lang="de-DE" dirty="0"/>
+              <a:t>Nächster Schritt: mehr beschädigte Proben testen</a:t>
+            </a:r>
+          </a:p>
+        </p:txBody>
+      </p:sp>
+      <p:sp>
+        <p:nvSpPr>
+          <p:cNvPr id="2" name="Titel 1">
+            <a:extLst>
+              <a:ext uri="{FF2B5EF4-FFF2-40B4-BE49-F238E27FC236}">
+                <a16:creationId xmlns:a16="http://schemas.microsoft.com/office/drawing/2014/main" id="{C254BBB6-51EB-B8DF-B124-F43AAB73DC5D}"/>
+              </a:ext>
+            </a:extLst>
+          </p:cNvPr>
+          <p:cNvSpPr>
+            <a:spLocks noGrp="1"/>
+          </p:cNvSpPr>
+          <p:nvPr>
+            <p:ph type="title"/>
+          </p:nvPr>
+        </p:nvSpPr>
+        <p:spPr/>
+        <p:txBody>
+          <a:bodyPr/>
+          <a:lstStyle/>
+          <a:p>
+            <a:r>
+              <a:rPr lang="de-DE" sz="3200" dirty="0"/>
+              <a:t>Fazit</a:t>
+            </a:r>
+          </a:p>
+        </p:txBody>
+      </p:sp>
+      <p:sp>
+        <p:nvSpPr>
+          <p:cNvPr id="5" name="Datumsplatzhalter 4">
+            <a:extLst>
+              <a:ext uri="{FF2B5EF4-FFF2-40B4-BE49-F238E27FC236}">
+                <a16:creationId xmlns:a16="http://schemas.microsoft.com/office/drawing/2014/main" id="{A1BB0821-ACF4-FAAA-FCFD-FE000BACD3BE}"/>
+              </a:ext>
+            </a:extLst>
+          </p:cNvPr>
+          <p:cNvSpPr>
+            <a:spLocks noGrp="1"/>
+          </p:cNvSpPr>
+          <p:nvPr>
+            <p:ph type="dt" sz="half" idx="12"/>
+          </p:nvPr>
+        </p:nvSpPr>
+        <p:spPr/>
+        <p:txBody>
+          <a:bodyPr/>
+          <a:lstStyle/>
+          <a:p>
+            <a:r>
+              <a:rPr lang="de-DE"/>
+              <a:t>16.07.2026</a:t>
+            </a:r>
+          </a:p>
+        </p:txBody>
+      </p:sp>
+      <p:sp>
+        <p:nvSpPr>
+          <p:cNvPr id="6" name="Fußzeilenplatzhalter 5">
+            <a:extLst>
+              <a:ext uri="{FF2B5EF4-FFF2-40B4-BE49-F238E27FC236}">
+                <a16:creationId xmlns:a16="http://schemas.microsoft.com/office/drawing/2014/main" id="{44504410-AB8A-471C-1D33-002F641A2C98}"/>
+              </a:ext>
+            </a:extLst>
+          </p:cNvPr>
+          <p:cNvSpPr>
+            <a:spLocks noGrp="1"/>
+          </p:cNvSpPr>
+          <p:nvPr>
+            <p:ph type="ftr" sz="quarter" idx="11"/>
+          </p:nvPr>
+        </p:nvSpPr>
+        <p:spPr/>
+        <p:txBody>
+          <a:bodyPr/>
+          <a:lstStyle/>
+          <a:p>
+            <a:r>
+              <a:rPr lang="de-DE"/>
+              <a:t>Materialdiagnostik: Task 3</a:t>
+            </a:r>
+            <a:endParaRPr lang="de-DE" dirty="0"/>
+          </a:p>
+        </p:txBody>
+      </p:sp>
+      <p:sp>
+        <p:nvSpPr>
+          <p:cNvPr id="7" name="Foliennummernplatzhalter 6">
+            <a:extLst>
+              <a:ext uri="{FF2B5EF4-FFF2-40B4-BE49-F238E27FC236}">
+                <a16:creationId xmlns:a16="http://schemas.microsoft.com/office/drawing/2014/main" id="{A8EACD8A-4E1D-8443-CADB-49E8F22A8887}"/>
+              </a:ext>
+            </a:extLst>
+          </p:cNvPr>
+          <p:cNvSpPr>
+            <a:spLocks noGrp="1"/>
+          </p:cNvSpPr>
+          <p:nvPr>
+            <p:ph type="sldNum" sz="quarter" idx="10"/>
+          </p:nvPr>
+        </p:nvSpPr>
+        <p:spPr/>
+        <p:txBody>
+          <a:bodyPr/>
+          <a:lstStyle/>
+          <a:p>
+            <a:fld id="{80B4FCE6-DC73-4135-BC56-1F242D45A84C}" type="slidenum">
+              <a:rPr lang="de-DE" smtClean="0"/>
+              <a:t>19</a:t>
+            </a:fld>
+            <a:endParaRPr lang="de-DE"/>
+          </a:p>
+        </p:txBody>
+      </p:sp>
+    </p:spTree>
+    <p:extLst>
+      <p:ext uri="{BB962C8B-B14F-4D97-AF65-F5344CB8AC3E}">
+        <p14:creationId xmlns:p14="http://schemas.microsoft.com/office/powerpoint/2010/main" val="176930895"/>
+      </p:ext>
+    </p:extLst>
+  </p:cSld>
+  <p:clrMapOvr>
+    <a:masterClrMapping/>
+  </p:clrMapOvr>
 </p:sld>
 </file>
 
@@ -9537,40 +9518,6 @@
       </p:sp>
       <p:sp>
         <p:nvSpPr>
-          <p:cNvPr id="9" name="Inhaltsplatzhalter 8">
-            <a:extLst>
-              <a:ext uri="{FF2B5EF4-FFF2-40B4-BE49-F238E27FC236}">
-                <a16:creationId xmlns:a16="http://schemas.microsoft.com/office/drawing/2014/main" id="{4DAFAAD0-F245-6E9A-4495-53E9DCD86688}"/>
-              </a:ext>
-            </a:extLst>
-          </p:cNvPr>
-          <p:cNvSpPr>
-            <a:spLocks noGrp="1"/>
-          </p:cNvSpPr>
-          <p:nvPr>
-            <p:ph type="body" sz="quarter" idx="13"/>
-          </p:nvPr>
-        </p:nvSpPr>
-        <p:spPr>
-          <a:xfrm>
-            <a:off x="4838289" y="1627906"/>
-            <a:ext cx="5747658" cy="3602187"/>
-          </a:xfrm>
-        </p:spPr>
-        <p:txBody>
-          <a:bodyPr/>
-          <a:lstStyle/>
-          <a:p>
-            <a:pPr>
-              <a:buFont typeface="Arial" panose="020B0604020202020204" pitchFamily="34" charset="0"/>
-              <a:buChar char="•"/>
-            </a:pPr>
-            <a:endParaRPr lang="de-DE" sz="2800" dirty="0"/>
-          </a:p>
-        </p:txBody>
-      </p:sp>
-      <p:sp>
-        <p:nvSpPr>
           <p:cNvPr id="6" name="Datumsplatzhalter 5">
             <a:extLst>
               <a:ext uri="{FF2B5EF4-FFF2-40B4-BE49-F238E27FC236}">
@@ -9654,6 +9601,36 @@
           </a:p>
         </p:txBody>
       </p:sp>
+      <p:pic>
+        <p:nvPicPr>
+          <p:cNvPr id="5" name="Grafik 4">
+            <a:extLst>
+              <a:ext uri="{FF2B5EF4-FFF2-40B4-BE49-F238E27FC236}">
+                <a16:creationId xmlns:a16="http://schemas.microsoft.com/office/drawing/2014/main" id="{3CD1AE25-2D20-AE6D-214C-FA96F52C5243}"/>
+              </a:ext>
+            </a:extLst>
+          </p:cNvPr>
+          <p:cNvPicPr>
+            <a:picLocks noChangeAspect="1"/>
+          </p:cNvPicPr>
+          <p:nvPr/>
+        </p:nvPicPr>
+        <p:blipFill>
+          <a:blip r:embed="rId3"/>
+          <a:stretch>
+            <a:fillRect/>
+          </a:stretch>
+        </p:blipFill>
+        <p:spPr>
+          <a:xfrm>
+            <a:off x="4838289" y="1627906"/>
+            <a:ext cx="4365653" cy="4350753"/>
+          </a:xfrm>
+          <a:prstGeom prst="rect">
+            <a:avLst/>
+          </a:prstGeom>
+        </p:spPr>
+      </p:pic>
     </p:spTree>
     <p:extLst>
       <p:ext uri="{BB962C8B-B14F-4D97-AF65-F5344CB8AC3E}">

--- a/Task_3/Task3Powerpoint.pptx
+++ b/Task_3/Task3Powerpoint.pptx
@@ -275,7 +275,7 @@
           <a:p>
             <a:fld id="{75AB4CA9-CCE6-4DE5-84AD-E1F7B6CB5CBB}" type="datetimeFigureOut">
               <a:rPr lang="de-DE" smtClean="0"/>
-              <a:t>09.07.2026</a:t>
+              <a:t>15.07.2026</a:t>
             </a:fld>
             <a:endParaRPr lang="de-DE"/>
           </a:p>
@@ -452,7 +452,7 @@
           <a:p>
             <a:fld id="{52D5829F-2F94-0B44-A96D-AE852A87AC61}" type="datetimeFigureOut">
               <a:rPr lang="de-DE" smtClean="0"/>
-              <a:t>09.07.2026</a:t>
+              <a:t>15.07.2026</a:t>
             </a:fld>
             <a:endParaRPr lang="de-DE"/>
           </a:p>
@@ -770,6 +770,18 @@
           <a:bodyPr/>
           <a:lstStyle/>
           <a:p>
+            <a:r>
+              <a:rPr lang="de-DE" sz="1200" b="0" kern="1200" dirty="0">
+                <a:solidFill>
+                  <a:schemeClr val="tx1"/>
+                </a:solidFill>
+                <a:effectLst/>
+                <a:latin typeface="+mn-lt"/>
+                <a:ea typeface="+mn-ea"/>
+                <a:cs typeface="+mn-cs"/>
+              </a:rPr>
+              <a:t>Victor</a:t>
+            </a:r>
             <a:endParaRPr lang="de-DE" dirty="0"/>
           </a:p>
           <a:p>
@@ -874,6 +886,20 @@
                 <a:ea typeface="+mn-ea"/>
                 <a:cs typeface="+mn-cs"/>
               </a:rPr>
+              <a:t>David</a:t>
+            </a:r>
+          </a:p>
+          <a:p>
+            <a:r>
+              <a:rPr lang="de-DE" sz="1200" b="0" kern="1200" dirty="0">
+                <a:solidFill>
+                  <a:schemeClr val="tx1"/>
+                </a:solidFill>
+                <a:effectLst/>
+                <a:latin typeface="+mn-lt"/>
+                <a:ea typeface="+mn-ea"/>
+                <a:cs typeface="+mn-cs"/>
+              </a:rPr>
               <a:t>Die Hyperparameter werden nicht auf dem Testsatz ausgewählt. Für jede Kombination trainieren wir auf dem Trainingssatz und bewerten auf dem Entwicklungssatz. Das beste Modell wird anhand der Entwicklungs-Metriken ausgewählt. Danach wird das finale Modell mit Training plus Entwicklung neu trainiert und erst dann auf dem Testsatz bewertet.</a:t>
             </a:r>
           </a:p>
@@ -993,6 +1019,37 @@
                 <a:ea typeface="+mn-ea"/>
                 <a:cs typeface="+mn-cs"/>
               </a:rPr>
+              <a:t>David</a:t>
+            </a:r>
+          </a:p>
+          <a:p>
+            <a:pPr marL="0" marR="0" lvl="0" indent="0" algn="l" defTabSz="914400" rtl="0" eaLnBrk="1" fontAlgn="auto" latinLnBrk="0" hangingPunct="1">
+              <a:lnSpc>
+                <a:spcPct val="100000"/>
+              </a:lnSpc>
+              <a:spcBef>
+                <a:spcPts val="0"/>
+              </a:spcBef>
+              <a:spcAft>
+                <a:spcPts val="0"/>
+              </a:spcAft>
+              <a:buClrTx/>
+              <a:buSzTx/>
+              <a:buFontTx/>
+              <a:buNone/>
+              <a:tabLst/>
+              <a:defRPr/>
+            </a:pPr>
+            <a:r>
+              <a:rPr lang="de-DE" sz="1200" b="0" kern="1200" dirty="0">
+                <a:solidFill>
+                  <a:schemeClr val="tx1"/>
+                </a:solidFill>
+                <a:effectLst/>
+                <a:latin typeface="+mn-lt"/>
+                <a:ea typeface="+mn-ea"/>
+                <a:cs typeface="+mn-cs"/>
+              </a:rPr>
               <a:t>Die Code-Vorstellung läuft am besten über `main.py`, weil dort alle Schritte sichtbar zusammenlaufen: Signale laden, Split anwenden, Features extrahieren, über `</a:t>
             </a:r>
             <a:r>
@@ -1218,7 +1275,21 @@
                 <a:ea typeface="+mn-ea"/>
                 <a:cs typeface="+mn-cs"/>
               </a:rPr>
-              <a:t> Die Training-Loss-Kurve zeigt, wie sich der Fehler während des Trainings entwickelt. Der Loss basiert auf den vorhergesagten Wahrscheinlichkeiten des MLP und den echten Labels. Wenn das Modell der richtigen Klasse eine hohe Wahrscheinlichkeit gibt, ist der Loss klein. Wenn es unsicher oder falsch liegt, steigt der Loss. In unseren Kurven sinkt der Loss deutlich ab, was zeigt, dass das Training funktioniert und das Modell die Trainingsdaten zunehmend besser beschreibt. Wichtig ist aber, dass ein niedriger Trainings-Loss allein nicht   ausreicht. Ein Modell kann auf Trainingsdaten sehr gut sein und trotzdem schlecht generalisieren. Deshalb bewerten wir zusätzlich mit Entwicklungssatz, Testsatz, ROC/AUC und Learning </a:t>
+              <a:t>David</a:t>
+            </a:r>
+          </a:p>
+          <a:p>
+            <a:r>
+              <a:rPr lang="de-DE" sz="1200" b="0" kern="1200" dirty="0">
+                <a:solidFill>
+                  <a:schemeClr val="tx1"/>
+                </a:solidFill>
+                <a:effectLst/>
+                <a:latin typeface="+mn-lt"/>
+                <a:ea typeface="+mn-ea"/>
+                <a:cs typeface="+mn-cs"/>
+              </a:rPr>
+              <a:t>Die Training-Loss-Kurve zeigt, wie sich der Fehler während des Trainings entwickelt. Der Loss basiert auf den vorhergesagten Wahrscheinlichkeiten des MLP und den echten Labels. Wenn das Modell der richtigen Klasse eine hohe Wahrscheinlichkeit gibt, ist der Loss klein. Wenn es unsicher oder falsch liegt, steigt der Loss. In unseren Kurven sinkt der Loss deutlich ab, was zeigt, dass das Training funktioniert und das Modell die Trainingsdaten zunehmend besser beschreibt. Wichtig ist aber, dass ein niedriger Trainings-Loss allein nicht   ausreicht. Ein Modell kann auf Trainingsdaten sehr gut sein und trotzdem schlecht generalisieren. Deshalb bewerten wir zusätzlich mit Entwicklungssatz, Testsatz, ROC/AUC und Learning </a:t>
             </a:r>
             <a:r>
               <a:rPr lang="de-DE" sz="1200" b="0" kern="1200" dirty="0" err="1">
@@ -1362,6 +1433,20 @@
                 <a:ea typeface="+mn-ea"/>
                 <a:cs typeface="+mn-cs"/>
               </a:rPr>
+              <a:t>Benjamin</a:t>
+            </a:r>
+          </a:p>
+          <a:p>
+            <a:r>
+              <a:rPr lang="de-DE" sz="1200" b="0" kern="1200" dirty="0">
+                <a:solidFill>
+                  <a:schemeClr val="tx1"/>
+                </a:solidFill>
+                <a:effectLst/>
+                <a:latin typeface="+mn-lt"/>
+                <a:ea typeface="+mn-ea"/>
+                <a:cs typeface="+mn-cs"/>
+              </a:rPr>
               <a:t>Die Learning </a:t>
             </a:r>
             <a:r>
@@ -1485,9 +1570,18 @@
           <a:lstStyle/>
           <a:p>
             <a:r>
-              <a:rPr lang="de-DE" dirty="0"/>
-              <a:t>B</a:t>
-            </a:r>
+              <a:rPr lang="de-DE" sz="1200" b="0" kern="1200" dirty="0">
+                <a:solidFill>
+                  <a:schemeClr val="tx1"/>
+                </a:solidFill>
+                <a:effectLst/>
+                <a:latin typeface="+mn-lt"/>
+                <a:ea typeface="+mn-ea"/>
+                <a:cs typeface="+mn-cs"/>
+              </a:rPr>
+              <a:t>Benjamin</a:t>
+            </a:r>
+            <a:endParaRPr lang="de-DE" dirty="0"/>
           </a:p>
         </p:txBody>
       </p:sp>
@@ -1597,9 +1691,18 @@
           <a:lstStyle/>
           <a:p>
             <a:r>
-              <a:rPr lang="de-DE" dirty="0"/>
-              <a:t>B</a:t>
-            </a:r>
+              <a:rPr lang="de-DE" sz="1200" b="0" kern="1200" dirty="0">
+                <a:solidFill>
+                  <a:schemeClr val="tx1"/>
+                </a:solidFill>
+                <a:effectLst/>
+                <a:latin typeface="+mn-lt"/>
+                <a:ea typeface="+mn-ea"/>
+                <a:cs typeface="+mn-cs"/>
+              </a:rPr>
+              <a:t>Benjamin</a:t>
+            </a:r>
+            <a:endParaRPr lang="de-DE" dirty="0"/>
           </a:p>
         </p:txBody>
       </p:sp>
@@ -1724,6 +1827,20 @@
                 <a:ea typeface="+mn-ea"/>
                 <a:cs typeface="+mn-cs"/>
               </a:rPr>
+              <a:t>Benjamin</a:t>
+            </a:r>
+          </a:p>
+          <a:p>
+            <a:r>
+              <a:rPr lang="de-DE" sz="1200" b="0" kern="1200" dirty="0">
+                <a:solidFill>
+                  <a:schemeClr val="tx1"/>
+                </a:solidFill>
+                <a:effectLst/>
+                <a:latin typeface="+mn-lt"/>
+                <a:ea typeface="+mn-ea"/>
+                <a:cs typeface="+mn-cs"/>
+              </a:rPr>
               <a:t>Die </a:t>
             </a:r>
             <a:r>
@@ -1880,6 +1997,20 @@
                 <a:ea typeface="+mn-ea"/>
                 <a:cs typeface="+mn-cs"/>
               </a:rPr>
+              <a:t>Benjamin</a:t>
+            </a:r>
+          </a:p>
+          <a:p>
+            <a:r>
+              <a:rPr lang="de-DE" sz="1200" b="0" kern="1200" dirty="0">
+                <a:solidFill>
+                  <a:schemeClr val="tx1"/>
+                </a:solidFill>
+                <a:effectLst/>
+                <a:latin typeface="+mn-lt"/>
+                <a:ea typeface="+mn-ea"/>
+                <a:cs typeface="+mn-cs"/>
+              </a:rPr>
               <a:t>Die ROC-Kurve zeigt, wie gut das Modell zwischen </a:t>
             </a:r>
             <a:r>
@@ -2047,6 +2178,37 @@
                 <a:ea typeface="+mn-ea"/>
                 <a:cs typeface="+mn-cs"/>
               </a:rPr>
+              <a:t>Tim</a:t>
+            </a:r>
+          </a:p>
+          <a:p>
+            <a:pPr marL="0" marR="0" lvl="0" indent="0" algn="l" defTabSz="914400" rtl="0" eaLnBrk="1" fontAlgn="auto" latinLnBrk="0" hangingPunct="1">
+              <a:lnSpc>
+                <a:spcPct val="100000"/>
+              </a:lnSpc>
+              <a:spcBef>
+                <a:spcPts val="0"/>
+              </a:spcBef>
+              <a:spcAft>
+                <a:spcPts val="0"/>
+              </a:spcAft>
+              <a:buClrTx/>
+              <a:buSzTx/>
+              <a:buFontTx/>
+              <a:buNone/>
+              <a:tabLst/>
+              <a:defRPr/>
+            </a:pPr>
+            <a:r>
+              <a:rPr lang="de-DE" sz="1200" b="0" kern="1200" dirty="0">
+                <a:solidFill>
+                  <a:schemeClr val="tx1"/>
+                </a:solidFill>
+                <a:effectLst/>
+                <a:latin typeface="+mn-lt"/>
+                <a:ea typeface="+mn-ea"/>
+                <a:cs typeface="+mn-cs"/>
+              </a:rPr>
               <a:t>Der wichtigste Diskussionsteil ist die Einordnung. Der neue Split prüft die guten Zahnräder strenger, weil `Z03` im Test nicht im Training vorkommt. Für die beschädigte Klasse bleibt die Aussage begrenzt, weil alle beschädigten Signale aus `Z05` stammen. Für eine robuste Aussage bräuchte man weitere beschädigte Zahnräder.</a:t>
             </a:r>
           </a:p>
@@ -2169,6 +2331,37 @@
                 <a:ea typeface="+mn-ea"/>
                 <a:cs typeface="+mn-cs"/>
               </a:rPr>
+              <a:t>Tim</a:t>
+            </a:r>
+          </a:p>
+          <a:p>
+            <a:pPr marL="0" marR="0" lvl="0" indent="0" algn="l" defTabSz="914400" rtl="0" eaLnBrk="1" fontAlgn="auto" latinLnBrk="0" hangingPunct="1">
+              <a:lnSpc>
+                <a:spcPct val="100000"/>
+              </a:lnSpc>
+              <a:spcBef>
+                <a:spcPts val="0"/>
+              </a:spcBef>
+              <a:spcAft>
+                <a:spcPts val="0"/>
+              </a:spcAft>
+              <a:buClrTx/>
+              <a:buSzTx/>
+              <a:buFontTx/>
+              <a:buNone/>
+              <a:tabLst/>
+              <a:defRPr/>
+            </a:pPr>
+            <a:r>
+              <a:rPr lang="de-DE" sz="1200" b="0" kern="1200" dirty="0">
+                <a:solidFill>
+                  <a:schemeClr val="tx1"/>
+                </a:solidFill>
+                <a:effectLst/>
+                <a:latin typeface="+mn-lt"/>
+                <a:ea typeface="+mn-ea"/>
+                <a:cs typeface="+mn-cs"/>
+              </a:rPr>
               <a:t>Zusammenfassend haben wir eine vollständige Klassifikationspipeline aufgebaut. Die wichtigsten methodischen Entscheidungen waren die Feature-Mittelung über `</a:t>
             </a:r>
             <a:r>
@@ -2288,15 +2481,18 @@
           <a:bodyPr/>
           <a:lstStyle/>
           <a:p>
-            <a:endParaRPr lang="de-DE" sz="1200" b="0" kern="1200" dirty="0">
-              <a:solidFill>
-                <a:schemeClr val="tx1"/>
-              </a:solidFill>
-              <a:effectLst/>
-              <a:latin typeface="+mn-lt"/>
-              <a:ea typeface="+mn-ea"/>
-              <a:cs typeface="+mn-cs"/>
-            </a:endParaRPr>
+            <a:r>
+              <a:rPr lang="de-DE" sz="1200" b="0" kern="1200" dirty="0">
+                <a:solidFill>
+                  <a:schemeClr val="tx1"/>
+                </a:solidFill>
+                <a:effectLst/>
+                <a:latin typeface="+mn-lt"/>
+                <a:ea typeface="+mn-ea"/>
+                <a:cs typeface="+mn-cs"/>
+              </a:rPr>
+              <a:t>Victor</a:t>
+            </a:r>
           </a:p>
         </p:txBody>
       </p:sp>
@@ -2404,6 +2600,10 @@
               <a:tabLst/>
               <a:defRPr/>
             </a:pPr>
+            <a:r>
+              <a:rPr lang="de-DE"/>
+              <a:t>Tim</a:t>
+            </a:r>
             <a:endParaRPr lang="de-DE" dirty="0"/>
           </a:p>
           <a:p>
@@ -2525,6 +2725,37 @@
                 <a:ea typeface="+mn-ea"/>
                 <a:cs typeface="+mn-cs"/>
               </a:rPr>
+              <a:t>Victor</a:t>
+            </a:r>
+          </a:p>
+          <a:p>
+            <a:pPr marL="0" marR="0" lvl="0" indent="0" algn="l" defTabSz="914400" rtl="0" eaLnBrk="1" fontAlgn="auto" latinLnBrk="0" hangingPunct="1">
+              <a:lnSpc>
+                <a:spcPct val="100000"/>
+              </a:lnSpc>
+              <a:spcBef>
+                <a:spcPts val="0"/>
+              </a:spcBef>
+              <a:spcAft>
+                <a:spcPts val="0"/>
+              </a:spcAft>
+              <a:buClrTx/>
+              <a:buSzTx/>
+              <a:buFontTx/>
+              <a:buNone/>
+              <a:tabLst/>
+              <a:defRPr/>
+            </a:pPr>
+            <a:r>
+              <a:rPr lang="de-DE" sz="1200" b="0" kern="1200" dirty="0">
+                <a:solidFill>
+                  <a:schemeClr val="tx1"/>
+                </a:solidFill>
+                <a:effectLst/>
+                <a:latin typeface="+mn-lt"/>
+                <a:ea typeface="+mn-ea"/>
+                <a:cs typeface="+mn-cs"/>
+              </a:rPr>
               <a:t>In Aufgabe 3 geht es darum, die Daten aus Aufgabe 2 nicht nur visuell zu untersuchen, sondern automatisch zu klassifizieren. Das Ziel ist eine binäre Entscheidung: Ist ein Signal einem guten oder einem beschädigten Zahnrad zuzuordnen? Dafür verwenden wir ein MLP und bewerten das Modell erst am Ende auf einem separaten Testsatz.</a:t>
             </a:r>
           </a:p>
@@ -2647,6 +2878,37 @@
                 <a:ea typeface="+mn-ea"/>
                 <a:cs typeface="+mn-cs"/>
               </a:rPr>
+              <a:t>Victor</a:t>
+            </a:r>
+          </a:p>
+          <a:p>
+            <a:pPr marL="0" marR="0" lvl="0" indent="0" algn="l" defTabSz="914400" rtl="0" eaLnBrk="1" fontAlgn="auto" latinLnBrk="0" hangingPunct="1">
+              <a:lnSpc>
+                <a:spcPct val="100000"/>
+              </a:lnSpc>
+              <a:spcBef>
+                <a:spcPts val="0"/>
+              </a:spcBef>
+              <a:spcAft>
+                <a:spcPts val="0"/>
+              </a:spcAft>
+              <a:buClrTx/>
+              <a:buSzTx/>
+              <a:buFontTx/>
+              <a:buNone/>
+              <a:tabLst/>
+              <a:defRPr/>
+            </a:pPr>
+            <a:r>
+              <a:rPr lang="de-DE" sz="1200" b="0" kern="1200" dirty="0">
+                <a:solidFill>
+                  <a:schemeClr val="tx1"/>
+                </a:solidFill>
+                <a:effectLst/>
+                <a:latin typeface="+mn-lt"/>
+                <a:ea typeface="+mn-ea"/>
+                <a:cs typeface="+mn-cs"/>
+              </a:rPr>
               <a:t>Die Label-Zuordnung basiert auf den Ergebnissen aus Aufgabe 2. Dort wurde `Z05` als beschädigt betrachtet, während `Z01` bis `Z04` als gut verwendet werden. Wichtig ist, dass nur eine Probe die Klasse 0 bildet. Das ist für die spätere Diskussion relevant, weil das Modell dadurch nicht viele verschiedene beschädigte Zahnräder sieht.</a:t>
             </a:r>
           </a:p>
@@ -2796,6 +3058,20 @@
         <p:txBody>
           <a:bodyPr/>
           <a:lstStyle/>
+          <a:p>
+            <a:r>
+              <a:rPr lang="de-DE" sz="1200" b="0" kern="1200" dirty="0">
+                <a:solidFill>
+                  <a:schemeClr val="tx1"/>
+                </a:solidFill>
+                <a:effectLst/>
+                <a:latin typeface="+mn-lt"/>
+                <a:ea typeface="+mn-ea"/>
+                <a:cs typeface="+mn-cs"/>
+              </a:rPr>
+              <a:t>Victor</a:t>
+            </a:r>
+          </a:p>
           <a:p>
             <a:r>
               <a:rPr lang="de-DE" sz="1200" b="0" kern="1200" dirty="0">
@@ -2951,6 +3227,29 @@
                 <a:ea typeface="+mn-ea"/>
                 <a:cs typeface="+mn-cs"/>
               </a:rPr>
+              <a:t>Victor</a:t>
+            </a:r>
+            <a:br>
+              <a:rPr lang="de-DE" sz="1200" b="0" kern="1200" dirty="0">
+                <a:solidFill>
+                  <a:schemeClr val="tx1"/>
+                </a:solidFill>
+                <a:effectLst/>
+                <a:latin typeface="+mn-lt"/>
+                <a:ea typeface="+mn-ea"/>
+                <a:cs typeface="+mn-cs"/>
+              </a:rPr>
+            </a:br>
+            <a:r>
+              <a:rPr lang="de-DE" sz="1200" b="0" kern="1200" dirty="0">
+                <a:solidFill>
+                  <a:schemeClr val="tx1"/>
+                </a:solidFill>
+                <a:effectLst/>
+                <a:latin typeface="+mn-lt"/>
+                <a:ea typeface="+mn-ea"/>
+                <a:cs typeface="+mn-cs"/>
+              </a:rPr>
               <a:t>Wir verwenden bewusst die Merkmale aus Aufgabe 2 weiter, weil diese bereits zu guten visuellen Trennungen geführt haben. Die Merkmale beschreiben sowohl zeitliche Eigenschaften als auch spektrale Eigenschaften des Signals. Dadurch muss das MLP nicht direkt auf den Rohsignalen lernen, sondern bekommt kompakte Signalbeschreibungen.</a:t>
             </a:r>
           </a:p>
@@ -3079,6 +3378,37 @@
                 <a:ea typeface="+mn-ea"/>
                 <a:cs typeface="+mn-cs"/>
               </a:rPr>
+              <a:t>Tim</a:t>
+            </a:r>
+          </a:p>
+          <a:p>
+            <a:pPr marL="0" marR="0" lvl="0" indent="0" algn="l" defTabSz="914400" rtl="0" eaLnBrk="1" fontAlgn="auto" latinLnBrk="0" hangingPunct="1">
+              <a:lnSpc>
+                <a:spcPct val="100000"/>
+              </a:lnSpc>
+              <a:spcBef>
+                <a:spcPts val="0"/>
+              </a:spcBef>
+              <a:spcAft>
+                <a:spcPts val="0"/>
+              </a:spcAft>
+              <a:buClrTx/>
+              <a:buSzTx/>
+              <a:buFontTx/>
+              <a:buNone/>
+              <a:tabLst/>
+              <a:defRPr/>
+            </a:pPr>
+            <a:r>
+              <a:rPr lang="de-DE" sz="1200" b="0" kern="1200" dirty="0">
+                <a:solidFill>
+                  <a:schemeClr val="tx1"/>
+                </a:solidFill>
+                <a:effectLst/>
+                <a:latin typeface="+mn-lt"/>
+                <a:ea typeface="+mn-ea"/>
+                <a:cs typeface="+mn-cs"/>
+              </a:rPr>
               <a:t>Wir extrahieren die Merkmale pro Roh-datei und mitteln danach die Feature-werte über alle `</a:t>
             </a:r>
             <a:r>
@@ -3197,6 +3527,37 @@
         <p:txBody>
           <a:bodyPr/>
           <a:lstStyle/>
+          <a:p>
+            <a:pPr marL="0" marR="0" lvl="0" indent="0" algn="l" defTabSz="914400" rtl="0" eaLnBrk="1" fontAlgn="auto" latinLnBrk="0" hangingPunct="1">
+              <a:lnSpc>
+                <a:spcPct val="100000"/>
+              </a:lnSpc>
+              <a:spcBef>
+                <a:spcPts val="0"/>
+              </a:spcBef>
+              <a:spcAft>
+                <a:spcPts val="0"/>
+              </a:spcAft>
+              <a:buClrTx/>
+              <a:buSzTx/>
+              <a:buFontTx/>
+              <a:buNone/>
+              <a:tabLst/>
+              <a:defRPr/>
+            </a:pPr>
+            <a:r>
+              <a:rPr lang="de-DE" sz="1200" b="0" kern="1200" dirty="0">
+                <a:solidFill>
+                  <a:schemeClr val="tx1"/>
+                </a:solidFill>
+                <a:effectLst/>
+                <a:latin typeface="+mn-lt"/>
+                <a:ea typeface="+mn-ea"/>
+                <a:cs typeface="+mn-cs"/>
+              </a:rPr>
+              <a:t>Tim</a:t>
+            </a:r>
+          </a:p>
           <a:p>
             <a:r>
               <a:rPr lang="de-DE" sz="1200" b="0" kern="1200" dirty="0">
@@ -3317,6 +3678,37 @@
         <p:txBody>
           <a:bodyPr/>
           <a:lstStyle/>
+          <a:p>
+            <a:pPr marL="0" marR="0" lvl="0" indent="0" algn="l" defTabSz="914400" rtl="0" eaLnBrk="1" fontAlgn="auto" latinLnBrk="0" hangingPunct="1">
+              <a:lnSpc>
+                <a:spcPct val="100000"/>
+              </a:lnSpc>
+              <a:spcBef>
+                <a:spcPts val="0"/>
+              </a:spcBef>
+              <a:spcAft>
+                <a:spcPts val="0"/>
+              </a:spcAft>
+              <a:buClrTx/>
+              <a:buSzTx/>
+              <a:buFontTx/>
+              <a:buNone/>
+              <a:tabLst/>
+              <a:defRPr/>
+            </a:pPr>
+            <a:r>
+              <a:rPr lang="de-DE" sz="1200" b="0" kern="1200" dirty="0">
+                <a:solidFill>
+                  <a:schemeClr val="tx1"/>
+                </a:solidFill>
+                <a:effectLst/>
+                <a:latin typeface="+mn-lt"/>
+                <a:ea typeface="+mn-ea"/>
+                <a:cs typeface="+mn-cs"/>
+              </a:rPr>
+              <a:t>David</a:t>
+            </a:r>
+          </a:p>
           <a:p>
             <a:r>
               <a:rPr lang="de-DE" sz="1200" b="0" kern="1200" dirty="0">
@@ -10883,18 +11275,7 @@
               <a:buFont typeface="Arial" panose="020B0604020202020204" pitchFamily="34" charset="0"/>
               <a:buChar char="•"/>
             </a:pPr>
-            <a:r>
-              <a:rPr lang="de-DE" dirty="0"/>
-              <a:t>Feature-Mittelung über `</a:t>
-            </a:r>
-            <a:r>
-              <a:rPr lang="de-DE" dirty="0" err="1"/>
-              <a:t>mID</a:t>
-            </a:r>
-            <a:r>
-              <a:rPr lang="de-DE" dirty="0"/>
-              <a:t>`</a:t>
-            </a:r>
+            <a:endParaRPr lang="de-DE" dirty="0"/>
           </a:p>
           <a:p>
             <a:pPr>
@@ -10903,7 +11284,15 @@
             </a:pPr>
             <a:r>
               <a:rPr lang="de-DE" dirty="0"/>
-              <a:t>Merkmalsextraktion pro Datei vor der Mittelung</a:t>
+              <a:t>Feature-Mittelung über `</a:t>
+            </a:r>
+            <a:r>
+              <a:rPr lang="de-DE" dirty="0" err="1"/>
+              <a:t>mID</a:t>
+            </a:r>
+            <a:r>
+              <a:rPr lang="de-DE" dirty="0"/>
+              <a:t>`</a:t>
             </a:r>
           </a:p>
           <a:p>
@@ -10913,47 +11302,7 @@
             </a:pPr>
             <a:r>
               <a:rPr lang="de-DE" dirty="0"/>
-              <a:t>Fester Split über Zahnräder:</a:t>
-            </a:r>
-          </a:p>
-          <a:p>
-            <a:pPr lvl="1">
-              <a:buFont typeface="Arial" panose="020B0604020202020204" pitchFamily="34" charset="0"/>
-              <a:buChar char="•"/>
-            </a:pPr>
-            <a:r>
-              <a:rPr lang="de-DE" dirty="0"/>
-              <a:t>Train: Z01, Z02</a:t>
-            </a:r>
-          </a:p>
-          <a:p>
-            <a:pPr lvl="1">
-              <a:buFont typeface="Arial" panose="020B0604020202020204" pitchFamily="34" charset="0"/>
-              <a:buChar char="•"/>
-            </a:pPr>
-            <a:r>
-              <a:rPr lang="de-DE" dirty="0"/>
-              <a:t>Dev: Z04</a:t>
-            </a:r>
-          </a:p>
-          <a:p>
-            <a:pPr lvl="1">
-              <a:buFont typeface="Arial" panose="020B0604020202020204" pitchFamily="34" charset="0"/>
-              <a:buChar char="•"/>
-            </a:pPr>
-            <a:r>
-              <a:rPr lang="de-DE" dirty="0"/>
-              <a:t>Test: Z03</a:t>
-            </a:r>
-          </a:p>
-          <a:p>
-            <a:pPr>
-              <a:buFont typeface="Arial" panose="020B0604020202020204" pitchFamily="34" charset="0"/>
-              <a:buChar char="•"/>
-            </a:pPr>
-            <a:r>
-              <a:rPr lang="de-DE" dirty="0"/>
-              <a:t>Z05 positionsbasiert auf alle Splits verteilt</a:t>
+              <a:t>Merkmalsextraktion pro Datei vor der Mittelung</a:t>
             </a:r>
           </a:p>
           <a:p>

--- a/Task_3/Task3Powerpoint.pptx
+++ b/Task_3/Task3Powerpoint.pptx
@@ -1471,7 +1471,35 @@
                 <a:ea typeface="+mn-ea"/>
                 <a:cs typeface="+mn-cs"/>
               </a:rPr>
-              <a:t> zeigen, wie gut das Modell mit wachsender Trainingsmenge wird. Im aktuellen Split erreicht `Ch1` schon mit kleinen Trainingsmengen perfekte Entwicklungswerte. `Ch2` verbessert sich schrittweise und erreicht die perfekten Entwicklungswerte erst mit der gesamten Trainingsmenge.</a:t>
+              <a:t> zeigen, wie gut das Modell mit wachsender Trainingsmenge wird. </a:t>
+            </a:r>
+          </a:p>
+          <a:p>
+            <a:r>
+              <a:rPr lang="de-DE" sz="1200" b="0" kern="1200" dirty="0">
+                <a:solidFill>
+                  <a:schemeClr val="tx1"/>
+                </a:solidFill>
+                <a:effectLst/>
+                <a:latin typeface="+mn-lt"/>
+                <a:ea typeface="+mn-ea"/>
+                <a:cs typeface="+mn-cs"/>
+              </a:rPr>
+              <a:t>Im aktuellen Split erreicht `Ch1` schon mit kleinen Trainingsmengen perfekte Entwicklungswerte. </a:t>
+            </a:r>
+          </a:p>
+          <a:p>
+            <a:r>
+              <a:rPr lang="de-DE" sz="1200" b="0" kern="1200" dirty="0">
+                <a:solidFill>
+                  <a:schemeClr val="tx1"/>
+                </a:solidFill>
+                <a:effectLst/>
+                <a:latin typeface="+mn-lt"/>
+                <a:ea typeface="+mn-ea"/>
+                <a:cs typeface="+mn-cs"/>
+              </a:rPr>
+              <a:t>`Ch2` verbessert sich schrittweise und erreicht die perfekten Entwicklungswerte erst mit der gesamten Trainingsmenge.</a:t>
             </a:r>
           </a:p>
         </p:txBody>
@@ -6457,9 +6485,8 @@
         </p:nvPicPr>
         <p:blipFill>
           <a:blip r:embed="rId3"/>
-          <a:stretch>
-            <a:fillRect/>
-          </a:stretch>
+          <a:srcRect/>
+          <a:stretch/>
         </p:blipFill>
         <p:spPr>
           <a:xfrm>
@@ -7277,6 +7304,77 @@
               <a:t>12</a:t>
             </a:fld>
             <a:endParaRPr lang="de-DE"/>
+          </a:p>
+        </p:txBody>
+      </p:sp>
+      <p:sp>
+        <p:nvSpPr>
+          <p:cNvPr id="4" name="Rechteck 3">
+            <a:extLst>
+              <a:ext uri="{FF2B5EF4-FFF2-40B4-BE49-F238E27FC236}">
+                <a16:creationId xmlns:a16="http://schemas.microsoft.com/office/drawing/2014/main" id="{A62FCFAB-90C4-BC2F-0E0E-35EA9DB353D8}"/>
+              </a:ext>
+            </a:extLst>
+          </p:cNvPr>
+          <p:cNvSpPr/>
+          <p:nvPr/>
+        </p:nvSpPr>
+        <p:spPr bwMode="auto">
+          <a:xfrm>
+            <a:off x="9049407" y="5244662"/>
+            <a:ext cx="578069" cy="217527"/>
+          </a:xfrm>
+          <a:prstGeom prst="rect">
+            <a:avLst/>
+          </a:prstGeom>
+          <a:solidFill>
+            <a:schemeClr val="bg1"/>
+          </a:solidFill>
+          <a:ln w="9525" cap="flat" cmpd="sng" algn="ctr">
+            <a:noFill/>
+            <a:prstDash val="solid"/>
+            <a:round/>
+            <a:headEnd type="none" w="med" len="med"/>
+            <a:tailEnd type="none" w="med" len="med"/>
+          </a:ln>
+          <a:effectLst/>
+        </p:spPr>
+        <p:txBody>
+          <a:bodyPr vert="horz" wrap="square" lIns="91440" tIns="45720" rIns="91440" bIns="45720" numCol="1" rtlCol="0" anchor="t" anchorCtr="0" compatLnSpc="1">
+            <a:prstTxWarp prst="textNoShape">
+              <a:avLst/>
+            </a:prstTxWarp>
+          </a:bodyPr>
+          <a:lstStyle/>
+          <a:p>
+            <a:pPr marL="0" marR="0" indent="0" algn="l" defTabSz="914400" rtl="0" eaLnBrk="0" fontAlgn="base" latinLnBrk="0" hangingPunct="0">
+              <a:lnSpc>
+                <a:spcPct val="100000"/>
+              </a:lnSpc>
+              <a:spcBef>
+                <a:spcPct val="0"/>
+              </a:spcBef>
+              <a:spcAft>
+                <a:spcPct val="0"/>
+              </a:spcAft>
+              <a:buClrTx/>
+              <a:buSzTx/>
+              <a:buFontTx/>
+              <a:buNone/>
+              <a:tabLst/>
+            </a:pPr>
+            <a:endParaRPr kumimoji="0" lang="de-DE" sz="2400" b="0" i="0" u="none" strike="noStrike" cap="none" normalizeH="0" baseline="0">
+              <a:ln>
+                <a:noFill/>
+              </a:ln>
+              <a:solidFill>
+                <a:schemeClr val="tx1"/>
+              </a:solidFill>
+              <a:effectLst/>
+              <a:latin typeface="Arial" pitchFamily="-109" charset="0"/>
+              <a:ea typeface="ヒラギノ角ゴ Pro W3" pitchFamily="-109" charset="-128"/>
+              <a:cs typeface="ヒラギノ角ゴ Pro W3" pitchFamily="-109" charset="-128"/>
+            </a:endParaRPr>
           </a:p>
         </p:txBody>
       </p:sp>
@@ -8848,7 +8946,7 @@
         </p:blipFill>
         <p:spPr>
           <a:xfrm>
-            <a:off x="6459536" y="2092721"/>
+            <a:off x="6455727" y="2068701"/>
             <a:ext cx="5196437" cy="4354385"/>
           </a:xfrm>
           <a:prstGeom prst="rect">
@@ -8981,8 +9079,8 @@
         </p:blipFill>
         <p:spPr>
           <a:xfrm>
-            <a:off x="6459536" y="2091968"/>
-            <a:ext cx="5196437" cy="4330365"/>
+            <a:off x="6455727" y="2068701"/>
+            <a:ext cx="5196437" cy="4354385"/>
           </a:xfrm>
           <a:prstGeom prst="rect">
             <a:avLst/>
@@ -9684,7 +9782,7 @@
             </a:pPr>
             <a:r>
               <a:rPr lang="de-DE" dirty="0"/>
-              <a:t>Saubere Pipeline von gemittelten Merkmalen zu zwei Channel-MLPs</a:t>
+              <a:t>Pipeline von gemittelten Merkmalen zu zwei Channel-MLPs</a:t>
             </a:r>
           </a:p>
           <a:p>
@@ -10394,21 +10492,8 @@
             </a:pPr>
             <a:r>
               <a:rPr lang="de-DE" dirty="0"/>
-              <a:t>Datenquelle: Task_2/</a:t>
-            </a:r>
-            <a:r>
-              <a:rPr lang="de-DE" dirty="0" err="1"/>
-              <a:t>data</a:t>
-            </a:r>
-            <a:r>
-              <a:rPr lang="de-DE" dirty="0"/>
-              <a:t>/</a:t>
-            </a:r>
-            <a:r>
-              <a:rPr lang="de-DE" dirty="0" err="1"/>
-              <a:t>sig</a:t>
-            </a:r>
-            <a:endParaRPr lang="de-DE" dirty="0"/>
+              <a:t>Datenquelle: selbe wie Task_2</a:t>
+            </a:r>
           </a:p>
           <a:p>
             <a:pPr>

--- a/Task_3/Task3Powerpoint.pptx
+++ b/Task_3/Task3Powerpoint.pptx
@@ -275,7 +275,7 @@
           <a:p>
             <a:fld id="{75AB4CA9-CCE6-4DE5-84AD-E1F7B6CB5CBB}" type="datetimeFigureOut">
               <a:rPr lang="de-DE" smtClean="0"/>
-              <a:t>15.07.2026</a:t>
+              <a:t>16.07.2026</a:t>
             </a:fld>
             <a:endParaRPr lang="de-DE"/>
           </a:p>
@@ -452,7 +452,7 @@
           <a:p>
             <a:fld id="{52D5829F-2F94-0B44-A96D-AE852A87AC61}" type="datetimeFigureOut">
               <a:rPr lang="de-DE" smtClean="0"/>
-              <a:t>15.07.2026</a:t>
+              <a:t>16.07.2026</a:t>
             </a:fld>
             <a:endParaRPr lang="de-DE"/>
           </a:p>
@@ -1893,8 +1893,33 @@
                 <a:ea typeface="+mn-ea"/>
                 <a:cs typeface="+mn-cs"/>
               </a:rPr>
-              <a:t> Matrix zeigt, dass im aktuellen Testsatz alle Beispiele korrekt klassifiziert wurden. Besonders wichtig ist der Recall </a:t>
-            </a:r>
+              <a:t> Matrix zeigt, dass im aktuellen Testsatz alle Beispiele korrekt klassifiziert wurden. </a:t>
+            </a:r>
+          </a:p>
+          <a:p>
+            <a:r>
+              <a:rPr lang="de-DE" sz="1200" b="0" kern="1200" dirty="0">
+                <a:solidFill>
+                  <a:schemeClr val="tx1"/>
+                </a:solidFill>
+                <a:effectLst/>
+                <a:latin typeface="+mn-lt"/>
+                <a:ea typeface="+mn-ea"/>
+                <a:cs typeface="+mn-cs"/>
+              </a:rPr>
+              <a:t>Besonders wichtig ist der  für Klasse 0</a:t>
+            </a:r>
+            <a:br>
+              <a:rPr lang="de-DE" sz="1200" b="0" kern="1200" dirty="0">
+                <a:solidFill>
+                  <a:schemeClr val="tx1"/>
+                </a:solidFill>
+                <a:effectLst/>
+                <a:latin typeface="+mn-lt"/>
+                <a:ea typeface="+mn-ea"/>
+                <a:cs typeface="+mn-cs"/>
+              </a:rPr>
+            </a:br>
             <a:r>
               <a:rPr lang="de-DE" sz="1200" b="0" kern="1200" dirty="0" err="1">
                 <a:solidFill>
@@ -1905,7 +1930,7 @@
                 <a:ea typeface="+mn-ea"/>
                 <a:cs typeface="+mn-cs"/>
               </a:rPr>
-              <a:t>fuer</a:t>
+              <a:t>Accuracy</a:t>
             </a:r>
             <a:r>
               <a:rPr lang="de-DE" sz="1200" b="0" kern="1200" dirty="0">
@@ -1917,7 +1942,89 @@
                 <a:ea typeface="+mn-ea"/>
                 <a:cs typeface="+mn-cs"/>
               </a:rPr>
-              <a:t> Klasse 0, also für beschädigte Signale. Dieser ist hier 1.0. Trotzdem müssen wir das Ergebnis kritisch einordnen, weil der Datensatz klein ist.</a:t>
+              <a:t>: Wie viele Vorhersagen waren insgesamt richtig?</a:t>
+            </a:r>
+            <a:br>
+              <a:rPr lang="de-DE" sz="1200" b="0" kern="1200" dirty="0">
+                <a:solidFill>
+                  <a:schemeClr val="tx1"/>
+                </a:solidFill>
+                <a:effectLst/>
+                <a:latin typeface="+mn-lt"/>
+                <a:ea typeface="+mn-ea"/>
+                <a:cs typeface="+mn-cs"/>
+              </a:rPr>
+            </a:br>
+            <a:r>
+              <a:rPr lang="de-DE" sz="1200" b="0" kern="1200" dirty="0" err="1">
+                <a:solidFill>
+                  <a:schemeClr val="tx1"/>
+                </a:solidFill>
+                <a:effectLst/>
+                <a:latin typeface="+mn-lt"/>
+                <a:ea typeface="+mn-ea"/>
+                <a:cs typeface="+mn-cs"/>
+              </a:rPr>
+              <a:t>Balanced</a:t>
+            </a:r>
+            <a:r>
+              <a:rPr lang="de-DE" sz="1200" b="0" kern="1200" dirty="0">
+                <a:solidFill>
+                  <a:schemeClr val="tx1"/>
+                </a:solidFill>
+                <a:effectLst/>
+                <a:latin typeface="+mn-lt"/>
+                <a:ea typeface="+mn-ea"/>
+                <a:cs typeface="+mn-cs"/>
+              </a:rPr>
+              <a:t> </a:t>
+            </a:r>
+            <a:r>
+              <a:rPr lang="de-DE" sz="1200" b="0" kern="1200" dirty="0" err="1">
+                <a:solidFill>
+                  <a:schemeClr val="tx1"/>
+                </a:solidFill>
+                <a:effectLst/>
+                <a:latin typeface="+mn-lt"/>
+                <a:ea typeface="+mn-ea"/>
+                <a:cs typeface="+mn-cs"/>
+              </a:rPr>
+              <a:t>Accuracy</a:t>
+            </a:r>
+            <a:r>
+              <a:rPr lang="de-DE" sz="1200" b="0" kern="1200" dirty="0">
+                <a:solidFill>
+                  <a:schemeClr val="tx1"/>
+                </a:solidFill>
+                <a:effectLst/>
+                <a:latin typeface="+mn-lt"/>
+                <a:ea typeface="+mn-ea"/>
+                <a:cs typeface="+mn-cs"/>
+              </a:rPr>
+              <a:t>: Wie gut funktioniert das Modell durchschnittlich für beide Klassen?</a:t>
+            </a:r>
+            <a:br>
+              <a:rPr lang="de-DE" sz="1200" b="0" kern="1200" dirty="0">
+                <a:solidFill>
+                  <a:schemeClr val="tx1"/>
+                </a:solidFill>
+                <a:effectLst/>
+                <a:latin typeface="+mn-lt"/>
+                <a:ea typeface="+mn-ea"/>
+                <a:cs typeface="+mn-cs"/>
+              </a:rPr>
+            </a:br>
+            <a:r>
+              <a:rPr lang="de-DE" sz="1200" b="0" kern="1200" dirty="0">
+                <a:solidFill>
+                  <a:schemeClr val="tx1"/>
+                </a:solidFill>
+                <a:effectLst/>
+                <a:latin typeface="+mn-lt"/>
+                <a:ea typeface="+mn-ea"/>
+                <a:cs typeface="+mn-cs"/>
+              </a:rPr>
+              <a:t>F1: Wie gut ist der Kompromiss zwischen TPR und TNR</a:t>
             </a:r>
           </a:p>
         </p:txBody>
@@ -2027,6 +2134,56 @@
               </a:rPr>
               <a:t>Benjamin</a:t>
             </a:r>
+          </a:p>
+          <a:p>
+            <a:r>
+              <a:rPr lang="de-DE" sz="1200" b="0" kern="1200" dirty="0">
+                <a:solidFill>
+                  <a:schemeClr val="tx1"/>
+                </a:solidFill>
+                <a:effectLst/>
+                <a:latin typeface="+mn-lt"/>
+                <a:ea typeface="+mn-ea"/>
+                <a:cs typeface="+mn-cs"/>
+              </a:rPr>
+              <a:t>ROC: </a:t>
+            </a:r>
+            <a:r>
+              <a:rPr lang="de-DE" dirty="0"/>
+              <a:t>Receiver Operating </a:t>
+            </a:r>
+            <a:r>
+              <a:rPr lang="de-DE" dirty="0" err="1"/>
+              <a:t>Characteristic</a:t>
+            </a:r>
+            <a:br>
+              <a:rPr lang="de-DE" dirty="0"/>
+            </a:br>
+            <a:r>
+              <a:rPr lang="de-DE" dirty="0"/>
+              <a:t>AUC: Area Under </a:t>
+            </a:r>
+            <a:r>
+              <a:rPr lang="de-DE" dirty="0" err="1"/>
+              <a:t>the</a:t>
+            </a:r>
+            <a:r>
+              <a:rPr lang="de-DE" dirty="0"/>
+              <a:t> </a:t>
+            </a:r>
+            <a:r>
+              <a:rPr lang="de-DE" dirty="0" err="1"/>
+              <a:t>Curve</a:t>
+            </a:r>
+            <a:endParaRPr lang="de-DE" sz="1200" b="0" kern="1200" dirty="0">
+              <a:solidFill>
+                <a:schemeClr val="tx1"/>
+              </a:solidFill>
+              <a:effectLst/>
+              <a:latin typeface="+mn-lt"/>
+              <a:ea typeface="+mn-ea"/>
+              <a:cs typeface="+mn-cs"/>
+            </a:endParaRPr>
           </a:p>
           <a:p>
             <a:r>
@@ -11369,15 +11526,7 @@
             </a:pPr>
             <a:r>
               <a:rPr lang="de-DE" dirty="0"/>
-              <a:t>Feature-Mittelung über `</a:t>
-            </a:r>
-            <a:r>
-              <a:rPr lang="de-DE" dirty="0" err="1"/>
-              <a:t>mID</a:t>
-            </a:r>
-            <a:r>
-              <a:rPr lang="de-DE" dirty="0"/>
-              <a:t>`</a:t>
+              <a:t>Merkmalsextraktion pro Datei vor der Mittelung</a:t>
             </a:r>
           </a:p>
           <a:p>
@@ -11387,7 +11536,15 @@
             </a:pPr>
             <a:r>
               <a:rPr lang="de-DE" dirty="0"/>
-              <a:t>Merkmalsextraktion pro Datei vor der Mittelung</a:t>
+              <a:t>Feature-Mittelung über `</a:t>
+            </a:r>
+            <a:r>
+              <a:rPr lang="de-DE" dirty="0" err="1"/>
+              <a:t>mID</a:t>
+            </a:r>
+            <a:r>
+              <a:rPr lang="de-DE" dirty="0"/>
+              <a:t>`</a:t>
             </a:r>
           </a:p>
           <a:p>
@@ -11418,6 +11575,32 @@
             <a:r>
               <a:rPr lang="de-DE" dirty="0"/>
               <a:t>Ch2</a:t>
+            </a:r>
+          </a:p>
+          <a:p>
+            <a:pPr>
+              <a:buFont typeface="Arial" panose="020B0604020202020204" pitchFamily="34" charset="0"/>
+              <a:buChar char="•"/>
+            </a:pPr>
+            <a:r>
+              <a:rPr lang="de-DE" dirty="0"/>
+              <a:t>Aufteilung in </a:t>
+            </a:r>
+            <a:r>
+              <a:rPr lang="de-DE" dirty="0" err="1"/>
+              <a:t>train</a:t>
+            </a:r>
+            <a:r>
+              <a:rPr lang="de-DE" dirty="0"/>
+              <a:t>-set, </a:t>
+            </a:r>
+            <a:r>
+              <a:rPr lang="de-DE" dirty="0" err="1"/>
+              <a:t>dev</a:t>
+            </a:r>
+            <a:r>
+              <a:rPr lang="de-DE" dirty="0"/>
+              <a:t>-set und test-set</a:t>
             </a:r>
           </a:p>
           <a:p>
